--- a/Media/Power Platform DevOps ALM_DevOps_April2025.pptx
+++ b/Media/Power Platform DevOps ALM_DevOps_April2025.pptx
@@ -5,7 +5,7 @@
     <p:sldMasterId id="2147483648" r:id="rId1"/>
   </p:sldMasterIdLst>
   <p:notesMasterIdLst>
-    <p:notesMasterId r:id="rId38"/>
+    <p:notesMasterId r:id="rId34"/>
   </p:notesMasterIdLst>
   <p:sldIdLst>
     <p:sldId id="1496" r:id="rId2"/>
@@ -37,13 +37,9 @@
     <p:sldId id="1522" r:id="rId28"/>
     <p:sldId id="1506" r:id="rId29"/>
     <p:sldId id="1519" r:id="rId30"/>
-    <p:sldId id="258" r:id="rId31"/>
-    <p:sldId id="267" r:id="rId32"/>
-    <p:sldId id="1512" r:id="rId33"/>
-    <p:sldId id="1505" r:id="rId34"/>
-    <p:sldId id="326" r:id="rId35"/>
-    <p:sldId id="1445" r:id="rId36"/>
-    <p:sldId id="1495" r:id="rId37"/>
+    <p:sldId id="1512" r:id="rId31"/>
+    <p:sldId id="326" r:id="rId32"/>
+    <p:sldId id="1445" r:id="rId33"/>
   </p:sldIdLst>
   <p:sldSz cx="12192000" cy="6858000"/>
   <p:notesSz cx="6858000" cy="9144000"/>
@@ -6148,1500 +6144,6 @@
 </file>
 
 <file path=ppt/diagrams/colors1.xml><?xml version="1.0" encoding="utf-8"?>
-<dgm:colorsDef xmlns:dgm="http://schemas.openxmlformats.org/drawingml/2006/diagram" xmlns:a="http://schemas.openxmlformats.org/drawingml/2006/main" uniqueId="urn:microsoft.com/office/officeart/2005/8/colors/accent1_2">
-  <dgm:title val=""/>
-  <dgm:desc val=""/>
-  <dgm:catLst>
-    <dgm:cat type="accent1" pri="11200"/>
-  </dgm:catLst>
-  <dgm:styleLbl name="node0">
-    <dgm:fillClrLst meth="repeat">
-      <a:schemeClr val="accent1"/>
-    </dgm:fillClrLst>
-    <dgm:linClrLst meth="repeat">
-      <a:schemeClr val="lt1"/>
-    </dgm:linClrLst>
-    <dgm:effectClrLst/>
-    <dgm:txLinClrLst/>
-    <dgm:txFillClrLst/>
-    <dgm:txEffectClrLst/>
-  </dgm:styleLbl>
-  <dgm:styleLbl name="alignNode1">
-    <dgm:fillClrLst meth="repeat">
-      <a:schemeClr val="accent1"/>
-    </dgm:fillClrLst>
-    <dgm:linClrLst meth="repeat">
-      <a:schemeClr val="accent1"/>
-    </dgm:linClrLst>
-    <dgm:effectClrLst/>
-    <dgm:txLinClrLst/>
-    <dgm:txFillClrLst/>
-    <dgm:txEffectClrLst/>
-  </dgm:styleLbl>
-  <dgm:styleLbl name="node1">
-    <dgm:fillClrLst meth="repeat">
-      <a:schemeClr val="accent1"/>
-    </dgm:fillClrLst>
-    <dgm:linClrLst meth="repeat">
-      <a:schemeClr val="lt1"/>
-    </dgm:linClrLst>
-    <dgm:effectClrLst/>
-    <dgm:txLinClrLst/>
-    <dgm:txFillClrLst/>
-    <dgm:txEffectClrLst/>
-  </dgm:styleLbl>
-  <dgm:styleLbl name="lnNode1">
-    <dgm:fillClrLst meth="repeat">
-      <a:schemeClr val="accent1"/>
-    </dgm:fillClrLst>
-    <dgm:linClrLst meth="repeat">
-      <a:schemeClr val="lt1"/>
-    </dgm:linClrLst>
-    <dgm:effectClrLst/>
-    <dgm:txLinClrLst/>
-    <dgm:txFillClrLst/>
-    <dgm:txEffectClrLst/>
-  </dgm:styleLbl>
-  <dgm:styleLbl name="vennNode1">
-    <dgm:fillClrLst meth="repeat">
-      <a:schemeClr val="accent1">
-        <a:alpha val="50000"/>
-      </a:schemeClr>
-    </dgm:fillClrLst>
-    <dgm:linClrLst meth="repeat">
-      <a:schemeClr val="lt1"/>
-    </dgm:linClrLst>
-    <dgm:effectClrLst/>
-    <dgm:txLinClrLst/>
-    <dgm:txFillClrLst/>
-    <dgm:txEffectClrLst/>
-  </dgm:styleLbl>
-  <dgm:styleLbl name="node2">
-    <dgm:fillClrLst meth="repeat">
-      <a:schemeClr val="accent1"/>
-    </dgm:fillClrLst>
-    <dgm:linClrLst meth="repeat">
-      <a:schemeClr val="lt1"/>
-    </dgm:linClrLst>
-    <dgm:effectClrLst/>
-    <dgm:txLinClrLst/>
-    <dgm:txFillClrLst/>
-    <dgm:txEffectClrLst/>
-  </dgm:styleLbl>
-  <dgm:styleLbl name="node3">
-    <dgm:fillClrLst meth="repeat">
-      <a:schemeClr val="accent1"/>
-    </dgm:fillClrLst>
-    <dgm:linClrLst meth="repeat">
-      <a:schemeClr val="lt1"/>
-    </dgm:linClrLst>
-    <dgm:effectClrLst/>
-    <dgm:txLinClrLst/>
-    <dgm:txFillClrLst/>
-    <dgm:txEffectClrLst/>
-  </dgm:styleLbl>
-  <dgm:styleLbl name="node4">
-    <dgm:fillClrLst meth="repeat">
-      <a:schemeClr val="accent1"/>
-    </dgm:fillClrLst>
-    <dgm:linClrLst meth="repeat">
-      <a:schemeClr val="lt1"/>
-    </dgm:linClrLst>
-    <dgm:effectClrLst/>
-    <dgm:txLinClrLst/>
-    <dgm:txFillClrLst/>
-    <dgm:txEffectClrLst/>
-  </dgm:styleLbl>
-  <dgm:styleLbl name="fgImgPlace1">
-    <dgm:fillClrLst meth="repeat">
-      <a:schemeClr val="accent1">
-        <a:tint val="50000"/>
-      </a:schemeClr>
-    </dgm:fillClrLst>
-    <dgm:linClrLst meth="repeat">
-      <a:schemeClr val="lt1"/>
-    </dgm:linClrLst>
-    <dgm:effectClrLst/>
-    <dgm:txLinClrLst/>
-    <dgm:txFillClrLst meth="repeat">
-      <a:schemeClr val="lt1"/>
-    </dgm:txFillClrLst>
-    <dgm:txEffectClrLst/>
-  </dgm:styleLbl>
-  <dgm:styleLbl name="alignImgPlace1">
-    <dgm:fillClrLst meth="repeat">
-      <a:schemeClr val="accent1">
-        <a:tint val="50000"/>
-      </a:schemeClr>
-    </dgm:fillClrLst>
-    <dgm:linClrLst meth="repeat">
-      <a:schemeClr val="lt1"/>
-    </dgm:linClrLst>
-    <dgm:effectClrLst/>
-    <dgm:txLinClrLst/>
-    <dgm:txFillClrLst meth="repeat">
-      <a:schemeClr val="lt1"/>
-    </dgm:txFillClrLst>
-    <dgm:txEffectClrLst/>
-  </dgm:styleLbl>
-  <dgm:styleLbl name="bgImgPlace1">
-    <dgm:fillClrLst meth="repeat">
-      <a:schemeClr val="accent1">
-        <a:tint val="50000"/>
-      </a:schemeClr>
-    </dgm:fillClrLst>
-    <dgm:linClrLst meth="repeat">
-      <a:schemeClr val="lt1"/>
-    </dgm:linClrLst>
-    <dgm:effectClrLst/>
-    <dgm:txLinClrLst/>
-    <dgm:txFillClrLst meth="repeat">
-      <a:schemeClr val="lt1"/>
-    </dgm:txFillClrLst>
-    <dgm:txEffectClrLst/>
-  </dgm:styleLbl>
-  <dgm:styleLbl name="sibTrans2D1">
-    <dgm:fillClrLst meth="repeat">
-      <a:schemeClr val="accent1">
-        <a:tint val="60000"/>
-      </a:schemeClr>
-    </dgm:fillClrLst>
-    <dgm:linClrLst meth="repeat">
-      <a:schemeClr val="accent1">
-        <a:tint val="60000"/>
-      </a:schemeClr>
-    </dgm:linClrLst>
-    <dgm:effectClrLst/>
-    <dgm:txLinClrLst/>
-    <dgm:txFillClrLst/>
-    <dgm:txEffectClrLst/>
-  </dgm:styleLbl>
-  <dgm:styleLbl name="fgSibTrans2D1">
-    <dgm:fillClrLst meth="repeat">
-      <a:schemeClr val="accent1">
-        <a:tint val="60000"/>
-      </a:schemeClr>
-    </dgm:fillClrLst>
-    <dgm:linClrLst meth="repeat">
-      <a:schemeClr val="accent1">
-        <a:tint val="60000"/>
-      </a:schemeClr>
-    </dgm:linClrLst>
-    <dgm:effectClrLst/>
-    <dgm:txLinClrLst/>
-    <dgm:txFillClrLst/>
-    <dgm:txEffectClrLst/>
-  </dgm:styleLbl>
-  <dgm:styleLbl name="bgSibTrans2D1">
-    <dgm:fillClrLst meth="repeat">
-      <a:schemeClr val="accent1">
-        <a:tint val="60000"/>
-      </a:schemeClr>
-    </dgm:fillClrLst>
-    <dgm:linClrLst meth="repeat">
-      <a:schemeClr val="accent1">
-        <a:tint val="60000"/>
-      </a:schemeClr>
-    </dgm:linClrLst>
-    <dgm:effectClrLst/>
-    <dgm:txLinClrLst/>
-    <dgm:txFillClrLst/>
-    <dgm:txEffectClrLst/>
-  </dgm:styleLbl>
-  <dgm:styleLbl name="sibTrans1D1">
-    <dgm:fillClrLst meth="repeat">
-      <a:schemeClr val="accent1"/>
-    </dgm:fillClrLst>
-    <dgm:linClrLst meth="repeat">
-      <a:schemeClr val="accent1"/>
-    </dgm:linClrLst>
-    <dgm:effectClrLst/>
-    <dgm:txLinClrLst/>
-    <dgm:txFillClrLst meth="repeat">
-      <a:schemeClr val="tx1"/>
-    </dgm:txFillClrLst>
-    <dgm:txEffectClrLst/>
-  </dgm:styleLbl>
-  <dgm:styleLbl name="callout">
-    <dgm:fillClrLst meth="repeat">
-      <a:schemeClr val="accent1"/>
-    </dgm:fillClrLst>
-    <dgm:linClrLst meth="repeat">
-      <a:schemeClr val="accent1">
-        <a:tint val="50000"/>
-      </a:schemeClr>
-    </dgm:linClrLst>
-    <dgm:effectClrLst/>
-    <dgm:txLinClrLst/>
-    <dgm:txFillClrLst meth="repeat">
-      <a:schemeClr val="tx1"/>
-    </dgm:txFillClrLst>
-    <dgm:txEffectClrLst/>
-  </dgm:styleLbl>
-  <dgm:styleLbl name="asst0">
-    <dgm:fillClrLst meth="repeat">
-      <a:schemeClr val="accent1"/>
-    </dgm:fillClrLst>
-    <dgm:linClrLst meth="repeat">
-      <a:schemeClr val="lt1"/>
-    </dgm:linClrLst>
-    <dgm:effectClrLst/>
-    <dgm:txLinClrLst/>
-    <dgm:txFillClrLst/>
-    <dgm:txEffectClrLst/>
-  </dgm:styleLbl>
-  <dgm:styleLbl name="asst1">
-    <dgm:fillClrLst meth="repeat">
-      <a:schemeClr val="accent1"/>
-    </dgm:fillClrLst>
-    <dgm:linClrLst meth="repeat">
-      <a:schemeClr val="lt1"/>
-    </dgm:linClrLst>
-    <dgm:effectClrLst/>
-    <dgm:txLinClrLst/>
-    <dgm:txFillClrLst/>
-    <dgm:txEffectClrLst/>
-  </dgm:styleLbl>
-  <dgm:styleLbl name="asst2">
-    <dgm:fillClrLst meth="repeat">
-      <a:schemeClr val="accent1"/>
-    </dgm:fillClrLst>
-    <dgm:linClrLst meth="repeat">
-      <a:schemeClr val="lt1"/>
-    </dgm:linClrLst>
-    <dgm:effectClrLst/>
-    <dgm:txLinClrLst/>
-    <dgm:txFillClrLst/>
-    <dgm:txEffectClrLst/>
-  </dgm:styleLbl>
-  <dgm:styleLbl name="asst3">
-    <dgm:fillClrLst meth="repeat">
-      <a:schemeClr val="accent1"/>
-    </dgm:fillClrLst>
-    <dgm:linClrLst meth="repeat">
-      <a:schemeClr val="lt1"/>
-    </dgm:linClrLst>
-    <dgm:effectClrLst/>
-    <dgm:txLinClrLst/>
-    <dgm:txFillClrLst/>
-    <dgm:txEffectClrLst/>
-  </dgm:styleLbl>
-  <dgm:styleLbl name="asst4">
-    <dgm:fillClrLst meth="repeat">
-      <a:schemeClr val="accent1"/>
-    </dgm:fillClrLst>
-    <dgm:linClrLst meth="repeat">
-      <a:schemeClr val="lt1"/>
-    </dgm:linClrLst>
-    <dgm:effectClrLst/>
-    <dgm:txLinClrLst/>
-    <dgm:txFillClrLst/>
-    <dgm:txEffectClrLst/>
-  </dgm:styleLbl>
-  <dgm:styleLbl name="parChTrans2D1">
-    <dgm:fillClrLst meth="repeat">
-      <a:schemeClr val="accent1">
-        <a:tint val="60000"/>
-      </a:schemeClr>
-    </dgm:fillClrLst>
-    <dgm:linClrLst meth="repeat">
-      <a:schemeClr val="accent1">
-        <a:tint val="60000"/>
-      </a:schemeClr>
-    </dgm:linClrLst>
-    <dgm:effectClrLst/>
-    <dgm:txLinClrLst/>
-    <dgm:txFillClrLst meth="repeat">
-      <a:schemeClr val="lt1"/>
-    </dgm:txFillClrLst>
-    <dgm:txEffectClrLst/>
-  </dgm:styleLbl>
-  <dgm:styleLbl name="parChTrans2D2">
-    <dgm:fillClrLst meth="repeat">
-      <a:schemeClr val="accent1"/>
-    </dgm:fillClrLst>
-    <dgm:linClrLst meth="repeat">
-      <a:schemeClr val="accent1"/>
-    </dgm:linClrLst>
-    <dgm:effectClrLst/>
-    <dgm:txLinClrLst/>
-    <dgm:txFillClrLst meth="repeat">
-      <a:schemeClr val="lt1"/>
-    </dgm:txFillClrLst>
-    <dgm:txEffectClrLst/>
-  </dgm:styleLbl>
-  <dgm:styleLbl name="parChTrans2D3">
-    <dgm:fillClrLst meth="repeat">
-      <a:schemeClr val="accent1"/>
-    </dgm:fillClrLst>
-    <dgm:linClrLst meth="repeat">
-      <a:schemeClr val="accent1"/>
-    </dgm:linClrLst>
-    <dgm:effectClrLst/>
-    <dgm:txLinClrLst/>
-    <dgm:txFillClrLst meth="repeat">
-      <a:schemeClr val="lt1"/>
-    </dgm:txFillClrLst>
-    <dgm:txEffectClrLst/>
-  </dgm:styleLbl>
-  <dgm:styleLbl name="parChTrans2D4">
-    <dgm:fillClrLst meth="repeat">
-      <a:schemeClr val="accent1"/>
-    </dgm:fillClrLst>
-    <dgm:linClrLst meth="repeat">
-      <a:schemeClr val="accent1"/>
-    </dgm:linClrLst>
-    <dgm:effectClrLst/>
-    <dgm:txLinClrLst/>
-    <dgm:txFillClrLst meth="repeat">
-      <a:schemeClr val="lt1"/>
-    </dgm:txFillClrLst>
-    <dgm:txEffectClrLst/>
-  </dgm:styleLbl>
-  <dgm:styleLbl name="parChTrans1D1">
-    <dgm:fillClrLst meth="repeat">
-      <a:schemeClr val="accent1"/>
-    </dgm:fillClrLst>
-    <dgm:linClrLst meth="repeat">
-      <a:schemeClr val="accent1">
-        <a:shade val="60000"/>
-      </a:schemeClr>
-    </dgm:linClrLst>
-    <dgm:effectClrLst/>
-    <dgm:txLinClrLst/>
-    <dgm:txFillClrLst meth="repeat">
-      <a:schemeClr val="tx1"/>
-    </dgm:txFillClrLst>
-    <dgm:txEffectClrLst/>
-  </dgm:styleLbl>
-  <dgm:styleLbl name="parChTrans1D2">
-    <dgm:fillClrLst meth="repeat">
-      <a:schemeClr val="accent1"/>
-    </dgm:fillClrLst>
-    <dgm:linClrLst meth="repeat">
-      <a:schemeClr val="accent1">
-        <a:shade val="60000"/>
-      </a:schemeClr>
-    </dgm:linClrLst>
-    <dgm:effectClrLst/>
-    <dgm:txLinClrLst/>
-    <dgm:txFillClrLst meth="repeat">
-      <a:schemeClr val="tx1"/>
-    </dgm:txFillClrLst>
-    <dgm:txEffectClrLst/>
-  </dgm:styleLbl>
-  <dgm:styleLbl name="parChTrans1D3">
-    <dgm:fillClrLst meth="repeat">
-      <a:schemeClr val="accent1"/>
-    </dgm:fillClrLst>
-    <dgm:linClrLst meth="repeat">
-      <a:schemeClr val="accent1">
-        <a:shade val="80000"/>
-      </a:schemeClr>
-    </dgm:linClrLst>
-    <dgm:effectClrLst/>
-    <dgm:txLinClrLst/>
-    <dgm:txFillClrLst meth="repeat">
-      <a:schemeClr val="tx1"/>
-    </dgm:txFillClrLst>
-    <dgm:txEffectClrLst/>
-  </dgm:styleLbl>
-  <dgm:styleLbl name="parChTrans1D4">
-    <dgm:fillClrLst meth="repeat">
-      <a:schemeClr val="accent1"/>
-    </dgm:fillClrLst>
-    <dgm:linClrLst meth="repeat">
-      <a:schemeClr val="accent1">
-        <a:shade val="80000"/>
-      </a:schemeClr>
-    </dgm:linClrLst>
-    <dgm:effectClrLst/>
-    <dgm:txLinClrLst/>
-    <dgm:txFillClrLst meth="repeat">
-      <a:schemeClr val="tx1"/>
-    </dgm:txFillClrLst>
-    <dgm:txEffectClrLst/>
-  </dgm:styleLbl>
-  <dgm:styleLbl name="fgAcc1">
-    <dgm:fillClrLst meth="repeat">
-      <a:schemeClr val="lt1">
-        <a:alpha val="90000"/>
-      </a:schemeClr>
-    </dgm:fillClrLst>
-    <dgm:linClrLst meth="repeat">
-      <a:schemeClr val="accent1"/>
-    </dgm:linClrLst>
-    <dgm:effectClrLst/>
-    <dgm:txLinClrLst/>
-    <dgm:txFillClrLst meth="repeat">
-      <a:schemeClr val="dk1"/>
-    </dgm:txFillClrLst>
-    <dgm:txEffectClrLst/>
-  </dgm:styleLbl>
-  <dgm:styleLbl name="conFgAcc1">
-    <dgm:fillClrLst meth="repeat">
-      <a:schemeClr val="lt1">
-        <a:alpha val="90000"/>
-      </a:schemeClr>
-    </dgm:fillClrLst>
-    <dgm:linClrLst meth="repeat">
-      <a:schemeClr val="accent1"/>
-    </dgm:linClrLst>
-    <dgm:effectClrLst/>
-    <dgm:txLinClrLst/>
-    <dgm:txFillClrLst meth="repeat">
-      <a:schemeClr val="dk1"/>
-    </dgm:txFillClrLst>
-    <dgm:txEffectClrLst/>
-  </dgm:styleLbl>
-  <dgm:styleLbl name="alignAcc1">
-    <dgm:fillClrLst meth="repeat">
-      <a:schemeClr val="lt1">
-        <a:alpha val="90000"/>
-      </a:schemeClr>
-    </dgm:fillClrLst>
-    <dgm:linClrLst meth="repeat">
-      <a:schemeClr val="accent1"/>
-    </dgm:linClrLst>
-    <dgm:effectClrLst/>
-    <dgm:txLinClrLst/>
-    <dgm:txFillClrLst meth="repeat">
-      <a:schemeClr val="dk1"/>
-    </dgm:txFillClrLst>
-    <dgm:txEffectClrLst/>
-  </dgm:styleLbl>
-  <dgm:styleLbl name="trAlignAcc1">
-    <dgm:fillClrLst meth="repeat">
-      <a:schemeClr val="lt1">
-        <a:alpha val="40000"/>
-      </a:schemeClr>
-    </dgm:fillClrLst>
-    <dgm:linClrLst meth="repeat">
-      <a:schemeClr val="accent1"/>
-    </dgm:linClrLst>
-    <dgm:effectClrLst/>
-    <dgm:txLinClrLst/>
-    <dgm:txFillClrLst meth="repeat">
-      <a:schemeClr val="dk1"/>
-    </dgm:txFillClrLst>
-    <dgm:txEffectClrLst/>
-  </dgm:styleLbl>
-  <dgm:styleLbl name="bgAcc1">
-    <dgm:fillClrLst meth="repeat">
-      <a:schemeClr val="lt1">
-        <a:alpha val="90000"/>
-      </a:schemeClr>
-    </dgm:fillClrLst>
-    <dgm:linClrLst meth="repeat">
-      <a:schemeClr val="accent1"/>
-    </dgm:linClrLst>
-    <dgm:effectClrLst/>
-    <dgm:txLinClrLst/>
-    <dgm:txFillClrLst meth="repeat">
-      <a:schemeClr val="dk1"/>
-    </dgm:txFillClrLst>
-    <dgm:txEffectClrLst/>
-  </dgm:styleLbl>
-  <dgm:styleLbl name="solidFgAcc1">
-    <dgm:fillClrLst meth="repeat">
-      <a:schemeClr val="lt1"/>
-    </dgm:fillClrLst>
-    <dgm:linClrLst meth="repeat">
-      <a:schemeClr val="accent1"/>
-    </dgm:linClrLst>
-    <dgm:effectClrLst/>
-    <dgm:txLinClrLst/>
-    <dgm:txFillClrLst meth="repeat">
-      <a:schemeClr val="dk1"/>
-    </dgm:txFillClrLst>
-    <dgm:txEffectClrLst/>
-  </dgm:styleLbl>
-  <dgm:styleLbl name="solidAlignAcc1">
-    <dgm:fillClrLst meth="repeat">
-      <a:schemeClr val="lt1"/>
-    </dgm:fillClrLst>
-    <dgm:linClrLst meth="repeat">
-      <a:schemeClr val="accent1"/>
-    </dgm:linClrLst>
-    <dgm:effectClrLst/>
-    <dgm:txLinClrLst/>
-    <dgm:txFillClrLst meth="repeat">
-      <a:schemeClr val="dk1"/>
-    </dgm:txFillClrLst>
-    <dgm:txEffectClrLst/>
-  </dgm:styleLbl>
-  <dgm:styleLbl name="solidBgAcc1">
-    <dgm:fillClrLst meth="repeat">
-      <a:schemeClr val="lt1"/>
-    </dgm:fillClrLst>
-    <dgm:linClrLst meth="repeat">
-      <a:schemeClr val="accent1"/>
-    </dgm:linClrLst>
-    <dgm:effectClrLst/>
-    <dgm:txLinClrLst/>
-    <dgm:txFillClrLst meth="repeat">
-      <a:schemeClr val="dk1"/>
-    </dgm:txFillClrLst>
-    <dgm:txEffectClrLst/>
-  </dgm:styleLbl>
-  <dgm:styleLbl name="fgAccFollowNode1">
-    <dgm:fillClrLst meth="repeat">
-      <a:schemeClr val="accent1">
-        <a:alpha val="90000"/>
-        <a:tint val="40000"/>
-      </a:schemeClr>
-    </dgm:fillClrLst>
-    <dgm:linClrLst meth="repeat">
-      <a:schemeClr val="accent1">
-        <a:alpha val="90000"/>
-        <a:tint val="40000"/>
-      </a:schemeClr>
-    </dgm:linClrLst>
-    <dgm:effectClrLst/>
-    <dgm:txLinClrLst/>
-    <dgm:txFillClrLst meth="repeat">
-      <a:schemeClr val="dk1"/>
-    </dgm:txFillClrLst>
-    <dgm:txEffectClrLst/>
-  </dgm:styleLbl>
-  <dgm:styleLbl name="alignAccFollowNode1">
-    <dgm:fillClrLst meth="repeat">
-      <a:schemeClr val="accent1">
-        <a:alpha val="90000"/>
-        <a:tint val="40000"/>
-      </a:schemeClr>
-    </dgm:fillClrLst>
-    <dgm:linClrLst meth="repeat">
-      <a:schemeClr val="accent1">
-        <a:alpha val="90000"/>
-        <a:tint val="40000"/>
-      </a:schemeClr>
-    </dgm:linClrLst>
-    <dgm:effectClrLst/>
-    <dgm:txLinClrLst/>
-    <dgm:txFillClrLst meth="repeat">
-      <a:schemeClr val="dk1"/>
-    </dgm:txFillClrLst>
-    <dgm:txEffectClrLst/>
-  </dgm:styleLbl>
-  <dgm:styleLbl name="bgAccFollowNode1">
-    <dgm:fillClrLst meth="repeat">
-      <a:schemeClr val="accent1">
-        <a:alpha val="90000"/>
-        <a:tint val="40000"/>
-      </a:schemeClr>
-    </dgm:fillClrLst>
-    <dgm:linClrLst meth="repeat">
-      <a:schemeClr val="accent1">
-        <a:alpha val="90000"/>
-        <a:tint val="40000"/>
-      </a:schemeClr>
-    </dgm:linClrLst>
-    <dgm:effectClrLst/>
-    <dgm:txLinClrLst/>
-    <dgm:txFillClrLst meth="repeat">
-      <a:schemeClr val="dk1"/>
-    </dgm:txFillClrLst>
-    <dgm:txEffectClrLst/>
-  </dgm:styleLbl>
-  <dgm:styleLbl name="fgAcc0">
-    <dgm:fillClrLst meth="repeat">
-      <a:schemeClr val="lt1">
-        <a:alpha val="90000"/>
-      </a:schemeClr>
-    </dgm:fillClrLst>
-    <dgm:linClrLst meth="repeat">
-      <a:schemeClr val="accent1"/>
-    </dgm:linClrLst>
-    <dgm:effectClrLst/>
-    <dgm:txLinClrLst/>
-    <dgm:txFillClrLst meth="repeat">
-      <a:schemeClr val="dk1"/>
-    </dgm:txFillClrLst>
-    <dgm:txEffectClrLst/>
-  </dgm:styleLbl>
-  <dgm:styleLbl name="fgAcc2">
-    <dgm:fillClrLst meth="repeat">
-      <a:schemeClr val="lt1">
-        <a:alpha val="90000"/>
-      </a:schemeClr>
-    </dgm:fillClrLst>
-    <dgm:linClrLst meth="repeat">
-      <a:schemeClr val="accent1"/>
-    </dgm:linClrLst>
-    <dgm:effectClrLst/>
-    <dgm:txLinClrLst/>
-    <dgm:txFillClrLst meth="repeat">
-      <a:schemeClr val="dk1"/>
-    </dgm:txFillClrLst>
-    <dgm:txEffectClrLst/>
-  </dgm:styleLbl>
-  <dgm:styleLbl name="fgAcc3">
-    <dgm:fillClrLst meth="repeat">
-      <a:schemeClr val="lt1">
-        <a:alpha val="90000"/>
-      </a:schemeClr>
-    </dgm:fillClrLst>
-    <dgm:linClrLst meth="repeat">
-      <a:schemeClr val="accent1"/>
-    </dgm:linClrLst>
-    <dgm:effectClrLst/>
-    <dgm:txLinClrLst/>
-    <dgm:txFillClrLst meth="repeat">
-      <a:schemeClr val="dk1"/>
-    </dgm:txFillClrLst>
-    <dgm:txEffectClrLst/>
-  </dgm:styleLbl>
-  <dgm:styleLbl name="fgAcc4">
-    <dgm:fillClrLst meth="repeat">
-      <a:schemeClr val="lt1">
-        <a:alpha val="90000"/>
-      </a:schemeClr>
-    </dgm:fillClrLst>
-    <dgm:linClrLst meth="repeat">
-      <a:schemeClr val="accent1"/>
-    </dgm:linClrLst>
-    <dgm:effectClrLst/>
-    <dgm:txLinClrLst/>
-    <dgm:txFillClrLst meth="repeat">
-      <a:schemeClr val="dk1"/>
-    </dgm:txFillClrLst>
-    <dgm:txEffectClrLst/>
-  </dgm:styleLbl>
-  <dgm:styleLbl name="bgShp">
-    <dgm:fillClrLst meth="repeat">
-      <a:schemeClr val="accent1">
-        <a:tint val="40000"/>
-      </a:schemeClr>
-    </dgm:fillClrLst>
-    <dgm:linClrLst meth="repeat">
-      <a:schemeClr val="accent1"/>
-    </dgm:linClrLst>
-    <dgm:effectClrLst/>
-    <dgm:txLinClrLst/>
-    <dgm:txFillClrLst meth="repeat">
-      <a:schemeClr val="dk1"/>
-    </dgm:txFillClrLst>
-    <dgm:txEffectClrLst/>
-  </dgm:styleLbl>
-  <dgm:styleLbl name="dkBgShp">
-    <dgm:fillClrLst meth="repeat">
-      <a:schemeClr val="accent1">
-        <a:shade val="80000"/>
-      </a:schemeClr>
-    </dgm:fillClrLst>
-    <dgm:linClrLst meth="repeat">
-      <a:schemeClr val="accent1"/>
-    </dgm:linClrLst>
-    <dgm:effectClrLst/>
-    <dgm:txLinClrLst/>
-    <dgm:txFillClrLst meth="repeat">
-      <a:schemeClr val="lt1"/>
-    </dgm:txFillClrLst>
-    <dgm:txEffectClrLst/>
-  </dgm:styleLbl>
-  <dgm:styleLbl name="trBgShp">
-    <dgm:fillClrLst meth="repeat">
-      <a:schemeClr val="accent1">
-        <a:tint val="50000"/>
-        <a:alpha val="40000"/>
-      </a:schemeClr>
-    </dgm:fillClrLst>
-    <dgm:linClrLst meth="repeat">
-      <a:schemeClr val="accent1"/>
-    </dgm:linClrLst>
-    <dgm:effectClrLst/>
-    <dgm:txLinClrLst/>
-    <dgm:txFillClrLst meth="repeat">
-      <a:schemeClr val="lt1"/>
-    </dgm:txFillClrLst>
-    <dgm:txEffectClrLst/>
-  </dgm:styleLbl>
-  <dgm:styleLbl name="fgShp">
-    <dgm:fillClrLst meth="repeat">
-      <a:schemeClr val="accent1">
-        <a:tint val="60000"/>
-      </a:schemeClr>
-    </dgm:fillClrLst>
-    <dgm:linClrLst meth="repeat">
-      <a:schemeClr val="lt1"/>
-    </dgm:linClrLst>
-    <dgm:effectClrLst/>
-    <dgm:txLinClrLst/>
-    <dgm:txFillClrLst meth="repeat">
-      <a:schemeClr val="dk1"/>
-    </dgm:txFillClrLst>
-    <dgm:txEffectClrLst/>
-  </dgm:styleLbl>
-  <dgm:styleLbl name="revTx">
-    <dgm:fillClrLst meth="repeat">
-      <a:schemeClr val="lt1">
-        <a:alpha val="0"/>
-      </a:schemeClr>
-    </dgm:fillClrLst>
-    <dgm:linClrLst meth="repeat">
-      <a:schemeClr val="dk1">
-        <a:alpha val="0"/>
-      </a:schemeClr>
-    </dgm:linClrLst>
-    <dgm:effectClrLst/>
-    <dgm:txLinClrLst/>
-    <dgm:txFillClrLst meth="repeat">
-      <a:schemeClr val="tx1"/>
-    </dgm:txFillClrLst>
-    <dgm:txEffectClrLst/>
-  </dgm:styleLbl>
-</dgm:colorsDef>
-</file>
-
-<file path=ppt/diagrams/colors2.xml><?xml version="1.0" encoding="utf-8"?>
-<dgm:colorsDef xmlns:dgm="http://schemas.openxmlformats.org/drawingml/2006/diagram" xmlns:a="http://schemas.openxmlformats.org/drawingml/2006/main" uniqueId="urn:microsoft.com/office/officeart/2005/8/colors/accent1_2">
-  <dgm:title val=""/>
-  <dgm:desc val=""/>
-  <dgm:catLst>
-    <dgm:cat type="accent1" pri="11200"/>
-  </dgm:catLst>
-  <dgm:styleLbl name="node0">
-    <dgm:fillClrLst meth="repeat">
-      <a:schemeClr val="accent1"/>
-    </dgm:fillClrLst>
-    <dgm:linClrLst meth="repeat">
-      <a:schemeClr val="lt1"/>
-    </dgm:linClrLst>
-    <dgm:effectClrLst/>
-    <dgm:txLinClrLst/>
-    <dgm:txFillClrLst/>
-    <dgm:txEffectClrLst/>
-  </dgm:styleLbl>
-  <dgm:styleLbl name="alignNode1">
-    <dgm:fillClrLst meth="repeat">
-      <a:schemeClr val="accent1"/>
-    </dgm:fillClrLst>
-    <dgm:linClrLst meth="repeat">
-      <a:schemeClr val="accent1"/>
-    </dgm:linClrLst>
-    <dgm:effectClrLst/>
-    <dgm:txLinClrLst/>
-    <dgm:txFillClrLst/>
-    <dgm:txEffectClrLst/>
-  </dgm:styleLbl>
-  <dgm:styleLbl name="node1">
-    <dgm:fillClrLst meth="repeat">
-      <a:schemeClr val="accent1"/>
-    </dgm:fillClrLst>
-    <dgm:linClrLst meth="repeat">
-      <a:schemeClr val="lt1"/>
-    </dgm:linClrLst>
-    <dgm:effectClrLst/>
-    <dgm:txLinClrLst/>
-    <dgm:txFillClrLst/>
-    <dgm:txEffectClrLst/>
-  </dgm:styleLbl>
-  <dgm:styleLbl name="lnNode1">
-    <dgm:fillClrLst meth="repeat">
-      <a:schemeClr val="accent1"/>
-    </dgm:fillClrLst>
-    <dgm:linClrLst meth="repeat">
-      <a:schemeClr val="lt1"/>
-    </dgm:linClrLst>
-    <dgm:effectClrLst/>
-    <dgm:txLinClrLst/>
-    <dgm:txFillClrLst/>
-    <dgm:txEffectClrLst/>
-  </dgm:styleLbl>
-  <dgm:styleLbl name="vennNode1">
-    <dgm:fillClrLst meth="repeat">
-      <a:schemeClr val="accent1">
-        <a:alpha val="50000"/>
-      </a:schemeClr>
-    </dgm:fillClrLst>
-    <dgm:linClrLst meth="repeat">
-      <a:schemeClr val="lt1"/>
-    </dgm:linClrLst>
-    <dgm:effectClrLst/>
-    <dgm:txLinClrLst/>
-    <dgm:txFillClrLst/>
-    <dgm:txEffectClrLst/>
-  </dgm:styleLbl>
-  <dgm:styleLbl name="node2">
-    <dgm:fillClrLst meth="repeat">
-      <a:schemeClr val="accent1"/>
-    </dgm:fillClrLst>
-    <dgm:linClrLst meth="repeat">
-      <a:schemeClr val="lt1"/>
-    </dgm:linClrLst>
-    <dgm:effectClrLst/>
-    <dgm:txLinClrLst/>
-    <dgm:txFillClrLst/>
-    <dgm:txEffectClrLst/>
-  </dgm:styleLbl>
-  <dgm:styleLbl name="node3">
-    <dgm:fillClrLst meth="repeat">
-      <a:schemeClr val="accent1"/>
-    </dgm:fillClrLst>
-    <dgm:linClrLst meth="repeat">
-      <a:schemeClr val="lt1"/>
-    </dgm:linClrLst>
-    <dgm:effectClrLst/>
-    <dgm:txLinClrLst/>
-    <dgm:txFillClrLst/>
-    <dgm:txEffectClrLst/>
-  </dgm:styleLbl>
-  <dgm:styleLbl name="node4">
-    <dgm:fillClrLst meth="repeat">
-      <a:schemeClr val="accent1"/>
-    </dgm:fillClrLst>
-    <dgm:linClrLst meth="repeat">
-      <a:schemeClr val="lt1"/>
-    </dgm:linClrLst>
-    <dgm:effectClrLst/>
-    <dgm:txLinClrLst/>
-    <dgm:txFillClrLst/>
-    <dgm:txEffectClrLst/>
-  </dgm:styleLbl>
-  <dgm:styleLbl name="fgImgPlace1">
-    <dgm:fillClrLst meth="repeat">
-      <a:schemeClr val="accent1">
-        <a:tint val="50000"/>
-      </a:schemeClr>
-    </dgm:fillClrLst>
-    <dgm:linClrLst meth="repeat">
-      <a:schemeClr val="lt1"/>
-    </dgm:linClrLst>
-    <dgm:effectClrLst/>
-    <dgm:txLinClrLst/>
-    <dgm:txFillClrLst meth="repeat">
-      <a:schemeClr val="lt1"/>
-    </dgm:txFillClrLst>
-    <dgm:txEffectClrLst/>
-  </dgm:styleLbl>
-  <dgm:styleLbl name="alignImgPlace1">
-    <dgm:fillClrLst meth="repeat">
-      <a:schemeClr val="accent1">
-        <a:tint val="50000"/>
-      </a:schemeClr>
-    </dgm:fillClrLst>
-    <dgm:linClrLst meth="repeat">
-      <a:schemeClr val="lt1"/>
-    </dgm:linClrLst>
-    <dgm:effectClrLst/>
-    <dgm:txLinClrLst/>
-    <dgm:txFillClrLst meth="repeat">
-      <a:schemeClr val="lt1"/>
-    </dgm:txFillClrLst>
-    <dgm:txEffectClrLst/>
-  </dgm:styleLbl>
-  <dgm:styleLbl name="bgImgPlace1">
-    <dgm:fillClrLst meth="repeat">
-      <a:schemeClr val="accent1">
-        <a:tint val="50000"/>
-      </a:schemeClr>
-    </dgm:fillClrLst>
-    <dgm:linClrLst meth="repeat">
-      <a:schemeClr val="lt1"/>
-    </dgm:linClrLst>
-    <dgm:effectClrLst/>
-    <dgm:txLinClrLst/>
-    <dgm:txFillClrLst meth="repeat">
-      <a:schemeClr val="lt1"/>
-    </dgm:txFillClrLst>
-    <dgm:txEffectClrLst/>
-  </dgm:styleLbl>
-  <dgm:styleLbl name="sibTrans2D1">
-    <dgm:fillClrLst meth="repeat">
-      <a:schemeClr val="accent1">
-        <a:tint val="60000"/>
-      </a:schemeClr>
-    </dgm:fillClrLst>
-    <dgm:linClrLst meth="repeat">
-      <a:schemeClr val="accent1">
-        <a:tint val="60000"/>
-      </a:schemeClr>
-    </dgm:linClrLst>
-    <dgm:effectClrLst/>
-    <dgm:txLinClrLst/>
-    <dgm:txFillClrLst/>
-    <dgm:txEffectClrLst/>
-  </dgm:styleLbl>
-  <dgm:styleLbl name="fgSibTrans2D1">
-    <dgm:fillClrLst meth="repeat">
-      <a:schemeClr val="accent1">
-        <a:tint val="60000"/>
-      </a:schemeClr>
-    </dgm:fillClrLst>
-    <dgm:linClrLst meth="repeat">
-      <a:schemeClr val="accent1">
-        <a:tint val="60000"/>
-      </a:schemeClr>
-    </dgm:linClrLst>
-    <dgm:effectClrLst/>
-    <dgm:txLinClrLst/>
-    <dgm:txFillClrLst/>
-    <dgm:txEffectClrLst/>
-  </dgm:styleLbl>
-  <dgm:styleLbl name="bgSibTrans2D1">
-    <dgm:fillClrLst meth="repeat">
-      <a:schemeClr val="accent1">
-        <a:tint val="60000"/>
-      </a:schemeClr>
-    </dgm:fillClrLst>
-    <dgm:linClrLst meth="repeat">
-      <a:schemeClr val="accent1">
-        <a:tint val="60000"/>
-      </a:schemeClr>
-    </dgm:linClrLst>
-    <dgm:effectClrLst/>
-    <dgm:txLinClrLst/>
-    <dgm:txFillClrLst/>
-    <dgm:txEffectClrLst/>
-  </dgm:styleLbl>
-  <dgm:styleLbl name="sibTrans1D1">
-    <dgm:fillClrLst meth="repeat">
-      <a:schemeClr val="accent1"/>
-    </dgm:fillClrLst>
-    <dgm:linClrLst meth="repeat">
-      <a:schemeClr val="accent1"/>
-    </dgm:linClrLst>
-    <dgm:effectClrLst/>
-    <dgm:txLinClrLst/>
-    <dgm:txFillClrLst meth="repeat">
-      <a:schemeClr val="tx1"/>
-    </dgm:txFillClrLst>
-    <dgm:txEffectClrLst/>
-  </dgm:styleLbl>
-  <dgm:styleLbl name="callout">
-    <dgm:fillClrLst meth="repeat">
-      <a:schemeClr val="accent1"/>
-    </dgm:fillClrLst>
-    <dgm:linClrLst meth="repeat">
-      <a:schemeClr val="accent1">
-        <a:tint val="50000"/>
-      </a:schemeClr>
-    </dgm:linClrLst>
-    <dgm:effectClrLst/>
-    <dgm:txLinClrLst/>
-    <dgm:txFillClrLst meth="repeat">
-      <a:schemeClr val="tx1"/>
-    </dgm:txFillClrLst>
-    <dgm:txEffectClrLst/>
-  </dgm:styleLbl>
-  <dgm:styleLbl name="asst0">
-    <dgm:fillClrLst meth="repeat">
-      <a:schemeClr val="accent1"/>
-    </dgm:fillClrLst>
-    <dgm:linClrLst meth="repeat">
-      <a:schemeClr val="lt1"/>
-    </dgm:linClrLst>
-    <dgm:effectClrLst/>
-    <dgm:txLinClrLst/>
-    <dgm:txFillClrLst/>
-    <dgm:txEffectClrLst/>
-  </dgm:styleLbl>
-  <dgm:styleLbl name="asst1">
-    <dgm:fillClrLst meth="repeat">
-      <a:schemeClr val="accent1"/>
-    </dgm:fillClrLst>
-    <dgm:linClrLst meth="repeat">
-      <a:schemeClr val="lt1"/>
-    </dgm:linClrLst>
-    <dgm:effectClrLst/>
-    <dgm:txLinClrLst/>
-    <dgm:txFillClrLst/>
-    <dgm:txEffectClrLst/>
-  </dgm:styleLbl>
-  <dgm:styleLbl name="asst2">
-    <dgm:fillClrLst meth="repeat">
-      <a:schemeClr val="accent1"/>
-    </dgm:fillClrLst>
-    <dgm:linClrLst meth="repeat">
-      <a:schemeClr val="lt1"/>
-    </dgm:linClrLst>
-    <dgm:effectClrLst/>
-    <dgm:txLinClrLst/>
-    <dgm:txFillClrLst/>
-    <dgm:txEffectClrLst/>
-  </dgm:styleLbl>
-  <dgm:styleLbl name="asst3">
-    <dgm:fillClrLst meth="repeat">
-      <a:schemeClr val="accent1"/>
-    </dgm:fillClrLst>
-    <dgm:linClrLst meth="repeat">
-      <a:schemeClr val="lt1"/>
-    </dgm:linClrLst>
-    <dgm:effectClrLst/>
-    <dgm:txLinClrLst/>
-    <dgm:txFillClrLst/>
-    <dgm:txEffectClrLst/>
-  </dgm:styleLbl>
-  <dgm:styleLbl name="asst4">
-    <dgm:fillClrLst meth="repeat">
-      <a:schemeClr val="accent1"/>
-    </dgm:fillClrLst>
-    <dgm:linClrLst meth="repeat">
-      <a:schemeClr val="lt1"/>
-    </dgm:linClrLst>
-    <dgm:effectClrLst/>
-    <dgm:txLinClrLst/>
-    <dgm:txFillClrLst/>
-    <dgm:txEffectClrLst/>
-  </dgm:styleLbl>
-  <dgm:styleLbl name="parChTrans2D1">
-    <dgm:fillClrLst meth="repeat">
-      <a:schemeClr val="accent1">
-        <a:tint val="60000"/>
-      </a:schemeClr>
-    </dgm:fillClrLst>
-    <dgm:linClrLst meth="repeat">
-      <a:schemeClr val="accent1">
-        <a:tint val="60000"/>
-      </a:schemeClr>
-    </dgm:linClrLst>
-    <dgm:effectClrLst/>
-    <dgm:txLinClrLst/>
-    <dgm:txFillClrLst meth="repeat">
-      <a:schemeClr val="lt1"/>
-    </dgm:txFillClrLst>
-    <dgm:txEffectClrLst/>
-  </dgm:styleLbl>
-  <dgm:styleLbl name="parChTrans2D2">
-    <dgm:fillClrLst meth="repeat">
-      <a:schemeClr val="accent1"/>
-    </dgm:fillClrLst>
-    <dgm:linClrLst meth="repeat">
-      <a:schemeClr val="accent1"/>
-    </dgm:linClrLst>
-    <dgm:effectClrLst/>
-    <dgm:txLinClrLst/>
-    <dgm:txFillClrLst meth="repeat">
-      <a:schemeClr val="lt1"/>
-    </dgm:txFillClrLst>
-    <dgm:txEffectClrLst/>
-  </dgm:styleLbl>
-  <dgm:styleLbl name="parChTrans2D3">
-    <dgm:fillClrLst meth="repeat">
-      <a:schemeClr val="accent1"/>
-    </dgm:fillClrLst>
-    <dgm:linClrLst meth="repeat">
-      <a:schemeClr val="accent1"/>
-    </dgm:linClrLst>
-    <dgm:effectClrLst/>
-    <dgm:txLinClrLst/>
-    <dgm:txFillClrLst meth="repeat">
-      <a:schemeClr val="lt1"/>
-    </dgm:txFillClrLst>
-    <dgm:txEffectClrLst/>
-  </dgm:styleLbl>
-  <dgm:styleLbl name="parChTrans2D4">
-    <dgm:fillClrLst meth="repeat">
-      <a:schemeClr val="accent1"/>
-    </dgm:fillClrLst>
-    <dgm:linClrLst meth="repeat">
-      <a:schemeClr val="accent1"/>
-    </dgm:linClrLst>
-    <dgm:effectClrLst/>
-    <dgm:txLinClrLst/>
-    <dgm:txFillClrLst meth="repeat">
-      <a:schemeClr val="lt1"/>
-    </dgm:txFillClrLst>
-    <dgm:txEffectClrLst/>
-  </dgm:styleLbl>
-  <dgm:styleLbl name="parChTrans1D1">
-    <dgm:fillClrLst meth="repeat">
-      <a:schemeClr val="accent1"/>
-    </dgm:fillClrLst>
-    <dgm:linClrLst meth="repeat">
-      <a:schemeClr val="accent1">
-        <a:shade val="60000"/>
-      </a:schemeClr>
-    </dgm:linClrLst>
-    <dgm:effectClrLst/>
-    <dgm:txLinClrLst/>
-    <dgm:txFillClrLst meth="repeat">
-      <a:schemeClr val="tx1"/>
-    </dgm:txFillClrLst>
-    <dgm:txEffectClrLst/>
-  </dgm:styleLbl>
-  <dgm:styleLbl name="parChTrans1D2">
-    <dgm:fillClrLst meth="repeat">
-      <a:schemeClr val="accent1"/>
-    </dgm:fillClrLst>
-    <dgm:linClrLst meth="repeat">
-      <a:schemeClr val="accent1">
-        <a:shade val="60000"/>
-      </a:schemeClr>
-    </dgm:linClrLst>
-    <dgm:effectClrLst/>
-    <dgm:txLinClrLst/>
-    <dgm:txFillClrLst meth="repeat">
-      <a:schemeClr val="tx1"/>
-    </dgm:txFillClrLst>
-    <dgm:txEffectClrLst/>
-  </dgm:styleLbl>
-  <dgm:styleLbl name="parChTrans1D3">
-    <dgm:fillClrLst meth="repeat">
-      <a:schemeClr val="accent1"/>
-    </dgm:fillClrLst>
-    <dgm:linClrLst meth="repeat">
-      <a:schemeClr val="accent1">
-        <a:shade val="80000"/>
-      </a:schemeClr>
-    </dgm:linClrLst>
-    <dgm:effectClrLst/>
-    <dgm:txLinClrLst/>
-    <dgm:txFillClrLst meth="repeat">
-      <a:schemeClr val="tx1"/>
-    </dgm:txFillClrLst>
-    <dgm:txEffectClrLst/>
-  </dgm:styleLbl>
-  <dgm:styleLbl name="parChTrans1D4">
-    <dgm:fillClrLst meth="repeat">
-      <a:schemeClr val="accent1"/>
-    </dgm:fillClrLst>
-    <dgm:linClrLst meth="repeat">
-      <a:schemeClr val="accent1">
-        <a:shade val="80000"/>
-      </a:schemeClr>
-    </dgm:linClrLst>
-    <dgm:effectClrLst/>
-    <dgm:txLinClrLst/>
-    <dgm:txFillClrLst meth="repeat">
-      <a:schemeClr val="tx1"/>
-    </dgm:txFillClrLst>
-    <dgm:txEffectClrLst/>
-  </dgm:styleLbl>
-  <dgm:styleLbl name="fgAcc1">
-    <dgm:fillClrLst meth="repeat">
-      <a:schemeClr val="lt1">
-        <a:alpha val="90000"/>
-      </a:schemeClr>
-    </dgm:fillClrLst>
-    <dgm:linClrLst meth="repeat">
-      <a:schemeClr val="accent1"/>
-    </dgm:linClrLst>
-    <dgm:effectClrLst/>
-    <dgm:txLinClrLst/>
-    <dgm:txFillClrLst meth="repeat">
-      <a:schemeClr val="dk1"/>
-    </dgm:txFillClrLst>
-    <dgm:txEffectClrLst/>
-  </dgm:styleLbl>
-  <dgm:styleLbl name="conFgAcc1">
-    <dgm:fillClrLst meth="repeat">
-      <a:schemeClr val="lt1">
-        <a:alpha val="90000"/>
-      </a:schemeClr>
-    </dgm:fillClrLst>
-    <dgm:linClrLst meth="repeat">
-      <a:schemeClr val="accent1"/>
-    </dgm:linClrLst>
-    <dgm:effectClrLst/>
-    <dgm:txLinClrLst/>
-    <dgm:txFillClrLst meth="repeat">
-      <a:schemeClr val="dk1"/>
-    </dgm:txFillClrLst>
-    <dgm:txEffectClrLst/>
-  </dgm:styleLbl>
-  <dgm:styleLbl name="alignAcc1">
-    <dgm:fillClrLst meth="repeat">
-      <a:schemeClr val="lt1">
-        <a:alpha val="90000"/>
-      </a:schemeClr>
-    </dgm:fillClrLst>
-    <dgm:linClrLst meth="repeat">
-      <a:schemeClr val="accent1"/>
-    </dgm:linClrLst>
-    <dgm:effectClrLst/>
-    <dgm:txLinClrLst/>
-    <dgm:txFillClrLst meth="repeat">
-      <a:schemeClr val="dk1"/>
-    </dgm:txFillClrLst>
-    <dgm:txEffectClrLst/>
-  </dgm:styleLbl>
-  <dgm:styleLbl name="trAlignAcc1">
-    <dgm:fillClrLst meth="repeat">
-      <a:schemeClr val="lt1">
-        <a:alpha val="40000"/>
-      </a:schemeClr>
-    </dgm:fillClrLst>
-    <dgm:linClrLst meth="repeat">
-      <a:schemeClr val="accent1"/>
-    </dgm:linClrLst>
-    <dgm:effectClrLst/>
-    <dgm:txLinClrLst/>
-    <dgm:txFillClrLst meth="repeat">
-      <a:schemeClr val="dk1"/>
-    </dgm:txFillClrLst>
-    <dgm:txEffectClrLst/>
-  </dgm:styleLbl>
-  <dgm:styleLbl name="bgAcc1">
-    <dgm:fillClrLst meth="repeat">
-      <a:schemeClr val="lt1">
-        <a:alpha val="90000"/>
-      </a:schemeClr>
-    </dgm:fillClrLst>
-    <dgm:linClrLst meth="repeat">
-      <a:schemeClr val="accent1"/>
-    </dgm:linClrLst>
-    <dgm:effectClrLst/>
-    <dgm:txLinClrLst/>
-    <dgm:txFillClrLst meth="repeat">
-      <a:schemeClr val="dk1"/>
-    </dgm:txFillClrLst>
-    <dgm:txEffectClrLst/>
-  </dgm:styleLbl>
-  <dgm:styleLbl name="solidFgAcc1">
-    <dgm:fillClrLst meth="repeat">
-      <a:schemeClr val="lt1"/>
-    </dgm:fillClrLst>
-    <dgm:linClrLst meth="repeat">
-      <a:schemeClr val="accent1"/>
-    </dgm:linClrLst>
-    <dgm:effectClrLst/>
-    <dgm:txLinClrLst/>
-    <dgm:txFillClrLst meth="repeat">
-      <a:schemeClr val="dk1"/>
-    </dgm:txFillClrLst>
-    <dgm:txEffectClrLst/>
-  </dgm:styleLbl>
-  <dgm:styleLbl name="solidAlignAcc1">
-    <dgm:fillClrLst meth="repeat">
-      <a:schemeClr val="lt1"/>
-    </dgm:fillClrLst>
-    <dgm:linClrLst meth="repeat">
-      <a:schemeClr val="accent1"/>
-    </dgm:linClrLst>
-    <dgm:effectClrLst/>
-    <dgm:txLinClrLst/>
-    <dgm:txFillClrLst meth="repeat">
-      <a:schemeClr val="dk1"/>
-    </dgm:txFillClrLst>
-    <dgm:txEffectClrLst/>
-  </dgm:styleLbl>
-  <dgm:styleLbl name="solidBgAcc1">
-    <dgm:fillClrLst meth="repeat">
-      <a:schemeClr val="lt1"/>
-    </dgm:fillClrLst>
-    <dgm:linClrLst meth="repeat">
-      <a:schemeClr val="accent1"/>
-    </dgm:linClrLst>
-    <dgm:effectClrLst/>
-    <dgm:txLinClrLst/>
-    <dgm:txFillClrLst meth="repeat">
-      <a:schemeClr val="dk1"/>
-    </dgm:txFillClrLst>
-    <dgm:txEffectClrLst/>
-  </dgm:styleLbl>
-  <dgm:styleLbl name="fgAccFollowNode1">
-    <dgm:fillClrLst meth="repeat">
-      <a:schemeClr val="accent1">
-        <a:alpha val="90000"/>
-        <a:tint val="40000"/>
-      </a:schemeClr>
-    </dgm:fillClrLst>
-    <dgm:linClrLst meth="repeat">
-      <a:schemeClr val="accent1">
-        <a:alpha val="90000"/>
-        <a:tint val="40000"/>
-      </a:schemeClr>
-    </dgm:linClrLst>
-    <dgm:effectClrLst/>
-    <dgm:txLinClrLst/>
-    <dgm:txFillClrLst meth="repeat">
-      <a:schemeClr val="dk1"/>
-    </dgm:txFillClrLst>
-    <dgm:txEffectClrLst/>
-  </dgm:styleLbl>
-  <dgm:styleLbl name="alignAccFollowNode1">
-    <dgm:fillClrLst meth="repeat">
-      <a:schemeClr val="accent1">
-        <a:alpha val="90000"/>
-        <a:tint val="40000"/>
-      </a:schemeClr>
-    </dgm:fillClrLst>
-    <dgm:linClrLst meth="repeat">
-      <a:schemeClr val="accent1">
-        <a:alpha val="90000"/>
-        <a:tint val="40000"/>
-      </a:schemeClr>
-    </dgm:linClrLst>
-    <dgm:effectClrLst/>
-    <dgm:txLinClrLst/>
-    <dgm:txFillClrLst meth="repeat">
-      <a:schemeClr val="dk1"/>
-    </dgm:txFillClrLst>
-    <dgm:txEffectClrLst/>
-  </dgm:styleLbl>
-  <dgm:styleLbl name="bgAccFollowNode1">
-    <dgm:fillClrLst meth="repeat">
-      <a:schemeClr val="accent1">
-        <a:alpha val="90000"/>
-        <a:tint val="40000"/>
-      </a:schemeClr>
-    </dgm:fillClrLst>
-    <dgm:linClrLst meth="repeat">
-      <a:schemeClr val="accent1">
-        <a:alpha val="90000"/>
-        <a:tint val="40000"/>
-      </a:schemeClr>
-    </dgm:linClrLst>
-    <dgm:effectClrLst/>
-    <dgm:txLinClrLst/>
-    <dgm:txFillClrLst meth="repeat">
-      <a:schemeClr val="dk1"/>
-    </dgm:txFillClrLst>
-    <dgm:txEffectClrLst/>
-  </dgm:styleLbl>
-  <dgm:styleLbl name="fgAcc0">
-    <dgm:fillClrLst meth="repeat">
-      <a:schemeClr val="lt1">
-        <a:alpha val="90000"/>
-      </a:schemeClr>
-    </dgm:fillClrLst>
-    <dgm:linClrLst meth="repeat">
-      <a:schemeClr val="accent1"/>
-    </dgm:linClrLst>
-    <dgm:effectClrLst/>
-    <dgm:txLinClrLst/>
-    <dgm:txFillClrLst meth="repeat">
-      <a:schemeClr val="dk1"/>
-    </dgm:txFillClrLst>
-    <dgm:txEffectClrLst/>
-  </dgm:styleLbl>
-  <dgm:styleLbl name="fgAcc2">
-    <dgm:fillClrLst meth="repeat">
-      <a:schemeClr val="lt1">
-        <a:alpha val="90000"/>
-      </a:schemeClr>
-    </dgm:fillClrLst>
-    <dgm:linClrLst meth="repeat">
-      <a:schemeClr val="accent1"/>
-    </dgm:linClrLst>
-    <dgm:effectClrLst/>
-    <dgm:txLinClrLst/>
-    <dgm:txFillClrLst meth="repeat">
-      <a:schemeClr val="dk1"/>
-    </dgm:txFillClrLst>
-    <dgm:txEffectClrLst/>
-  </dgm:styleLbl>
-  <dgm:styleLbl name="fgAcc3">
-    <dgm:fillClrLst meth="repeat">
-      <a:schemeClr val="lt1">
-        <a:alpha val="90000"/>
-      </a:schemeClr>
-    </dgm:fillClrLst>
-    <dgm:linClrLst meth="repeat">
-      <a:schemeClr val="accent1"/>
-    </dgm:linClrLst>
-    <dgm:effectClrLst/>
-    <dgm:txLinClrLst/>
-    <dgm:txFillClrLst meth="repeat">
-      <a:schemeClr val="dk1"/>
-    </dgm:txFillClrLst>
-    <dgm:txEffectClrLst/>
-  </dgm:styleLbl>
-  <dgm:styleLbl name="fgAcc4">
-    <dgm:fillClrLst meth="repeat">
-      <a:schemeClr val="lt1">
-        <a:alpha val="90000"/>
-      </a:schemeClr>
-    </dgm:fillClrLst>
-    <dgm:linClrLst meth="repeat">
-      <a:schemeClr val="accent1"/>
-    </dgm:linClrLst>
-    <dgm:effectClrLst/>
-    <dgm:txLinClrLst/>
-    <dgm:txFillClrLst meth="repeat">
-      <a:schemeClr val="dk1"/>
-    </dgm:txFillClrLst>
-    <dgm:txEffectClrLst/>
-  </dgm:styleLbl>
-  <dgm:styleLbl name="bgShp">
-    <dgm:fillClrLst meth="repeat">
-      <a:schemeClr val="accent1">
-        <a:tint val="40000"/>
-      </a:schemeClr>
-    </dgm:fillClrLst>
-    <dgm:linClrLst meth="repeat">
-      <a:schemeClr val="accent1"/>
-    </dgm:linClrLst>
-    <dgm:effectClrLst/>
-    <dgm:txLinClrLst/>
-    <dgm:txFillClrLst meth="repeat">
-      <a:schemeClr val="dk1"/>
-    </dgm:txFillClrLst>
-    <dgm:txEffectClrLst/>
-  </dgm:styleLbl>
-  <dgm:styleLbl name="dkBgShp">
-    <dgm:fillClrLst meth="repeat">
-      <a:schemeClr val="accent1">
-        <a:shade val="80000"/>
-      </a:schemeClr>
-    </dgm:fillClrLst>
-    <dgm:linClrLst meth="repeat">
-      <a:schemeClr val="accent1"/>
-    </dgm:linClrLst>
-    <dgm:effectClrLst/>
-    <dgm:txLinClrLst/>
-    <dgm:txFillClrLst meth="repeat">
-      <a:schemeClr val="lt1"/>
-    </dgm:txFillClrLst>
-    <dgm:txEffectClrLst/>
-  </dgm:styleLbl>
-  <dgm:styleLbl name="trBgShp">
-    <dgm:fillClrLst meth="repeat">
-      <a:schemeClr val="accent1">
-        <a:tint val="50000"/>
-        <a:alpha val="40000"/>
-      </a:schemeClr>
-    </dgm:fillClrLst>
-    <dgm:linClrLst meth="repeat">
-      <a:schemeClr val="accent1"/>
-    </dgm:linClrLst>
-    <dgm:effectClrLst/>
-    <dgm:txLinClrLst/>
-    <dgm:txFillClrLst meth="repeat">
-      <a:schemeClr val="lt1"/>
-    </dgm:txFillClrLst>
-    <dgm:txEffectClrLst/>
-  </dgm:styleLbl>
-  <dgm:styleLbl name="fgShp">
-    <dgm:fillClrLst meth="repeat">
-      <a:schemeClr val="accent1">
-        <a:tint val="60000"/>
-      </a:schemeClr>
-    </dgm:fillClrLst>
-    <dgm:linClrLst meth="repeat">
-      <a:schemeClr val="lt1"/>
-    </dgm:linClrLst>
-    <dgm:effectClrLst/>
-    <dgm:txLinClrLst/>
-    <dgm:txFillClrLst meth="repeat">
-      <a:schemeClr val="dk1"/>
-    </dgm:txFillClrLst>
-    <dgm:txEffectClrLst/>
-  </dgm:styleLbl>
-  <dgm:styleLbl name="revTx">
-    <dgm:fillClrLst meth="repeat">
-      <a:schemeClr val="lt1">
-        <a:alpha val="0"/>
-      </a:schemeClr>
-    </dgm:fillClrLst>
-    <dgm:linClrLst meth="repeat">
-      <a:schemeClr val="dk1">
-        <a:alpha val="0"/>
-      </a:schemeClr>
-    </dgm:linClrLst>
-    <dgm:effectClrLst/>
-    <dgm:txLinClrLst/>
-    <dgm:txFillClrLst meth="repeat">
-      <a:schemeClr val="tx1"/>
-    </dgm:txFillClrLst>
-    <dgm:txEffectClrLst/>
-  </dgm:styleLbl>
-</dgm:colorsDef>
-</file>
-
-<file path=ppt/diagrams/colors3.xml><?xml version="1.0" encoding="utf-8"?>
 <dgm:colorsDef xmlns:dgm="http://schemas.openxmlformats.org/drawingml/2006/diagram" xmlns:a="http://schemas.openxmlformats.org/drawingml/2006/main" uniqueId="urn:microsoft.com/office/officeart/2005/8/colors/accent1_2">
   <dgm:title val=""/>
   <dgm:desc val=""/>
@@ -8827,2028 +7329,6 @@
 </dgm:dataModel>
 </file>
 
-<file path=ppt/diagrams/data2.xml><?xml version="1.0" encoding="utf-8"?>
-<dgm:dataModel xmlns:dgm="http://schemas.openxmlformats.org/drawingml/2006/diagram" xmlns:a="http://schemas.openxmlformats.org/drawingml/2006/main">
-  <dgm:ptLst>
-    <dgm:pt modelId="{DE1A03B6-942F-4AC6-80BB-76731E8D619A}" type="doc">
-      <dgm:prSet loTypeId="urn:microsoft.com/office/officeart/2005/8/layout/process3" loCatId="process" qsTypeId="urn:microsoft.com/office/officeart/2005/8/quickstyle/simple1" qsCatId="simple" csTypeId="urn:microsoft.com/office/officeart/2005/8/colors/accent1_2" csCatId="accent1" phldr="1"/>
-      <dgm:spPr/>
-      <dgm:t>
-        <a:bodyPr/>
-        <a:lstStyle/>
-        <a:p>
-          <a:endParaRPr lang="en-GB"/>
-        </a:p>
-      </dgm:t>
-    </dgm:pt>
-    <dgm:pt modelId="{3C2AB5AB-129C-45E8-AB3F-B2E063D5FFA7}">
-      <dgm:prSet phldrT="[Text]"/>
-      <dgm:spPr/>
-      <dgm:t>
-        <a:bodyPr/>
-        <a:lstStyle/>
-        <a:p>
-          <a:r>
-            <a:rPr lang="en-GB" dirty="0"/>
-            <a:t>Sources</a:t>
-          </a:r>
-        </a:p>
-      </dgm:t>
-    </dgm:pt>
-    <dgm:pt modelId="{5F20E94D-C07C-47E6-B04A-399C6C7EB5FC}" type="parTrans" cxnId="{B9C71534-3795-4F15-BF9E-441E1E2CDE0B}">
-      <dgm:prSet/>
-      <dgm:spPr/>
-      <dgm:t>
-        <a:bodyPr/>
-        <a:lstStyle/>
-        <a:p>
-          <a:endParaRPr lang="en-GB"/>
-        </a:p>
-      </dgm:t>
-    </dgm:pt>
-    <dgm:pt modelId="{488BDB2D-2A42-4C8C-A46D-EDEEE03EAD4B}" type="sibTrans" cxnId="{B9C71534-3795-4F15-BF9E-441E1E2CDE0B}">
-      <dgm:prSet/>
-      <dgm:spPr>
-        <a:solidFill>
-          <a:schemeClr val="tx2"/>
-        </a:solidFill>
-      </dgm:spPr>
-      <dgm:t>
-        <a:bodyPr/>
-        <a:lstStyle/>
-        <a:p>
-          <a:endParaRPr lang="en-GB"/>
-        </a:p>
-      </dgm:t>
-    </dgm:pt>
-    <dgm:pt modelId="{A35A2B80-F5F7-404F-BA73-398735E4BA2C}">
-      <dgm:prSet phldrT="[Text]"/>
-      <dgm:spPr/>
-      <dgm:t>
-        <a:bodyPr/>
-        <a:lstStyle/>
-        <a:p>
-          <a:r>
-            <a:rPr lang="en-GB" dirty="0"/>
-            <a:t>Customizations</a:t>
-          </a:r>
-        </a:p>
-      </dgm:t>
-    </dgm:pt>
-    <dgm:pt modelId="{51C69587-6425-41F8-AB94-FABEB78B19AC}" type="parTrans" cxnId="{C80CA2F9-EF80-43C5-85CB-DFB5B9DBFA41}">
-      <dgm:prSet/>
-      <dgm:spPr/>
-      <dgm:t>
-        <a:bodyPr/>
-        <a:lstStyle/>
-        <a:p>
-          <a:endParaRPr lang="en-GB"/>
-        </a:p>
-      </dgm:t>
-    </dgm:pt>
-    <dgm:pt modelId="{6842B20C-0753-4B38-B4D1-568764A2E096}" type="sibTrans" cxnId="{C80CA2F9-EF80-43C5-85CB-DFB5B9DBFA41}">
-      <dgm:prSet/>
-      <dgm:spPr/>
-      <dgm:t>
-        <a:bodyPr/>
-        <a:lstStyle/>
-        <a:p>
-          <a:endParaRPr lang="en-GB"/>
-        </a:p>
-      </dgm:t>
-    </dgm:pt>
-    <dgm:pt modelId="{729818DC-1341-4A35-8637-D3A777AC3E87}">
-      <dgm:prSet phldrT="[Text]"/>
-      <dgm:spPr/>
-      <dgm:t>
-        <a:bodyPr/>
-        <a:lstStyle/>
-        <a:p>
-          <a:r>
-            <a:rPr lang="en-GB" dirty="0"/>
-            <a:t>Build</a:t>
-          </a:r>
-        </a:p>
-      </dgm:t>
-    </dgm:pt>
-    <dgm:pt modelId="{B834ECB9-49A9-4BF9-A956-DD685C81D9BE}" type="parTrans" cxnId="{27839E0A-22C1-4626-BC18-605028B5B3C1}">
-      <dgm:prSet/>
-      <dgm:spPr/>
-      <dgm:t>
-        <a:bodyPr/>
-        <a:lstStyle/>
-        <a:p>
-          <a:endParaRPr lang="en-GB"/>
-        </a:p>
-      </dgm:t>
-    </dgm:pt>
-    <dgm:pt modelId="{64A19925-D214-4FAB-B3C9-2F981DA2DA0B}" type="sibTrans" cxnId="{27839E0A-22C1-4626-BC18-605028B5B3C1}">
-      <dgm:prSet/>
-      <dgm:spPr>
-        <a:solidFill>
-          <a:schemeClr val="tx2"/>
-        </a:solidFill>
-      </dgm:spPr>
-      <dgm:t>
-        <a:bodyPr/>
-        <a:lstStyle/>
-        <a:p>
-          <a:endParaRPr lang="en-GB"/>
-        </a:p>
-      </dgm:t>
-    </dgm:pt>
-    <dgm:pt modelId="{146CE24C-1C65-4A16-A600-DE980C859DD9}">
-      <dgm:prSet phldrT="[Text]"/>
-      <dgm:spPr/>
-      <dgm:t>
-        <a:bodyPr/>
-        <a:lstStyle/>
-        <a:p>
-          <a:r>
-            <a:rPr lang="en-GB" dirty="0"/>
-            <a:t>Pack</a:t>
-          </a:r>
-        </a:p>
-      </dgm:t>
-    </dgm:pt>
-    <dgm:pt modelId="{20CEFF71-889E-4703-9EBA-465A239D2749}" type="parTrans" cxnId="{CC92E9C4-B50B-4DC6-B165-3DF8E37510A5}">
-      <dgm:prSet/>
-      <dgm:spPr/>
-      <dgm:t>
-        <a:bodyPr/>
-        <a:lstStyle/>
-        <a:p>
-          <a:endParaRPr lang="en-GB"/>
-        </a:p>
-      </dgm:t>
-    </dgm:pt>
-    <dgm:pt modelId="{3F143513-E1A2-44F9-8D40-991EF5BD685F}" type="sibTrans" cxnId="{CC92E9C4-B50B-4DC6-B165-3DF8E37510A5}">
-      <dgm:prSet/>
-      <dgm:spPr/>
-      <dgm:t>
-        <a:bodyPr/>
-        <a:lstStyle/>
-        <a:p>
-          <a:endParaRPr lang="en-GB"/>
-        </a:p>
-      </dgm:t>
-    </dgm:pt>
-    <dgm:pt modelId="{2A79F2AC-5078-4040-B225-0D20377FE91A}">
-      <dgm:prSet phldrT="[Text]"/>
-      <dgm:spPr/>
-      <dgm:t>
-        <a:bodyPr/>
-        <a:lstStyle/>
-        <a:p>
-          <a:r>
-            <a:rPr lang="en-GB" dirty="0"/>
-            <a:t>Artifacts</a:t>
-          </a:r>
-        </a:p>
-      </dgm:t>
-    </dgm:pt>
-    <dgm:pt modelId="{25BF6886-A072-4D60-9A1A-8C9333F04790}" type="parTrans" cxnId="{B9F4498F-5302-49C5-8D1E-04DA80C27D8B}">
-      <dgm:prSet/>
-      <dgm:spPr/>
-      <dgm:t>
-        <a:bodyPr/>
-        <a:lstStyle/>
-        <a:p>
-          <a:endParaRPr lang="en-GB"/>
-        </a:p>
-      </dgm:t>
-    </dgm:pt>
-    <dgm:pt modelId="{47AE645E-3A8A-4EE9-9878-F13939902DBA}" type="sibTrans" cxnId="{B9F4498F-5302-49C5-8D1E-04DA80C27D8B}">
-      <dgm:prSet/>
-      <dgm:spPr/>
-      <dgm:t>
-        <a:bodyPr/>
-        <a:lstStyle/>
-        <a:p>
-          <a:endParaRPr lang="en-GB"/>
-        </a:p>
-      </dgm:t>
-    </dgm:pt>
-    <dgm:pt modelId="{DFEB15FD-2194-47F0-8809-6ABBBB6D7A7E}">
-      <dgm:prSet phldrT="[Text]"/>
-      <dgm:spPr/>
-      <dgm:t>
-        <a:bodyPr/>
-        <a:lstStyle/>
-        <a:p>
-          <a:r>
-            <a:rPr lang="en-GB" dirty="0"/>
-            <a:t>Solutions</a:t>
-          </a:r>
-        </a:p>
-      </dgm:t>
-    </dgm:pt>
-    <dgm:pt modelId="{5F2184DE-FF37-421D-B6A2-36E5D588C4E1}" type="parTrans" cxnId="{56E7E4D7-96C1-4423-A771-E2CE13A2488E}">
-      <dgm:prSet/>
-      <dgm:spPr/>
-      <dgm:t>
-        <a:bodyPr/>
-        <a:lstStyle/>
-        <a:p>
-          <a:endParaRPr lang="en-GB"/>
-        </a:p>
-      </dgm:t>
-    </dgm:pt>
-    <dgm:pt modelId="{02E15070-D612-4335-9F73-FE8D6BAB765B}" type="sibTrans" cxnId="{56E7E4D7-96C1-4423-A771-E2CE13A2488E}">
-      <dgm:prSet/>
-      <dgm:spPr/>
-      <dgm:t>
-        <a:bodyPr/>
-        <a:lstStyle/>
-        <a:p>
-          <a:endParaRPr lang="en-GB"/>
-        </a:p>
-      </dgm:t>
-    </dgm:pt>
-    <dgm:pt modelId="{7A8A64D0-750F-45B9-9EAD-210617E9E2B5}">
-      <dgm:prSet phldrT="[Text]"/>
-      <dgm:spPr/>
-      <dgm:t>
-        <a:bodyPr/>
-        <a:lstStyle/>
-        <a:p>
-          <a:r>
-            <a:rPr lang="en-GB" dirty="0"/>
-            <a:t>.NET Code (Plug-ins, CRM Packages)</a:t>
-          </a:r>
-        </a:p>
-      </dgm:t>
-    </dgm:pt>
-    <dgm:pt modelId="{325F4CB3-B2BD-4AAA-A151-6672A4491B27}" type="parTrans" cxnId="{FE297C9B-131E-4E5A-A7C4-9D5089A116DB}">
-      <dgm:prSet/>
-      <dgm:spPr/>
-      <dgm:t>
-        <a:bodyPr/>
-        <a:lstStyle/>
-        <a:p>
-          <a:endParaRPr lang="en-GB"/>
-        </a:p>
-      </dgm:t>
-    </dgm:pt>
-    <dgm:pt modelId="{9E1E91B5-B5B5-4A7F-9F3A-657E5D507C3F}" type="sibTrans" cxnId="{FE297C9B-131E-4E5A-A7C4-9D5089A116DB}">
-      <dgm:prSet/>
-      <dgm:spPr/>
-      <dgm:t>
-        <a:bodyPr/>
-        <a:lstStyle/>
-        <a:p>
-          <a:endParaRPr lang="en-GB"/>
-        </a:p>
-      </dgm:t>
-    </dgm:pt>
-    <dgm:pt modelId="{85A192D5-4BBB-4C3A-95B2-16030C638DC5}">
-      <dgm:prSet phldrT="[Text]"/>
-      <dgm:spPr/>
-      <dgm:t>
-        <a:bodyPr/>
-        <a:lstStyle/>
-        <a:p>
-          <a:r>
-            <a:rPr lang="en-GB" dirty="0"/>
-            <a:t>Web Resources</a:t>
-          </a:r>
-        </a:p>
-      </dgm:t>
-    </dgm:pt>
-    <dgm:pt modelId="{4B3EA7E9-6CDA-436B-B17C-7EBF0FF7F819}" type="parTrans" cxnId="{0AAD318A-2703-4D23-9E7C-EA4385EC226D}">
-      <dgm:prSet/>
-      <dgm:spPr/>
-      <dgm:t>
-        <a:bodyPr/>
-        <a:lstStyle/>
-        <a:p>
-          <a:endParaRPr lang="en-GB"/>
-        </a:p>
-      </dgm:t>
-    </dgm:pt>
-    <dgm:pt modelId="{CC7108DD-A893-4298-9019-034C944AD5B7}" type="sibTrans" cxnId="{0AAD318A-2703-4D23-9E7C-EA4385EC226D}">
-      <dgm:prSet/>
-      <dgm:spPr/>
-      <dgm:t>
-        <a:bodyPr/>
-        <a:lstStyle/>
-        <a:p>
-          <a:endParaRPr lang="en-GB"/>
-        </a:p>
-      </dgm:t>
-    </dgm:pt>
-    <dgm:pt modelId="{25F435A0-D841-4340-A1F1-5D649A8EFC27}">
-      <dgm:prSet phldrT="[Text]"/>
-      <dgm:spPr/>
-      <dgm:t>
-        <a:bodyPr/>
-        <a:lstStyle/>
-        <a:p>
-          <a:r>
-            <a:rPr lang="en-GB" dirty="0"/>
-            <a:t>Compile</a:t>
-          </a:r>
-        </a:p>
-      </dgm:t>
-    </dgm:pt>
-    <dgm:pt modelId="{B94FF2C4-5331-4735-8397-6B2B38B0E05E}" type="parTrans" cxnId="{0983D168-D537-4A68-99AB-2355EE78EC1C}">
-      <dgm:prSet/>
-      <dgm:spPr/>
-      <dgm:t>
-        <a:bodyPr/>
-        <a:lstStyle/>
-        <a:p>
-          <a:endParaRPr lang="en-GB"/>
-        </a:p>
-      </dgm:t>
-    </dgm:pt>
-    <dgm:pt modelId="{F5D21AF6-8057-418C-B3F5-EE9ABC685516}" type="sibTrans" cxnId="{0983D168-D537-4A68-99AB-2355EE78EC1C}">
-      <dgm:prSet/>
-      <dgm:spPr/>
-      <dgm:t>
-        <a:bodyPr/>
-        <a:lstStyle/>
-        <a:p>
-          <a:endParaRPr lang="en-GB"/>
-        </a:p>
-      </dgm:t>
-    </dgm:pt>
-    <dgm:pt modelId="{73FCEED4-9361-4AE9-B8D4-1DA0A76B4689}">
-      <dgm:prSet phldrT="[Text]"/>
-      <dgm:spPr/>
-      <dgm:t>
-        <a:bodyPr/>
-        <a:lstStyle/>
-        <a:p>
-          <a:r>
-            <a:rPr lang="en-GB" dirty="0"/>
-            <a:t>Minify</a:t>
-          </a:r>
-        </a:p>
-      </dgm:t>
-    </dgm:pt>
-    <dgm:pt modelId="{AA4AB530-F5E6-4655-9280-24C4FD0D71CE}" type="parTrans" cxnId="{78CAF808-4CB5-49EC-9E1E-D333AE2D45C2}">
-      <dgm:prSet/>
-      <dgm:spPr/>
-      <dgm:t>
-        <a:bodyPr/>
-        <a:lstStyle/>
-        <a:p>
-          <a:endParaRPr lang="en-GB"/>
-        </a:p>
-      </dgm:t>
-    </dgm:pt>
-    <dgm:pt modelId="{1FF7A295-DCEB-42EC-9A73-1CA1DE651E38}" type="sibTrans" cxnId="{78CAF808-4CB5-49EC-9E1E-D333AE2D45C2}">
-      <dgm:prSet/>
-      <dgm:spPr/>
-      <dgm:t>
-        <a:bodyPr/>
-        <a:lstStyle/>
-        <a:p>
-          <a:endParaRPr lang="en-GB"/>
-        </a:p>
-      </dgm:t>
-    </dgm:pt>
-    <dgm:pt modelId="{C9F96109-F746-41B8-A9C4-8F1EDFE06825}">
-      <dgm:prSet phldrT="[Text]"/>
-      <dgm:spPr/>
-      <dgm:t>
-        <a:bodyPr/>
-        <a:lstStyle/>
-        <a:p>
-          <a:r>
-            <a:rPr lang="en-GB" dirty="0"/>
-            <a:t>Run Static Analysis</a:t>
-          </a:r>
-        </a:p>
-      </dgm:t>
-    </dgm:pt>
-    <dgm:pt modelId="{9AF33ED7-D8C0-40F1-877B-46C77AFE1015}" type="parTrans" cxnId="{7B0EB799-377F-4850-B15E-B48912C026A5}">
-      <dgm:prSet/>
-      <dgm:spPr/>
-      <dgm:t>
-        <a:bodyPr/>
-        <a:lstStyle/>
-        <a:p>
-          <a:endParaRPr lang="en-GB"/>
-        </a:p>
-      </dgm:t>
-    </dgm:pt>
-    <dgm:pt modelId="{E94264A1-D90E-4035-8064-CCDFF5D4F94C}" type="sibTrans" cxnId="{7B0EB799-377F-4850-B15E-B48912C026A5}">
-      <dgm:prSet/>
-      <dgm:spPr/>
-      <dgm:t>
-        <a:bodyPr/>
-        <a:lstStyle/>
-        <a:p>
-          <a:endParaRPr lang="en-GB"/>
-        </a:p>
-      </dgm:t>
-    </dgm:pt>
-    <dgm:pt modelId="{99FB9980-8AE1-41F4-A26B-469AD6F82C5B}">
-      <dgm:prSet phldrT="[Text]"/>
-      <dgm:spPr/>
-      <dgm:t>
-        <a:bodyPr/>
-        <a:lstStyle/>
-        <a:p>
-          <a:r>
-            <a:rPr lang="en-GB" dirty="0"/>
-            <a:t>Run Unit Tests</a:t>
-          </a:r>
-        </a:p>
-      </dgm:t>
-    </dgm:pt>
-    <dgm:pt modelId="{298E8F3A-5B4A-40DD-99F7-3DE2C859743F}" type="parTrans" cxnId="{D36111E3-8E7F-4DEF-BF3C-F359A376CCE7}">
-      <dgm:prSet/>
-      <dgm:spPr/>
-      <dgm:t>
-        <a:bodyPr/>
-        <a:lstStyle/>
-        <a:p>
-          <a:endParaRPr lang="en-GB"/>
-        </a:p>
-      </dgm:t>
-    </dgm:pt>
-    <dgm:pt modelId="{07E2469C-AC1D-4C73-BB97-AC2BEB15C1E1}" type="sibTrans" cxnId="{D36111E3-8E7F-4DEF-BF3C-F359A376CCE7}">
-      <dgm:prSet/>
-      <dgm:spPr/>
-      <dgm:t>
-        <a:bodyPr/>
-        <a:lstStyle/>
-        <a:p>
-          <a:endParaRPr lang="en-GB"/>
-        </a:p>
-      </dgm:t>
-    </dgm:pt>
-    <dgm:pt modelId="{10CD0FB0-F964-47FE-8107-58FB77282F88}">
-      <dgm:prSet phldrT="[Text]"/>
-      <dgm:spPr/>
-      <dgm:t>
-        <a:bodyPr/>
-        <a:lstStyle/>
-        <a:p>
-          <a:r>
-            <a:rPr lang="en-GB" dirty="0"/>
-            <a:t>Packages</a:t>
-          </a:r>
-        </a:p>
-      </dgm:t>
-    </dgm:pt>
-    <dgm:pt modelId="{81BB4A6B-C9F5-4AD8-8502-5F7CCF378D1E}" type="parTrans" cxnId="{5B579AC6-4A02-49E3-AC97-F6BFF7EB3704}">
-      <dgm:prSet/>
-      <dgm:spPr/>
-      <dgm:t>
-        <a:bodyPr/>
-        <a:lstStyle/>
-        <a:p>
-          <a:endParaRPr lang="en-GB"/>
-        </a:p>
-      </dgm:t>
-    </dgm:pt>
-    <dgm:pt modelId="{0A905215-4212-4FEA-887E-4A28CD91897C}" type="sibTrans" cxnId="{5B579AC6-4A02-49E3-AC97-F6BFF7EB3704}">
-      <dgm:prSet/>
-      <dgm:spPr/>
-      <dgm:t>
-        <a:bodyPr/>
-        <a:lstStyle/>
-        <a:p>
-          <a:endParaRPr lang="en-GB"/>
-        </a:p>
-      </dgm:t>
-    </dgm:pt>
-    <dgm:pt modelId="{126AF485-0AC1-405C-9F7E-CC6D5C3CE58F}">
-      <dgm:prSet phldrT="[Text]"/>
-      <dgm:spPr/>
-      <dgm:t>
-        <a:bodyPr/>
-        <a:lstStyle/>
-        <a:p>
-          <a:r>
-            <a:rPr lang="en-GB" dirty="0"/>
-            <a:t>Data</a:t>
-          </a:r>
-        </a:p>
-      </dgm:t>
-    </dgm:pt>
-    <dgm:pt modelId="{9520D2CB-E00D-4193-B142-E3AB6C6E615D}" type="parTrans" cxnId="{24D4C815-221F-431F-B161-FAE9D41C7996}">
-      <dgm:prSet/>
-      <dgm:spPr/>
-      <dgm:t>
-        <a:bodyPr/>
-        <a:lstStyle/>
-        <a:p>
-          <a:endParaRPr lang="en-GB"/>
-        </a:p>
-      </dgm:t>
-    </dgm:pt>
-    <dgm:pt modelId="{CE01D0A9-B9A3-4AD5-8167-1990E75012EE}" type="sibTrans" cxnId="{24D4C815-221F-431F-B161-FAE9D41C7996}">
-      <dgm:prSet/>
-      <dgm:spPr/>
-      <dgm:t>
-        <a:bodyPr/>
-        <a:lstStyle/>
-        <a:p>
-          <a:endParaRPr lang="en-GB"/>
-        </a:p>
-      </dgm:t>
-    </dgm:pt>
-    <dgm:pt modelId="{906A08C9-DD99-4AFF-AA20-AEFAF7A62956}">
-      <dgm:prSet phldrT="[Text]"/>
-      <dgm:spPr/>
-      <dgm:t>
-        <a:bodyPr/>
-        <a:lstStyle/>
-        <a:p>
-          <a:r>
-            <a:rPr lang="en-GB" dirty="0"/>
-            <a:t>Tests</a:t>
-          </a:r>
-        </a:p>
-      </dgm:t>
-    </dgm:pt>
-    <dgm:pt modelId="{8966DBCE-2EFB-4C60-8C18-97620A549E6B}" type="parTrans" cxnId="{905ECDFD-0151-4CA3-BF3C-58469A28399C}">
-      <dgm:prSet/>
-      <dgm:spPr/>
-      <dgm:t>
-        <a:bodyPr/>
-        <a:lstStyle/>
-        <a:p>
-          <a:endParaRPr lang="en-GB"/>
-        </a:p>
-      </dgm:t>
-    </dgm:pt>
-    <dgm:pt modelId="{F15B2A55-1E80-4377-8982-F0B43115915F}" type="sibTrans" cxnId="{905ECDFD-0151-4CA3-BF3C-58469A28399C}">
-      <dgm:prSet/>
-      <dgm:spPr/>
-      <dgm:t>
-        <a:bodyPr/>
-        <a:lstStyle/>
-        <a:p>
-          <a:endParaRPr lang="en-GB"/>
-        </a:p>
-      </dgm:t>
-    </dgm:pt>
-    <dgm:pt modelId="{2EDB9B3A-AA9B-4D90-88FB-3A672F339AE1}">
-      <dgm:prSet phldrT="[Text]"/>
-      <dgm:spPr/>
-      <dgm:t>
-        <a:bodyPr/>
-        <a:lstStyle/>
-        <a:p>
-          <a:r>
-            <a:rPr lang="en-GB" dirty="0"/>
-            <a:t>Custom Controls</a:t>
-          </a:r>
-        </a:p>
-      </dgm:t>
-    </dgm:pt>
-    <dgm:pt modelId="{B2803E1D-60D6-427B-BC04-690C9C3DB5AA}" type="parTrans" cxnId="{DA669289-09BF-4800-9627-B2F40F7ED6C9}">
-      <dgm:prSet/>
-      <dgm:spPr/>
-      <dgm:t>
-        <a:bodyPr/>
-        <a:lstStyle/>
-        <a:p>
-          <a:endParaRPr lang="en-US"/>
-        </a:p>
-      </dgm:t>
-    </dgm:pt>
-    <dgm:pt modelId="{9DC924BA-BB39-4EA0-86D6-724444D7A13A}" type="sibTrans" cxnId="{DA669289-09BF-4800-9627-B2F40F7ED6C9}">
-      <dgm:prSet/>
-      <dgm:spPr/>
-      <dgm:t>
-        <a:bodyPr/>
-        <a:lstStyle/>
-        <a:p>
-          <a:endParaRPr lang="en-US"/>
-        </a:p>
-      </dgm:t>
-    </dgm:pt>
-    <dgm:pt modelId="{C3DFF362-9823-4FFF-9963-FF6533E1173B}">
-      <dgm:prSet phldrT="[Text]"/>
-      <dgm:spPr/>
-      <dgm:t>
-        <a:bodyPr/>
-        <a:lstStyle/>
-        <a:p>
-          <a:r>
-            <a:rPr lang="en-GB" dirty="0"/>
-            <a:t>Sign</a:t>
-          </a:r>
-        </a:p>
-      </dgm:t>
-    </dgm:pt>
-    <dgm:pt modelId="{21C98E7F-87E6-4E0B-9A37-887F86362500}" type="parTrans" cxnId="{0D6CB03F-934F-4335-8713-B888873DAD25}">
-      <dgm:prSet/>
-      <dgm:spPr/>
-      <dgm:t>
-        <a:bodyPr/>
-        <a:lstStyle/>
-        <a:p>
-          <a:endParaRPr lang="en-US"/>
-        </a:p>
-      </dgm:t>
-    </dgm:pt>
-    <dgm:pt modelId="{0C377D5B-E05B-4D42-8B5F-595556B9CEEE}" type="sibTrans" cxnId="{0D6CB03F-934F-4335-8713-B888873DAD25}">
-      <dgm:prSet/>
-      <dgm:spPr/>
-      <dgm:t>
-        <a:bodyPr/>
-        <a:lstStyle/>
-        <a:p>
-          <a:endParaRPr lang="en-US"/>
-        </a:p>
-      </dgm:t>
-    </dgm:pt>
-    <dgm:pt modelId="{93F71054-EFD1-4B82-A06A-AAC7B279460D}">
-      <dgm:prSet phldrT="[Text]"/>
-      <dgm:spPr/>
-      <dgm:t>
-        <a:bodyPr/>
-        <a:lstStyle/>
-        <a:p>
-          <a:r>
-            <a:rPr lang="en-GB" dirty="0"/>
-            <a:t>Reference Data</a:t>
-          </a:r>
-        </a:p>
-      </dgm:t>
-    </dgm:pt>
-    <dgm:pt modelId="{C21E914D-58E9-423E-B074-C72C1D7D2318}" type="parTrans" cxnId="{34D78FA0-3425-459E-852E-62380C90BB7E}">
-      <dgm:prSet/>
-      <dgm:spPr/>
-      <dgm:t>
-        <a:bodyPr/>
-        <a:lstStyle/>
-        <a:p>
-          <a:endParaRPr lang="en-US"/>
-        </a:p>
-      </dgm:t>
-    </dgm:pt>
-    <dgm:pt modelId="{3D0FC75D-9BC9-4719-83A0-1EC64A5F672C}" type="sibTrans" cxnId="{34D78FA0-3425-459E-852E-62380C90BB7E}">
-      <dgm:prSet/>
-      <dgm:spPr/>
-      <dgm:t>
-        <a:bodyPr/>
-        <a:lstStyle/>
-        <a:p>
-          <a:endParaRPr lang="en-US"/>
-        </a:p>
-      </dgm:t>
-    </dgm:pt>
-    <dgm:pt modelId="{06EDCDD7-C657-445C-A5EE-5ADA70880A51}">
-      <dgm:prSet phldrT="[Text]"/>
-      <dgm:spPr/>
-      <dgm:t>
-        <a:bodyPr/>
-        <a:lstStyle/>
-        <a:p>
-          <a:r>
-            <a:rPr lang="en-GB" dirty="0"/>
-            <a:t>Version</a:t>
-          </a:r>
-        </a:p>
-      </dgm:t>
-    </dgm:pt>
-    <dgm:pt modelId="{2F22CB52-64C1-4D51-8DBF-BB08DC5E7D96}" type="parTrans" cxnId="{812F40B7-B685-4E4A-911B-6B8AFBF6A891}">
-      <dgm:prSet/>
-      <dgm:spPr/>
-      <dgm:t>
-        <a:bodyPr/>
-        <a:lstStyle/>
-        <a:p>
-          <a:endParaRPr lang="en-US"/>
-        </a:p>
-      </dgm:t>
-    </dgm:pt>
-    <dgm:pt modelId="{19DA4C63-CEEA-4E59-B744-6AAC6087568C}" type="sibTrans" cxnId="{812F40B7-B685-4E4A-911B-6B8AFBF6A891}">
-      <dgm:prSet/>
-      <dgm:spPr/>
-      <dgm:t>
-        <a:bodyPr/>
-        <a:lstStyle/>
-        <a:p>
-          <a:endParaRPr lang="en-US"/>
-        </a:p>
-      </dgm:t>
-    </dgm:pt>
-    <dgm:pt modelId="{D2804D6F-8D6A-4F26-B3AA-40B5BCF75FB4}" type="pres">
-      <dgm:prSet presAssocID="{DE1A03B6-942F-4AC6-80BB-76731E8D619A}" presName="linearFlow" presStyleCnt="0">
-        <dgm:presLayoutVars>
-          <dgm:dir/>
-          <dgm:animLvl val="lvl"/>
-          <dgm:resizeHandles val="exact"/>
-        </dgm:presLayoutVars>
-      </dgm:prSet>
-      <dgm:spPr/>
-    </dgm:pt>
-    <dgm:pt modelId="{CDF2C51C-7D96-4615-8EE5-902DE3D5F59A}" type="pres">
-      <dgm:prSet presAssocID="{3C2AB5AB-129C-45E8-AB3F-B2E063D5FFA7}" presName="composite" presStyleCnt="0"/>
-      <dgm:spPr/>
-    </dgm:pt>
-    <dgm:pt modelId="{3B5AE309-7480-4D63-828A-A02F268BBCA1}" type="pres">
-      <dgm:prSet presAssocID="{3C2AB5AB-129C-45E8-AB3F-B2E063D5FFA7}" presName="parTx" presStyleLbl="node1" presStyleIdx="0" presStyleCnt="3">
-        <dgm:presLayoutVars>
-          <dgm:chMax val="0"/>
-          <dgm:chPref val="0"/>
-          <dgm:bulletEnabled val="1"/>
-        </dgm:presLayoutVars>
-      </dgm:prSet>
-      <dgm:spPr/>
-    </dgm:pt>
-    <dgm:pt modelId="{5E24D3A6-8425-4985-9887-3007A5739949}" type="pres">
-      <dgm:prSet presAssocID="{3C2AB5AB-129C-45E8-AB3F-B2E063D5FFA7}" presName="parSh" presStyleLbl="node1" presStyleIdx="0" presStyleCnt="3"/>
-      <dgm:spPr/>
-    </dgm:pt>
-    <dgm:pt modelId="{10C42DA6-E5EC-432C-9EE3-A0B3DBD402BC}" type="pres">
-      <dgm:prSet presAssocID="{3C2AB5AB-129C-45E8-AB3F-B2E063D5FFA7}" presName="desTx" presStyleLbl="fgAcc1" presStyleIdx="0" presStyleCnt="3">
-        <dgm:presLayoutVars>
-          <dgm:bulletEnabled val="1"/>
-        </dgm:presLayoutVars>
-      </dgm:prSet>
-      <dgm:spPr/>
-    </dgm:pt>
-    <dgm:pt modelId="{5E6ADCBE-372D-4BA9-A979-5A31ECDCDC40}" type="pres">
-      <dgm:prSet presAssocID="{488BDB2D-2A42-4C8C-A46D-EDEEE03EAD4B}" presName="sibTrans" presStyleLbl="sibTrans2D1" presStyleIdx="0" presStyleCnt="2"/>
-      <dgm:spPr/>
-    </dgm:pt>
-    <dgm:pt modelId="{183961AC-A0B8-430D-A843-DDA4C608F438}" type="pres">
-      <dgm:prSet presAssocID="{488BDB2D-2A42-4C8C-A46D-EDEEE03EAD4B}" presName="connTx" presStyleLbl="sibTrans2D1" presStyleIdx="0" presStyleCnt="2"/>
-      <dgm:spPr/>
-    </dgm:pt>
-    <dgm:pt modelId="{2E8942A8-400E-4554-B31F-AB508087AFC9}" type="pres">
-      <dgm:prSet presAssocID="{729818DC-1341-4A35-8637-D3A777AC3E87}" presName="composite" presStyleCnt="0"/>
-      <dgm:spPr/>
-    </dgm:pt>
-    <dgm:pt modelId="{32173E52-1296-4551-B90B-3F07AE8E0306}" type="pres">
-      <dgm:prSet presAssocID="{729818DC-1341-4A35-8637-D3A777AC3E87}" presName="parTx" presStyleLbl="node1" presStyleIdx="0" presStyleCnt="3">
-        <dgm:presLayoutVars>
-          <dgm:chMax val="0"/>
-          <dgm:chPref val="0"/>
-          <dgm:bulletEnabled val="1"/>
-        </dgm:presLayoutVars>
-      </dgm:prSet>
-      <dgm:spPr/>
-    </dgm:pt>
-    <dgm:pt modelId="{E53EF5A2-9B51-4860-94D7-DCC04E9C7EA3}" type="pres">
-      <dgm:prSet presAssocID="{729818DC-1341-4A35-8637-D3A777AC3E87}" presName="parSh" presStyleLbl="node1" presStyleIdx="1" presStyleCnt="3"/>
-      <dgm:spPr/>
-    </dgm:pt>
-    <dgm:pt modelId="{21E181B6-3FD8-4DAC-8298-5C17B4D5C3CD}" type="pres">
-      <dgm:prSet presAssocID="{729818DC-1341-4A35-8637-D3A777AC3E87}" presName="desTx" presStyleLbl="fgAcc1" presStyleIdx="1" presStyleCnt="3">
-        <dgm:presLayoutVars>
-          <dgm:bulletEnabled val="1"/>
-        </dgm:presLayoutVars>
-      </dgm:prSet>
-      <dgm:spPr/>
-    </dgm:pt>
-    <dgm:pt modelId="{97B330FB-580F-44AC-B8D7-C75FE33FD7C0}" type="pres">
-      <dgm:prSet presAssocID="{64A19925-D214-4FAB-B3C9-2F981DA2DA0B}" presName="sibTrans" presStyleLbl="sibTrans2D1" presStyleIdx="1" presStyleCnt="2"/>
-      <dgm:spPr/>
-    </dgm:pt>
-    <dgm:pt modelId="{47128B4D-493E-4820-9C21-A0EBC656A3CC}" type="pres">
-      <dgm:prSet presAssocID="{64A19925-D214-4FAB-B3C9-2F981DA2DA0B}" presName="connTx" presStyleLbl="sibTrans2D1" presStyleIdx="1" presStyleCnt="2"/>
-      <dgm:spPr/>
-    </dgm:pt>
-    <dgm:pt modelId="{F7D49382-3373-415B-873D-27A00D15CB86}" type="pres">
-      <dgm:prSet presAssocID="{2A79F2AC-5078-4040-B225-0D20377FE91A}" presName="composite" presStyleCnt="0"/>
-      <dgm:spPr/>
-    </dgm:pt>
-    <dgm:pt modelId="{ADD5CEE7-27C8-42DA-8252-6E15D178100A}" type="pres">
-      <dgm:prSet presAssocID="{2A79F2AC-5078-4040-B225-0D20377FE91A}" presName="parTx" presStyleLbl="node1" presStyleIdx="1" presStyleCnt="3">
-        <dgm:presLayoutVars>
-          <dgm:chMax val="0"/>
-          <dgm:chPref val="0"/>
-          <dgm:bulletEnabled val="1"/>
-        </dgm:presLayoutVars>
-      </dgm:prSet>
-      <dgm:spPr/>
-    </dgm:pt>
-    <dgm:pt modelId="{47295986-DACE-425A-84B0-E664787F38E3}" type="pres">
-      <dgm:prSet presAssocID="{2A79F2AC-5078-4040-B225-0D20377FE91A}" presName="parSh" presStyleLbl="node1" presStyleIdx="2" presStyleCnt="3"/>
-      <dgm:spPr/>
-    </dgm:pt>
-    <dgm:pt modelId="{3E1AEA04-6E5B-48C8-A007-B09A7ACB56D7}" type="pres">
-      <dgm:prSet presAssocID="{2A79F2AC-5078-4040-B225-0D20377FE91A}" presName="desTx" presStyleLbl="fgAcc1" presStyleIdx="2" presStyleCnt="3">
-        <dgm:presLayoutVars>
-          <dgm:bulletEnabled val="1"/>
-        </dgm:presLayoutVars>
-      </dgm:prSet>
-      <dgm:spPr/>
-    </dgm:pt>
-  </dgm:ptLst>
-  <dgm:cxnLst>
-    <dgm:cxn modelId="{CAEEAD02-AF35-4182-AE2C-0503D0A94FAF}" type="presOf" srcId="{488BDB2D-2A42-4C8C-A46D-EDEEE03EAD4B}" destId="{5E6ADCBE-372D-4BA9-A979-5A31ECDCDC40}" srcOrd="0" destOrd="0" presId="urn:microsoft.com/office/officeart/2005/8/layout/process3"/>
-    <dgm:cxn modelId="{78CAF808-4CB5-49EC-9E1E-D333AE2D45C2}" srcId="{729818DC-1341-4A35-8637-D3A777AC3E87}" destId="{73FCEED4-9361-4AE9-B8D4-1DA0A76B4689}" srcOrd="3" destOrd="0" parTransId="{AA4AB530-F5E6-4655-9280-24C4FD0D71CE}" sibTransId="{1FF7A295-DCEB-42EC-9A73-1CA1DE651E38}"/>
-    <dgm:cxn modelId="{27839E0A-22C1-4626-BC18-605028B5B3C1}" srcId="{DE1A03B6-942F-4AC6-80BB-76731E8D619A}" destId="{729818DC-1341-4A35-8637-D3A777AC3E87}" srcOrd="1" destOrd="0" parTransId="{B834ECB9-49A9-4BF9-A956-DD685C81D9BE}" sibTransId="{64A19925-D214-4FAB-B3C9-2F981DA2DA0B}"/>
-    <dgm:cxn modelId="{24D4C815-221F-431F-B161-FAE9D41C7996}" srcId="{2A79F2AC-5078-4040-B225-0D20377FE91A}" destId="{126AF485-0AC1-405C-9F7E-CC6D5C3CE58F}" srcOrd="2" destOrd="0" parTransId="{9520D2CB-E00D-4193-B142-E3AB6C6E615D}" sibTransId="{CE01D0A9-B9A3-4AD5-8167-1990E75012EE}"/>
-    <dgm:cxn modelId="{1DDACF32-CD26-4C4F-BB5F-F116579191F5}" type="presOf" srcId="{99FB9980-8AE1-41F4-A26B-469AD6F82C5B}" destId="{21E181B6-3FD8-4DAC-8298-5C17B4D5C3CD}" srcOrd="0" destOrd="6" presId="urn:microsoft.com/office/officeart/2005/8/layout/process3"/>
-    <dgm:cxn modelId="{B9C71534-3795-4F15-BF9E-441E1E2CDE0B}" srcId="{DE1A03B6-942F-4AC6-80BB-76731E8D619A}" destId="{3C2AB5AB-129C-45E8-AB3F-B2E063D5FFA7}" srcOrd="0" destOrd="0" parTransId="{5F20E94D-C07C-47E6-B04A-399C6C7EB5FC}" sibTransId="{488BDB2D-2A42-4C8C-A46D-EDEEE03EAD4B}"/>
-    <dgm:cxn modelId="{0D6CB03F-934F-4335-8713-B888873DAD25}" srcId="{729818DC-1341-4A35-8637-D3A777AC3E87}" destId="{C3DFF362-9823-4FFF-9963-FF6533E1173B}" srcOrd="2" destOrd="0" parTransId="{21C98E7F-87E6-4E0B-9A37-887F86362500}" sibTransId="{0C377D5B-E05B-4D42-8B5F-595556B9CEEE}"/>
-    <dgm:cxn modelId="{D842B45D-3E7F-4579-9E87-8EC64461D371}" type="presOf" srcId="{73FCEED4-9361-4AE9-B8D4-1DA0A76B4689}" destId="{21E181B6-3FD8-4DAC-8298-5C17B4D5C3CD}" srcOrd="0" destOrd="3" presId="urn:microsoft.com/office/officeart/2005/8/layout/process3"/>
-    <dgm:cxn modelId="{1BE1235F-3D16-4184-A95D-8C0B818841CC}" type="presOf" srcId="{A35A2B80-F5F7-404F-BA73-398735E4BA2C}" destId="{10C42DA6-E5EC-432C-9EE3-A0B3DBD402BC}" srcOrd="0" destOrd="0" presId="urn:microsoft.com/office/officeart/2005/8/layout/process3"/>
-    <dgm:cxn modelId="{23042D61-8DBF-483D-B2C3-6A2F5A3C1B0D}" type="presOf" srcId="{C3DFF362-9823-4FFF-9963-FF6533E1173B}" destId="{21E181B6-3FD8-4DAC-8298-5C17B4D5C3CD}" srcOrd="0" destOrd="2" presId="urn:microsoft.com/office/officeart/2005/8/layout/process3"/>
-    <dgm:cxn modelId="{0983D168-D537-4A68-99AB-2355EE78EC1C}" srcId="{729818DC-1341-4A35-8637-D3A777AC3E87}" destId="{25F435A0-D841-4340-A1F1-5D649A8EFC27}" srcOrd="1" destOrd="0" parTransId="{B94FF2C4-5331-4735-8397-6B2B38B0E05E}" sibTransId="{F5D21AF6-8057-418C-B3F5-EE9ABC685516}"/>
-    <dgm:cxn modelId="{AA8CB84C-A7F7-4081-BDD4-F0FC8C16030A}" type="presOf" srcId="{06EDCDD7-C657-445C-A5EE-5ADA70880A51}" destId="{21E181B6-3FD8-4DAC-8298-5C17B4D5C3CD}" srcOrd="0" destOrd="4" presId="urn:microsoft.com/office/officeart/2005/8/layout/process3"/>
-    <dgm:cxn modelId="{5D57734F-6B44-4C66-9B09-E946874752F0}" type="presOf" srcId="{25F435A0-D841-4340-A1F1-5D649A8EFC27}" destId="{21E181B6-3FD8-4DAC-8298-5C17B4D5C3CD}" srcOrd="0" destOrd="1" presId="urn:microsoft.com/office/officeart/2005/8/layout/process3"/>
-    <dgm:cxn modelId="{CC1ACB83-4A04-410C-968B-4609C49E84D1}" type="presOf" srcId="{906A08C9-DD99-4AFF-AA20-AEFAF7A62956}" destId="{3E1AEA04-6E5B-48C8-A007-B09A7ACB56D7}" srcOrd="0" destOrd="3" presId="urn:microsoft.com/office/officeart/2005/8/layout/process3"/>
-    <dgm:cxn modelId="{0D89F886-CAE4-4AAA-83D4-EF0338E0EAE3}" type="presOf" srcId="{2EDB9B3A-AA9B-4D90-88FB-3A672F339AE1}" destId="{10C42DA6-E5EC-432C-9EE3-A0B3DBD402BC}" srcOrd="0" destOrd="3" presId="urn:microsoft.com/office/officeart/2005/8/layout/process3"/>
-    <dgm:cxn modelId="{2D564288-4284-45CE-8232-151068B56710}" type="presOf" srcId="{10CD0FB0-F964-47FE-8107-58FB77282F88}" destId="{3E1AEA04-6E5B-48C8-A007-B09A7ACB56D7}" srcOrd="0" destOrd="1" presId="urn:microsoft.com/office/officeart/2005/8/layout/process3"/>
-    <dgm:cxn modelId="{DA669289-09BF-4800-9627-B2F40F7ED6C9}" srcId="{3C2AB5AB-129C-45E8-AB3F-B2E063D5FFA7}" destId="{2EDB9B3A-AA9B-4D90-88FB-3A672F339AE1}" srcOrd="3" destOrd="0" parTransId="{B2803E1D-60D6-427B-BC04-690C9C3DB5AA}" sibTransId="{9DC924BA-BB39-4EA0-86D6-724444D7A13A}"/>
-    <dgm:cxn modelId="{0AAD318A-2703-4D23-9E7C-EA4385EC226D}" srcId="{3C2AB5AB-129C-45E8-AB3F-B2E063D5FFA7}" destId="{85A192D5-4BBB-4C3A-95B2-16030C638DC5}" srcOrd="2" destOrd="0" parTransId="{4B3EA7E9-6CDA-436B-B17C-7EBF0FF7F819}" sibTransId="{CC7108DD-A893-4298-9019-034C944AD5B7}"/>
-    <dgm:cxn modelId="{F32F778A-8821-4133-AE8B-6AC6C1CA3B31}" type="presOf" srcId="{2A79F2AC-5078-4040-B225-0D20377FE91A}" destId="{ADD5CEE7-27C8-42DA-8252-6E15D178100A}" srcOrd="0" destOrd="0" presId="urn:microsoft.com/office/officeart/2005/8/layout/process3"/>
-    <dgm:cxn modelId="{FE82DD8E-744B-4533-ABCE-16B6675508B4}" type="presOf" srcId="{729818DC-1341-4A35-8637-D3A777AC3E87}" destId="{E53EF5A2-9B51-4860-94D7-DCC04E9C7EA3}" srcOrd="1" destOrd="0" presId="urn:microsoft.com/office/officeart/2005/8/layout/process3"/>
-    <dgm:cxn modelId="{B9F4498F-5302-49C5-8D1E-04DA80C27D8B}" srcId="{DE1A03B6-942F-4AC6-80BB-76731E8D619A}" destId="{2A79F2AC-5078-4040-B225-0D20377FE91A}" srcOrd="2" destOrd="0" parTransId="{25BF6886-A072-4D60-9A1A-8C9333F04790}" sibTransId="{47AE645E-3A8A-4EE9-9878-F13939902DBA}"/>
-    <dgm:cxn modelId="{CACCFB8F-DA04-44F4-A781-682E470F71B6}" type="presOf" srcId="{64A19925-D214-4FAB-B3C9-2F981DA2DA0B}" destId="{47128B4D-493E-4820-9C21-A0EBC656A3CC}" srcOrd="1" destOrd="0" presId="urn:microsoft.com/office/officeart/2005/8/layout/process3"/>
-    <dgm:cxn modelId="{7F11B496-6B5A-496F-B082-82B849EED1E7}" type="presOf" srcId="{729818DC-1341-4A35-8637-D3A777AC3E87}" destId="{32173E52-1296-4551-B90B-3F07AE8E0306}" srcOrd="0" destOrd="0" presId="urn:microsoft.com/office/officeart/2005/8/layout/process3"/>
-    <dgm:cxn modelId="{7B0EB799-377F-4850-B15E-B48912C026A5}" srcId="{729818DC-1341-4A35-8637-D3A777AC3E87}" destId="{C9F96109-F746-41B8-A9C4-8F1EDFE06825}" srcOrd="5" destOrd="0" parTransId="{9AF33ED7-D8C0-40F1-877B-46C77AFE1015}" sibTransId="{E94264A1-D90E-4035-8064-CCDFF5D4F94C}"/>
-    <dgm:cxn modelId="{FE297C9B-131E-4E5A-A7C4-9D5089A116DB}" srcId="{3C2AB5AB-129C-45E8-AB3F-B2E063D5FFA7}" destId="{7A8A64D0-750F-45B9-9EAD-210617E9E2B5}" srcOrd="1" destOrd="0" parTransId="{325F4CB3-B2BD-4AAA-A151-6672A4491B27}" sibTransId="{9E1E91B5-B5B5-4A7F-9F3A-657E5D507C3F}"/>
-    <dgm:cxn modelId="{D21D749E-11B8-4294-AD48-2BB608FD642E}" type="presOf" srcId="{93F71054-EFD1-4B82-A06A-AAC7B279460D}" destId="{10C42DA6-E5EC-432C-9EE3-A0B3DBD402BC}" srcOrd="0" destOrd="4" presId="urn:microsoft.com/office/officeart/2005/8/layout/process3"/>
-    <dgm:cxn modelId="{FD2555A0-BC6F-4062-8B1D-DC3432ACA439}" type="presOf" srcId="{3C2AB5AB-129C-45E8-AB3F-B2E063D5FFA7}" destId="{5E24D3A6-8425-4985-9887-3007A5739949}" srcOrd="1" destOrd="0" presId="urn:microsoft.com/office/officeart/2005/8/layout/process3"/>
-    <dgm:cxn modelId="{34D78FA0-3425-459E-852E-62380C90BB7E}" srcId="{3C2AB5AB-129C-45E8-AB3F-B2E063D5FFA7}" destId="{93F71054-EFD1-4B82-A06A-AAC7B279460D}" srcOrd="4" destOrd="0" parTransId="{C21E914D-58E9-423E-B074-C72C1D7D2318}" sibTransId="{3D0FC75D-9BC9-4719-83A0-1EC64A5F672C}"/>
-    <dgm:cxn modelId="{8C036EA7-174E-45BD-ABF1-FFFE4BFCC187}" type="presOf" srcId="{488BDB2D-2A42-4C8C-A46D-EDEEE03EAD4B}" destId="{183961AC-A0B8-430D-A843-DDA4C608F438}" srcOrd="1" destOrd="0" presId="urn:microsoft.com/office/officeart/2005/8/layout/process3"/>
-    <dgm:cxn modelId="{DAF8DEAC-0727-4169-8648-A77D599AFDE8}" type="presOf" srcId="{3C2AB5AB-129C-45E8-AB3F-B2E063D5FFA7}" destId="{3B5AE309-7480-4D63-828A-A02F268BBCA1}" srcOrd="0" destOrd="0" presId="urn:microsoft.com/office/officeart/2005/8/layout/process3"/>
-    <dgm:cxn modelId="{CF10E7AE-A657-413A-B730-F7B95F97EAE6}" type="presOf" srcId="{2A79F2AC-5078-4040-B225-0D20377FE91A}" destId="{47295986-DACE-425A-84B0-E664787F38E3}" srcOrd="1" destOrd="0" presId="urn:microsoft.com/office/officeart/2005/8/layout/process3"/>
-    <dgm:cxn modelId="{812F40B7-B685-4E4A-911B-6B8AFBF6A891}" srcId="{729818DC-1341-4A35-8637-D3A777AC3E87}" destId="{06EDCDD7-C657-445C-A5EE-5ADA70880A51}" srcOrd="4" destOrd="0" parTransId="{2F22CB52-64C1-4D51-8DBF-BB08DC5E7D96}" sibTransId="{19DA4C63-CEEA-4E59-B744-6AAC6087568C}"/>
-    <dgm:cxn modelId="{EC7A20BF-1A93-40D3-A099-98234F66C028}" type="presOf" srcId="{DE1A03B6-942F-4AC6-80BB-76731E8D619A}" destId="{D2804D6F-8D6A-4F26-B3AA-40B5BCF75FB4}" srcOrd="0" destOrd="0" presId="urn:microsoft.com/office/officeart/2005/8/layout/process3"/>
-    <dgm:cxn modelId="{CC92E9C4-B50B-4DC6-B165-3DF8E37510A5}" srcId="{729818DC-1341-4A35-8637-D3A777AC3E87}" destId="{146CE24C-1C65-4A16-A600-DE980C859DD9}" srcOrd="0" destOrd="0" parTransId="{20CEFF71-889E-4703-9EBA-465A239D2749}" sibTransId="{3F143513-E1A2-44F9-8D40-991EF5BD685F}"/>
-    <dgm:cxn modelId="{5B579AC6-4A02-49E3-AC97-F6BFF7EB3704}" srcId="{2A79F2AC-5078-4040-B225-0D20377FE91A}" destId="{10CD0FB0-F964-47FE-8107-58FB77282F88}" srcOrd="1" destOrd="0" parTransId="{81BB4A6B-C9F5-4AD8-8502-5F7CCF378D1E}" sibTransId="{0A905215-4212-4FEA-887E-4A28CD91897C}"/>
-    <dgm:cxn modelId="{477487D0-32B6-4E98-AA72-D70598336074}" type="presOf" srcId="{7A8A64D0-750F-45B9-9EAD-210617E9E2B5}" destId="{10C42DA6-E5EC-432C-9EE3-A0B3DBD402BC}" srcOrd="0" destOrd="1" presId="urn:microsoft.com/office/officeart/2005/8/layout/process3"/>
-    <dgm:cxn modelId="{07826DD5-B451-41E8-BD97-C2B924B491F3}" type="presOf" srcId="{64A19925-D214-4FAB-B3C9-2F981DA2DA0B}" destId="{97B330FB-580F-44AC-B8D7-C75FE33FD7C0}" srcOrd="0" destOrd="0" presId="urn:microsoft.com/office/officeart/2005/8/layout/process3"/>
-    <dgm:cxn modelId="{56E7E4D7-96C1-4423-A771-E2CE13A2488E}" srcId="{2A79F2AC-5078-4040-B225-0D20377FE91A}" destId="{DFEB15FD-2194-47F0-8809-6ABBBB6D7A7E}" srcOrd="0" destOrd="0" parTransId="{5F2184DE-FF37-421D-B6A2-36E5D588C4E1}" sibTransId="{02E15070-D612-4335-9F73-FE8D6BAB765B}"/>
-    <dgm:cxn modelId="{482C92D8-0C14-4129-8A19-4E2E07C2B7AF}" type="presOf" srcId="{DFEB15FD-2194-47F0-8809-6ABBBB6D7A7E}" destId="{3E1AEA04-6E5B-48C8-A007-B09A7ACB56D7}" srcOrd="0" destOrd="0" presId="urn:microsoft.com/office/officeart/2005/8/layout/process3"/>
-    <dgm:cxn modelId="{6F9E66E1-7BBF-4C02-B8D5-0341BBEF30AA}" type="presOf" srcId="{146CE24C-1C65-4A16-A600-DE980C859DD9}" destId="{21E181B6-3FD8-4DAC-8298-5C17B4D5C3CD}" srcOrd="0" destOrd="0" presId="urn:microsoft.com/office/officeart/2005/8/layout/process3"/>
-    <dgm:cxn modelId="{D36111E3-8E7F-4DEF-BF3C-F359A376CCE7}" srcId="{729818DC-1341-4A35-8637-D3A777AC3E87}" destId="{99FB9980-8AE1-41F4-A26B-469AD6F82C5B}" srcOrd="6" destOrd="0" parTransId="{298E8F3A-5B4A-40DD-99F7-3DE2C859743F}" sibTransId="{07E2469C-AC1D-4C73-BB97-AC2BEB15C1E1}"/>
-    <dgm:cxn modelId="{C339D9E7-8686-4CD1-846C-1DA900E9D900}" type="presOf" srcId="{85A192D5-4BBB-4C3A-95B2-16030C638DC5}" destId="{10C42DA6-E5EC-432C-9EE3-A0B3DBD402BC}" srcOrd="0" destOrd="2" presId="urn:microsoft.com/office/officeart/2005/8/layout/process3"/>
-    <dgm:cxn modelId="{743BBBEA-7B36-4865-BD51-337F95FD4352}" type="presOf" srcId="{126AF485-0AC1-405C-9F7E-CC6D5C3CE58F}" destId="{3E1AEA04-6E5B-48C8-A007-B09A7ACB56D7}" srcOrd="0" destOrd="2" presId="urn:microsoft.com/office/officeart/2005/8/layout/process3"/>
-    <dgm:cxn modelId="{C80CA2F9-EF80-43C5-85CB-DFB5B9DBFA41}" srcId="{3C2AB5AB-129C-45E8-AB3F-B2E063D5FFA7}" destId="{A35A2B80-F5F7-404F-BA73-398735E4BA2C}" srcOrd="0" destOrd="0" parTransId="{51C69587-6425-41F8-AB94-FABEB78B19AC}" sibTransId="{6842B20C-0753-4B38-B4D1-568764A2E096}"/>
-    <dgm:cxn modelId="{905ECDFD-0151-4CA3-BF3C-58469A28399C}" srcId="{2A79F2AC-5078-4040-B225-0D20377FE91A}" destId="{906A08C9-DD99-4AFF-AA20-AEFAF7A62956}" srcOrd="3" destOrd="0" parTransId="{8966DBCE-2EFB-4C60-8C18-97620A549E6B}" sibTransId="{F15B2A55-1E80-4377-8982-F0B43115915F}"/>
-    <dgm:cxn modelId="{D333FBFD-0AD3-48E9-9FDB-6EECB10A7612}" type="presOf" srcId="{C9F96109-F746-41B8-A9C4-8F1EDFE06825}" destId="{21E181B6-3FD8-4DAC-8298-5C17B4D5C3CD}" srcOrd="0" destOrd="5" presId="urn:microsoft.com/office/officeart/2005/8/layout/process3"/>
-    <dgm:cxn modelId="{E08F2E52-F1A1-407C-AAB0-5D5BF741037C}" type="presParOf" srcId="{D2804D6F-8D6A-4F26-B3AA-40B5BCF75FB4}" destId="{CDF2C51C-7D96-4615-8EE5-902DE3D5F59A}" srcOrd="0" destOrd="0" presId="urn:microsoft.com/office/officeart/2005/8/layout/process3"/>
-    <dgm:cxn modelId="{BC2171FB-56C8-474D-8773-5FDBEFA9F66B}" type="presParOf" srcId="{CDF2C51C-7D96-4615-8EE5-902DE3D5F59A}" destId="{3B5AE309-7480-4D63-828A-A02F268BBCA1}" srcOrd="0" destOrd="0" presId="urn:microsoft.com/office/officeart/2005/8/layout/process3"/>
-    <dgm:cxn modelId="{262072C3-6C43-4D9B-AC9D-EB058AE75BA2}" type="presParOf" srcId="{CDF2C51C-7D96-4615-8EE5-902DE3D5F59A}" destId="{5E24D3A6-8425-4985-9887-3007A5739949}" srcOrd="1" destOrd="0" presId="urn:microsoft.com/office/officeart/2005/8/layout/process3"/>
-    <dgm:cxn modelId="{1E265812-5AA9-436B-9217-BB968D907EE7}" type="presParOf" srcId="{CDF2C51C-7D96-4615-8EE5-902DE3D5F59A}" destId="{10C42DA6-E5EC-432C-9EE3-A0B3DBD402BC}" srcOrd="2" destOrd="0" presId="urn:microsoft.com/office/officeart/2005/8/layout/process3"/>
-    <dgm:cxn modelId="{D6463AB7-0A4C-4D5E-A4FD-AC149B2815E7}" type="presParOf" srcId="{D2804D6F-8D6A-4F26-B3AA-40B5BCF75FB4}" destId="{5E6ADCBE-372D-4BA9-A979-5A31ECDCDC40}" srcOrd="1" destOrd="0" presId="urn:microsoft.com/office/officeart/2005/8/layout/process3"/>
-    <dgm:cxn modelId="{7FC85009-C270-4771-B67A-5342028019F9}" type="presParOf" srcId="{5E6ADCBE-372D-4BA9-A979-5A31ECDCDC40}" destId="{183961AC-A0B8-430D-A843-DDA4C608F438}" srcOrd="0" destOrd="0" presId="urn:microsoft.com/office/officeart/2005/8/layout/process3"/>
-    <dgm:cxn modelId="{E65040F3-D113-431E-BDBF-8F9ECA109CFC}" type="presParOf" srcId="{D2804D6F-8D6A-4F26-B3AA-40B5BCF75FB4}" destId="{2E8942A8-400E-4554-B31F-AB508087AFC9}" srcOrd="2" destOrd="0" presId="urn:microsoft.com/office/officeart/2005/8/layout/process3"/>
-    <dgm:cxn modelId="{FCABCCF1-B9F4-4433-99FD-7E803CE13A80}" type="presParOf" srcId="{2E8942A8-400E-4554-B31F-AB508087AFC9}" destId="{32173E52-1296-4551-B90B-3F07AE8E0306}" srcOrd="0" destOrd="0" presId="urn:microsoft.com/office/officeart/2005/8/layout/process3"/>
-    <dgm:cxn modelId="{EA53D431-4E70-4D47-AD5B-D7F261403F71}" type="presParOf" srcId="{2E8942A8-400E-4554-B31F-AB508087AFC9}" destId="{E53EF5A2-9B51-4860-94D7-DCC04E9C7EA3}" srcOrd="1" destOrd="0" presId="urn:microsoft.com/office/officeart/2005/8/layout/process3"/>
-    <dgm:cxn modelId="{EAE042A2-4DAD-4F65-AF2A-6FA5C3773156}" type="presParOf" srcId="{2E8942A8-400E-4554-B31F-AB508087AFC9}" destId="{21E181B6-3FD8-4DAC-8298-5C17B4D5C3CD}" srcOrd="2" destOrd="0" presId="urn:microsoft.com/office/officeart/2005/8/layout/process3"/>
-    <dgm:cxn modelId="{54191651-9714-446A-89D3-60A5F582677F}" type="presParOf" srcId="{D2804D6F-8D6A-4F26-B3AA-40B5BCF75FB4}" destId="{97B330FB-580F-44AC-B8D7-C75FE33FD7C0}" srcOrd="3" destOrd="0" presId="urn:microsoft.com/office/officeart/2005/8/layout/process3"/>
-    <dgm:cxn modelId="{21801C49-8F8D-4CCD-8ACE-AF85CD21604E}" type="presParOf" srcId="{97B330FB-580F-44AC-B8D7-C75FE33FD7C0}" destId="{47128B4D-493E-4820-9C21-A0EBC656A3CC}" srcOrd="0" destOrd="0" presId="urn:microsoft.com/office/officeart/2005/8/layout/process3"/>
-    <dgm:cxn modelId="{6B15ACAB-8573-40FD-800D-5EE5DD6E0521}" type="presParOf" srcId="{D2804D6F-8D6A-4F26-B3AA-40B5BCF75FB4}" destId="{F7D49382-3373-415B-873D-27A00D15CB86}" srcOrd="4" destOrd="0" presId="urn:microsoft.com/office/officeart/2005/8/layout/process3"/>
-    <dgm:cxn modelId="{7B6F17E2-F405-4387-BE3B-B95F6A1F15BA}" type="presParOf" srcId="{F7D49382-3373-415B-873D-27A00D15CB86}" destId="{ADD5CEE7-27C8-42DA-8252-6E15D178100A}" srcOrd="0" destOrd="0" presId="urn:microsoft.com/office/officeart/2005/8/layout/process3"/>
-    <dgm:cxn modelId="{E582F458-F458-444D-8C3A-74C2C4231B16}" type="presParOf" srcId="{F7D49382-3373-415B-873D-27A00D15CB86}" destId="{47295986-DACE-425A-84B0-E664787F38E3}" srcOrd="1" destOrd="0" presId="urn:microsoft.com/office/officeart/2005/8/layout/process3"/>
-    <dgm:cxn modelId="{5D47F96F-B08B-47CA-BB42-B960219A0158}" type="presParOf" srcId="{F7D49382-3373-415B-873D-27A00D15CB86}" destId="{3E1AEA04-6E5B-48C8-A007-B09A7ACB56D7}" srcOrd="2" destOrd="0" presId="urn:microsoft.com/office/officeart/2005/8/layout/process3"/>
-  </dgm:cxnLst>
-  <dgm:bg/>
-  <dgm:whole/>
-  <dgm:extLst>
-    <a:ext uri="http://schemas.microsoft.com/office/drawing/2008/diagram">
-      <dsp:dataModelExt xmlns:dsp="http://schemas.microsoft.com/office/drawing/2008/diagram" relId="rId7" minVer="http://schemas.openxmlformats.org/drawingml/2006/diagram"/>
-    </a:ext>
-  </dgm:extLst>
-</dgm:dataModel>
-</file>
-
-<file path=ppt/diagrams/data3.xml><?xml version="1.0" encoding="utf-8"?>
-<dgm:dataModel xmlns:dgm="http://schemas.openxmlformats.org/drawingml/2006/diagram" xmlns:a="http://schemas.openxmlformats.org/drawingml/2006/main">
-  <dgm:ptLst>
-    <dgm:pt modelId="{DE1A03B6-942F-4AC6-80BB-76731E8D619A}" type="doc">
-      <dgm:prSet loTypeId="urn:microsoft.com/office/officeart/2005/8/layout/process3" loCatId="process" qsTypeId="urn:microsoft.com/office/officeart/2005/8/quickstyle/simple1" qsCatId="simple" csTypeId="urn:microsoft.com/office/officeart/2005/8/colors/accent1_2" csCatId="accent1" phldr="1"/>
-      <dgm:spPr/>
-      <dgm:t>
-        <a:bodyPr/>
-        <a:lstStyle/>
-        <a:p>
-          <a:endParaRPr lang="en-GB"/>
-        </a:p>
-      </dgm:t>
-    </dgm:pt>
-    <dgm:pt modelId="{3C2AB5AB-129C-45E8-AB3F-B2E063D5FFA7}">
-      <dgm:prSet phldrT="[Text]"/>
-      <dgm:spPr/>
-      <dgm:t>
-        <a:bodyPr/>
-        <a:lstStyle/>
-        <a:p>
-          <a:r>
-            <a:rPr lang="en-GB" dirty="0"/>
-            <a:t>Artifacts</a:t>
-          </a:r>
-        </a:p>
-      </dgm:t>
-    </dgm:pt>
-    <dgm:pt modelId="{5F20E94D-C07C-47E6-B04A-399C6C7EB5FC}" type="parTrans" cxnId="{B9C71534-3795-4F15-BF9E-441E1E2CDE0B}">
-      <dgm:prSet/>
-      <dgm:spPr/>
-      <dgm:t>
-        <a:bodyPr/>
-        <a:lstStyle/>
-        <a:p>
-          <a:endParaRPr lang="en-GB"/>
-        </a:p>
-      </dgm:t>
-    </dgm:pt>
-    <dgm:pt modelId="{488BDB2D-2A42-4C8C-A46D-EDEEE03EAD4B}" type="sibTrans" cxnId="{B9C71534-3795-4F15-BF9E-441E1E2CDE0B}">
-      <dgm:prSet/>
-      <dgm:spPr>
-        <a:solidFill>
-          <a:schemeClr val="tx2"/>
-        </a:solidFill>
-      </dgm:spPr>
-      <dgm:t>
-        <a:bodyPr/>
-        <a:lstStyle/>
-        <a:p>
-          <a:endParaRPr lang="en-GB"/>
-        </a:p>
-      </dgm:t>
-    </dgm:pt>
-    <dgm:pt modelId="{A35A2B80-F5F7-404F-BA73-398735E4BA2C}">
-      <dgm:prSet phldrT="[Text]"/>
-      <dgm:spPr/>
-      <dgm:t>
-        <a:bodyPr/>
-        <a:lstStyle/>
-        <a:p>
-          <a:r>
-            <a:rPr lang="en-GB" dirty="0"/>
-            <a:t>Solutions</a:t>
-          </a:r>
-        </a:p>
-      </dgm:t>
-    </dgm:pt>
-    <dgm:pt modelId="{51C69587-6425-41F8-AB94-FABEB78B19AC}" type="parTrans" cxnId="{C80CA2F9-EF80-43C5-85CB-DFB5B9DBFA41}">
-      <dgm:prSet/>
-      <dgm:spPr/>
-      <dgm:t>
-        <a:bodyPr/>
-        <a:lstStyle/>
-        <a:p>
-          <a:endParaRPr lang="en-GB"/>
-        </a:p>
-      </dgm:t>
-    </dgm:pt>
-    <dgm:pt modelId="{6842B20C-0753-4B38-B4D1-568764A2E096}" type="sibTrans" cxnId="{C80CA2F9-EF80-43C5-85CB-DFB5B9DBFA41}">
-      <dgm:prSet/>
-      <dgm:spPr/>
-      <dgm:t>
-        <a:bodyPr/>
-        <a:lstStyle/>
-        <a:p>
-          <a:endParaRPr lang="en-GB"/>
-        </a:p>
-      </dgm:t>
-    </dgm:pt>
-    <dgm:pt modelId="{729818DC-1341-4A35-8637-D3A777AC3E87}">
-      <dgm:prSet phldrT="[Text]"/>
-      <dgm:spPr/>
-      <dgm:t>
-        <a:bodyPr/>
-        <a:lstStyle/>
-        <a:p>
-          <a:r>
-            <a:rPr lang="en-GB" dirty="0"/>
-            <a:t>Release</a:t>
-          </a:r>
-        </a:p>
-      </dgm:t>
-    </dgm:pt>
-    <dgm:pt modelId="{B834ECB9-49A9-4BF9-A956-DD685C81D9BE}" type="parTrans" cxnId="{27839E0A-22C1-4626-BC18-605028B5B3C1}">
-      <dgm:prSet/>
-      <dgm:spPr/>
-      <dgm:t>
-        <a:bodyPr/>
-        <a:lstStyle/>
-        <a:p>
-          <a:endParaRPr lang="en-GB"/>
-        </a:p>
-      </dgm:t>
-    </dgm:pt>
-    <dgm:pt modelId="{64A19925-D214-4FAB-B3C9-2F981DA2DA0B}" type="sibTrans" cxnId="{27839E0A-22C1-4626-BC18-605028B5B3C1}">
-      <dgm:prSet/>
-      <dgm:spPr>
-        <a:solidFill>
-          <a:schemeClr val="tx2"/>
-        </a:solidFill>
-      </dgm:spPr>
-      <dgm:t>
-        <a:bodyPr/>
-        <a:lstStyle/>
-        <a:p>
-          <a:endParaRPr lang="en-GB"/>
-        </a:p>
-      </dgm:t>
-    </dgm:pt>
-    <dgm:pt modelId="{146CE24C-1C65-4A16-A600-DE980C859DD9}">
-      <dgm:prSet phldrT="[Text]"/>
-      <dgm:spPr/>
-      <dgm:t>
-        <a:bodyPr/>
-        <a:lstStyle/>
-        <a:p>
-          <a:r>
-            <a:rPr lang="en-GB" dirty="0"/>
-            <a:t>Approvals</a:t>
-          </a:r>
-        </a:p>
-      </dgm:t>
-    </dgm:pt>
-    <dgm:pt modelId="{20CEFF71-889E-4703-9EBA-465A239D2749}" type="parTrans" cxnId="{CC92E9C4-B50B-4DC6-B165-3DF8E37510A5}">
-      <dgm:prSet/>
-      <dgm:spPr/>
-      <dgm:t>
-        <a:bodyPr/>
-        <a:lstStyle/>
-        <a:p>
-          <a:endParaRPr lang="en-GB"/>
-        </a:p>
-      </dgm:t>
-    </dgm:pt>
-    <dgm:pt modelId="{3F143513-E1A2-44F9-8D40-991EF5BD685F}" type="sibTrans" cxnId="{CC92E9C4-B50B-4DC6-B165-3DF8E37510A5}">
-      <dgm:prSet/>
-      <dgm:spPr/>
-      <dgm:t>
-        <a:bodyPr/>
-        <a:lstStyle/>
-        <a:p>
-          <a:endParaRPr lang="en-GB"/>
-        </a:p>
-      </dgm:t>
-    </dgm:pt>
-    <dgm:pt modelId="{2A79F2AC-5078-4040-B225-0D20377FE91A}">
-      <dgm:prSet phldrT="[Text]"/>
-      <dgm:spPr/>
-      <dgm:t>
-        <a:bodyPr/>
-        <a:lstStyle/>
-        <a:p>
-          <a:r>
-            <a:rPr lang="en-GB" dirty="0"/>
-            <a:t>Environments</a:t>
-          </a:r>
-        </a:p>
-      </dgm:t>
-    </dgm:pt>
-    <dgm:pt modelId="{25BF6886-A072-4D60-9A1A-8C9333F04790}" type="parTrans" cxnId="{B9F4498F-5302-49C5-8D1E-04DA80C27D8B}">
-      <dgm:prSet/>
-      <dgm:spPr/>
-      <dgm:t>
-        <a:bodyPr/>
-        <a:lstStyle/>
-        <a:p>
-          <a:endParaRPr lang="en-GB"/>
-        </a:p>
-      </dgm:t>
-    </dgm:pt>
-    <dgm:pt modelId="{47AE645E-3A8A-4EE9-9878-F13939902DBA}" type="sibTrans" cxnId="{B9F4498F-5302-49C5-8D1E-04DA80C27D8B}">
-      <dgm:prSet/>
-      <dgm:spPr/>
-      <dgm:t>
-        <a:bodyPr/>
-        <a:lstStyle/>
-        <a:p>
-          <a:endParaRPr lang="en-GB"/>
-        </a:p>
-      </dgm:t>
-    </dgm:pt>
-    <dgm:pt modelId="{DFEB15FD-2194-47F0-8809-6ABBBB6D7A7E}">
-      <dgm:prSet phldrT="[Text]"/>
-      <dgm:spPr/>
-      <dgm:t>
-        <a:bodyPr/>
-        <a:lstStyle/>
-        <a:p>
-          <a:r>
-            <a:rPr lang="en-GB" dirty="0"/>
-            <a:t>Test</a:t>
-          </a:r>
-        </a:p>
-      </dgm:t>
-    </dgm:pt>
-    <dgm:pt modelId="{5F2184DE-FF37-421D-B6A2-36E5D588C4E1}" type="parTrans" cxnId="{56E7E4D7-96C1-4423-A771-E2CE13A2488E}">
-      <dgm:prSet/>
-      <dgm:spPr/>
-      <dgm:t>
-        <a:bodyPr/>
-        <a:lstStyle/>
-        <a:p>
-          <a:endParaRPr lang="en-GB"/>
-        </a:p>
-      </dgm:t>
-    </dgm:pt>
-    <dgm:pt modelId="{02E15070-D612-4335-9F73-FE8D6BAB765B}" type="sibTrans" cxnId="{56E7E4D7-96C1-4423-A771-E2CE13A2488E}">
-      <dgm:prSet/>
-      <dgm:spPr/>
-      <dgm:t>
-        <a:bodyPr/>
-        <a:lstStyle/>
-        <a:p>
-          <a:endParaRPr lang="en-GB"/>
-        </a:p>
-      </dgm:t>
-    </dgm:pt>
-    <dgm:pt modelId="{10CD0FB0-F964-47FE-8107-58FB77282F88}">
-      <dgm:prSet phldrT="[Text]"/>
-      <dgm:spPr/>
-      <dgm:t>
-        <a:bodyPr/>
-        <a:lstStyle/>
-        <a:p>
-          <a:r>
-            <a:rPr lang="en-GB" dirty="0"/>
-            <a:t>SIT</a:t>
-          </a:r>
-        </a:p>
-      </dgm:t>
-    </dgm:pt>
-    <dgm:pt modelId="{81BB4A6B-C9F5-4AD8-8502-5F7CCF378D1E}" type="parTrans" cxnId="{5B579AC6-4A02-49E3-AC97-F6BFF7EB3704}">
-      <dgm:prSet/>
-      <dgm:spPr/>
-      <dgm:t>
-        <a:bodyPr/>
-        <a:lstStyle/>
-        <a:p>
-          <a:endParaRPr lang="en-GB"/>
-        </a:p>
-      </dgm:t>
-    </dgm:pt>
-    <dgm:pt modelId="{0A905215-4212-4FEA-887E-4A28CD91897C}" type="sibTrans" cxnId="{5B579AC6-4A02-49E3-AC97-F6BFF7EB3704}">
-      <dgm:prSet/>
-      <dgm:spPr/>
-      <dgm:t>
-        <a:bodyPr/>
-        <a:lstStyle/>
-        <a:p>
-          <a:endParaRPr lang="en-GB"/>
-        </a:p>
-      </dgm:t>
-    </dgm:pt>
-    <dgm:pt modelId="{126AF485-0AC1-405C-9F7E-CC6D5C3CE58F}">
-      <dgm:prSet phldrT="[Text]"/>
-      <dgm:spPr/>
-      <dgm:t>
-        <a:bodyPr/>
-        <a:lstStyle/>
-        <a:p>
-          <a:r>
-            <a:rPr lang="en-GB" dirty="0"/>
-            <a:t>UAT</a:t>
-          </a:r>
-        </a:p>
-      </dgm:t>
-    </dgm:pt>
-    <dgm:pt modelId="{9520D2CB-E00D-4193-B142-E3AB6C6E615D}" type="parTrans" cxnId="{24D4C815-221F-431F-B161-FAE9D41C7996}">
-      <dgm:prSet/>
-      <dgm:spPr/>
-      <dgm:t>
-        <a:bodyPr/>
-        <a:lstStyle/>
-        <a:p>
-          <a:endParaRPr lang="en-GB"/>
-        </a:p>
-      </dgm:t>
-    </dgm:pt>
-    <dgm:pt modelId="{CE01D0A9-B9A3-4AD5-8167-1990E75012EE}" type="sibTrans" cxnId="{24D4C815-221F-431F-B161-FAE9D41C7996}">
-      <dgm:prSet/>
-      <dgm:spPr/>
-      <dgm:t>
-        <a:bodyPr/>
-        <a:lstStyle/>
-        <a:p>
-          <a:endParaRPr lang="en-GB"/>
-        </a:p>
-      </dgm:t>
-    </dgm:pt>
-    <dgm:pt modelId="{906A08C9-DD99-4AFF-AA20-AEFAF7A62956}">
-      <dgm:prSet phldrT="[Text]"/>
-      <dgm:spPr/>
-      <dgm:t>
-        <a:bodyPr/>
-        <a:lstStyle/>
-        <a:p>
-          <a:r>
-            <a:rPr lang="en-GB" dirty="0"/>
-            <a:t>OAT</a:t>
-          </a:r>
-        </a:p>
-      </dgm:t>
-    </dgm:pt>
-    <dgm:pt modelId="{8966DBCE-2EFB-4C60-8C18-97620A549E6B}" type="parTrans" cxnId="{905ECDFD-0151-4CA3-BF3C-58469A28399C}">
-      <dgm:prSet/>
-      <dgm:spPr/>
-      <dgm:t>
-        <a:bodyPr/>
-        <a:lstStyle/>
-        <a:p>
-          <a:endParaRPr lang="en-GB"/>
-        </a:p>
-      </dgm:t>
-    </dgm:pt>
-    <dgm:pt modelId="{F15B2A55-1E80-4377-8982-F0B43115915F}" type="sibTrans" cxnId="{905ECDFD-0151-4CA3-BF3C-58469A28399C}">
-      <dgm:prSet/>
-      <dgm:spPr/>
-      <dgm:t>
-        <a:bodyPr/>
-        <a:lstStyle/>
-        <a:p>
-          <a:endParaRPr lang="en-GB"/>
-        </a:p>
-      </dgm:t>
-    </dgm:pt>
-    <dgm:pt modelId="{1F28B47D-CC2F-41C0-AFB6-236FB8EDC888}">
-      <dgm:prSet/>
-      <dgm:spPr/>
-      <dgm:t>
-        <a:bodyPr/>
-        <a:lstStyle/>
-        <a:p>
-          <a:r>
-            <a:rPr lang="en-GB" dirty="0"/>
-            <a:t>Packages</a:t>
-          </a:r>
-        </a:p>
-      </dgm:t>
-    </dgm:pt>
-    <dgm:pt modelId="{BE9CA30B-EB00-4D3B-B837-2757906C4D22}" type="parTrans" cxnId="{2E9DDA3E-D7C9-433F-8B5C-9E9A50B2E0C0}">
-      <dgm:prSet/>
-      <dgm:spPr/>
-      <dgm:t>
-        <a:bodyPr/>
-        <a:lstStyle/>
-        <a:p>
-          <a:endParaRPr lang="en-GB"/>
-        </a:p>
-      </dgm:t>
-    </dgm:pt>
-    <dgm:pt modelId="{D9B3E0E8-D9B9-42E9-8FF6-C70EA91F62E7}" type="sibTrans" cxnId="{2E9DDA3E-D7C9-433F-8B5C-9E9A50B2E0C0}">
-      <dgm:prSet/>
-      <dgm:spPr/>
-      <dgm:t>
-        <a:bodyPr/>
-        <a:lstStyle/>
-        <a:p>
-          <a:endParaRPr lang="en-GB"/>
-        </a:p>
-      </dgm:t>
-    </dgm:pt>
-    <dgm:pt modelId="{FBA2E943-9C28-4927-AACA-EB33912D2FFC}">
-      <dgm:prSet/>
-      <dgm:spPr/>
-      <dgm:t>
-        <a:bodyPr/>
-        <a:lstStyle/>
-        <a:p>
-          <a:r>
-            <a:rPr lang="en-GB" dirty="0"/>
-            <a:t>Data</a:t>
-          </a:r>
-        </a:p>
-      </dgm:t>
-    </dgm:pt>
-    <dgm:pt modelId="{ACA46B8B-683D-4B0C-AE7C-02CFBB96C8AD}" type="parTrans" cxnId="{7B13FCE3-53F1-461F-8B9A-338025CE94EE}">
-      <dgm:prSet/>
-      <dgm:spPr/>
-      <dgm:t>
-        <a:bodyPr/>
-        <a:lstStyle/>
-        <a:p>
-          <a:endParaRPr lang="en-GB"/>
-        </a:p>
-      </dgm:t>
-    </dgm:pt>
-    <dgm:pt modelId="{064E41D4-8A4E-4C6F-AD96-2E643AB8ADDF}" type="sibTrans" cxnId="{7B13FCE3-53F1-461F-8B9A-338025CE94EE}">
-      <dgm:prSet/>
-      <dgm:spPr/>
-      <dgm:t>
-        <a:bodyPr/>
-        <a:lstStyle/>
-        <a:p>
-          <a:endParaRPr lang="en-GB"/>
-        </a:p>
-      </dgm:t>
-    </dgm:pt>
-    <dgm:pt modelId="{EA4642D8-6410-49BA-8804-12EDE38A747A}">
-      <dgm:prSet/>
-      <dgm:spPr/>
-      <dgm:t>
-        <a:bodyPr/>
-        <a:lstStyle/>
-        <a:p>
-          <a:r>
-            <a:rPr lang="en-GB" dirty="0"/>
-            <a:t>Tests</a:t>
-          </a:r>
-        </a:p>
-      </dgm:t>
-    </dgm:pt>
-    <dgm:pt modelId="{126C1E3B-53D2-4EAB-83DF-C0460A50E549}" type="parTrans" cxnId="{47A26AE8-FBA2-4C16-889D-2E35D695795E}">
-      <dgm:prSet/>
-      <dgm:spPr/>
-      <dgm:t>
-        <a:bodyPr/>
-        <a:lstStyle/>
-        <a:p>
-          <a:endParaRPr lang="en-GB"/>
-        </a:p>
-      </dgm:t>
-    </dgm:pt>
-    <dgm:pt modelId="{D197E42E-4AD7-4824-A683-788AD552FCE5}" type="sibTrans" cxnId="{47A26AE8-FBA2-4C16-889D-2E35D695795E}">
-      <dgm:prSet/>
-      <dgm:spPr/>
-      <dgm:t>
-        <a:bodyPr/>
-        <a:lstStyle/>
-        <a:p>
-          <a:endParaRPr lang="en-GB"/>
-        </a:p>
-      </dgm:t>
-    </dgm:pt>
-    <dgm:pt modelId="{4D3355A4-388A-4E52-85E1-32F21EF710D3}">
-      <dgm:prSet phldrT="[Text]"/>
-      <dgm:spPr/>
-      <dgm:t>
-        <a:bodyPr/>
-        <a:lstStyle/>
-        <a:p>
-          <a:r>
-            <a:rPr lang="en-GB" dirty="0"/>
-            <a:t>Backup/Rollback</a:t>
-          </a:r>
-        </a:p>
-      </dgm:t>
-    </dgm:pt>
-    <dgm:pt modelId="{7A881F0D-50F4-4303-B857-EC9890E4220A}" type="parTrans" cxnId="{4FCD8230-DF46-46B0-B02A-8B28A10EE7DA}">
-      <dgm:prSet/>
-      <dgm:spPr/>
-      <dgm:t>
-        <a:bodyPr/>
-        <a:lstStyle/>
-        <a:p>
-          <a:endParaRPr lang="en-GB"/>
-        </a:p>
-      </dgm:t>
-    </dgm:pt>
-    <dgm:pt modelId="{E92C8647-9BFD-4B18-A356-74347ACBBD06}" type="sibTrans" cxnId="{4FCD8230-DF46-46B0-B02A-8B28A10EE7DA}">
-      <dgm:prSet/>
-      <dgm:spPr/>
-      <dgm:t>
-        <a:bodyPr/>
-        <a:lstStyle/>
-        <a:p>
-          <a:endParaRPr lang="en-GB"/>
-        </a:p>
-      </dgm:t>
-    </dgm:pt>
-    <dgm:pt modelId="{D93C29AF-4E73-4C71-B267-2481B94FAB63}">
-      <dgm:prSet phldrT="[Text]"/>
-      <dgm:spPr/>
-      <dgm:t>
-        <a:bodyPr/>
-        <a:lstStyle/>
-        <a:p>
-          <a:r>
-            <a:rPr lang="en-GB" dirty="0"/>
-            <a:t>Provision Environments</a:t>
-          </a:r>
-        </a:p>
-      </dgm:t>
-    </dgm:pt>
-    <dgm:pt modelId="{B61D3ED6-BE19-46AD-AA91-385CA49C2BCA}" type="parTrans" cxnId="{BB80C341-436E-44F2-A923-CFF6AF4A2849}">
-      <dgm:prSet/>
-      <dgm:spPr/>
-      <dgm:t>
-        <a:bodyPr/>
-        <a:lstStyle/>
-        <a:p>
-          <a:endParaRPr lang="en-GB"/>
-        </a:p>
-      </dgm:t>
-    </dgm:pt>
-    <dgm:pt modelId="{332569B5-C231-4BED-BCA2-F29DCFC46DCC}" type="sibTrans" cxnId="{BB80C341-436E-44F2-A923-CFF6AF4A2849}">
-      <dgm:prSet/>
-      <dgm:spPr/>
-      <dgm:t>
-        <a:bodyPr/>
-        <a:lstStyle/>
-        <a:p>
-          <a:endParaRPr lang="en-GB"/>
-        </a:p>
-      </dgm:t>
-    </dgm:pt>
-    <dgm:pt modelId="{38CABA7B-C936-4B33-9142-B6BA85191A9D}">
-      <dgm:prSet phldrT="[Text]"/>
-      <dgm:spPr/>
-      <dgm:t>
-        <a:bodyPr/>
-        <a:lstStyle/>
-        <a:p>
-          <a:r>
-            <a:rPr lang="en-GB" dirty="0"/>
-            <a:t>Import Solutions</a:t>
-          </a:r>
-        </a:p>
-      </dgm:t>
-    </dgm:pt>
-    <dgm:pt modelId="{B8F5CB22-FE4A-46A7-87F4-F5D5111EF4AA}" type="parTrans" cxnId="{071618F8-8396-4193-9261-DFC1A11D3A03}">
-      <dgm:prSet/>
-      <dgm:spPr/>
-      <dgm:t>
-        <a:bodyPr/>
-        <a:lstStyle/>
-        <a:p>
-          <a:endParaRPr lang="en-GB"/>
-        </a:p>
-      </dgm:t>
-    </dgm:pt>
-    <dgm:pt modelId="{3689CC6D-9C9E-4E78-9341-C7EE2E3AB1FC}" type="sibTrans" cxnId="{071618F8-8396-4193-9261-DFC1A11D3A03}">
-      <dgm:prSet/>
-      <dgm:spPr/>
-      <dgm:t>
-        <a:bodyPr/>
-        <a:lstStyle/>
-        <a:p>
-          <a:endParaRPr lang="en-GB"/>
-        </a:p>
-      </dgm:t>
-    </dgm:pt>
-    <dgm:pt modelId="{814FE300-628C-4BBC-8333-CB051A7DC9DF}">
-      <dgm:prSet phldrT="[Text]"/>
-      <dgm:spPr/>
-      <dgm:t>
-        <a:bodyPr/>
-        <a:lstStyle/>
-        <a:p>
-          <a:r>
-            <a:rPr lang="en-GB" dirty="0"/>
-            <a:t>Execute Packages</a:t>
-          </a:r>
-        </a:p>
-      </dgm:t>
-    </dgm:pt>
-    <dgm:pt modelId="{EFFB84BC-62A7-4DC1-BE65-185B989FEE87}" type="parTrans" cxnId="{EF926CEF-7C1E-4E54-BFC5-8CC0D77261A8}">
-      <dgm:prSet/>
-      <dgm:spPr/>
-      <dgm:t>
-        <a:bodyPr/>
-        <a:lstStyle/>
-        <a:p>
-          <a:endParaRPr lang="en-GB"/>
-        </a:p>
-      </dgm:t>
-    </dgm:pt>
-    <dgm:pt modelId="{B33E61F5-7102-4BD2-8CCE-BC4EB3930B54}" type="sibTrans" cxnId="{EF926CEF-7C1E-4E54-BFC5-8CC0D77261A8}">
-      <dgm:prSet/>
-      <dgm:spPr/>
-      <dgm:t>
-        <a:bodyPr/>
-        <a:lstStyle/>
-        <a:p>
-          <a:endParaRPr lang="en-GB"/>
-        </a:p>
-      </dgm:t>
-    </dgm:pt>
-    <dgm:pt modelId="{26DF6FB2-1631-4CEB-9806-8B39E2EBC22C}">
-      <dgm:prSet phldrT="[Text]"/>
-      <dgm:spPr/>
-      <dgm:t>
-        <a:bodyPr/>
-        <a:lstStyle/>
-        <a:p>
-          <a:r>
-            <a:rPr lang="en-GB" dirty="0"/>
-            <a:t>Import Data</a:t>
-          </a:r>
-        </a:p>
-      </dgm:t>
-    </dgm:pt>
-    <dgm:pt modelId="{315E9D56-F7A6-47A9-908E-095E4812FAA4}" type="parTrans" cxnId="{12DBFACC-824A-4D74-9D5C-74DF7A9D9F6A}">
-      <dgm:prSet/>
-      <dgm:spPr/>
-      <dgm:t>
-        <a:bodyPr/>
-        <a:lstStyle/>
-        <a:p>
-          <a:endParaRPr lang="en-GB"/>
-        </a:p>
-      </dgm:t>
-    </dgm:pt>
-    <dgm:pt modelId="{38EA71A0-5DAC-4098-BF93-6EE8FA3D08CD}" type="sibTrans" cxnId="{12DBFACC-824A-4D74-9D5C-74DF7A9D9F6A}">
-      <dgm:prSet/>
-      <dgm:spPr/>
-      <dgm:t>
-        <a:bodyPr/>
-        <a:lstStyle/>
-        <a:p>
-          <a:endParaRPr lang="en-GB"/>
-        </a:p>
-      </dgm:t>
-    </dgm:pt>
-    <dgm:pt modelId="{BE65191F-45D5-4DA5-A055-2090826717D9}">
-      <dgm:prSet phldrT="[Text]"/>
-      <dgm:spPr/>
-      <dgm:t>
-        <a:bodyPr/>
-        <a:lstStyle/>
-        <a:p>
-          <a:r>
-            <a:rPr lang="en-GB" dirty="0"/>
-            <a:t>Additional Steps</a:t>
-          </a:r>
-        </a:p>
-      </dgm:t>
-    </dgm:pt>
-    <dgm:pt modelId="{EB4752A4-F659-4D88-8B8D-75E6447F6832}" type="parTrans" cxnId="{258A6A2A-1E5D-4C19-81A6-A2EBC208D34E}">
-      <dgm:prSet/>
-      <dgm:spPr/>
-      <dgm:t>
-        <a:bodyPr/>
-        <a:lstStyle/>
-        <a:p>
-          <a:endParaRPr lang="en-GB"/>
-        </a:p>
-      </dgm:t>
-    </dgm:pt>
-    <dgm:pt modelId="{3B7A34C1-09EB-4EF9-B7F3-212606570E42}" type="sibTrans" cxnId="{258A6A2A-1E5D-4C19-81A6-A2EBC208D34E}">
-      <dgm:prSet/>
-      <dgm:spPr/>
-      <dgm:t>
-        <a:bodyPr/>
-        <a:lstStyle/>
-        <a:p>
-          <a:endParaRPr lang="en-GB"/>
-        </a:p>
-      </dgm:t>
-    </dgm:pt>
-    <dgm:pt modelId="{D5A8F026-7142-42F1-AFC2-7347F4BE6F7A}">
-      <dgm:prSet phldrT="[Text]"/>
-      <dgm:spPr/>
-      <dgm:t>
-        <a:bodyPr/>
-        <a:lstStyle/>
-        <a:p>
-          <a:r>
-            <a:rPr lang="en-GB" dirty="0"/>
-            <a:t>Execute Tests</a:t>
-          </a:r>
-        </a:p>
-      </dgm:t>
-    </dgm:pt>
-    <dgm:pt modelId="{A05C2651-41C7-4AB1-AFEF-C60B47E2B541}" type="parTrans" cxnId="{A07779CA-1BD7-4FE5-9E0F-739AB43A860C}">
-      <dgm:prSet/>
-      <dgm:spPr/>
-      <dgm:t>
-        <a:bodyPr/>
-        <a:lstStyle/>
-        <a:p>
-          <a:endParaRPr lang="en-GB"/>
-        </a:p>
-      </dgm:t>
-    </dgm:pt>
-    <dgm:pt modelId="{31D3583F-1203-4D45-AF8E-2DE85EC1D032}" type="sibTrans" cxnId="{A07779CA-1BD7-4FE5-9E0F-739AB43A860C}">
-      <dgm:prSet/>
-      <dgm:spPr/>
-      <dgm:t>
-        <a:bodyPr/>
-        <a:lstStyle/>
-        <a:p>
-          <a:endParaRPr lang="en-GB"/>
-        </a:p>
-      </dgm:t>
-    </dgm:pt>
-    <dgm:pt modelId="{81959AD0-A4CB-4A05-8512-6DC36906EA3E}">
-      <dgm:prSet phldrT="[Text]"/>
-      <dgm:spPr/>
-      <dgm:t>
-        <a:bodyPr/>
-        <a:lstStyle/>
-        <a:p>
-          <a:r>
-            <a:rPr lang="en-GB" dirty="0"/>
-            <a:t>Pre-Prod</a:t>
-          </a:r>
-        </a:p>
-      </dgm:t>
-    </dgm:pt>
-    <dgm:pt modelId="{FA9953CB-19D2-4959-B4E2-9EF13AA51FB7}" type="parTrans" cxnId="{2133CBE9-A4A8-4E96-BBE2-5B0BAEC0658D}">
-      <dgm:prSet/>
-      <dgm:spPr/>
-      <dgm:t>
-        <a:bodyPr/>
-        <a:lstStyle/>
-        <a:p>
-          <a:endParaRPr lang="en-GB"/>
-        </a:p>
-      </dgm:t>
-    </dgm:pt>
-    <dgm:pt modelId="{0EA99E8A-D505-4BBB-BB14-DF90E1A75A33}" type="sibTrans" cxnId="{2133CBE9-A4A8-4E96-BBE2-5B0BAEC0658D}">
-      <dgm:prSet/>
-      <dgm:spPr/>
-      <dgm:t>
-        <a:bodyPr/>
-        <a:lstStyle/>
-        <a:p>
-          <a:endParaRPr lang="en-GB"/>
-        </a:p>
-      </dgm:t>
-    </dgm:pt>
-    <dgm:pt modelId="{626915AE-A3F8-43FC-97E4-B39D0BF87DD2}">
-      <dgm:prSet phldrT="[Text]"/>
-      <dgm:spPr/>
-      <dgm:t>
-        <a:bodyPr/>
-        <a:lstStyle/>
-        <a:p>
-          <a:r>
-            <a:rPr lang="en-GB" dirty="0"/>
-            <a:t>Prod</a:t>
-          </a:r>
-        </a:p>
-      </dgm:t>
-    </dgm:pt>
-    <dgm:pt modelId="{98517584-EA4F-4F88-A281-8F67FA2073DD}" type="parTrans" cxnId="{FD2F025A-46EF-44B5-99A5-A56D446DE258}">
-      <dgm:prSet/>
-      <dgm:spPr/>
-      <dgm:t>
-        <a:bodyPr/>
-        <a:lstStyle/>
-        <a:p>
-          <a:endParaRPr lang="en-GB"/>
-        </a:p>
-      </dgm:t>
-    </dgm:pt>
-    <dgm:pt modelId="{48E9B695-5052-449E-A352-7BDD70A06965}" type="sibTrans" cxnId="{FD2F025A-46EF-44B5-99A5-A56D446DE258}">
-      <dgm:prSet/>
-      <dgm:spPr/>
-      <dgm:t>
-        <a:bodyPr/>
-        <a:lstStyle/>
-        <a:p>
-          <a:endParaRPr lang="en-GB"/>
-        </a:p>
-      </dgm:t>
-    </dgm:pt>
-    <dgm:pt modelId="{1E47FBFF-D017-4B46-A983-B9523E1FFDEF}">
-      <dgm:prSet phldrT="[Text]"/>
-      <dgm:spPr/>
-      <dgm:t>
-        <a:bodyPr/>
-        <a:lstStyle/>
-        <a:p>
-          <a:r>
-            <a:rPr lang="en-GB" dirty="0"/>
-            <a:t>Dev</a:t>
-          </a:r>
-        </a:p>
-      </dgm:t>
-    </dgm:pt>
-    <dgm:pt modelId="{00715D29-D934-436B-9F95-4391AE48B930}" type="parTrans" cxnId="{49032360-DA58-4CDA-B2C0-1273B6A7DEEA}">
-      <dgm:prSet/>
-      <dgm:spPr/>
-      <dgm:t>
-        <a:bodyPr/>
-        <a:lstStyle/>
-        <a:p>
-          <a:endParaRPr lang="en-GB"/>
-        </a:p>
-      </dgm:t>
-    </dgm:pt>
-    <dgm:pt modelId="{E71084B1-74FE-448E-8ECD-515B4007E414}" type="sibTrans" cxnId="{49032360-DA58-4CDA-B2C0-1273B6A7DEEA}">
-      <dgm:prSet/>
-      <dgm:spPr/>
-      <dgm:t>
-        <a:bodyPr/>
-        <a:lstStyle/>
-        <a:p>
-          <a:endParaRPr lang="en-GB"/>
-        </a:p>
-      </dgm:t>
-    </dgm:pt>
-    <dgm:pt modelId="{BD29C1CB-FFD0-43D6-A033-4CBCCA6B163D}">
-      <dgm:prSet phldrT="[Text]"/>
-      <dgm:spPr/>
-      <dgm:t>
-        <a:bodyPr/>
-        <a:lstStyle/>
-        <a:p>
-          <a:r>
-            <a:rPr lang="en-GB" dirty="0"/>
-            <a:t>PoC</a:t>
-          </a:r>
-        </a:p>
-      </dgm:t>
-    </dgm:pt>
-    <dgm:pt modelId="{81F64306-57AB-4675-8AE4-F72FC65CEB27}" type="parTrans" cxnId="{47F2C76F-7080-4EE4-954A-2CD0F1A29DA6}">
-      <dgm:prSet/>
-      <dgm:spPr/>
-      <dgm:t>
-        <a:bodyPr/>
-        <a:lstStyle/>
-        <a:p>
-          <a:endParaRPr lang="en-GB"/>
-        </a:p>
-      </dgm:t>
-    </dgm:pt>
-    <dgm:pt modelId="{9C7F7F91-D6EE-4F28-8EAF-A514615B318E}" type="sibTrans" cxnId="{47F2C76F-7080-4EE4-954A-2CD0F1A29DA6}">
-      <dgm:prSet/>
-      <dgm:spPr/>
-      <dgm:t>
-        <a:bodyPr/>
-        <a:lstStyle/>
-        <a:p>
-          <a:endParaRPr lang="en-GB"/>
-        </a:p>
-      </dgm:t>
-    </dgm:pt>
-    <dgm:pt modelId="{2410EAE4-89FA-42F8-823D-1F093CEFA2BF}">
-      <dgm:prSet phldrT="[Text]"/>
-      <dgm:spPr/>
-      <dgm:t>
-        <a:bodyPr/>
-        <a:lstStyle/>
-        <a:p>
-          <a:r>
-            <a:rPr lang="en-GB" dirty="0"/>
-            <a:t>Demo</a:t>
-          </a:r>
-        </a:p>
-      </dgm:t>
-    </dgm:pt>
-    <dgm:pt modelId="{60F01604-6DA8-4C3D-9FBB-642E00274501}" type="parTrans" cxnId="{DE1DBBFB-AC45-47CB-8D94-AA3199617E83}">
-      <dgm:prSet/>
-      <dgm:spPr/>
-      <dgm:t>
-        <a:bodyPr/>
-        <a:lstStyle/>
-        <a:p>
-          <a:endParaRPr lang="en-GB"/>
-        </a:p>
-      </dgm:t>
-    </dgm:pt>
-    <dgm:pt modelId="{CBF86568-7B51-47A0-9490-E940963A9328}" type="sibTrans" cxnId="{DE1DBBFB-AC45-47CB-8D94-AA3199617E83}">
-      <dgm:prSet/>
-      <dgm:spPr/>
-      <dgm:t>
-        <a:bodyPr/>
-        <a:lstStyle/>
-        <a:p>
-          <a:endParaRPr lang="en-GB"/>
-        </a:p>
-      </dgm:t>
-    </dgm:pt>
-    <dgm:pt modelId="{4D611FD3-9D24-4597-860A-02E04BD7CD7E}">
-      <dgm:prSet phldrT="[Text]"/>
-      <dgm:spPr/>
-      <dgm:t>
-        <a:bodyPr/>
-        <a:lstStyle/>
-        <a:p>
-          <a:r>
-            <a:rPr lang="en-GB" dirty="0"/>
-            <a:t>Training</a:t>
-          </a:r>
-        </a:p>
-      </dgm:t>
-    </dgm:pt>
-    <dgm:pt modelId="{A3A700AA-D272-4F26-BB0D-CDC082126641}" type="parTrans" cxnId="{19E65AE9-B443-457D-8506-5DAEC420CC03}">
-      <dgm:prSet/>
-      <dgm:spPr/>
-      <dgm:t>
-        <a:bodyPr/>
-        <a:lstStyle/>
-        <a:p>
-          <a:endParaRPr lang="en-GB"/>
-        </a:p>
-      </dgm:t>
-    </dgm:pt>
-    <dgm:pt modelId="{DA24191E-E133-46B5-AF9B-9594E784AE4D}" type="sibTrans" cxnId="{19E65AE9-B443-457D-8506-5DAEC420CC03}">
-      <dgm:prSet/>
-      <dgm:spPr/>
-      <dgm:t>
-        <a:bodyPr/>
-        <a:lstStyle/>
-        <a:p>
-          <a:endParaRPr lang="en-GB"/>
-        </a:p>
-      </dgm:t>
-    </dgm:pt>
-    <dgm:pt modelId="{ED49DB6E-0327-4DE7-8075-CE7F4BBB8110}">
-      <dgm:prSet phldrT="[Text]"/>
-      <dgm:spPr/>
-      <dgm:t>
-        <a:bodyPr/>
-        <a:lstStyle/>
-        <a:p>
-          <a:r>
-            <a:rPr lang="en-GB" dirty="0"/>
-            <a:t>Notifications</a:t>
-          </a:r>
-        </a:p>
-      </dgm:t>
-    </dgm:pt>
-    <dgm:pt modelId="{8BF0C231-04A6-4BA3-B475-8DE80D32775B}" type="parTrans" cxnId="{495A4487-AD78-49C0-BB5E-2388A149A1F2}">
-      <dgm:prSet/>
-      <dgm:spPr/>
-    </dgm:pt>
-    <dgm:pt modelId="{FD0062CF-0375-4B9E-9AC9-5C45B28FCB1F}" type="sibTrans" cxnId="{495A4487-AD78-49C0-BB5E-2388A149A1F2}">
-      <dgm:prSet/>
-      <dgm:spPr/>
-    </dgm:pt>
-    <dgm:pt modelId="{D2804D6F-8D6A-4F26-B3AA-40B5BCF75FB4}" type="pres">
-      <dgm:prSet presAssocID="{DE1A03B6-942F-4AC6-80BB-76731E8D619A}" presName="linearFlow" presStyleCnt="0">
-        <dgm:presLayoutVars>
-          <dgm:dir/>
-          <dgm:animLvl val="lvl"/>
-          <dgm:resizeHandles val="exact"/>
-        </dgm:presLayoutVars>
-      </dgm:prSet>
-      <dgm:spPr/>
-    </dgm:pt>
-    <dgm:pt modelId="{CDF2C51C-7D96-4615-8EE5-902DE3D5F59A}" type="pres">
-      <dgm:prSet presAssocID="{3C2AB5AB-129C-45E8-AB3F-B2E063D5FFA7}" presName="composite" presStyleCnt="0"/>
-      <dgm:spPr/>
-    </dgm:pt>
-    <dgm:pt modelId="{3B5AE309-7480-4D63-828A-A02F268BBCA1}" type="pres">
-      <dgm:prSet presAssocID="{3C2AB5AB-129C-45E8-AB3F-B2E063D5FFA7}" presName="parTx" presStyleLbl="node1" presStyleIdx="0" presStyleCnt="3">
-        <dgm:presLayoutVars>
-          <dgm:chMax val="0"/>
-          <dgm:chPref val="0"/>
-          <dgm:bulletEnabled val="1"/>
-        </dgm:presLayoutVars>
-      </dgm:prSet>
-      <dgm:spPr/>
-    </dgm:pt>
-    <dgm:pt modelId="{5E24D3A6-8425-4985-9887-3007A5739949}" type="pres">
-      <dgm:prSet presAssocID="{3C2AB5AB-129C-45E8-AB3F-B2E063D5FFA7}" presName="parSh" presStyleLbl="node1" presStyleIdx="0" presStyleCnt="3"/>
-      <dgm:spPr/>
-    </dgm:pt>
-    <dgm:pt modelId="{10C42DA6-E5EC-432C-9EE3-A0B3DBD402BC}" type="pres">
-      <dgm:prSet presAssocID="{3C2AB5AB-129C-45E8-AB3F-B2E063D5FFA7}" presName="desTx" presStyleLbl="fgAcc1" presStyleIdx="0" presStyleCnt="3">
-        <dgm:presLayoutVars>
-          <dgm:bulletEnabled val="1"/>
-        </dgm:presLayoutVars>
-      </dgm:prSet>
-      <dgm:spPr/>
-    </dgm:pt>
-    <dgm:pt modelId="{5E6ADCBE-372D-4BA9-A979-5A31ECDCDC40}" type="pres">
-      <dgm:prSet presAssocID="{488BDB2D-2A42-4C8C-A46D-EDEEE03EAD4B}" presName="sibTrans" presStyleLbl="sibTrans2D1" presStyleIdx="0" presStyleCnt="2"/>
-      <dgm:spPr/>
-    </dgm:pt>
-    <dgm:pt modelId="{183961AC-A0B8-430D-A843-DDA4C608F438}" type="pres">
-      <dgm:prSet presAssocID="{488BDB2D-2A42-4C8C-A46D-EDEEE03EAD4B}" presName="connTx" presStyleLbl="sibTrans2D1" presStyleIdx="0" presStyleCnt="2"/>
-      <dgm:spPr/>
-    </dgm:pt>
-    <dgm:pt modelId="{2E8942A8-400E-4554-B31F-AB508087AFC9}" type="pres">
-      <dgm:prSet presAssocID="{729818DC-1341-4A35-8637-D3A777AC3E87}" presName="composite" presStyleCnt="0"/>
-      <dgm:spPr/>
-    </dgm:pt>
-    <dgm:pt modelId="{32173E52-1296-4551-B90B-3F07AE8E0306}" type="pres">
-      <dgm:prSet presAssocID="{729818DC-1341-4A35-8637-D3A777AC3E87}" presName="parTx" presStyleLbl="node1" presStyleIdx="0" presStyleCnt="3">
-        <dgm:presLayoutVars>
-          <dgm:chMax val="0"/>
-          <dgm:chPref val="0"/>
-          <dgm:bulletEnabled val="1"/>
-        </dgm:presLayoutVars>
-      </dgm:prSet>
-      <dgm:spPr/>
-    </dgm:pt>
-    <dgm:pt modelId="{E53EF5A2-9B51-4860-94D7-DCC04E9C7EA3}" type="pres">
-      <dgm:prSet presAssocID="{729818DC-1341-4A35-8637-D3A777AC3E87}" presName="parSh" presStyleLbl="node1" presStyleIdx="1" presStyleCnt="3"/>
-      <dgm:spPr/>
-    </dgm:pt>
-    <dgm:pt modelId="{21E181B6-3FD8-4DAC-8298-5C17B4D5C3CD}" type="pres">
-      <dgm:prSet presAssocID="{729818DC-1341-4A35-8637-D3A777AC3E87}" presName="desTx" presStyleLbl="fgAcc1" presStyleIdx="1" presStyleCnt="3">
-        <dgm:presLayoutVars>
-          <dgm:bulletEnabled val="1"/>
-        </dgm:presLayoutVars>
-      </dgm:prSet>
-      <dgm:spPr/>
-    </dgm:pt>
-    <dgm:pt modelId="{97B330FB-580F-44AC-B8D7-C75FE33FD7C0}" type="pres">
-      <dgm:prSet presAssocID="{64A19925-D214-4FAB-B3C9-2F981DA2DA0B}" presName="sibTrans" presStyleLbl="sibTrans2D1" presStyleIdx="1" presStyleCnt="2"/>
-      <dgm:spPr/>
-    </dgm:pt>
-    <dgm:pt modelId="{47128B4D-493E-4820-9C21-A0EBC656A3CC}" type="pres">
-      <dgm:prSet presAssocID="{64A19925-D214-4FAB-B3C9-2F981DA2DA0B}" presName="connTx" presStyleLbl="sibTrans2D1" presStyleIdx="1" presStyleCnt="2"/>
-      <dgm:spPr/>
-    </dgm:pt>
-    <dgm:pt modelId="{F7D49382-3373-415B-873D-27A00D15CB86}" type="pres">
-      <dgm:prSet presAssocID="{2A79F2AC-5078-4040-B225-0D20377FE91A}" presName="composite" presStyleCnt="0"/>
-      <dgm:spPr/>
-    </dgm:pt>
-    <dgm:pt modelId="{ADD5CEE7-27C8-42DA-8252-6E15D178100A}" type="pres">
-      <dgm:prSet presAssocID="{2A79F2AC-5078-4040-B225-0D20377FE91A}" presName="parTx" presStyleLbl="node1" presStyleIdx="1" presStyleCnt="3">
-        <dgm:presLayoutVars>
-          <dgm:chMax val="0"/>
-          <dgm:chPref val="0"/>
-          <dgm:bulletEnabled val="1"/>
-        </dgm:presLayoutVars>
-      </dgm:prSet>
-      <dgm:spPr/>
-    </dgm:pt>
-    <dgm:pt modelId="{47295986-DACE-425A-84B0-E664787F38E3}" type="pres">
-      <dgm:prSet presAssocID="{2A79F2AC-5078-4040-B225-0D20377FE91A}" presName="parSh" presStyleLbl="node1" presStyleIdx="2" presStyleCnt="3"/>
-      <dgm:spPr/>
-    </dgm:pt>
-    <dgm:pt modelId="{3E1AEA04-6E5B-48C8-A007-B09A7ACB56D7}" type="pres">
-      <dgm:prSet presAssocID="{2A79F2AC-5078-4040-B225-0D20377FE91A}" presName="desTx" presStyleLbl="fgAcc1" presStyleIdx="2" presStyleCnt="3">
-        <dgm:presLayoutVars>
-          <dgm:bulletEnabled val="1"/>
-        </dgm:presLayoutVars>
-      </dgm:prSet>
-      <dgm:spPr/>
-    </dgm:pt>
-  </dgm:ptLst>
-  <dgm:cxnLst>
-    <dgm:cxn modelId="{CAEEAD02-AF35-4182-AE2C-0503D0A94FAF}" type="presOf" srcId="{488BDB2D-2A42-4C8C-A46D-EDEEE03EAD4B}" destId="{5E6ADCBE-372D-4BA9-A979-5A31ECDCDC40}" srcOrd="0" destOrd="0" presId="urn:microsoft.com/office/officeart/2005/8/layout/process3"/>
-    <dgm:cxn modelId="{65FFCB07-FE5C-4BC3-AE72-0690990F8326}" type="presOf" srcId="{FBA2E943-9C28-4927-AACA-EB33912D2FFC}" destId="{10C42DA6-E5EC-432C-9EE3-A0B3DBD402BC}" srcOrd="0" destOrd="2" presId="urn:microsoft.com/office/officeart/2005/8/layout/process3"/>
-    <dgm:cxn modelId="{27839E0A-22C1-4626-BC18-605028B5B3C1}" srcId="{DE1A03B6-942F-4AC6-80BB-76731E8D619A}" destId="{729818DC-1341-4A35-8637-D3A777AC3E87}" srcOrd="1" destOrd="0" parTransId="{B834ECB9-49A9-4BF9-A956-DD685C81D9BE}" sibTransId="{64A19925-D214-4FAB-B3C9-2F981DA2DA0B}"/>
-    <dgm:cxn modelId="{24D4C815-221F-431F-B161-FAE9D41C7996}" srcId="{2A79F2AC-5078-4040-B225-0D20377FE91A}" destId="{126AF485-0AC1-405C-9F7E-CC6D5C3CE58F}" srcOrd="5" destOrd="0" parTransId="{9520D2CB-E00D-4193-B142-E3AB6C6E615D}" sibTransId="{CE01D0A9-B9A3-4AD5-8167-1990E75012EE}"/>
-    <dgm:cxn modelId="{258A6A2A-1E5D-4C19-81A6-A2EBC208D34E}" srcId="{729818DC-1341-4A35-8637-D3A777AC3E87}" destId="{BE65191F-45D5-4DA5-A055-2090826717D9}" srcOrd="6" destOrd="0" parTransId="{EB4752A4-F659-4D88-8B8D-75E6447F6832}" sibTransId="{3B7A34C1-09EB-4EF9-B7F3-212606570E42}"/>
-    <dgm:cxn modelId="{4FCD8230-DF46-46B0-B02A-8B28A10EE7DA}" srcId="{729818DC-1341-4A35-8637-D3A777AC3E87}" destId="{4D3355A4-388A-4E52-85E1-32F21EF710D3}" srcOrd="2" destOrd="0" parTransId="{7A881F0D-50F4-4303-B857-EC9890E4220A}" sibTransId="{E92C8647-9BFD-4B18-A356-74347ACBBD06}"/>
-    <dgm:cxn modelId="{B9C71534-3795-4F15-BF9E-441E1E2CDE0B}" srcId="{DE1A03B6-942F-4AC6-80BB-76731E8D619A}" destId="{3C2AB5AB-129C-45E8-AB3F-B2E063D5FFA7}" srcOrd="0" destOrd="0" parTransId="{5F20E94D-C07C-47E6-B04A-399C6C7EB5FC}" sibTransId="{488BDB2D-2A42-4C8C-A46D-EDEEE03EAD4B}"/>
-    <dgm:cxn modelId="{B686303B-8E97-4041-A146-ACF46F1AD9EB}" type="presOf" srcId="{4D3355A4-388A-4E52-85E1-32F21EF710D3}" destId="{21E181B6-3FD8-4DAC-8298-5C17B4D5C3CD}" srcOrd="0" destOrd="2" presId="urn:microsoft.com/office/officeart/2005/8/layout/process3"/>
-    <dgm:cxn modelId="{3F7E413C-E9A9-4556-8509-4BFE6E8FA710}" type="presOf" srcId="{4D611FD3-9D24-4597-860A-02E04BD7CD7E}" destId="{3E1AEA04-6E5B-48C8-A007-B09A7ACB56D7}" srcOrd="0" destOrd="7" presId="urn:microsoft.com/office/officeart/2005/8/layout/process3"/>
-    <dgm:cxn modelId="{2E9DDA3E-D7C9-433F-8B5C-9E9A50B2E0C0}" srcId="{3C2AB5AB-129C-45E8-AB3F-B2E063D5FFA7}" destId="{1F28B47D-CC2F-41C0-AFB6-236FB8EDC888}" srcOrd="1" destOrd="0" parTransId="{BE9CA30B-EB00-4D3B-B837-2757906C4D22}" sibTransId="{D9B3E0E8-D9B9-42E9-8FF6-C70EA91F62E7}"/>
-    <dgm:cxn modelId="{04AABB40-7AE8-42CD-84F4-8CEE60F9AD72}" type="presOf" srcId="{26DF6FB2-1631-4CEB-9806-8B39E2EBC22C}" destId="{21E181B6-3FD8-4DAC-8298-5C17B4D5C3CD}" srcOrd="0" destOrd="5" presId="urn:microsoft.com/office/officeart/2005/8/layout/process3"/>
-    <dgm:cxn modelId="{1BE1235F-3D16-4184-A95D-8C0B818841CC}" type="presOf" srcId="{A35A2B80-F5F7-404F-BA73-398735E4BA2C}" destId="{10C42DA6-E5EC-432C-9EE3-A0B3DBD402BC}" srcOrd="0" destOrd="0" presId="urn:microsoft.com/office/officeart/2005/8/layout/process3"/>
-    <dgm:cxn modelId="{49032360-DA58-4CDA-B2C0-1273B6A7DEEA}" srcId="{2A79F2AC-5078-4040-B225-0D20377FE91A}" destId="{1E47FBFF-D017-4B46-A983-B9523E1FFDEF}" srcOrd="0" destOrd="0" parTransId="{00715D29-D934-436B-9F95-4391AE48B930}" sibTransId="{E71084B1-74FE-448E-8ECD-515B4007E414}"/>
-    <dgm:cxn modelId="{BB80C341-436E-44F2-A923-CFF6AF4A2849}" srcId="{729818DC-1341-4A35-8637-D3A777AC3E87}" destId="{D93C29AF-4E73-4C71-B267-2481B94FAB63}" srcOrd="1" destOrd="0" parTransId="{B61D3ED6-BE19-46AD-AA91-385CA49C2BCA}" sibTransId="{332569B5-C231-4BED-BCA2-F29DCFC46DCC}"/>
-    <dgm:cxn modelId="{47F2C76F-7080-4EE4-954A-2CD0F1A29DA6}" srcId="{2A79F2AC-5078-4040-B225-0D20377FE91A}" destId="{BD29C1CB-FFD0-43D6-A033-4CBCCA6B163D}" srcOrd="1" destOrd="0" parTransId="{81F64306-57AB-4675-8AE4-F72FC65CEB27}" sibTransId="{9C7F7F91-D6EE-4F28-8EAF-A514615B318E}"/>
-    <dgm:cxn modelId="{FC3F6F53-7F50-44EE-8C35-CB720DF52D44}" type="presOf" srcId="{81959AD0-A4CB-4A05-8512-6DC36906EA3E}" destId="{3E1AEA04-6E5B-48C8-A007-B09A7ACB56D7}" srcOrd="0" destOrd="8" presId="urn:microsoft.com/office/officeart/2005/8/layout/process3"/>
-    <dgm:cxn modelId="{19850658-C7BE-48C8-8F9C-3B2DFD0D1811}" type="presOf" srcId="{D93C29AF-4E73-4C71-B267-2481B94FAB63}" destId="{21E181B6-3FD8-4DAC-8298-5C17B4D5C3CD}" srcOrd="0" destOrd="1" presId="urn:microsoft.com/office/officeart/2005/8/layout/process3"/>
-    <dgm:cxn modelId="{FD2F025A-46EF-44B5-99A5-A56D446DE258}" srcId="{2A79F2AC-5078-4040-B225-0D20377FE91A}" destId="{626915AE-A3F8-43FC-97E4-B39D0BF87DD2}" srcOrd="9" destOrd="0" parTransId="{98517584-EA4F-4F88-A281-8F67FA2073DD}" sibTransId="{48E9B695-5052-449E-A352-7BDD70A06965}"/>
-    <dgm:cxn modelId="{CC1ACB83-4A04-410C-968B-4609C49E84D1}" type="presOf" srcId="{906A08C9-DD99-4AFF-AA20-AEFAF7A62956}" destId="{3E1AEA04-6E5B-48C8-A007-B09A7ACB56D7}" srcOrd="0" destOrd="6" presId="urn:microsoft.com/office/officeart/2005/8/layout/process3"/>
-    <dgm:cxn modelId="{50A60586-377C-447D-B590-A90FA91B458C}" type="presOf" srcId="{BD29C1CB-FFD0-43D6-A033-4CBCCA6B163D}" destId="{3E1AEA04-6E5B-48C8-A007-B09A7ACB56D7}" srcOrd="0" destOrd="1" presId="urn:microsoft.com/office/officeart/2005/8/layout/process3"/>
-    <dgm:cxn modelId="{495A4487-AD78-49C0-BB5E-2388A149A1F2}" srcId="{729818DC-1341-4A35-8637-D3A777AC3E87}" destId="{ED49DB6E-0327-4DE7-8075-CE7F4BBB8110}" srcOrd="8" destOrd="0" parTransId="{8BF0C231-04A6-4BA3-B475-8DE80D32775B}" sibTransId="{FD0062CF-0375-4B9E-9AC9-5C45B28FCB1F}"/>
-    <dgm:cxn modelId="{2D564288-4284-45CE-8232-151068B56710}" type="presOf" srcId="{10CD0FB0-F964-47FE-8107-58FB77282F88}" destId="{3E1AEA04-6E5B-48C8-A007-B09A7ACB56D7}" srcOrd="0" destOrd="4" presId="urn:microsoft.com/office/officeart/2005/8/layout/process3"/>
-    <dgm:cxn modelId="{EEDEAF89-99CD-4637-BDCA-8A77DEB9402F}" type="presOf" srcId="{ED49DB6E-0327-4DE7-8075-CE7F4BBB8110}" destId="{21E181B6-3FD8-4DAC-8298-5C17B4D5C3CD}" srcOrd="0" destOrd="8" presId="urn:microsoft.com/office/officeart/2005/8/layout/process3"/>
-    <dgm:cxn modelId="{F32F778A-8821-4133-AE8B-6AC6C1CA3B31}" type="presOf" srcId="{2A79F2AC-5078-4040-B225-0D20377FE91A}" destId="{ADD5CEE7-27C8-42DA-8252-6E15D178100A}" srcOrd="0" destOrd="0" presId="urn:microsoft.com/office/officeart/2005/8/layout/process3"/>
-    <dgm:cxn modelId="{FE82DD8E-744B-4533-ABCE-16B6675508B4}" type="presOf" srcId="{729818DC-1341-4A35-8637-D3A777AC3E87}" destId="{E53EF5A2-9B51-4860-94D7-DCC04E9C7EA3}" srcOrd="1" destOrd="0" presId="urn:microsoft.com/office/officeart/2005/8/layout/process3"/>
-    <dgm:cxn modelId="{B9F4498F-5302-49C5-8D1E-04DA80C27D8B}" srcId="{DE1A03B6-942F-4AC6-80BB-76731E8D619A}" destId="{2A79F2AC-5078-4040-B225-0D20377FE91A}" srcOrd="2" destOrd="0" parTransId="{25BF6886-A072-4D60-9A1A-8C9333F04790}" sibTransId="{47AE645E-3A8A-4EE9-9878-F13939902DBA}"/>
-    <dgm:cxn modelId="{CACCFB8F-DA04-44F4-A781-682E470F71B6}" type="presOf" srcId="{64A19925-D214-4FAB-B3C9-2F981DA2DA0B}" destId="{47128B4D-493E-4820-9C21-A0EBC656A3CC}" srcOrd="1" destOrd="0" presId="urn:microsoft.com/office/officeart/2005/8/layout/process3"/>
-    <dgm:cxn modelId="{7F11B496-6B5A-496F-B082-82B849EED1E7}" type="presOf" srcId="{729818DC-1341-4A35-8637-D3A777AC3E87}" destId="{32173E52-1296-4551-B90B-3F07AE8E0306}" srcOrd="0" destOrd="0" presId="urn:microsoft.com/office/officeart/2005/8/layout/process3"/>
-    <dgm:cxn modelId="{FD2555A0-BC6F-4062-8B1D-DC3432ACA439}" type="presOf" srcId="{3C2AB5AB-129C-45E8-AB3F-B2E063D5FFA7}" destId="{5E24D3A6-8425-4985-9887-3007A5739949}" srcOrd="1" destOrd="0" presId="urn:microsoft.com/office/officeart/2005/8/layout/process3"/>
-    <dgm:cxn modelId="{8C036EA7-174E-45BD-ABF1-FFFE4BFCC187}" type="presOf" srcId="{488BDB2D-2A42-4C8C-A46D-EDEEE03EAD4B}" destId="{183961AC-A0B8-430D-A843-DDA4C608F438}" srcOrd="1" destOrd="0" presId="urn:microsoft.com/office/officeart/2005/8/layout/process3"/>
-    <dgm:cxn modelId="{DAF8DEAC-0727-4169-8648-A77D599AFDE8}" type="presOf" srcId="{3C2AB5AB-129C-45E8-AB3F-B2E063D5FFA7}" destId="{3B5AE309-7480-4D63-828A-A02F268BBCA1}" srcOrd="0" destOrd="0" presId="urn:microsoft.com/office/officeart/2005/8/layout/process3"/>
-    <dgm:cxn modelId="{3483F6AD-CB79-4655-8CF1-CC6A19A12DCD}" type="presOf" srcId="{BE65191F-45D5-4DA5-A055-2090826717D9}" destId="{21E181B6-3FD8-4DAC-8298-5C17B4D5C3CD}" srcOrd="0" destOrd="6" presId="urn:microsoft.com/office/officeart/2005/8/layout/process3"/>
-    <dgm:cxn modelId="{CF10E7AE-A657-413A-B730-F7B95F97EAE6}" type="presOf" srcId="{2A79F2AC-5078-4040-B225-0D20377FE91A}" destId="{47295986-DACE-425A-84B0-E664787F38E3}" srcOrd="1" destOrd="0" presId="urn:microsoft.com/office/officeart/2005/8/layout/process3"/>
-    <dgm:cxn modelId="{8AC29BB1-89E0-4D81-B024-2819AC0628A5}" type="presOf" srcId="{1E47FBFF-D017-4B46-A983-B9523E1FFDEF}" destId="{3E1AEA04-6E5B-48C8-A007-B09A7ACB56D7}" srcOrd="0" destOrd="0" presId="urn:microsoft.com/office/officeart/2005/8/layout/process3"/>
-    <dgm:cxn modelId="{294459B9-EB95-4088-9D22-165E5C6ABBB0}" type="presOf" srcId="{626915AE-A3F8-43FC-97E4-B39D0BF87DD2}" destId="{3E1AEA04-6E5B-48C8-A007-B09A7ACB56D7}" srcOrd="0" destOrd="9" presId="urn:microsoft.com/office/officeart/2005/8/layout/process3"/>
-    <dgm:cxn modelId="{EC7A20BF-1A93-40D3-A099-98234F66C028}" type="presOf" srcId="{DE1A03B6-942F-4AC6-80BB-76731E8D619A}" destId="{D2804D6F-8D6A-4F26-B3AA-40B5BCF75FB4}" srcOrd="0" destOrd="0" presId="urn:microsoft.com/office/officeart/2005/8/layout/process3"/>
-    <dgm:cxn modelId="{CC92E9C4-B50B-4DC6-B165-3DF8E37510A5}" srcId="{729818DC-1341-4A35-8637-D3A777AC3E87}" destId="{146CE24C-1C65-4A16-A600-DE980C859DD9}" srcOrd="0" destOrd="0" parTransId="{20CEFF71-889E-4703-9EBA-465A239D2749}" sibTransId="{3F143513-E1A2-44F9-8D40-991EF5BD685F}"/>
-    <dgm:cxn modelId="{5B579AC6-4A02-49E3-AC97-F6BFF7EB3704}" srcId="{2A79F2AC-5078-4040-B225-0D20377FE91A}" destId="{10CD0FB0-F964-47FE-8107-58FB77282F88}" srcOrd="4" destOrd="0" parTransId="{81BB4A6B-C9F5-4AD8-8502-5F7CCF378D1E}" sibTransId="{0A905215-4212-4FEA-887E-4A28CD91897C}"/>
-    <dgm:cxn modelId="{A07779CA-1BD7-4FE5-9E0F-739AB43A860C}" srcId="{729818DC-1341-4A35-8637-D3A777AC3E87}" destId="{D5A8F026-7142-42F1-AFC2-7347F4BE6F7A}" srcOrd="7" destOrd="0" parTransId="{A05C2651-41C7-4AB1-AFEF-C60B47E2B541}" sibTransId="{31D3583F-1203-4D45-AF8E-2DE85EC1D032}"/>
-    <dgm:cxn modelId="{18E24ECC-4B50-4E72-B1BC-DB85A8A1B6F4}" type="presOf" srcId="{1F28B47D-CC2F-41C0-AFB6-236FB8EDC888}" destId="{10C42DA6-E5EC-432C-9EE3-A0B3DBD402BC}" srcOrd="0" destOrd="1" presId="urn:microsoft.com/office/officeart/2005/8/layout/process3"/>
-    <dgm:cxn modelId="{12DBFACC-824A-4D74-9D5C-74DF7A9D9F6A}" srcId="{729818DC-1341-4A35-8637-D3A777AC3E87}" destId="{26DF6FB2-1631-4CEB-9806-8B39E2EBC22C}" srcOrd="5" destOrd="0" parTransId="{315E9D56-F7A6-47A9-908E-095E4812FAA4}" sibTransId="{38EA71A0-5DAC-4098-BF93-6EE8FA3D08CD}"/>
-    <dgm:cxn modelId="{46B42CCE-9843-488A-BBAB-7FC1F019CD89}" type="presOf" srcId="{814FE300-628C-4BBC-8333-CB051A7DC9DF}" destId="{21E181B6-3FD8-4DAC-8298-5C17B4D5C3CD}" srcOrd="0" destOrd="4" presId="urn:microsoft.com/office/officeart/2005/8/layout/process3"/>
-    <dgm:cxn modelId="{07826DD5-B451-41E8-BD97-C2B924B491F3}" type="presOf" srcId="{64A19925-D214-4FAB-B3C9-2F981DA2DA0B}" destId="{97B330FB-580F-44AC-B8D7-C75FE33FD7C0}" srcOrd="0" destOrd="0" presId="urn:microsoft.com/office/officeart/2005/8/layout/process3"/>
-    <dgm:cxn modelId="{56E7E4D7-96C1-4423-A771-E2CE13A2488E}" srcId="{2A79F2AC-5078-4040-B225-0D20377FE91A}" destId="{DFEB15FD-2194-47F0-8809-6ABBBB6D7A7E}" srcOrd="3" destOrd="0" parTransId="{5F2184DE-FF37-421D-B6A2-36E5D588C4E1}" sibTransId="{02E15070-D612-4335-9F73-FE8D6BAB765B}"/>
-    <dgm:cxn modelId="{482C92D8-0C14-4129-8A19-4E2E07C2B7AF}" type="presOf" srcId="{DFEB15FD-2194-47F0-8809-6ABBBB6D7A7E}" destId="{3E1AEA04-6E5B-48C8-A007-B09A7ACB56D7}" srcOrd="0" destOrd="3" presId="urn:microsoft.com/office/officeart/2005/8/layout/process3"/>
-    <dgm:cxn modelId="{380A50DB-012A-44B4-98E4-40F9A7F0BF3F}" type="presOf" srcId="{38CABA7B-C936-4B33-9142-B6BA85191A9D}" destId="{21E181B6-3FD8-4DAC-8298-5C17B4D5C3CD}" srcOrd="0" destOrd="3" presId="urn:microsoft.com/office/officeart/2005/8/layout/process3"/>
-    <dgm:cxn modelId="{6F9E66E1-7BBF-4C02-B8D5-0341BBEF30AA}" type="presOf" srcId="{146CE24C-1C65-4A16-A600-DE980C859DD9}" destId="{21E181B6-3FD8-4DAC-8298-5C17B4D5C3CD}" srcOrd="0" destOrd="0" presId="urn:microsoft.com/office/officeart/2005/8/layout/process3"/>
-    <dgm:cxn modelId="{7B13FCE3-53F1-461F-8B9A-338025CE94EE}" srcId="{3C2AB5AB-129C-45E8-AB3F-B2E063D5FFA7}" destId="{FBA2E943-9C28-4927-AACA-EB33912D2FFC}" srcOrd="2" destOrd="0" parTransId="{ACA46B8B-683D-4B0C-AE7C-02CFBB96C8AD}" sibTransId="{064E41D4-8A4E-4C6F-AD96-2E643AB8ADDF}"/>
-    <dgm:cxn modelId="{8219EBE5-4539-4EB0-9B14-BF854DC9E49E}" type="presOf" srcId="{EA4642D8-6410-49BA-8804-12EDE38A747A}" destId="{10C42DA6-E5EC-432C-9EE3-A0B3DBD402BC}" srcOrd="0" destOrd="3" presId="urn:microsoft.com/office/officeart/2005/8/layout/process3"/>
-    <dgm:cxn modelId="{47A26AE8-FBA2-4C16-889D-2E35D695795E}" srcId="{3C2AB5AB-129C-45E8-AB3F-B2E063D5FFA7}" destId="{EA4642D8-6410-49BA-8804-12EDE38A747A}" srcOrd="3" destOrd="0" parTransId="{126C1E3B-53D2-4EAB-83DF-C0460A50E549}" sibTransId="{D197E42E-4AD7-4824-A683-788AD552FCE5}"/>
-    <dgm:cxn modelId="{A70E45E9-349D-45FF-9C50-B1B23B3ABF1E}" type="presOf" srcId="{D5A8F026-7142-42F1-AFC2-7347F4BE6F7A}" destId="{21E181B6-3FD8-4DAC-8298-5C17B4D5C3CD}" srcOrd="0" destOrd="7" presId="urn:microsoft.com/office/officeart/2005/8/layout/process3"/>
-    <dgm:cxn modelId="{19E65AE9-B443-457D-8506-5DAEC420CC03}" srcId="{2A79F2AC-5078-4040-B225-0D20377FE91A}" destId="{4D611FD3-9D24-4597-860A-02E04BD7CD7E}" srcOrd="7" destOrd="0" parTransId="{A3A700AA-D272-4F26-BB0D-CDC082126641}" sibTransId="{DA24191E-E133-46B5-AF9B-9594E784AE4D}"/>
-    <dgm:cxn modelId="{2133CBE9-A4A8-4E96-BBE2-5B0BAEC0658D}" srcId="{2A79F2AC-5078-4040-B225-0D20377FE91A}" destId="{81959AD0-A4CB-4A05-8512-6DC36906EA3E}" srcOrd="8" destOrd="0" parTransId="{FA9953CB-19D2-4959-B4E2-9EF13AA51FB7}" sibTransId="{0EA99E8A-D505-4BBB-BB14-DF90E1A75A33}"/>
-    <dgm:cxn modelId="{743BBBEA-7B36-4865-BD51-337F95FD4352}" type="presOf" srcId="{126AF485-0AC1-405C-9F7E-CC6D5C3CE58F}" destId="{3E1AEA04-6E5B-48C8-A007-B09A7ACB56D7}" srcOrd="0" destOrd="5" presId="urn:microsoft.com/office/officeart/2005/8/layout/process3"/>
-    <dgm:cxn modelId="{EF926CEF-7C1E-4E54-BFC5-8CC0D77261A8}" srcId="{729818DC-1341-4A35-8637-D3A777AC3E87}" destId="{814FE300-628C-4BBC-8333-CB051A7DC9DF}" srcOrd="4" destOrd="0" parTransId="{EFFB84BC-62A7-4DC1-BE65-185B989FEE87}" sibTransId="{B33E61F5-7102-4BD2-8CCE-BC4EB3930B54}"/>
-    <dgm:cxn modelId="{92F5ABEF-BCD6-4C52-994C-F90B40442BEB}" type="presOf" srcId="{2410EAE4-89FA-42F8-823D-1F093CEFA2BF}" destId="{3E1AEA04-6E5B-48C8-A007-B09A7ACB56D7}" srcOrd="0" destOrd="2" presId="urn:microsoft.com/office/officeart/2005/8/layout/process3"/>
-    <dgm:cxn modelId="{071618F8-8396-4193-9261-DFC1A11D3A03}" srcId="{729818DC-1341-4A35-8637-D3A777AC3E87}" destId="{38CABA7B-C936-4B33-9142-B6BA85191A9D}" srcOrd="3" destOrd="0" parTransId="{B8F5CB22-FE4A-46A7-87F4-F5D5111EF4AA}" sibTransId="{3689CC6D-9C9E-4E78-9341-C7EE2E3AB1FC}"/>
-    <dgm:cxn modelId="{C80CA2F9-EF80-43C5-85CB-DFB5B9DBFA41}" srcId="{3C2AB5AB-129C-45E8-AB3F-B2E063D5FFA7}" destId="{A35A2B80-F5F7-404F-BA73-398735E4BA2C}" srcOrd="0" destOrd="0" parTransId="{51C69587-6425-41F8-AB94-FABEB78B19AC}" sibTransId="{6842B20C-0753-4B38-B4D1-568764A2E096}"/>
-    <dgm:cxn modelId="{DE1DBBFB-AC45-47CB-8D94-AA3199617E83}" srcId="{2A79F2AC-5078-4040-B225-0D20377FE91A}" destId="{2410EAE4-89FA-42F8-823D-1F093CEFA2BF}" srcOrd="2" destOrd="0" parTransId="{60F01604-6DA8-4C3D-9FBB-642E00274501}" sibTransId="{CBF86568-7B51-47A0-9490-E940963A9328}"/>
-    <dgm:cxn modelId="{905ECDFD-0151-4CA3-BF3C-58469A28399C}" srcId="{2A79F2AC-5078-4040-B225-0D20377FE91A}" destId="{906A08C9-DD99-4AFF-AA20-AEFAF7A62956}" srcOrd="6" destOrd="0" parTransId="{8966DBCE-2EFB-4C60-8C18-97620A549E6B}" sibTransId="{F15B2A55-1E80-4377-8982-F0B43115915F}"/>
-    <dgm:cxn modelId="{E08F2E52-F1A1-407C-AAB0-5D5BF741037C}" type="presParOf" srcId="{D2804D6F-8D6A-4F26-B3AA-40B5BCF75FB4}" destId="{CDF2C51C-7D96-4615-8EE5-902DE3D5F59A}" srcOrd="0" destOrd="0" presId="urn:microsoft.com/office/officeart/2005/8/layout/process3"/>
-    <dgm:cxn modelId="{BC2171FB-56C8-474D-8773-5FDBEFA9F66B}" type="presParOf" srcId="{CDF2C51C-7D96-4615-8EE5-902DE3D5F59A}" destId="{3B5AE309-7480-4D63-828A-A02F268BBCA1}" srcOrd="0" destOrd="0" presId="urn:microsoft.com/office/officeart/2005/8/layout/process3"/>
-    <dgm:cxn modelId="{262072C3-6C43-4D9B-AC9D-EB058AE75BA2}" type="presParOf" srcId="{CDF2C51C-7D96-4615-8EE5-902DE3D5F59A}" destId="{5E24D3A6-8425-4985-9887-3007A5739949}" srcOrd="1" destOrd="0" presId="urn:microsoft.com/office/officeart/2005/8/layout/process3"/>
-    <dgm:cxn modelId="{1E265812-5AA9-436B-9217-BB968D907EE7}" type="presParOf" srcId="{CDF2C51C-7D96-4615-8EE5-902DE3D5F59A}" destId="{10C42DA6-E5EC-432C-9EE3-A0B3DBD402BC}" srcOrd="2" destOrd="0" presId="urn:microsoft.com/office/officeart/2005/8/layout/process3"/>
-    <dgm:cxn modelId="{D6463AB7-0A4C-4D5E-A4FD-AC149B2815E7}" type="presParOf" srcId="{D2804D6F-8D6A-4F26-B3AA-40B5BCF75FB4}" destId="{5E6ADCBE-372D-4BA9-A979-5A31ECDCDC40}" srcOrd="1" destOrd="0" presId="urn:microsoft.com/office/officeart/2005/8/layout/process3"/>
-    <dgm:cxn modelId="{7FC85009-C270-4771-B67A-5342028019F9}" type="presParOf" srcId="{5E6ADCBE-372D-4BA9-A979-5A31ECDCDC40}" destId="{183961AC-A0B8-430D-A843-DDA4C608F438}" srcOrd="0" destOrd="0" presId="urn:microsoft.com/office/officeart/2005/8/layout/process3"/>
-    <dgm:cxn modelId="{E65040F3-D113-431E-BDBF-8F9ECA109CFC}" type="presParOf" srcId="{D2804D6F-8D6A-4F26-B3AA-40B5BCF75FB4}" destId="{2E8942A8-400E-4554-B31F-AB508087AFC9}" srcOrd="2" destOrd="0" presId="urn:microsoft.com/office/officeart/2005/8/layout/process3"/>
-    <dgm:cxn modelId="{FCABCCF1-B9F4-4433-99FD-7E803CE13A80}" type="presParOf" srcId="{2E8942A8-400E-4554-B31F-AB508087AFC9}" destId="{32173E52-1296-4551-B90B-3F07AE8E0306}" srcOrd="0" destOrd="0" presId="urn:microsoft.com/office/officeart/2005/8/layout/process3"/>
-    <dgm:cxn modelId="{EA53D431-4E70-4D47-AD5B-D7F261403F71}" type="presParOf" srcId="{2E8942A8-400E-4554-B31F-AB508087AFC9}" destId="{E53EF5A2-9B51-4860-94D7-DCC04E9C7EA3}" srcOrd="1" destOrd="0" presId="urn:microsoft.com/office/officeart/2005/8/layout/process3"/>
-    <dgm:cxn modelId="{EAE042A2-4DAD-4F65-AF2A-6FA5C3773156}" type="presParOf" srcId="{2E8942A8-400E-4554-B31F-AB508087AFC9}" destId="{21E181B6-3FD8-4DAC-8298-5C17B4D5C3CD}" srcOrd="2" destOrd="0" presId="urn:microsoft.com/office/officeart/2005/8/layout/process3"/>
-    <dgm:cxn modelId="{54191651-9714-446A-89D3-60A5F582677F}" type="presParOf" srcId="{D2804D6F-8D6A-4F26-B3AA-40B5BCF75FB4}" destId="{97B330FB-580F-44AC-B8D7-C75FE33FD7C0}" srcOrd="3" destOrd="0" presId="urn:microsoft.com/office/officeart/2005/8/layout/process3"/>
-    <dgm:cxn modelId="{21801C49-8F8D-4CCD-8ACE-AF85CD21604E}" type="presParOf" srcId="{97B330FB-580F-44AC-B8D7-C75FE33FD7C0}" destId="{47128B4D-493E-4820-9C21-A0EBC656A3CC}" srcOrd="0" destOrd="0" presId="urn:microsoft.com/office/officeart/2005/8/layout/process3"/>
-    <dgm:cxn modelId="{6B15ACAB-8573-40FD-800D-5EE5DD6E0521}" type="presParOf" srcId="{D2804D6F-8D6A-4F26-B3AA-40B5BCF75FB4}" destId="{F7D49382-3373-415B-873D-27A00D15CB86}" srcOrd="4" destOrd="0" presId="urn:microsoft.com/office/officeart/2005/8/layout/process3"/>
-    <dgm:cxn modelId="{7B6F17E2-F405-4387-BE3B-B95F6A1F15BA}" type="presParOf" srcId="{F7D49382-3373-415B-873D-27A00D15CB86}" destId="{ADD5CEE7-27C8-42DA-8252-6E15D178100A}" srcOrd="0" destOrd="0" presId="urn:microsoft.com/office/officeart/2005/8/layout/process3"/>
-    <dgm:cxn modelId="{E582F458-F458-444D-8C3A-74C2C4231B16}" type="presParOf" srcId="{F7D49382-3373-415B-873D-27A00D15CB86}" destId="{47295986-DACE-425A-84B0-E664787F38E3}" srcOrd="1" destOrd="0" presId="urn:microsoft.com/office/officeart/2005/8/layout/process3"/>
-    <dgm:cxn modelId="{5D47F96F-B08B-47CA-BB42-B960219A0158}" type="presParOf" srcId="{F7D49382-3373-415B-873D-27A00D15CB86}" destId="{3E1AEA04-6E5B-48C8-A007-B09A7ACB56D7}" srcOrd="2" destOrd="0" presId="urn:microsoft.com/office/officeart/2005/8/layout/process3"/>
-  </dgm:cxnLst>
-  <dgm:bg/>
-  <dgm:whole/>
-  <dgm:extLst>
-    <a:ext uri="http://schemas.microsoft.com/office/drawing/2008/diagram">
-      <dsp:dataModelExt xmlns:dsp="http://schemas.microsoft.com/office/drawing/2008/diagram" relId="rId7" minVer="http://schemas.openxmlformats.org/drawingml/2006/diagram"/>
-    </a:ext>
-  </dgm:extLst>
-</dgm:dataModel>
-</file>
-
 <file path=ppt/diagrams/drawing1.xml><?xml version="1.0" encoding="utf-8"?>
 <dsp:drawing xmlns:dgm="http://schemas.openxmlformats.org/drawingml/2006/diagram" xmlns:dsp="http://schemas.microsoft.com/office/drawing/2008/diagram" xmlns:a="http://schemas.openxmlformats.org/drawingml/2006/main">
   <dsp:spTree>
@@ -11534,1834 +8014,6 @@
 </dsp:drawing>
 </file>
 
-<file path=ppt/diagrams/drawing2.xml><?xml version="1.0" encoding="utf-8"?>
-<dsp:drawing xmlns:dgm="http://schemas.openxmlformats.org/drawingml/2006/diagram" xmlns:dsp="http://schemas.microsoft.com/office/drawing/2008/diagram" xmlns:a="http://schemas.openxmlformats.org/drawingml/2006/main">
-  <dsp:spTree>
-    <dsp:nvGrpSpPr>
-      <dsp:cNvPr id="0" name=""/>
-      <dsp:cNvGrpSpPr/>
-    </dsp:nvGrpSpPr>
-    <dsp:grpSpPr/>
-    <dsp:sp modelId="{5E24D3A6-8425-4985-9887-3007A5739949}">
-      <dsp:nvSpPr>
-        <dsp:cNvPr id="0" name=""/>
-        <dsp:cNvSpPr/>
-      </dsp:nvSpPr>
-      <dsp:spPr>
-        <a:xfrm>
-          <a:off x="4912" y="1211016"/>
-          <a:ext cx="2233824" cy="820800"/>
-        </a:xfrm>
-        <a:prstGeom prst="roundRect">
-          <a:avLst>
-            <a:gd name="adj" fmla="val 10000"/>
-          </a:avLst>
-        </a:prstGeom>
-        <a:solidFill>
-          <a:schemeClr val="accent1">
-            <a:hueOff val="0"/>
-            <a:satOff val="0"/>
-            <a:lumOff val="0"/>
-            <a:alphaOff val="0"/>
-          </a:schemeClr>
-        </a:solidFill>
-        <a:ln w="12700" cap="flat" cmpd="sng" algn="ctr">
-          <a:solidFill>
-            <a:schemeClr val="lt1">
-              <a:hueOff val="0"/>
-              <a:satOff val="0"/>
-              <a:lumOff val="0"/>
-              <a:alphaOff val="0"/>
-            </a:schemeClr>
-          </a:solidFill>
-          <a:prstDash val="solid"/>
-          <a:miter lim="800000"/>
-        </a:ln>
-        <a:effectLst/>
-      </dsp:spPr>
-      <dsp:style>
-        <a:lnRef idx="2">
-          <a:scrgbClr r="0" g="0" b="0"/>
-        </a:lnRef>
-        <a:fillRef idx="1">
-          <a:scrgbClr r="0" g="0" b="0"/>
-        </a:fillRef>
-        <a:effectRef idx="0">
-          <a:scrgbClr r="0" g="0" b="0"/>
-        </a:effectRef>
-        <a:fontRef idx="minor">
-          <a:schemeClr val="lt1"/>
-        </a:fontRef>
-      </dsp:style>
-      <dsp:txBody>
-        <a:bodyPr spcFirstLastPara="0" vert="horz" wrap="square" lIns="135128" tIns="135128" rIns="135128" bIns="72390" numCol="1" spcCol="1270" anchor="t" anchorCtr="0">
-          <a:noAutofit/>
-        </a:bodyPr>
-        <a:lstStyle/>
-        <a:p>
-          <a:pPr marL="0" lvl="0" indent="0" algn="l" defTabSz="844550">
-            <a:lnSpc>
-              <a:spcPct val="90000"/>
-            </a:lnSpc>
-            <a:spcBef>
-              <a:spcPct val="0"/>
-            </a:spcBef>
-            <a:spcAft>
-              <a:spcPct val="35000"/>
-            </a:spcAft>
-            <a:buNone/>
-          </a:pPr>
-          <a:r>
-            <a:rPr lang="en-GB" sz="1900" kern="1200" dirty="0"/>
-            <a:t>Sources</a:t>
-          </a:r>
-        </a:p>
-      </dsp:txBody>
-      <dsp:txXfrm>
-        <a:off x="4912" y="1211016"/>
-        <a:ext cx="2233824" cy="547200"/>
-      </dsp:txXfrm>
-    </dsp:sp>
-    <dsp:sp modelId="{10C42DA6-E5EC-432C-9EE3-A0B3DBD402BC}">
-      <dsp:nvSpPr>
-        <dsp:cNvPr id="0" name=""/>
-        <dsp:cNvSpPr/>
-      </dsp:nvSpPr>
-      <dsp:spPr>
-        <a:xfrm>
-          <a:off x="462443" y="1758216"/>
-          <a:ext cx="2233824" cy="3033112"/>
-        </a:xfrm>
-        <a:prstGeom prst="roundRect">
-          <a:avLst>
-            <a:gd name="adj" fmla="val 10000"/>
-          </a:avLst>
-        </a:prstGeom>
-        <a:solidFill>
-          <a:schemeClr val="lt1">
-            <a:alpha val="90000"/>
-            <a:hueOff val="0"/>
-            <a:satOff val="0"/>
-            <a:lumOff val="0"/>
-            <a:alphaOff val="0"/>
-          </a:schemeClr>
-        </a:solidFill>
-        <a:ln w="12700" cap="flat" cmpd="sng" algn="ctr">
-          <a:solidFill>
-            <a:schemeClr val="accent1">
-              <a:hueOff val="0"/>
-              <a:satOff val="0"/>
-              <a:lumOff val="0"/>
-              <a:alphaOff val="0"/>
-            </a:schemeClr>
-          </a:solidFill>
-          <a:prstDash val="solid"/>
-          <a:miter lim="800000"/>
-        </a:ln>
-        <a:effectLst/>
-      </dsp:spPr>
-      <dsp:style>
-        <a:lnRef idx="2">
-          <a:scrgbClr r="0" g="0" b="0"/>
-        </a:lnRef>
-        <a:fillRef idx="1">
-          <a:scrgbClr r="0" g="0" b="0"/>
-        </a:fillRef>
-        <a:effectRef idx="0">
-          <a:scrgbClr r="0" g="0" b="0"/>
-        </a:effectRef>
-        <a:fontRef idx="minor"/>
-      </dsp:style>
-      <dsp:txBody>
-        <a:bodyPr spcFirstLastPara="0" vert="horz" wrap="square" lIns="135128" tIns="135128" rIns="135128" bIns="135128" numCol="1" spcCol="1270" anchor="t" anchorCtr="0">
-          <a:noAutofit/>
-        </a:bodyPr>
-        <a:lstStyle/>
-        <a:p>
-          <a:pPr marL="171450" lvl="1" indent="-171450" algn="l" defTabSz="844550">
-            <a:lnSpc>
-              <a:spcPct val="90000"/>
-            </a:lnSpc>
-            <a:spcBef>
-              <a:spcPct val="0"/>
-            </a:spcBef>
-            <a:spcAft>
-              <a:spcPct val="15000"/>
-            </a:spcAft>
-            <a:buChar char="•"/>
-          </a:pPr>
-          <a:r>
-            <a:rPr lang="en-GB" sz="1900" kern="1200" dirty="0"/>
-            <a:t>Customizations</a:t>
-          </a:r>
-        </a:p>
-        <a:p>
-          <a:pPr marL="171450" lvl="1" indent="-171450" algn="l" defTabSz="844550">
-            <a:lnSpc>
-              <a:spcPct val="90000"/>
-            </a:lnSpc>
-            <a:spcBef>
-              <a:spcPct val="0"/>
-            </a:spcBef>
-            <a:spcAft>
-              <a:spcPct val="15000"/>
-            </a:spcAft>
-            <a:buChar char="•"/>
-          </a:pPr>
-          <a:r>
-            <a:rPr lang="en-GB" sz="1900" kern="1200" dirty="0"/>
-            <a:t>.NET Code (Plug-ins, CRM Packages)</a:t>
-          </a:r>
-        </a:p>
-        <a:p>
-          <a:pPr marL="171450" lvl="1" indent="-171450" algn="l" defTabSz="844550">
-            <a:lnSpc>
-              <a:spcPct val="90000"/>
-            </a:lnSpc>
-            <a:spcBef>
-              <a:spcPct val="0"/>
-            </a:spcBef>
-            <a:spcAft>
-              <a:spcPct val="15000"/>
-            </a:spcAft>
-            <a:buChar char="•"/>
-          </a:pPr>
-          <a:r>
-            <a:rPr lang="en-GB" sz="1900" kern="1200" dirty="0"/>
-            <a:t>Web Resources</a:t>
-          </a:r>
-        </a:p>
-        <a:p>
-          <a:pPr marL="171450" lvl="1" indent="-171450" algn="l" defTabSz="844550">
-            <a:lnSpc>
-              <a:spcPct val="90000"/>
-            </a:lnSpc>
-            <a:spcBef>
-              <a:spcPct val="0"/>
-            </a:spcBef>
-            <a:spcAft>
-              <a:spcPct val="15000"/>
-            </a:spcAft>
-            <a:buChar char="•"/>
-          </a:pPr>
-          <a:r>
-            <a:rPr lang="en-GB" sz="1900" kern="1200" dirty="0"/>
-            <a:t>Custom Controls</a:t>
-          </a:r>
-        </a:p>
-        <a:p>
-          <a:pPr marL="171450" lvl="1" indent="-171450" algn="l" defTabSz="844550">
-            <a:lnSpc>
-              <a:spcPct val="90000"/>
-            </a:lnSpc>
-            <a:spcBef>
-              <a:spcPct val="0"/>
-            </a:spcBef>
-            <a:spcAft>
-              <a:spcPct val="15000"/>
-            </a:spcAft>
-            <a:buChar char="•"/>
-          </a:pPr>
-          <a:r>
-            <a:rPr lang="en-GB" sz="1900" kern="1200" dirty="0"/>
-            <a:t>Reference Data</a:t>
-          </a:r>
-        </a:p>
-      </dsp:txBody>
-      <dsp:txXfrm>
-        <a:off x="527869" y="1823642"/>
-        <a:ext cx="2102972" cy="2902260"/>
-      </dsp:txXfrm>
-    </dsp:sp>
-    <dsp:sp modelId="{5E6ADCBE-372D-4BA9-A979-5A31ECDCDC40}">
-      <dsp:nvSpPr>
-        <dsp:cNvPr id="0" name=""/>
-        <dsp:cNvSpPr/>
-      </dsp:nvSpPr>
-      <dsp:spPr>
-        <a:xfrm>
-          <a:off x="2577376" y="1206537"/>
-          <a:ext cx="717916" cy="556157"/>
-        </a:xfrm>
-        <a:prstGeom prst="rightArrow">
-          <a:avLst>
-            <a:gd name="adj1" fmla="val 60000"/>
-            <a:gd name="adj2" fmla="val 50000"/>
-          </a:avLst>
-        </a:prstGeom>
-        <a:solidFill>
-          <a:schemeClr val="tx2"/>
-        </a:solidFill>
-        <a:ln>
-          <a:noFill/>
-        </a:ln>
-        <a:effectLst/>
-      </dsp:spPr>
-      <dsp:style>
-        <a:lnRef idx="0">
-          <a:scrgbClr r="0" g="0" b="0"/>
-        </a:lnRef>
-        <a:fillRef idx="1">
-          <a:scrgbClr r="0" g="0" b="0"/>
-        </a:fillRef>
-        <a:effectRef idx="0">
-          <a:scrgbClr r="0" g="0" b="0"/>
-        </a:effectRef>
-        <a:fontRef idx="minor">
-          <a:schemeClr val="lt1"/>
-        </a:fontRef>
-      </dsp:style>
-      <dsp:txBody>
-        <a:bodyPr spcFirstLastPara="0" vert="horz" wrap="square" lIns="0" tIns="0" rIns="0" bIns="0" numCol="1" spcCol="1270" anchor="ctr" anchorCtr="0">
-          <a:noAutofit/>
-        </a:bodyPr>
-        <a:lstStyle/>
-        <a:p>
-          <a:pPr marL="0" lvl="0" indent="0" algn="ctr" defTabSz="666750">
-            <a:lnSpc>
-              <a:spcPct val="90000"/>
-            </a:lnSpc>
-            <a:spcBef>
-              <a:spcPct val="0"/>
-            </a:spcBef>
-            <a:spcAft>
-              <a:spcPct val="35000"/>
-            </a:spcAft>
-            <a:buNone/>
-          </a:pPr>
-          <a:endParaRPr lang="en-GB" sz="1500" kern="1200"/>
-        </a:p>
-      </dsp:txBody>
-      <dsp:txXfrm>
-        <a:off x="2577376" y="1317768"/>
-        <a:ext cx="551069" cy="333695"/>
-      </dsp:txXfrm>
-    </dsp:sp>
-    <dsp:sp modelId="{E53EF5A2-9B51-4860-94D7-DCC04E9C7EA3}">
-      <dsp:nvSpPr>
-        <dsp:cNvPr id="0" name=""/>
-        <dsp:cNvSpPr/>
-      </dsp:nvSpPr>
-      <dsp:spPr>
-        <a:xfrm>
-          <a:off x="3593295" y="1211016"/>
-          <a:ext cx="2233824" cy="820800"/>
-        </a:xfrm>
-        <a:prstGeom prst="roundRect">
-          <a:avLst>
-            <a:gd name="adj" fmla="val 10000"/>
-          </a:avLst>
-        </a:prstGeom>
-        <a:solidFill>
-          <a:schemeClr val="accent1">
-            <a:hueOff val="0"/>
-            <a:satOff val="0"/>
-            <a:lumOff val="0"/>
-            <a:alphaOff val="0"/>
-          </a:schemeClr>
-        </a:solidFill>
-        <a:ln w="12700" cap="flat" cmpd="sng" algn="ctr">
-          <a:solidFill>
-            <a:schemeClr val="lt1">
-              <a:hueOff val="0"/>
-              <a:satOff val="0"/>
-              <a:lumOff val="0"/>
-              <a:alphaOff val="0"/>
-            </a:schemeClr>
-          </a:solidFill>
-          <a:prstDash val="solid"/>
-          <a:miter lim="800000"/>
-        </a:ln>
-        <a:effectLst/>
-      </dsp:spPr>
-      <dsp:style>
-        <a:lnRef idx="2">
-          <a:scrgbClr r="0" g="0" b="0"/>
-        </a:lnRef>
-        <a:fillRef idx="1">
-          <a:scrgbClr r="0" g="0" b="0"/>
-        </a:fillRef>
-        <a:effectRef idx="0">
-          <a:scrgbClr r="0" g="0" b="0"/>
-        </a:effectRef>
-        <a:fontRef idx="minor">
-          <a:schemeClr val="lt1"/>
-        </a:fontRef>
-      </dsp:style>
-      <dsp:txBody>
-        <a:bodyPr spcFirstLastPara="0" vert="horz" wrap="square" lIns="135128" tIns="135128" rIns="135128" bIns="72390" numCol="1" spcCol="1270" anchor="t" anchorCtr="0">
-          <a:noAutofit/>
-        </a:bodyPr>
-        <a:lstStyle/>
-        <a:p>
-          <a:pPr marL="0" lvl="0" indent="0" algn="l" defTabSz="844550">
-            <a:lnSpc>
-              <a:spcPct val="90000"/>
-            </a:lnSpc>
-            <a:spcBef>
-              <a:spcPct val="0"/>
-            </a:spcBef>
-            <a:spcAft>
-              <a:spcPct val="35000"/>
-            </a:spcAft>
-            <a:buNone/>
-          </a:pPr>
-          <a:r>
-            <a:rPr lang="en-GB" sz="1900" kern="1200" dirty="0"/>
-            <a:t>Build</a:t>
-          </a:r>
-        </a:p>
-      </dsp:txBody>
-      <dsp:txXfrm>
-        <a:off x="3593295" y="1211016"/>
-        <a:ext cx="2233824" cy="547200"/>
-      </dsp:txXfrm>
-    </dsp:sp>
-    <dsp:sp modelId="{21E181B6-3FD8-4DAC-8298-5C17B4D5C3CD}">
-      <dsp:nvSpPr>
-        <dsp:cNvPr id="0" name=""/>
-        <dsp:cNvSpPr/>
-      </dsp:nvSpPr>
-      <dsp:spPr>
-        <a:xfrm>
-          <a:off x="4050826" y="1758216"/>
-          <a:ext cx="2233824" cy="3033112"/>
-        </a:xfrm>
-        <a:prstGeom prst="roundRect">
-          <a:avLst>
-            <a:gd name="adj" fmla="val 10000"/>
-          </a:avLst>
-        </a:prstGeom>
-        <a:solidFill>
-          <a:schemeClr val="lt1">
-            <a:alpha val="90000"/>
-            <a:hueOff val="0"/>
-            <a:satOff val="0"/>
-            <a:lumOff val="0"/>
-            <a:alphaOff val="0"/>
-          </a:schemeClr>
-        </a:solidFill>
-        <a:ln w="12700" cap="flat" cmpd="sng" algn="ctr">
-          <a:solidFill>
-            <a:schemeClr val="accent1">
-              <a:hueOff val="0"/>
-              <a:satOff val="0"/>
-              <a:lumOff val="0"/>
-              <a:alphaOff val="0"/>
-            </a:schemeClr>
-          </a:solidFill>
-          <a:prstDash val="solid"/>
-          <a:miter lim="800000"/>
-        </a:ln>
-        <a:effectLst/>
-      </dsp:spPr>
-      <dsp:style>
-        <a:lnRef idx="2">
-          <a:scrgbClr r="0" g="0" b="0"/>
-        </a:lnRef>
-        <a:fillRef idx="1">
-          <a:scrgbClr r="0" g="0" b="0"/>
-        </a:fillRef>
-        <a:effectRef idx="0">
-          <a:scrgbClr r="0" g="0" b="0"/>
-        </a:effectRef>
-        <a:fontRef idx="minor"/>
-      </dsp:style>
-      <dsp:txBody>
-        <a:bodyPr spcFirstLastPara="0" vert="horz" wrap="square" lIns="135128" tIns="135128" rIns="135128" bIns="135128" numCol="1" spcCol="1270" anchor="t" anchorCtr="0">
-          <a:noAutofit/>
-        </a:bodyPr>
-        <a:lstStyle/>
-        <a:p>
-          <a:pPr marL="171450" lvl="1" indent="-171450" algn="l" defTabSz="844550">
-            <a:lnSpc>
-              <a:spcPct val="90000"/>
-            </a:lnSpc>
-            <a:spcBef>
-              <a:spcPct val="0"/>
-            </a:spcBef>
-            <a:spcAft>
-              <a:spcPct val="15000"/>
-            </a:spcAft>
-            <a:buChar char="•"/>
-          </a:pPr>
-          <a:r>
-            <a:rPr lang="en-GB" sz="1900" kern="1200" dirty="0"/>
-            <a:t>Pack</a:t>
-          </a:r>
-        </a:p>
-        <a:p>
-          <a:pPr marL="171450" lvl="1" indent="-171450" algn="l" defTabSz="844550">
-            <a:lnSpc>
-              <a:spcPct val="90000"/>
-            </a:lnSpc>
-            <a:spcBef>
-              <a:spcPct val="0"/>
-            </a:spcBef>
-            <a:spcAft>
-              <a:spcPct val="15000"/>
-            </a:spcAft>
-            <a:buChar char="•"/>
-          </a:pPr>
-          <a:r>
-            <a:rPr lang="en-GB" sz="1900" kern="1200" dirty="0"/>
-            <a:t>Compile</a:t>
-          </a:r>
-        </a:p>
-        <a:p>
-          <a:pPr marL="171450" lvl="1" indent="-171450" algn="l" defTabSz="844550">
-            <a:lnSpc>
-              <a:spcPct val="90000"/>
-            </a:lnSpc>
-            <a:spcBef>
-              <a:spcPct val="0"/>
-            </a:spcBef>
-            <a:spcAft>
-              <a:spcPct val="15000"/>
-            </a:spcAft>
-            <a:buChar char="•"/>
-          </a:pPr>
-          <a:r>
-            <a:rPr lang="en-GB" sz="1900" kern="1200" dirty="0"/>
-            <a:t>Sign</a:t>
-          </a:r>
-        </a:p>
-        <a:p>
-          <a:pPr marL="171450" lvl="1" indent="-171450" algn="l" defTabSz="844550">
-            <a:lnSpc>
-              <a:spcPct val="90000"/>
-            </a:lnSpc>
-            <a:spcBef>
-              <a:spcPct val="0"/>
-            </a:spcBef>
-            <a:spcAft>
-              <a:spcPct val="15000"/>
-            </a:spcAft>
-            <a:buChar char="•"/>
-          </a:pPr>
-          <a:r>
-            <a:rPr lang="en-GB" sz="1900" kern="1200" dirty="0"/>
-            <a:t>Minify</a:t>
-          </a:r>
-        </a:p>
-        <a:p>
-          <a:pPr marL="171450" lvl="1" indent="-171450" algn="l" defTabSz="844550">
-            <a:lnSpc>
-              <a:spcPct val="90000"/>
-            </a:lnSpc>
-            <a:spcBef>
-              <a:spcPct val="0"/>
-            </a:spcBef>
-            <a:spcAft>
-              <a:spcPct val="15000"/>
-            </a:spcAft>
-            <a:buChar char="•"/>
-          </a:pPr>
-          <a:r>
-            <a:rPr lang="en-GB" sz="1900" kern="1200" dirty="0"/>
-            <a:t>Version</a:t>
-          </a:r>
-        </a:p>
-        <a:p>
-          <a:pPr marL="171450" lvl="1" indent="-171450" algn="l" defTabSz="844550">
-            <a:lnSpc>
-              <a:spcPct val="90000"/>
-            </a:lnSpc>
-            <a:spcBef>
-              <a:spcPct val="0"/>
-            </a:spcBef>
-            <a:spcAft>
-              <a:spcPct val="15000"/>
-            </a:spcAft>
-            <a:buChar char="•"/>
-          </a:pPr>
-          <a:r>
-            <a:rPr lang="en-GB" sz="1900" kern="1200" dirty="0"/>
-            <a:t>Run Static Analysis</a:t>
-          </a:r>
-        </a:p>
-        <a:p>
-          <a:pPr marL="171450" lvl="1" indent="-171450" algn="l" defTabSz="844550">
-            <a:lnSpc>
-              <a:spcPct val="90000"/>
-            </a:lnSpc>
-            <a:spcBef>
-              <a:spcPct val="0"/>
-            </a:spcBef>
-            <a:spcAft>
-              <a:spcPct val="15000"/>
-            </a:spcAft>
-            <a:buChar char="•"/>
-          </a:pPr>
-          <a:r>
-            <a:rPr lang="en-GB" sz="1900" kern="1200" dirty="0"/>
-            <a:t>Run Unit Tests</a:t>
-          </a:r>
-        </a:p>
-      </dsp:txBody>
-      <dsp:txXfrm>
-        <a:off x="4116252" y="1823642"/>
-        <a:ext cx="2102972" cy="2902260"/>
-      </dsp:txXfrm>
-    </dsp:sp>
-    <dsp:sp modelId="{97B330FB-580F-44AC-B8D7-C75FE33FD7C0}">
-      <dsp:nvSpPr>
-        <dsp:cNvPr id="0" name=""/>
-        <dsp:cNvSpPr/>
-      </dsp:nvSpPr>
-      <dsp:spPr>
-        <a:xfrm>
-          <a:off x="6165759" y="1206537"/>
-          <a:ext cx="717916" cy="556157"/>
-        </a:xfrm>
-        <a:prstGeom prst="rightArrow">
-          <a:avLst>
-            <a:gd name="adj1" fmla="val 60000"/>
-            <a:gd name="adj2" fmla="val 50000"/>
-          </a:avLst>
-        </a:prstGeom>
-        <a:solidFill>
-          <a:schemeClr val="tx2"/>
-        </a:solidFill>
-        <a:ln>
-          <a:noFill/>
-        </a:ln>
-        <a:effectLst/>
-      </dsp:spPr>
-      <dsp:style>
-        <a:lnRef idx="0">
-          <a:scrgbClr r="0" g="0" b="0"/>
-        </a:lnRef>
-        <a:fillRef idx="1">
-          <a:scrgbClr r="0" g="0" b="0"/>
-        </a:fillRef>
-        <a:effectRef idx="0">
-          <a:scrgbClr r="0" g="0" b="0"/>
-        </a:effectRef>
-        <a:fontRef idx="minor">
-          <a:schemeClr val="lt1"/>
-        </a:fontRef>
-      </dsp:style>
-      <dsp:txBody>
-        <a:bodyPr spcFirstLastPara="0" vert="horz" wrap="square" lIns="0" tIns="0" rIns="0" bIns="0" numCol="1" spcCol="1270" anchor="ctr" anchorCtr="0">
-          <a:noAutofit/>
-        </a:bodyPr>
-        <a:lstStyle/>
-        <a:p>
-          <a:pPr marL="0" lvl="0" indent="0" algn="ctr" defTabSz="666750">
-            <a:lnSpc>
-              <a:spcPct val="90000"/>
-            </a:lnSpc>
-            <a:spcBef>
-              <a:spcPct val="0"/>
-            </a:spcBef>
-            <a:spcAft>
-              <a:spcPct val="35000"/>
-            </a:spcAft>
-            <a:buNone/>
-          </a:pPr>
-          <a:endParaRPr lang="en-GB" sz="1500" kern="1200"/>
-        </a:p>
-      </dsp:txBody>
-      <dsp:txXfrm>
-        <a:off x="6165759" y="1317768"/>
-        <a:ext cx="551069" cy="333695"/>
-      </dsp:txXfrm>
-    </dsp:sp>
-    <dsp:sp modelId="{47295986-DACE-425A-84B0-E664787F38E3}">
-      <dsp:nvSpPr>
-        <dsp:cNvPr id="0" name=""/>
-        <dsp:cNvSpPr/>
-      </dsp:nvSpPr>
-      <dsp:spPr>
-        <a:xfrm>
-          <a:off x="7181678" y="1211016"/>
-          <a:ext cx="2233824" cy="820800"/>
-        </a:xfrm>
-        <a:prstGeom prst="roundRect">
-          <a:avLst>
-            <a:gd name="adj" fmla="val 10000"/>
-          </a:avLst>
-        </a:prstGeom>
-        <a:solidFill>
-          <a:schemeClr val="accent1">
-            <a:hueOff val="0"/>
-            <a:satOff val="0"/>
-            <a:lumOff val="0"/>
-            <a:alphaOff val="0"/>
-          </a:schemeClr>
-        </a:solidFill>
-        <a:ln w="12700" cap="flat" cmpd="sng" algn="ctr">
-          <a:solidFill>
-            <a:schemeClr val="lt1">
-              <a:hueOff val="0"/>
-              <a:satOff val="0"/>
-              <a:lumOff val="0"/>
-              <a:alphaOff val="0"/>
-            </a:schemeClr>
-          </a:solidFill>
-          <a:prstDash val="solid"/>
-          <a:miter lim="800000"/>
-        </a:ln>
-        <a:effectLst/>
-      </dsp:spPr>
-      <dsp:style>
-        <a:lnRef idx="2">
-          <a:scrgbClr r="0" g="0" b="0"/>
-        </a:lnRef>
-        <a:fillRef idx="1">
-          <a:scrgbClr r="0" g="0" b="0"/>
-        </a:fillRef>
-        <a:effectRef idx="0">
-          <a:scrgbClr r="0" g="0" b="0"/>
-        </a:effectRef>
-        <a:fontRef idx="minor">
-          <a:schemeClr val="lt1"/>
-        </a:fontRef>
-      </dsp:style>
-      <dsp:txBody>
-        <a:bodyPr spcFirstLastPara="0" vert="horz" wrap="square" lIns="135128" tIns="135128" rIns="135128" bIns="72390" numCol="1" spcCol="1270" anchor="t" anchorCtr="0">
-          <a:noAutofit/>
-        </a:bodyPr>
-        <a:lstStyle/>
-        <a:p>
-          <a:pPr marL="0" lvl="0" indent="0" algn="l" defTabSz="844550">
-            <a:lnSpc>
-              <a:spcPct val="90000"/>
-            </a:lnSpc>
-            <a:spcBef>
-              <a:spcPct val="0"/>
-            </a:spcBef>
-            <a:spcAft>
-              <a:spcPct val="35000"/>
-            </a:spcAft>
-            <a:buNone/>
-          </a:pPr>
-          <a:r>
-            <a:rPr lang="en-GB" sz="1900" kern="1200" dirty="0"/>
-            <a:t>Artifacts</a:t>
-          </a:r>
-        </a:p>
-      </dsp:txBody>
-      <dsp:txXfrm>
-        <a:off x="7181678" y="1211016"/>
-        <a:ext cx="2233824" cy="547200"/>
-      </dsp:txXfrm>
-    </dsp:sp>
-    <dsp:sp modelId="{3E1AEA04-6E5B-48C8-A007-B09A7ACB56D7}">
-      <dsp:nvSpPr>
-        <dsp:cNvPr id="0" name=""/>
-        <dsp:cNvSpPr/>
-      </dsp:nvSpPr>
-      <dsp:spPr>
-        <a:xfrm>
-          <a:off x="7639208" y="1758216"/>
-          <a:ext cx="2233824" cy="3033112"/>
-        </a:xfrm>
-        <a:prstGeom prst="roundRect">
-          <a:avLst>
-            <a:gd name="adj" fmla="val 10000"/>
-          </a:avLst>
-        </a:prstGeom>
-        <a:solidFill>
-          <a:schemeClr val="lt1">
-            <a:alpha val="90000"/>
-            <a:hueOff val="0"/>
-            <a:satOff val="0"/>
-            <a:lumOff val="0"/>
-            <a:alphaOff val="0"/>
-          </a:schemeClr>
-        </a:solidFill>
-        <a:ln w="12700" cap="flat" cmpd="sng" algn="ctr">
-          <a:solidFill>
-            <a:schemeClr val="accent1">
-              <a:hueOff val="0"/>
-              <a:satOff val="0"/>
-              <a:lumOff val="0"/>
-              <a:alphaOff val="0"/>
-            </a:schemeClr>
-          </a:solidFill>
-          <a:prstDash val="solid"/>
-          <a:miter lim="800000"/>
-        </a:ln>
-        <a:effectLst/>
-      </dsp:spPr>
-      <dsp:style>
-        <a:lnRef idx="2">
-          <a:scrgbClr r="0" g="0" b="0"/>
-        </a:lnRef>
-        <a:fillRef idx="1">
-          <a:scrgbClr r="0" g="0" b="0"/>
-        </a:fillRef>
-        <a:effectRef idx="0">
-          <a:scrgbClr r="0" g="0" b="0"/>
-        </a:effectRef>
-        <a:fontRef idx="minor"/>
-      </dsp:style>
-      <dsp:txBody>
-        <a:bodyPr spcFirstLastPara="0" vert="horz" wrap="square" lIns="135128" tIns="135128" rIns="135128" bIns="135128" numCol="1" spcCol="1270" anchor="t" anchorCtr="0">
-          <a:noAutofit/>
-        </a:bodyPr>
-        <a:lstStyle/>
-        <a:p>
-          <a:pPr marL="171450" lvl="1" indent="-171450" algn="l" defTabSz="844550">
-            <a:lnSpc>
-              <a:spcPct val="90000"/>
-            </a:lnSpc>
-            <a:spcBef>
-              <a:spcPct val="0"/>
-            </a:spcBef>
-            <a:spcAft>
-              <a:spcPct val="15000"/>
-            </a:spcAft>
-            <a:buChar char="•"/>
-          </a:pPr>
-          <a:r>
-            <a:rPr lang="en-GB" sz="1900" kern="1200" dirty="0"/>
-            <a:t>Solutions</a:t>
-          </a:r>
-        </a:p>
-        <a:p>
-          <a:pPr marL="171450" lvl="1" indent="-171450" algn="l" defTabSz="844550">
-            <a:lnSpc>
-              <a:spcPct val="90000"/>
-            </a:lnSpc>
-            <a:spcBef>
-              <a:spcPct val="0"/>
-            </a:spcBef>
-            <a:spcAft>
-              <a:spcPct val="15000"/>
-            </a:spcAft>
-            <a:buChar char="•"/>
-          </a:pPr>
-          <a:r>
-            <a:rPr lang="en-GB" sz="1900" kern="1200" dirty="0"/>
-            <a:t>Packages</a:t>
-          </a:r>
-        </a:p>
-        <a:p>
-          <a:pPr marL="171450" lvl="1" indent="-171450" algn="l" defTabSz="844550">
-            <a:lnSpc>
-              <a:spcPct val="90000"/>
-            </a:lnSpc>
-            <a:spcBef>
-              <a:spcPct val="0"/>
-            </a:spcBef>
-            <a:spcAft>
-              <a:spcPct val="15000"/>
-            </a:spcAft>
-            <a:buChar char="•"/>
-          </a:pPr>
-          <a:r>
-            <a:rPr lang="en-GB" sz="1900" kern="1200" dirty="0"/>
-            <a:t>Data</a:t>
-          </a:r>
-        </a:p>
-        <a:p>
-          <a:pPr marL="171450" lvl="1" indent="-171450" algn="l" defTabSz="844550">
-            <a:lnSpc>
-              <a:spcPct val="90000"/>
-            </a:lnSpc>
-            <a:spcBef>
-              <a:spcPct val="0"/>
-            </a:spcBef>
-            <a:spcAft>
-              <a:spcPct val="15000"/>
-            </a:spcAft>
-            <a:buChar char="•"/>
-          </a:pPr>
-          <a:r>
-            <a:rPr lang="en-GB" sz="1900" kern="1200" dirty="0"/>
-            <a:t>Tests</a:t>
-          </a:r>
-        </a:p>
-      </dsp:txBody>
-      <dsp:txXfrm>
-        <a:off x="7704634" y="1823642"/>
-        <a:ext cx="2102972" cy="2902260"/>
-      </dsp:txXfrm>
-    </dsp:sp>
-  </dsp:spTree>
-</dsp:drawing>
-</file>
-
-<file path=ppt/diagrams/drawing3.xml><?xml version="1.0" encoding="utf-8"?>
-<dsp:drawing xmlns:dgm="http://schemas.openxmlformats.org/drawingml/2006/diagram" xmlns:dsp="http://schemas.microsoft.com/office/drawing/2008/diagram" xmlns:a="http://schemas.openxmlformats.org/drawingml/2006/main">
-  <dsp:spTree>
-    <dsp:nvGrpSpPr>
-      <dsp:cNvPr id="0" name=""/>
-      <dsp:cNvGrpSpPr/>
-    </dsp:nvGrpSpPr>
-    <dsp:grpSpPr/>
-    <dsp:sp modelId="{5E24D3A6-8425-4985-9887-3007A5739949}">
-      <dsp:nvSpPr>
-        <dsp:cNvPr id="0" name=""/>
-        <dsp:cNvSpPr/>
-      </dsp:nvSpPr>
-      <dsp:spPr>
-        <a:xfrm>
-          <a:off x="4912" y="707860"/>
-          <a:ext cx="2233824" cy="777599"/>
-        </a:xfrm>
-        <a:prstGeom prst="roundRect">
-          <a:avLst>
-            <a:gd name="adj" fmla="val 10000"/>
-          </a:avLst>
-        </a:prstGeom>
-        <a:solidFill>
-          <a:schemeClr val="accent1">
-            <a:hueOff val="0"/>
-            <a:satOff val="0"/>
-            <a:lumOff val="0"/>
-            <a:alphaOff val="0"/>
-          </a:schemeClr>
-        </a:solidFill>
-        <a:ln w="12700" cap="flat" cmpd="sng" algn="ctr">
-          <a:solidFill>
-            <a:schemeClr val="lt1">
-              <a:hueOff val="0"/>
-              <a:satOff val="0"/>
-              <a:lumOff val="0"/>
-              <a:alphaOff val="0"/>
-            </a:schemeClr>
-          </a:solidFill>
-          <a:prstDash val="solid"/>
-          <a:miter lim="800000"/>
-        </a:ln>
-        <a:effectLst/>
-      </dsp:spPr>
-      <dsp:style>
-        <a:lnRef idx="2">
-          <a:scrgbClr r="0" g="0" b="0"/>
-        </a:lnRef>
-        <a:fillRef idx="1">
-          <a:scrgbClr r="0" g="0" b="0"/>
-        </a:fillRef>
-        <a:effectRef idx="0">
-          <a:scrgbClr r="0" g="0" b="0"/>
-        </a:effectRef>
-        <a:fontRef idx="minor">
-          <a:schemeClr val="lt1"/>
-        </a:fontRef>
-      </dsp:style>
-      <dsp:txBody>
-        <a:bodyPr spcFirstLastPara="0" vert="horz" wrap="square" lIns="128016" tIns="128016" rIns="128016" bIns="68580" numCol="1" spcCol="1270" anchor="t" anchorCtr="0">
-          <a:noAutofit/>
-        </a:bodyPr>
-        <a:lstStyle/>
-        <a:p>
-          <a:pPr marL="0" lvl="0" indent="0" algn="l" defTabSz="800100">
-            <a:lnSpc>
-              <a:spcPct val="90000"/>
-            </a:lnSpc>
-            <a:spcBef>
-              <a:spcPct val="0"/>
-            </a:spcBef>
-            <a:spcAft>
-              <a:spcPct val="35000"/>
-            </a:spcAft>
-            <a:buNone/>
-          </a:pPr>
-          <a:r>
-            <a:rPr lang="en-GB" sz="1800" kern="1200" dirty="0"/>
-            <a:t>Artifacts</a:t>
-          </a:r>
-        </a:p>
-      </dsp:txBody>
-      <dsp:txXfrm>
-        <a:off x="4912" y="707860"/>
-        <a:ext cx="2233824" cy="518400"/>
-      </dsp:txXfrm>
-    </dsp:sp>
-    <dsp:sp modelId="{10C42DA6-E5EC-432C-9EE3-A0B3DBD402BC}">
-      <dsp:nvSpPr>
-        <dsp:cNvPr id="0" name=""/>
-        <dsp:cNvSpPr/>
-      </dsp:nvSpPr>
-      <dsp:spPr>
-        <a:xfrm>
-          <a:off x="462443" y="1226260"/>
-          <a:ext cx="2233824" cy="4068225"/>
-        </a:xfrm>
-        <a:prstGeom prst="roundRect">
-          <a:avLst>
-            <a:gd name="adj" fmla="val 10000"/>
-          </a:avLst>
-        </a:prstGeom>
-        <a:solidFill>
-          <a:schemeClr val="lt1">
-            <a:alpha val="90000"/>
-            <a:hueOff val="0"/>
-            <a:satOff val="0"/>
-            <a:lumOff val="0"/>
-            <a:alphaOff val="0"/>
-          </a:schemeClr>
-        </a:solidFill>
-        <a:ln w="12700" cap="flat" cmpd="sng" algn="ctr">
-          <a:solidFill>
-            <a:schemeClr val="accent1">
-              <a:hueOff val="0"/>
-              <a:satOff val="0"/>
-              <a:lumOff val="0"/>
-              <a:alphaOff val="0"/>
-            </a:schemeClr>
-          </a:solidFill>
-          <a:prstDash val="solid"/>
-          <a:miter lim="800000"/>
-        </a:ln>
-        <a:effectLst/>
-      </dsp:spPr>
-      <dsp:style>
-        <a:lnRef idx="2">
-          <a:scrgbClr r="0" g="0" b="0"/>
-        </a:lnRef>
-        <a:fillRef idx="1">
-          <a:scrgbClr r="0" g="0" b="0"/>
-        </a:fillRef>
-        <a:effectRef idx="0">
-          <a:scrgbClr r="0" g="0" b="0"/>
-        </a:effectRef>
-        <a:fontRef idx="minor"/>
-      </dsp:style>
-      <dsp:txBody>
-        <a:bodyPr spcFirstLastPara="0" vert="horz" wrap="square" lIns="128016" tIns="128016" rIns="128016" bIns="128016" numCol="1" spcCol="1270" anchor="t" anchorCtr="0">
-          <a:noAutofit/>
-        </a:bodyPr>
-        <a:lstStyle/>
-        <a:p>
-          <a:pPr marL="171450" lvl="1" indent="-171450" algn="l" defTabSz="800100">
-            <a:lnSpc>
-              <a:spcPct val="90000"/>
-            </a:lnSpc>
-            <a:spcBef>
-              <a:spcPct val="0"/>
-            </a:spcBef>
-            <a:spcAft>
-              <a:spcPct val="15000"/>
-            </a:spcAft>
-            <a:buChar char="•"/>
-          </a:pPr>
-          <a:r>
-            <a:rPr lang="en-GB" sz="1800" kern="1200" dirty="0"/>
-            <a:t>Solutions</a:t>
-          </a:r>
-        </a:p>
-        <a:p>
-          <a:pPr marL="171450" lvl="1" indent="-171450" algn="l" defTabSz="800100">
-            <a:lnSpc>
-              <a:spcPct val="90000"/>
-            </a:lnSpc>
-            <a:spcBef>
-              <a:spcPct val="0"/>
-            </a:spcBef>
-            <a:spcAft>
-              <a:spcPct val="15000"/>
-            </a:spcAft>
-            <a:buChar char="•"/>
-          </a:pPr>
-          <a:r>
-            <a:rPr lang="en-GB" sz="1800" kern="1200" dirty="0"/>
-            <a:t>Packages</a:t>
-          </a:r>
-        </a:p>
-        <a:p>
-          <a:pPr marL="171450" lvl="1" indent="-171450" algn="l" defTabSz="800100">
-            <a:lnSpc>
-              <a:spcPct val="90000"/>
-            </a:lnSpc>
-            <a:spcBef>
-              <a:spcPct val="0"/>
-            </a:spcBef>
-            <a:spcAft>
-              <a:spcPct val="15000"/>
-            </a:spcAft>
-            <a:buChar char="•"/>
-          </a:pPr>
-          <a:r>
-            <a:rPr lang="en-GB" sz="1800" kern="1200" dirty="0"/>
-            <a:t>Data</a:t>
-          </a:r>
-        </a:p>
-        <a:p>
-          <a:pPr marL="171450" lvl="1" indent="-171450" algn="l" defTabSz="800100">
-            <a:lnSpc>
-              <a:spcPct val="90000"/>
-            </a:lnSpc>
-            <a:spcBef>
-              <a:spcPct val="0"/>
-            </a:spcBef>
-            <a:spcAft>
-              <a:spcPct val="15000"/>
-            </a:spcAft>
-            <a:buChar char="•"/>
-          </a:pPr>
-          <a:r>
-            <a:rPr lang="en-GB" sz="1800" kern="1200" dirty="0"/>
-            <a:t>Tests</a:t>
-          </a:r>
-        </a:p>
-      </dsp:txBody>
-      <dsp:txXfrm>
-        <a:off x="527869" y="1291686"/>
-        <a:ext cx="2102972" cy="3937373"/>
-      </dsp:txXfrm>
-    </dsp:sp>
-    <dsp:sp modelId="{5E6ADCBE-372D-4BA9-A979-5A31ECDCDC40}">
-      <dsp:nvSpPr>
-        <dsp:cNvPr id="0" name=""/>
-        <dsp:cNvSpPr/>
-      </dsp:nvSpPr>
-      <dsp:spPr>
-        <a:xfrm>
-          <a:off x="2577376" y="688981"/>
-          <a:ext cx="717916" cy="556157"/>
-        </a:xfrm>
-        <a:prstGeom prst="rightArrow">
-          <a:avLst>
-            <a:gd name="adj1" fmla="val 60000"/>
-            <a:gd name="adj2" fmla="val 50000"/>
-          </a:avLst>
-        </a:prstGeom>
-        <a:solidFill>
-          <a:schemeClr val="tx2"/>
-        </a:solidFill>
-        <a:ln>
-          <a:noFill/>
-        </a:ln>
-        <a:effectLst/>
-      </dsp:spPr>
-      <dsp:style>
-        <a:lnRef idx="0">
-          <a:scrgbClr r="0" g="0" b="0"/>
-        </a:lnRef>
-        <a:fillRef idx="1">
-          <a:scrgbClr r="0" g="0" b="0"/>
-        </a:fillRef>
-        <a:effectRef idx="0">
-          <a:scrgbClr r="0" g="0" b="0"/>
-        </a:effectRef>
-        <a:fontRef idx="minor">
-          <a:schemeClr val="lt1"/>
-        </a:fontRef>
-      </dsp:style>
-      <dsp:txBody>
-        <a:bodyPr spcFirstLastPara="0" vert="horz" wrap="square" lIns="0" tIns="0" rIns="0" bIns="0" numCol="1" spcCol="1270" anchor="ctr" anchorCtr="0">
-          <a:noAutofit/>
-        </a:bodyPr>
-        <a:lstStyle/>
-        <a:p>
-          <a:pPr marL="0" lvl="0" indent="0" algn="ctr" defTabSz="622300">
-            <a:lnSpc>
-              <a:spcPct val="90000"/>
-            </a:lnSpc>
-            <a:spcBef>
-              <a:spcPct val="0"/>
-            </a:spcBef>
-            <a:spcAft>
-              <a:spcPct val="35000"/>
-            </a:spcAft>
-            <a:buNone/>
-          </a:pPr>
-          <a:endParaRPr lang="en-GB" sz="1400" kern="1200"/>
-        </a:p>
-      </dsp:txBody>
-      <dsp:txXfrm>
-        <a:off x="2577376" y="800212"/>
-        <a:ext cx="551069" cy="333695"/>
-      </dsp:txXfrm>
-    </dsp:sp>
-    <dsp:sp modelId="{E53EF5A2-9B51-4860-94D7-DCC04E9C7EA3}">
-      <dsp:nvSpPr>
-        <dsp:cNvPr id="0" name=""/>
-        <dsp:cNvSpPr/>
-      </dsp:nvSpPr>
-      <dsp:spPr>
-        <a:xfrm>
-          <a:off x="3593295" y="707860"/>
-          <a:ext cx="2233824" cy="777599"/>
-        </a:xfrm>
-        <a:prstGeom prst="roundRect">
-          <a:avLst>
-            <a:gd name="adj" fmla="val 10000"/>
-          </a:avLst>
-        </a:prstGeom>
-        <a:solidFill>
-          <a:schemeClr val="accent1">
-            <a:hueOff val="0"/>
-            <a:satOff val="0"/>
-            <a:lumOff val="0"/>
-            <a:alphaOff val="0"/>
-          </a:schemeClr>
-        </a:solidFill>
-        <a:ln w="12700" cap="flat" cmpd="sng" algn="ctr">
-          <a:solidFill>
-            <a:schemeClr val="lt1">
-              <a:hueOff val="0"/>
-              <a:satOff val="0"/>
-              <a:lumOff val="0"/>
-              <a:alphaOff val="0"/>
-            </a:schemeClr>
-          </a:solidFill>
-          <a:prstDash val="solid"/>
-          <a:miter lim="800000"/>
-        </a:ln>
-        <a:effectLst/>
-      </dsp:spPr>
-      <dsp:style>
-        <a:lnRef idx="2">
-          <a:scrgbClr r="0" g="0" b="0"/>
-        </a:lnRef>
-        <a:fillRef idx="1">
-          <a:scrgbClr r="0" g="0" b="0"/>
-        </a:fillRef>
-        <a:effectRef idx="0">
-          <a:scrgbClr r="0" g="0" b="0"/>
-        </a:effectRef>
-        <a:fontRef idx="minor">
-          <a:schemeClr val="lt1"/>
-        </a:fontRef>
-      </dsp:style>
-      <dsp:txBody>
-        <a:bodyPr spcFirstLastPara="0" vert="horz" wrap="square" lIns="128016" tIns="128016" rIns="128016" bIns="68580" numCol="1" spcCol="1270" anchor="t" anchorCtr="0">
-          <a:noAutofit/>
-        </a:bodyPr>
-        <a:lstStyle/>
-        <a:p>
-          <a:pPr marL="0" lvl="0" indent="0" algn="l" defTabSz="800100">
-            <a:lnSpc>
-              <a:spcPct val="90000"/>
-            </a:lnSpc>
-            <a:spcBef>
-              <a:spcPct val="0"/>
-            </a:spcBef>
-            <a:spcAft>
-              <a:spcPct val="35000"/>
-            </a:spcAft>
-            <a:buNone/>
-          </a:pPr>
-          <a:r>
-            <a:rPr lang="en-GB" sz="1800" kern="1200" dirty="0"/>
-            <a:t>Release</a:t>
-          </a:r>
-        </a:p>
-      </dsp:txBody>
-      <dsp:txXfrm>
-        <a:off x="3593295" y="707860"/>
-        <a:ext cx="2233824" cy="518400"/>
-      </dsp:txXfrm>
-    </dsp:sp>
-    <dsp:sp modelId="{21E181B6-3FD8-4DAC-8298-5C17B4D5C3CD}">
-      <dsp:nvSpPr>
-        <dsp:cNvPr id="0" name=""/>
-        <dsp:cNvSpPr/>
-      </dsp:nvSpPr>
-      <dsp:spPr>
-        <a:xfrm>
-          <a:off x="4050826" y="1226260"/>
-          <a:ext cx="2233824" cy="4068225"/>
-        </a:xfrm>
-        <a:prstGeom prst="roundRect">
-          <a:avLst>
-            <a:gd name="adj" fmla="val 10000"/>
-          </a:avLst>
-        </a:prstGeom>
-        <a:solidFill>
-          <a:schemeClr val="lt1">
-            <a:alpha val="90000"/>
-            <a:hueOff val="0"/>
-            <a:satOff val="0"/>
-            <a:lumOff val="0"/>
-            <a:alphaOff val="0"/>
-          </a:schemeClr>
-        </a:solidFill>
-        <a:ln w="12700" cap="flat" cmpd="sng" algn="ctr">
-          <a:solidFill>
-            <a:schemeClr val="accent1">
-              <a:hueOff val="0"/>
-              <a:satOff val="0"/>
-              <a:lumOff val="0"/>
-              <a:alphaOff val="0"/>
-            </a:schemeClr>
-          </a:solidFill>
-          <a:prstDash val="solid"/>
-          <a:miter lim="800000"/>
-        </a:ln>
-        <a:effectLst/>
-      </dsp:spPr>
-      <dsp:style>
-        <a:lnRef idx="2">
-          <a:scrgbClr r="0" g="0" b="0"/>
-        </a:lnRef>
-        <a:fillRef idx="1">
-          <a:scrgbClr r="0" g="0" b="0"/>
-        </a:fillRef>
-        <a:effectRef idx="0">
-          <a:scrgbClr r="0" g="0" b="0"/>
-        </a:effectRef>
-        <a:fontRef idx="minor"/>
-      </dsp:style>
-      <dsp:txBody>
-        <a:bodyPr spcFirstLastPara="0" vert="horz" wrap="square" lIns="128016" tIns="128016" rIns="128016" bIns="128016" numCol="1" spcCol="1270" anchor="t" anchorCtr="0">
-          <a:noAutofit/>
-        </a:bodyPr>
-        <a:lstStyle/>
-        <a:p>
-          <a:pPr marL="171450" lvl="1" indent="-171450" algn="l" defTabSz="800100">
-            <a:lnSpc>
-              <a:spcPct val="90000"/>
-            </a:lnSpc>
-            <a:spcBef>
-              <a:spcPct val="0"/>
-            </a:spcBef>
-            <a:spcAft>
-              <a:spcPct val="15000"/>
-            </a:spcAft>
-            <a:buChar char="•"/>
-          </a:pPr>
-          <a:r>
-            <a:rPr lang="en-GB" sz="1800" kern="1200" dirty="0"/>
-            <a:t>Approvals</a:t>
-          </a:r>
-        </a:p>
-        <a:p>
-          <a:pPr marL="171450" lvl="1" indent="-171450" algn="l" defTabSz="800100">
-            <a:lnSpc>
-              <a:spcPct val="90000"/>
-            </a:lnSpc>
-            <a:spcBef>
-              <a:spcPct val="0"/>
-            </a:spcBef>
-            <a:spcAft>
-              <a:spcPct val="15000"/>
-            </a:spcAft>
-            <a:buChar char="•"/>
-          </a:pPr>
-          <a:r>
-            <a:rPr lang="en-GB" sz="1800" kern="1200" dirty="0"/>
-            <a:t>Provision Environments</a:t>
-          </a:r>
-        </a:p>
-        <a:p>
-          <a:pPr marL="171450" lvl="1" indent="-171450" algn="l" defTabSz="800100">
-            <a:lnSpc>
-              <a:spcPct val="90000"/>
-            </a:lnSpc>
-            <a:spcBef>
-              <a:spcPct val="0"/>
-            </a:spcBef>
-            <a:spcAft>
-              <a:spcPct val="15000"/>
-            </a:spcAft>
-            <a:buChar char="•"/>
-          </a:pPr>
-          <a:r>
-            <a:rPr lang="en-GB" sz="1800" kern="1200" dirty="0"/>
-            <a:t>Backup/Rollback</a:t>
-          </a:r>
-        </a:p>
-        <a:p>
-          <a:pPr marL="171450" lvl="1" indent="-171450" algn="l" defTabSz="800100">
-            <a:lnSpc>
-              <a:spcPct val="90000"/>
-            </a:lnSpc>
-            <a:spcBef>
-              <a:spcPct val="0"/>
-            </a:spcBef>
-            <a:spcAft>
-              <a:spcPct val="15000"/>
-            </a:spcAft>
-            <a:buChar char="•"/>
-          </a:pPr>
-          <a:r>
-            <a:rPr lang="en-GB" sz="1800" kern="1200" dirty="0"/>
-            <a:t>Import Solutions</a:t>
-          </a:r>
-        </a:p>
-        <a:p>
-          <a:pPr marL="171450" lvl="1" indent="-171450" algn="l" defTabSz="800100">
-            <a:lnSpc>
-              <a:spcPct val="90000"/>
-            </a:lnSpc>
-            <a:spcBef>
-              <a:spcPct val="0"/>
-            </a:spcBef>
-            <a:spcAft>
-              <a:spcPct val="15000"/>
-            </a:spcAft>
-            <a:buChar char="•"/>
-          </a:pPr>
-          <a:r>
-            <a:rPr lang="en-GB" sz="1800" kern="1200" dirty="0"/>
-            <a:t>Execute Packages</a:t>
-          </a:r>
-        </a:p>
-        <a:p>
-          <a:pPr marL="171450" lvl="1" indent="-171450" algn="l" defTabSz="800100">
-            <a:lnSpc>
-              <a:spcPct val="90000"/>
-            </a:lnSpc>
-            <a:spcBef>
-              <a:spcPct val="0"/>
-            </a:spcBef>
-            <a:spcAft>
-              <a:spcPct val="15000"/>
-            </a:spcAft>
-            <a:buChar char="•"/>
-          </a:pPr>
-          <a:r>
-            <a:rPr lang="en-GB" sz="1800" kern="1200" dirty="0"/>
-            <a:t>Import Data</a:t>
-          </a:r>
-        </a:p>
-        <a:p>
-          <a:pPr marL="171450" lvl="1" indent="-171450" algn="l" defTabSz="800100">
-            <a:lnSpc>
-              <a:spcPct val="90000"/>
-            </a:lnSpc>
-            <a:spcBef>
-              <a:spcPct val="0"/>
-            </a:spcBef>
-            <a:spcAft>
-              <a:spcPct val="15000"/>
-            </a:spcAft>
-            <a:buChar char="•"/>
-          </a:pPr>
-          <a:r>
-            <a:rPr lang="en-GB" sz="1800" kern="1200" dirty="0"/>
-            <a:t>Additional Steps</a:t>
-          </a:r>
-        </a:p>
-        <a:p>
-          <a:pPr marL="171450" lvl="1" indent="-171450" algn="l" defTabSz="800100">
-            <a:lnSpc>
-              <a:spcPct val="90000"/>
-            </a:lnSpc>
-            <a:spcBef>
-              <a:spcPct val="0"/>
-            </a:spcBef>
-            <a:spcAft>
-              <a:spcPct val="15000"/>
-            </a:spcAft>
-            <a:buChar char="•"/>
-          </a:pPr>
-          <a:r>
-            <a:rPr lang="en-GB" sz="1800" kern="1200" dirty="0"/>
-            <a:t>Execute Tests</a:t>
-          </a:r>
-        </a:p>
-        <a:p>
-          <a:pPr marL="171450" lvl="1" indent="-171450" algn="l" defTabSz="800100">
-            <a:lnSpc>
-              <a:spcPct val="90000"/>
-            </a:lnSpc>
-            <a:spcBef>
-              <a:spcPct val="0"/>
-            </a:spcBef>
-            <a:spcAft>
-              <a:spcPct val="15000"/>
-            </a:spcAft>
-            <a:buChar char="•"/>
-          </a:pPr>
-          <a:r>
-            <a:rPr lang="en-GB" sz="1800" kern="1200" dirty="0"/>
-            <a:t>Notifications</a:t>
-          </a:r>
-        </a:p>
-      </dsp:txBody>
-      <dsp:txXfrm>
-        <a:off x="4116252" y="1291686"/>
-        <a:ext cx="2102972" cy="3937373"/>
-      </dsp:txXfrm>
-    </dsp:sp>
-    <dsp:sp modelId="{97B330FB-580F-44AC-B8D7-C75FE33FD7C0}">
-      <dsp:nvSpPr>
-        <dsp:cNvPr id="0" name=""/>
-        <dsp:cNvSpPr/>
-      </dsp:nvSpPr>
-      <dsp:spPr>
-        <a:xfrm>
-          <a:off x="6165759" y="688981"/>
-          <a:ext cx="717916" cy="556157"/>
-        </a:xfrm>
-        <a:prstGeom prst="rightArrow">
-          <a:avLst>
-            <a:gd name="adj1" fmla="val 60000"/>
-            <a:gd name="adj2" fmla="val 50000"/>
-          </a:avLst>
-        </a:prstGeom>
-        <a:solidFill>
-          <a:schemeClr val="tx2"/>
-        </a:solidFill>
-        <a:ln>
-          <a:noFill/>
-        </a:ln>
-        <a:effectLst/>
-      </dsp:spPr>
-      <dsp:style>
-        <a:lnRef idx="0">
-          <a:scrgbClr r="0" g="0" b="0"/>
-        </a:lnRef>
-        <a:fillRef idx="1">
-          <a:scrgbClr r="0" g="0" b="0"/>
-        </a:fillRef>
-        <a:effectRef idx="0">
-          <a:scrgbClr r="0" g="0" b="0"/>
-        </a:effectRef>
-        <a:fontRef idx="minor">
-          <a:schemeClr val="lt1"/>
-        </a:fontRef>
-      </dsp:style>
-      <dsp:txBody>
-        <a:bodyPr spcFirstLastPara="0" vert="horz" wrap="square" lIns="0" tIns="0" rIns="0" bIns="0" numCol="1" spcCol="1270" anchor="ctr" anchorCtr="0">
-          <a:noAutofit/>
-        </a:bodyPr>
-        <a:lstStyle/>
-        <a:p>
-          <a:pPr marL="0" lvl="0" indent="0" algn="ctr" defTabSz="622300">
-            <a:lnSpc>
-              <a:spcPct val="90000"/>
-            </a:lnSpc>
-            <a:spcBef>
-              <a:spcPct val="0"/>
-            </a:spcBef>
-            <a:spcAft>
-              <a:spcPct val="35000"/>
-            </a:spcAft>
-            <a:buNone/>
-          </a:pPr>
-          <a:endParaRPr lang="en-GB" sz="1400" kern="1200"/>
-        </a:p>
-      </dsp:txBody>
-      <dsp:txXfrm>
-        <a:off x="6165759" y="800212"/>
-        <a:ext cx="551069" cy="333695"/>
-      </dsp:txXfrm>
-    </dsp:sp>
-    <dsp:sp modelId="{47295986-DACE-425A-84B0-E664787F38E3}">
-      <dsp:nvSpPr>
-        <dsp:cNvPr id="0" name=""/>
-        <dsp:cNvSpPr/>
-      </dsp:nvSpPr>
-      <dsp:spPr>
-        <a:xfrm>
-          <a:off x="7181678" y="707860"/>
-          <a:ext cx="2233824" cy="777599"/>
-        </a:xfrm>
-        <a:prstGeom prst="roundRect">
-          <a:avLst>
-            <a:gd name="adj" fmla="val 10000"/>
-          </a:avLst>
-        </a:prstGeom>
-        <a:solidFill>
-          <a:schemeClr val="accent1">
-            <a:hueOff val="0"/>
-            <a:satOff val="0"/>
-            <a:lumOff val="0"/>
-            <a:alphaOff val="0"/>
-          </a:schemeClr>
-        </a:solidFill>
-        <a:ln w="12700" cap="flat" cmpd="sng" algn="ctr">
-          <a:solidFill>
-            <a:schemeClr val="lt1">
-              <a:hueOff val="0"/>
-              <a:satOff val="0"/>
-              <a:lumOff val="0"/>
-              <a:alphaOff val="0"/>
-            </a:schemeClr>
-          </a:solidFill>
-          <a:prstDash val="solid"/>
-          <a:miter lim="800000"/>
-        </a:ln>
-        <a:effectLst/>
-      </dsp:spPr>
-      <dsp:style>
-        <a:lnRef idx="2">
-          <a:scrgbClr r="0" g="0" b="0"/>
-        </a:lnRef>
-        <a:fillRef idx="1">
-          <a:scrgbClr r="0" g="0" b="0"/>
-        </a:fillRef>
-        <a:effectRef idx="0">
-          <a:scrgbClr r="0" g="0" b="0"/>
-        </a:effectRef>
-        <a:fontRef idx="minor">
-          <a:schemeClr val="lt1"/>
-        </a:fontRef>
-      </dsp:style>
-      <dsp:txBody>
-        <a:bodyPr spcFirstLastPara="0" vert="horz" wrap="square" lIns="128016" tIns="128016" rIns="128016" bIns="68580" numCol="1" spcCol="1270" anchor="t" anchorCtr="0">
-          <a:noAutofit/>
-        </a:bodyPr>
-        <a:lstStyle/>
-        <a:p>
-          <a:pPr marL="0" lvl="0" indent="0" algn="l" defTabSz="800100">
-            <a:lnSpc>
-              <a:spcPct val="90000"/>
-            </a:lnSpc>
-            <a:spcBef>
-              <a:spcPct val="0"/>
-            </a:spcBef>
-            <a:spcAft>
-              <a:spcPct val="35000"/>
-            </a:spcAft>
-            <a:buNone/>
-          </a:pPr>
-          <a:r>
-            <a:rPr lang="en-GB" sz="1800" kern="1200" dirty="0"/>
-            <a:t>Environments</a:t>
-          </a:r>
-        </a:p>
-      </dsp:txBody>
-      <dsp:txXfrm>
-        <a:off x="7181678" y="707860"/>
-        <a:ext cx="2233824" cy="518400"/>
-      </dsp:txXfrm>
-    </dsp:sp>
-    <dsp:sp modelId="{3E1AEA04-6E5B-48C8-A007-B09A7ACB56D7}">
-      <dsp:nvSpPr>
-        <dsp:cNvPr id="0" name=""/>
-        <dsp:cNvSpPr/>
-      </dsp:nvSpPr>
-      <dsp:spPr>
-        <a:xfrm>
-          <a:off x="7639208" y="1226260"/>
-          <a:ext cx="2233824" cy="4068225"/>
-        </a:xfrm>
-        <a:prstGeom prst="roundRect">
-          <a:avLst>
-            <a:gd name="adj" fmla="val 10000"/>
-          </a:avLst>
-        </a:prstGeom>
-        <a:solidFill>
-          <a:schemeClr val="lt1">
-            <a:alpha val="90000"/>
-            <a:hueOff val="0"/>
-            <a:satOff val="0"/>
-            <a:lumOff val="0"/>
-            <a:alphaOff val="0"/>
-          </a:schemeClr>
-        </a:solidFill>
-        <a:ln w="12700" cap="flat" cmpd="sng" algn="ctr">
-          <a:solidFill>
-            <a:schemeClr val="accent1">
-              <a:hueOff val="0"/>
-              <a:satOff val="0"/>
-              <a:lumOff val="0"/>
-              <a:alphaOff val="0"/>
-            </a:schemeClr>
-          </a:solidFill>
-          <a:prstDash val="solid"/>
-          <a:miter lim="800000"/>
-        </a:ln>
-        <a:effectLst/>
-      </dsp:spPr>
-      <dsp:style>
-        <a:lnRef idx="2">
-          <a:scrgbClr r="0" g="0" b="0"/>
-        </a:lnRef>
-        <a:fillRef idx="1">
-          <a:scrgbClr r="0" g="0" b="0"/>
-        </a:fillRef>
-        <a:effectRef idx="0">
-          <a:scrgbClr r="0" g="0" b="0"/>
-        </a:effectRef>
-        <a:fontRef idx="minor"/>
-      </dsp:style>
-      <dsp:txBody>
-        <a:bodyPr spcFirstLastPara="0" vert="horz" wrap="square" lIns="128016" tIns="128016" rIns="128016" bIns="128016" numCol="1" spcCol="1270" anchor="t" anchorCtr="0">
-          <a:noAutofit/>
-        </a:bodyPr>
-        <a:lstStyle/>
-        <a:p>
-          <a:pPr marL="171450" lvl="1" indent="-171450" algn="l" defTabSz="800100">
-            <a:lnSpc>
-              <a:spcPct val="90000"/>
-            </a:lnSpc>
-            <a:spcBef>
-              <a:spcPct val="0"/>
-            </a:spcBef>
-            <a:spcAft>
-              <a:spcPct val="15000"/>
-            </a:spcAft>
-            <a:buChar char="•"/>
-          </a:pPr>
-          <a:r>
-            <a:rPr lang="en-GB" sz="1800" kern="1200" dirty="0"/>
-            <a:t>Dev</a:t>
-          </a:r>
-        </a:p>
-        <a:p>
-          <a:pPr marL="171450" lvl="1" indent="-171450" algn="l" defTabSz="800100">
-            <a:lnSpc>
-              <a:spcPct val="90000"/>
-            </a:lnSpc>
-            <a:spcBef>
-              <a:spcPct val="0"/>
-            </a:spcBef>
-            <a:spcAft>
-              <a:spcPct val="15000"/>
-            </a:spcAft>
-            <a:buChar char="•"/>
-          </a:pPr>
-          <a:r>
-            <a:rPr lang="en-GB" sz="1800" kern="1200" dirty="0"/>
-            <a:t>PoC</a:t>
-          </a:r>
-        </a:p>
-        <a:p>
-          <a:pPr marL="171450" lvl="1" indent="-171450" algn="l" defTabSz="800100">
-            <a:lnSpc>
-              <a:spcPct val="90000"/>
-            </a:lnSpc>
-            <a:spcBef>
-              <a:spcPct val="0"/>
-            </a:spcBef>
-            <a:spcAft>
-              <a:spcPct val="15000"/>
-            </a:spcAft>
-            <a:buChar char="•"/>
-          </a:pPr>
-          <a:r>
-            <a:rPr lang="en-GB" sz="1800" kern="1200" dirty="0"/>
-            <a:t>Demo</a:t>
-          </a:r>
-        </a:p>
-        <a:p>
-          <a:pPr marL="171450" lvl="1" indent="-171450" algn="l" defTabSz="800100">
-            <a:lnSpc>
-              <a:spcPct val="90000"/>
-            </a:lnSpc>
-            <a:spcBef>
-              <a:spcPct val="0"/>
-            </a:spcBef>
-            <a:spcAft>
-              <a:spcPct val="15000"/>
-            </a:spcAft>
-            <a:buChar char="•"/>
-          </a:pPr>
-          <a:r>
-            <a:rPr lang="en-GB" sz="1800" kern="1200" dirty="0"/>
-            <a:t>Test</a:t>
-          </a:r>
-        </a:p>
-        <a:p>
-          <a:pPr marL="171450" lvl="1" indent="-171450" algn="l" defTabSz="800100">
-            <a:lnSpc>
-              <a:spcPct val="90000"/>
-            </a:lnSpc>
-            <a:spcBef>
-              <a:spcPct val="0"/>
-            </a:spcBef>
-            <a:spcAft>
-              <a:spcPct val="15000"/>
-            </a:spcAft>
-            <a:buChar char="•"/>
-          </a:pPr>
-          <a:r>
-            <a:rPr lang="en-GB" sz="1800" kern="1200" dirty="0"/>
-            <a:t>SIT</a:t>
-          </a:r>
-        </a:p>
-        <a:p>
-          <a:pPr marL="171450" lvl="1" indent="-171450" algn="l" defTabSz="800100">
-            <a:lnSpc>
-              <a:spcPct val="90000"/>
-            </a:lnSpc>
-            <a:spcBef>
-              <a:spcPct val="0"/>
-            </a:spcBef>
-            <a:spcAft>
-              <a:spcPct val="15000"/>
-            </a:spcAft>
-            <a:buChar char="•"/>
-          </a:pPr>
-          <a:r>
-            <a:rPr lang="en-GB" sz="1800" kern="1200" dirty="0"/>
-            <a:t>UAT</a:t>
-          </a:r>
-        </a:p>
-        <a:p>
-          <a:pPr marL="171450" lvl="1" indent="-171450" algn="l" defTabSz="800100">
-            <a:lnSpc>
-              <a:spcPct val="90000"/>
-            </a:lnSpc>
-            <a:spcBef>
-              <a:spcPct val="0"/>
-            </a:spcBef>
-            <a:spcAft>
-              <a:spcPct val="15000"/>
-            </a:spcAft>
-            <a:buChar char="•"/>
-          </a:pPr>
-          <a:r>
-            <a:rPr lang="en-GB" sz="1800" kern="1200" dirty="0"/>
-            <a:t>OAT</a:t>
-          </a:r>
-        </a:p>
-        <a:p>
-          <a:pPr marL="171450" lvl="1" indent="-171450" algn="l" defTabSz="800100">
-            <a:lnSpc>
-              <a:spcPct val="90000"/>
-            </a:lnSpc>
-            <a:spcBef>
-              <a:spcPct val="0"/>
-            </a:spcBef>
-            <a:spcAft>
-              <a:spcPct val="15000"/>
-            </a:spcAft>
-            <a:buChar char="•"/>
-          </a:pPr>
-          <a:r>
-            <a:rPr lang="en-GB" sz="1800" kern="1200" dirty="0"/>
-            <a:t>Training</a:t>
-          </a:r>
-        </a:p>
-        <a:p>
-          <a:pPr marL="171450" lvl="1" indent="-171450" algn="l" defTabSz="800100">
-            <a:lnSpc>
-              <a:spcPct val="90000"/>
-            </a:lnSpc>
-            <a:spcBef>
-              <a:spcPct val="0"/>
-            </a:spcBef>
-            <a:spcAft>
-              <a:spcPct val="15000"/>
-            </a:spcAft>
-            <a:buChar char="•"/>
-          </a:pPr>
-          <a:r>
-            <a:rPr lang="en-GB" sz="1800" kern="1200" dirty="0"/>
-            <a:t>Pre-Prod</a:t>
-          </a:r>
-        </a:p>
-        <a:p>
-          <a:pPr marL="171450" lvl="1" indent="-171450" algn="l" defTabSz="800100">
-            <a:lnSpc>
-              <a:spcPct val="90000"/>
-            </a:lnSpc>
-            <a:spcBef>
-              <a:spcPct val="0"/>
-            </a:spcBef>
-            <a:spcAft>
-              <a:spcPct val="15000"/>
-            </a:spcAft>
-            <a:buChar char="•"/>
-          </a:pPr>
-          <a:r>
-            <a:rPr lang="en-GB" sz="1800" kern="1200" dirty="0"/>
-            <a:t>Prod</a:t>
-          </a:r>
-        </a:p>
-      </dsp:txBody>
-      <dsp:txXfrm>
-        <a:off x="7704634" y="1291686"/>
-        <a:ext cx="2102972" cy="3937373"/>
-      </dsp:txXfrm>
-    </dsp:sp>
-  </dsp:spTree>
-</dsp:drawing>
-</file>
-
 <file path=ppt/diagrams/layout1.xml><?xml version="1.0" encoding="utf-8"?>
 <dgm:layoutDef xmlns:dgm="http://schemas.openxmlformats.org/drawingml/2006/diagram" xmlns:a="http://schemas.openxmlformats.org/drawingml/2006/main" uniqueId="urn:microsoft.com/office/officeart/2005/8/layout/radial6">
   <dgm:title val=""/>
@@ -13769,2677 +8421,7 @@
 </dgm:layoutDef>
 </file>
 
-<file path=ppt/diagrams/layout2.xml><?xml version="1.0" encoding="utf-8"?>
-<dgm:layoutDef xmlns:dgm="http://schemas.openxmlformats.org/drawingml/2006/diagram" xmlns:a="http://schemas.openxmlformats.org/drawingml/2006/main" uniqueId="urn:microsoft.com/office/officeart/2005/8/layout/process3">
-  <dgm:title val=""/>
-  <dgm:desc val=""/>
-  <dgm:catLst>
-    <dgm:cat type="process" pri="2000"/>
-  </dgm:catLst>
-  <dgm:sampData>
-    <dgm:dataModel>
-      <dgm:ptLst>
-        <dgm:pt modelId="0" type="doc"/>
-        <dgm:pt modelId="1">
-          <dgm:prSet phldr="1"/>
-        </dgm:pt>
-        <dgm:pt modelId="11">
-          <dgm:prSet phldr="1"/>
-        </dgm:pt>
-        <dgm:pt modelId="2">
-          <dgm:prSet phldr="1"/>
-        </dgm:pt>
-        <dgm:pt modelId="21">
-          <dgm:prSet phldr="1"/>
-        </dgm:pt>
-        <dgm:pt modelId="3">
-          <dgm:prSet phldr="1"/>
-        </dgm:pt>
-        <dgm:pt modelId="31">
-          <dgm:prSet phldr="1"/>
-        </dgm:pt>
-      </dgm:ptLst>
-      <dgm:cxnLst>
-        <dgm:cxn modelId="4" srcId="0" destId="1" srcOrd="0" destOrd="0"/>
-        <dgm:cxn modelId="5" srcId="0" destId="2" srcOrd="1" destOrd="0"/>
-        <dgm:cxn modelId="6" srcId="0" destId="3" srcOrd="3" destOrd="0"/>
-        <dgm:cxn modelId="12" srcId="1" destId="11" srcOrd="0" destOrd="0"/>
-        <dgm:cxn modelId="23" srcId="2" destId="21" srcOrd="0" destOrd="0"/>
-        <dgm:cxn modelId="34" srcId="3" destId="31" srcOrd="0" destOrd="0"/>
-      </dgm:cxnLst>
-      <dgm:bg/>
-      <dgm:whole/>
-    </dgm:dataModel>
-  </dgm:sampData>
-  <dgm:styleData>
-    <dgm:dataModel>
-      <dgm:ptLst>
-        <dgm:pt modelId="0" type="doc"/>
-        <dgm:pt modelId="1">
-          <dgm:prSet phldr="1"/>
-        </dgm:pt>
-        <dgm:pt modelId="11">
-          <dgm:prSet phldr="1"/>
-        </dgm:pt>
-        <dgm:pt modelId="2">
-          <dgm:prSet phldr="1"/>
-        </dgm:pt>
-        <dgm:pt modelId="21">
-          <dgm:prSet phldr="1"/>
-        </dgm:pt>
-      </dgm:ptLst>
-      <dgm:cxnLst>
-        <dgm:cxn modelId="4" srcId="0" destId="1" srcOrd="0" destOrd="0"/>
-        <dgm:cxn modelId="5" srcId="0" destId="2" srcOrd="1" destOrd="0"/>
-        <dgm:cxn modelId="13" srcId="1" destId="11" srcOrd="0" destOrd="0"/>
-        <dgm:cxn modelId="23" srcId="2" destId="21" srcOrd="0" destOrd="0"/>
-      </dgm:cxnLst>
-      <dgm:bg/>
-      <dgm:whole/>
-    </dgm:dataModel>
-  </dgm:styleData>
-  <dgm:clrData>
-    <dgm:dataModel>
-      <dgm:ptLst>
-        <dgm:pt modelId="0" type="doc"/>
-        <dgm:pt modelId="1">
-          <dgm:prSet phldr="1"/>
-        </dgm:pt>
-        <dgm:pt modelId="11">
-          <dgm:prSet phldr="1"/>
-        </dgm:pt>
-        <dgm:pt modelId="2">
-          <dgm:prSet phldr="1"/>
-        </dgm:pt>
-        <dgm:pt modelId="21">
-          <dgm:prSet phldr="1"/>
-        </dgm:pt>
-        <dgm:pt modelId="3">
-          <dgm:prSet phldr="1"/>
-        </dgm:pt>
-        <dgm:pt modelId="31">
-          <dgm:prSet phldr="1"/>
-        </dgm:pt>
-        <dgm:pt modelId="4">
-          <dgm:prSet phldr="1"/>
-        </dgm:pt>
-        <dgm:pt modelId="41">
-          <dgm:prSet phldr="1"/>
-        </dgm:pt>
-      </dgm:ptLst>
-      <dgm:cxnLst>
-        <dgm:cxn modelId="5" srcId="0" destId="1" srcOrd="0" destOrd="0"/>
-        <dgm:cxn modelId="6" srcId="0" destId="2" srcOrd="1" destOrd="0"/>
-        <dgm:cxn modelId="7" srcId="0" destId="3" srcOrd="2" destOrd="0"/>
-        <dgm:cxn modelId="8" srcId="0" destId="4" srcOrd="3" destOrd="0"/>
-        <dgm:cxn modelId="13" srcId="1" destId="11" srcOrd="0" destOrd="0"/>
-        <dgm:cxn modelId="23" srcId="2" destId="21" srcOrd="0" destOrd="0"/>
-        <dgm:cxn modelId="33" srcId="3" destId="31" srcOrd="0" destOrd="0"/>
-        <dgm:cxn modelId="43" srcId="4" destId="41" srcOrd="0" destOrd="0"/>
-      </dgm:cxnLst>
-      <dgm:bg/>
-      <dgm:whole/>
-    </dgm:dataModel>
-  </dgm:clrData>
-  <dgm:layoutNode name="linearFlow">
-    <dgm:varLst>
-      <dgm:dir/>
-      <dgm:animLvl val="lvl"/>
-      <dgm:resizeHandles val="exact"/>
-    </dgm:varLst>
-    <dgm:choose name="Name0">
-      <dgm:if name="Name1" func="var" arg="dir" op="equ" val="norm">
-        <dgm:alg type="lin"/>
-      </dgm:if>
-      <dgm:else name="Name2">
-        <dgm:alg type="lin">
-          <dgm:param type="linDir" val="fromR"/>
-        </dgm:alg>
-      </dgm:else>
-    </dgm:choose>
-    <dgm:shape xmlns:r="http://schemas.openxmlformats.org/officeDocument/2006/relationships" r:blip="">
-      <dgm:adjLst/>
-    </dgm:shape>
-    <dgm:presOf/>
-    <dgm:constrLst>
-      <dgm:constr type="w" for="ch" forName="composite" refType="w"/>
-      <dgm:constr type="w" for="ch" ptType="sibTrans" refType="w" refFor="ch" refForName="composite" fact="0.3333"/>
-      <dgm:constr type="w" for="des" forName="parTx"/>
-      <dgm:constr type="h" for="des" forName="parTx" op="equ"/>
-      <dgm:constr type="h" for="des" forName="parSh" op="equ"/>
-      <dgm:constr type="w" for="des" forName="desTx"/>
-      <dgm:constr type="h" for="des" forName="desTx" op="equ"/>
-      <dgm:constr type="w" for="des" forName="parSh"/>
-      <dgm:constr type="primFontSz" for="des" forName="parTx" val="65"/>
-      <dgm:constr type="secFontSz" for="des" forName="desTx" refType="primFontSz" refFor="des" refForName="parTx" op="equ"/>
-      <dgm:constr type="primFontSz" for="des" forName="connTx" refType="primFontSz" refFor="des" refForName="parTx" fact="0.8"/>
-      <dgm:constr type="primFontSz" for="des" forName="connTx" refType="primFontSz" refFor="des" refForName="parTx" op="lte" fact="0.8"/>
-      <dgm:constr type="h" for="des" forName="parTx" refType="primFontSz" refFor="des" refForName="parTx" fact="0.8"/>
-      <dgm:constr type="h" for="des" forName="parSh" refType="primFontSz" refFor="des" refForName="parTx" fact="1.2"/>
-      <dgm:constr type="h" for="des" forName="desTx" refType="primFontSz" refFor="des" refForName="parTx" fact="1.6"/>
-      <dgm:constr type="h" for="des" forName="parSh" refType="h" refFor="des" refForName="parTx" op="lte" fact="1.5"/>
-      <dgm:constr type="h" for="des" forName="parSh" refType="h" refFor="des" refForName="parTx" op="gte" fact="1.5"/>
-    </dgm:constrLst>
-    <dgm:ruleLst>
-      <dgm:rule type="w" for="ch" forName="composite" val="0" fact="NaN" max="NaN"/>
-      <dgm:rule type="primFontSz" for="des" forName="parTx" val="5" fact="NaN" max="NaN"/>
-    </dgm:ruleLst>
-    <dgm:forEach name="Name3" axis="ch" ptType="node">
-      <dgm:layoutNode name="composite">
-        <dgm:alg type="composite"/>
-        <dgm:shape xmlns:r="http://schemas.openxmlformats.org/officeDocument/2006/relationships" r:blip="">
-          <dgm:adjLst/>
-        </dgm:shape>
-        <dgm:presOf/>
-        <dgm:choose name="Name4">
-          <dgm:if name="Name5" func="var" arg="dir" op="equ" val="norm">
-            <dgm:constrLst>
-              <dgm:constr type="h" refType="w" fact="1000"/>
-              <dgm:constr type="l" for="ch" forName="parTx"/>
-              <dgm:constr type="w" for="ch" forName="parTx" refType="w" fact="0.83"/>
-              <dgm:constr type="t" for="ch" forName="parTx"/>
-              <dgm:constr type="l" for="ch" forName="parSh"/>
-              <dgm:constr type="w" for="ch" forName="parSh" refType="w" refFor="ch" refForName="parTx"/>
-              <dgm:constr type="t" for="ch" forName="parSh"/>
-              <dgm:constr type="l" for="ch" forName="desTx" refType="w" fact="0.17"/>
-              <dgm:constr type="w" for="ch" forName="desTx" refType="w" refFor="ch" refForName="parTx"/>
-              <dgm:constr type="t" for="ch" forName="desTx" refType="h" refFor="ch" refForName="parTx"/>
-            </dgm:constrLst>
-          </dgm:if>
-          <dgm:else name="Name6">
-            <dgm:constrLst>
-              <dgm:constr type="h" refType="w" fact="1000"/>
-              <dgm:constr type="l" for="ch" forName="parTx" refType="w" fact="0.17"/>
-              <dgm:constr type="w" for="ch" forName="parTx" refType="w" fact="0.83"/>
-              <dgm:constr type="t" for="ch" forName="parTx"/>
-              <dgm:constr type="l" for="ch" forName="parSh" refType="w" fact="0.15"/>
-              <dgm:constr type="w" for="ch" forName="parSh" refType="w" refFor="ch" refForName="parTx"/>
-              <dgm:constr type="t" for="ch" forName="parSh"/>
-              <dgm:constr type="l" for="ch" forName="desTx"/>
-              <dgm:constr type="w" for="ch" forName="desTx" refType="w" refFor="ch" refForName="parTx"/>
-              <dgm:constr type="t" for="ch" forName="desTx" refType="h" refFor="ch" refForName="parTx"/>
-            </dgm:constrLst>
-          </dgm:else>
-        </dgm:choose>
-        <dgm:ruleLst>
-          <dgm:rule type="h" val="INF" fact="NaN" max="NaN"/>
-        </dgm:ruleLst>
-        <dgm:layoutNode name="parTx">
-          <dgm:varLst>
-            <dgm:chMax val="0"/>
-            <dgm:chPref val="0"/>
-            <dgm:bulletEnabled val="1"/>
-          </dgm:varLst>
-          <dgm:alg type="tx">
-            <dgm:param type="parTxLTRAlign" val="l"/>
-            <dgm:param type="parTxRTLAlign" val="r"/>
-            <dgm:param type="txAnchorVert" val="t"/>
-          </dgm:alg>
-          <dgm:shape xmlns:r="http://schemas.openxmlformats.org/officeDocument/2006/relationships" type="rect" r:blip="" zOrderOff="1" hideGeom="1">
-            <dgm:adjLst>
-              <dgm:adj idx="1" val="0.1"/>
-            </dgm:adjLst>
-          </dgm:shape>
-          <dgm:presOf axis="self" ptType="node"/>
-          <dgm:constrLst>
-            <dgm:constr type="h" refType="w" op="lte" fact="0.4"/>
-            <dgm:constr type="bMarg" refType="primFontSz" fact="0.3"/>
-            <dgm:constr type="h"/>
-          </dgm:constrLst>
-          <dgm:ruleLst>
-            <dgm:rule type="h" val="INF" fact="NaN" max="NaN"/>
-          </dgm:ruleLst>
-        </dgm:layoutNode>
-        <dgm:layoutNode name="parSh">
-          <dgm:alg type="sp"/>
-          <dgm:shape xmlns:r="http://schemas.openxmlformats.org/officeDocument/2006/relationships" type="roundRect" r:blip="">
-            <dgm:adjLst>
-              <dgm:adj idx="1" val="0.1"/>
-            </dgm:adjLst>
-          </dgm:shape>
-          <dgm:presOf axis="self" ptType="node"/>
-          <dgm:constrLst>
-            <dgm:constr type="h"/>
-          </dgm:constrLst>
-          <dgm:ruleLst/>
-        </dgm:layoutNode>
-        <dgm:layoutNode name="desTx" styleLbl="fgAcc1">
-          <dgm:varLst>
-            <dgm:bulletEnabled val="1"/>
-          </dgm:varLst>
-          <dgm:alg type="tx">
-            <dgm:param type="stBulletLvl" val="1"/>
-          </dgm:alg>
-          <dgm:shape xmlns:r="http://schemas.openxmlformats.org/officeDocument/2006/relationships" type="roundRect" r:blip="">
-            <dgm:adjLst>
-              <dgm:adj idx="1" val="0.1"/>
-            </dgm:adjLst>
-          </dgm:shape>
-          <dgm:presOf axis="des" ptType="node"/>
-          <dgm:constrLst>
-            <dgm:constr type="secFontSz" val="65"/>
-            <dgm:constr type="primFontSz" refType="secFontSz"/>
-            <dgm:constr type="h"/>
-          </dgm:constrLst>
-          <dgm:ruleLst>
-            <dgm:rule type="h" val="INF" fact="NaN" max="NaN"/>
-          </dgm:ruleLst>
-        </dgm:layoutNode>
-      </dgm:layoutNode>
-      <dgm:forEach name="sibTransForEach" axis="followSib" ptType="sibTrans" cnt="1">
-        <dgm:layoutNode name="sibTrans">
-          <dgm:alg type="conn">
-            <dgm:param type="begPts" val="auto"/>
-            <dgm:param type="endPts" val="auto"/>
-            <dgm:param type="srcNode" val="parTx"/>
-            <dgm:param type="dstNode" val="parTx"/>
-          </dgm:alg>
-          <dgm:shape xmlns:r="http://schemas.openxmlformats.org/officeDocument/2006/relationships" type="conn" r:blip="">
-            <dgm:adjLst/>
-          </dgm:shape>
-          <dgm:presOf axis="self"/>
-          <dgm:constrLst>
-            <dgm:constr type="h" refType="w" fact="0.62"/>
-            <dgm:constr type="connDist"/>
-            <dgm:constr type="begPad" refType="connDist" fact="0.25"/>
-            <dgm:constr type="endPad" refType="connDist" fact="0.22"/>
-          </dgm:constrLst>
-          <dgm:ruleLst/>
-          <dgm:layoutNode name="connTx">
-            <dgm:alg type="tx">
-              <dgm:param type="autoTxRot" val="grav"/>
-            </dgm:alg>
-            <dgm:shape xmlns:r="http://schemas.openxmlformats.org/officeDocument/2006/relationships" type="conn" r:blip="" hideGeom="1">
-              <dgm:adjLst/>
-            </dgm:shape>
-            <dgm:presOf axis="self"/>
-            <dgm:constrLst>
-              <dgm:constr type="lMarg"/>
-              <dgm:constr type="rMarg"/>
-              <dgm:constr type="tMarg"/>
-              <dgm:constr type="bMarg"/>
-            </dgm:constrLst>
-            <dgm:ruleLst>
-              <dgm:rule type="primFontSz" val="5" fact="NaN" max="NaN"/>
-            </dgm:ruleLst>
-          </dgm:layoutNode>
-        </dgm:layoutNode>
-      </dgm:forEach>
-    </dgm:forEach>
-  </dgm:layoutNode>
-</dgm:layoutDef>
-</file>
-
-<file path=ppt/diagrams/layout3.xml><?xml version="1.0" encoding="utf-8"?>
-<dgm:layoutDef xmlns:dgm="http://schemas.openxmlformats.org/drawingml/2006/diagram" xmlns:a="http://schemas.openxmlformats.org/drawingml/2006/main" uniqueId="urn:microsoft.com/office/officeart/2005/8/layout/process3">
-  <dgm:title val=""/>
-  <dgm:desc val=""/>
-  <dgm:catLst>
-    <dgm:cat type="process" pri="2000"/>
-  </dgm:catLst>
-  <dgm:sampData>
-    <dgm:dataModel>
-      <dgm:ptLst>
-        <dgm:pt modelId="0" type="doc"/>
-        <dgm:pt modelId="1">
-          <dgm:prSet phldr="1"/>
-        </dgm:pt>
-        <dgm:pt modelId="11">
-          <dgm:prSet phldr="1"/>
-        </dgm:pt>
-        <dgm:pt modelId="2">
-          <dgm:prSet phldr="1"/>
-        </dgm:pt>
-        <dgm:pt modelId="21">
-          <dgm:prSet phldr="1"/>
-        </dgm:pt>
-        <dgm:pt modelId="3">
-          <dgm:prSet phldr="1"/>
-        </dgm:pt>
-        <dgm:pt modelId="31">
-          <dgm:prSet phldr="1"/>
-        </dgm:pt>
-      </dgm:ptLst>
-      <dgm:cxnLst>
-        <dgm:cxn modelId="4" srcId="0" destId="1" srcOrd="0" destOrd="0"/>
-        <dgm:cxn modelId="5" srcId="0" destId="2" srcOrd="1" destOrd="0"/>
-        <dgm:cxn modelId="6" srcId="0" destId="3" srcOrd="3" destOrd="0"/>
-        <dgm:cxn modelId="12" srcId="1" destId="11" srcOrd="0" destOrd="0"/>
-        <dgm:cxn modelId="23" srcId="2" destId="21" srcOrd="0" destOrd="0"/>
-        <dgm:cxn modelId="34" srcId="3" destId="31" srcOrd="0" destOrd="0"/>
-      </dgm:cxnLst>
-      <dgm:bg/>
-      <dgm:whole/>
-    </dgm:dataModel>
-  </dgm:sampData>
-  <dgm:styleData>
-    <dgm:dataModel>
-      <dgm:ptLst>
-        <dgm:pt modelId="0" type="doc"/>
-        <dgm:pt modelId="1">
-          <dgm:prSet phldr="1"/>
-        </dgm:pt>
-        <dgm:pt modelId="11">
-          <dgm:prSet phldr="1"/>
-        </dgm:pt>
-        <dgm:pt modelId="2">
-          <dgm:prSet phldr="1"/>
-        </dgm:pt>
-        <dgm:pt modelId="21">
-          <dgm:prSet phldr="1"/>
-        </dgm:pt>
-      </dgm:ptLst>
-      <dgm:cxnLst>
-        <dgm:cxn modelId="4" srcId="0" destId="1" srcOrd="0" destOrd="0"/>
-        <dgm:cxn modelId="5" srcId="0" destId="2" srcOrd="1" destOrd="0"/>
-        <dgm:cxn modelId="13" srcId="1" destId="11" srcOrd="0" destOrd="0"/>
-        <dgm:cxn modelId="23" srcId="2" destId="21" srcOrd="0" destOrd="0"/>
-      </dgm:cxnLst>
-      <dgm:bg/>
-      <dgm:whole/>
-    </dgm:dataModel>
-  </dgm:styleData>
-  <dgm:clrData>
-    <dgm:dataModel>
-      <dgm:ptLst>
-        <dgm:pt modelId="0" type="doc"/>
-        <dgm:pt modelId="1">
-          <dgm:prSet phldr="1"/>
-        </dgm:pt>
-        <dgm:pt modelId="11">
-          <dgm:prSet phldr="1"/>
-        </dgm:pt>
-        <dgm:pt modelId="2">
-          <dgm:prSet phldr="1"/>
-        </dgm:pt>
-        <dgm:pt modelId="21">
-          <dgm:prSet phldr="1"/>
-        </dgm:pt>
-        <dgm:pt modelId="3">
-          <dgm:prSet phldr="1"/>
-        </dgm:pt>
-        <dgm:pt modelId="31">
-          <dgm:prSet phldr="1"/>
-        </dgm:pt>
-        <dgm:pt modelId="4">
-          <dgm:prSet phldr="1"/>
-        </dgm:pt>
-        <dgm:pt modelId="41">
-          <dgm:prSet phldr="1"/>
-        </dgm:pt>
-      </dgm:ptLst>
-      <dgm:cxnLst>
-        <dgm:cxn modelId="5" srcId="0" destId="1" srcOrd="0" destOrd="0"/>
-        <dgm:cxn modelId="6" srcId="0" destId="2" srcOrd="1" destOrd="0"/>
-        <dgm:cxn modelId="7" srcId="0" destId="3" srcOrd="2" destOrd="0"/>
-        <dgm:cxn modelId="8" srcId="0" destId="4" srcOrd="3" destOrd="0"/>
-        <dgm:cxn modelId="13" srcId="1" destId="11" srcOrd="0" destOrd="0"/>
-        <dgm:cxn modelId="23" srcId="2" destId="21" srcOrd="0" destOrd="0"/>
-        <dgm:cxn modelId="33" srcId="3" destId="31" srcOrd="0" destOrd="0"/>
-        <dgm:cxn modelId="43" srcId="4" destId="41" srcOrd="0" destOrd="0"/>
-      </dgm:cxnLst>
-      <dgm:bg/>
-      <dgm:whole/>
-    </dgm:dataModel>
-  </dgm:clrData>
-  <dgm:layoutNode name="linearFlow">
-    <dgm:varLst>
-      <dgm:dir/>
-      <dgm:animLvl val="lvl"/>
-      <dgm:resizeHandles val="exact"/>
-    </dgm:varLst>
-    <dgm:choose name="Name0">
-      <dgm:if name="Name1" func="var" arg="dir" op="equ" val="norm">
-        <dgm:alg type="lin"/>
-      </dgm:if>
-      <dgm:else name="Name2">
-        <dgm:alg type="lin">
-          <dgm:param type="linDir" val="fromR"/>
-        </dgm:alg>
-      </dgm:else>
-    </dgm:choose>
-    <dgm:shape xmlns:r="http://schemas.openxmlformats.org/officeDocument/2006/relationships" r:blip="">
-      <dgm:adjLst/>
-    </dgm:shape>
-    <dgm:presOf/>
-    <dgm:constrLst>
-      <dgm:constr type="w" for="ch" forName="composite" refType="w"/>
-      <dgm:constr type="w" for="ch" ptType="sibTrans" refType="w" refFor="ch" refForName="composite" fact="0.3333"/>
-      <dgm:constr type="w" for="des" forName="parTx"/>
-      <dgm:constr type="h" for="des" forName="parTx" op="equ"/>
-      <dgm:constr type="h" for="des" forName="parSh" op="equ"/>
-      <dgm:constr type="w" for="des" forName="desTx"/>
-      <dgm:constr type="h" for="des" forName="desTx" op="equ"/>
-      <dgm:constr type="w" for="des" forName="parSh"/>
-      <dgm:constr type="primFontSz" for="des" forName="parTx" val="65"/>
-      <dgm:constr type="secFontSz" for="des" forName="desTx" refType="primFontSz" refFor="des" refForName="parTx" op="equ"/>
-      <dgm:constr type="primFontSz" for="des" forName="connTx" refType="primFontSz" refFor="des" refForName="parTx" fact="0.8"/>
-      <dgm:constr type="primFontSz" for="des" forName="connTx" refType="primFontSz" refFor="des" refForName="parTx" op="lte" fact="0.8"/>
-      <dgm:constr type="h" for="des" forName="parTx" refType="primFontSz" refFor="des" refForName="parTx" fact="0.8"/>
-      <dgm:constr type="h" for="des" forName="parSh" refType="primFontSz" refFor="des" refForName="parTx" fact="1.2"/>
-      <dgm:constr type="h" for="des" forName="desTx" refType="primFontSz" refFor="des" refForName="parTx" fact="1.6"/>
-      <dgm:constr type="h" for="des" forName="parSh" refType="h" refFor="des" refForName="parTx" op="lte" fact="1.5"/>
-      <dgm:constr type="h" for="des" forName="parSh" refType="h" refFor="des" refForName="parTx" op="gte" fact="1.5"/>
-    </dgm:constrLst>
-    <dgm:ruleLst>
-      <dgm:rule type="w" for="ch" forName="composite" val="0" fact="NaN" max="NaN"/>
-      <dgm:rule type="primFontSz" for="des" forName="parTx" val="5" fact="NaN" max="NaN"/>
-    </dgm:ruleLst>
-    <dgm:forEach name="Name3" axis="ch" ptType="node">
-      <dgm:layoutNode name="composite">
-        <dgm:alg type="composite"/>
-        <dgm:shape xmlns:r="http://schemas.openxmlformats.org/officeDocument/2006/relationships" r:blip="">
-          <dgm:adjLst/>
-        </dgm:shape>
-        <dgm:presOf/>
-        <dgm:choose name="Name4">
-          <dgm:if name="Name5" func="var" arg="dir" op="equ" val="norm">
-            <dgm:constrLst>
-              <dgm:constr type="h" refType="w" fact="1000"/>
-              <dgm:constr type="l" for="ch" forName="parTx"/>
-              <dgm:constr type="w" for="ch" forName="parTx" refType="w" fact="0.83"/>
-              <dgm:constr type="t" for="ch" forName="parTx"/>
-              <dgm:constr type="l" for="ch" forName="parSh"/>
-              <dgm:constr type="w" for="ch" forName="parSh" refType="w" refFor="ch" refForName="parTx"/>
-              <dgm:constr type="t" for="ch" forName="parSh"/>
-              <dgm:constr type="l" for="ch" forName="desTx" refType="w" fact="0.17"/>
-              <dgm:constr type="w" for="ch" forName="desTx" refType="w" refFor="ch" refForName="parTx"/>
-              <dgm:constr type="t" for="ch" forName="desTx" refType="h" refFor="ch" refForName="parTx"/>
-            </dgm:constrLst>
-          </dgm:if>
-          <dgm:else name="Name6">
-            <dgm:constrLst>
-              <dgm:constr type="h" refType="w" fact="1000"/>
-              <dgm:constr type="l" for="ch" forName="parTx" refType="w" fact="0.17"/>
-              <dgm:constr type="w" for="ch" forName="parTx" refType="w" fact="0.83"/>
-              <dgm:constr type="t" for="ch" forName="parTx"/>
-              <dgm:constr type="l" for="ch" forName="parSh" refType="w" fact="0.15"/>
-              <dgm:constr type="w" for="ch" forName="parSh" refType="w" refFor="ch" refForName="parTx"/>
-              <dgm:constr type="t" for="ch" forName="parSh"/>
-              <dgm:constr type="l" for="ch" forName="desTx"/>
-              <dgm:constr type="w" for="ch" forName="desTx" refType="w" refFor="ch" refForName="parTx"/>
-              <dgm:constr type="t" for="ch" forName="desTx" refType="h" refFor="ch" refForName="parTx"/>
-            </dgm:constrLst>
-          </dgm:else>
-        </dgm:choose>
-        <dgm:ruleLst>
-          <dgm:rule type="h" val="INF" fact="NaN" max="NaN"/>
-        </dgm:ruleLst>
-        <dgm:layoutNode name="parTx">
-          <dgm:varLst>
-            <dgm:chMax val="0"/>
-            <dgm:chPref val="0"/>
-            <dgm:bulletEnabled val="1"/>
-          </dgm:varLst>
-          <dgm:alg type="tx">
-            <dgm:param type="parTxLTRAlign" val="l"/>
-            <dgm:param type="parTxRTLAlign" val="r"/>
-            <dgm:param type="txAnchorVert" val="t"/>
-          </dgm:alg>
-          <dgm:shape xmlns:r="http://schemas.openxmlformats.org/officeDocument/2006/relationships" type="rect" r:blip="" zOrderOff="1" hideGeom="1">
-            <dgm:adjLst>
-              <dgm:adj idx="1" val="0.1"/>
-            </dgm:adjLst>
-          </dgm:shape>
-          <dgm:presOf axis="self" ptType="node"/>
-          <dgm:constrLst>
-            <dgm:constr type="h" refType="w" op="lte" fact="0.4"/>
-            <dgm:constr type="bMarg" refType="primFontSz" fact="0.3"/>
-            <dgm:constr type="h"/>
-          </dgm:constrLst>
-          <dgm:ruleLst>
-            <dgm:rule type="h" val="INF" fact="NaN" max="NaN"/>
-          </dgm:ruleLst>
-        </dgm:layoutNode>
-        <dgm:layoutNode name="parSh">
-          <dgm:alg type="sp"/>
-          <dgm:shape xmlns:r="http://schemas.openxmlformats.org/officeDocument/2006/relationships" type="roundRect" r:blip="">
-            <dgm:adjLst>
-              <dgm:adj idx="1" val="0.1"/>
-            </dgm:adjLst>
-          </dgm:shape>
-          <dgm:presOf axis="self" ptType="node"/>
-          <dgm:constrLst>
-            <dgm:constr type="h"/>
-          </dgm:constrLst>
-          <dgm:ruleLst/>
-        </dgm:layoutNode>
-        <dgm:layoutNode name="desTx" styleLbl="fgAcc1">
-          <dgm:varLst>
-            <dgm:bulletEnabled val="1"/>
-          </dgm:varLst>
-          <dgm:alg type="tx">
-            <dgm:param type="stBulletLvl" val="1"/>
-          </dgm:alg>
-          <dgm:shape xmlns:r="http://schemas.openxmlformats.org/officeDocument/2006/relationships" type="roundRect" r:blip="">
-            <dgm:adjLst>
-              <dgm:adj idx="1" val="0.1"/>
-            </dgm:adjLst>
-          </dgm:shape>
-          <dgm:presOf axis="des" ptType="node"/>
-          <dgm:constrLst>
-            <dgm:constr type="secFontSz" val="65"/>
-            <dgm:constr type="primFontSz" refType="secFontSz"/>
-            <dgm:constr type="h"/>
-          </dgm:constrLst>
-          <dgm:ruleLst>
-            <dgm:rule type="h" val="INF" fact="NaN" max="NaN"/>
-          </dgm:ruleLst>
-        </dgm:layoutNode>
-      </dgm:layoutNode>
-      <dgm:forEach name="sibTransForEach" axis="followSib" ptType="sibTrans" cnt="1">
-        <dgm:layoutNode name="sibTrans">
-          <dgm:alg type="conn">
-            <dgm:param type="begPts" val="auto"/>
-            <dgm:param type="endPts" val="auto"/>
-            <dgm:param type="srcNode" val="parTx"/>
-            <dgm:param type="dstNode" val="parTx"/>
-          </dgm:alg>
-          <dgm:shape xmlns:r="http://schemas.openxmlformats.org/officeDocument/2006/relationships" type="conn" r:blip="">
-            <dgm:adjLst/>
-          </dgm:shape>
-          <dgm:presOf axis="self"/>
-          <dgm:constrLst>
-            <dgm:constr type="h" refType="w" fact="0.62"/>
-            <dgm:constr type="connDist"/>
-            <dgm:constr type="begPad" refType="connDist" fact="0.25"/>
-            <dgm:constr type="endPad" refType="connDist" fact="0.22"/>
-          </dgm:constrLst>
-          <dgm:ruleLst/>
-          <dgm:layoutNode name="connTx">
-            <dgm:alg type="tx">
-              <dgm:param type="autoTxRot" val="grav"/>
-            </dgm:alg>
-            <dgm:shape xmlns:r="http://schemas.openxmlformats.org/officeDocument/2006/relationships" type="conn" r:blip="" hideGeom="1">
-              <dgm:adjLst/>
-            </dgm:shape>
-            <dgm:presOf axis="self"/>
-            <dgm:constrLst>
-              <dgm:constr type="lMarg"/>
-              <dgm:constr type="rMarg"/>
-              <dgm:constr type="tMarg"/>
-              <dgm:constr type="bMarg"/>
-            </dgm:constrLst>
-            <dgm:ruleLst>
-              <dgm:rule type="primFontSz" val="5" fact="NaN" max="NaN"/>
-            </dgm:ruleLst>
-          </dgm:layoutNode>
-        </dgm:layoutNode>
-      </dgm:forEach>
-    </dgm:forEach>
-  </dgm:layoutNode>
-</dgm:layoutDef>
-</file>
-
 <file path=ppt/diagrams/quickStyle1.xml><?xml version="1.0" encoding="utf-8"?>
-<dgm:styleDef xmlns:dgm="http://schemas.openxmlformats.org/drawingml/2006/diagram" xmlns:a="http://schemas.openxmlformats.org/drawingml/2006/main" uniqueId="urn:microsoft.com/office/officeart/2005/8/quickstyle/simple1">
-  <dgm:title val=""/>
-  <dgm:desc val=""/>
-  <dgm:catLst>
-    <dgm:cat type="simple" pri="10100"/>
-  </dgm:catLst>
-  <dgm:scene3d>
-    <a:camera prst="orthographicFront"/>
-    <a:lightRig rig="threePt" dir="t"/>
-  </dgm:scene3d>
-  <dgm:styleLbl name="node0">
-    <dgm:scene3d>
-      <a:camera prst="orthographicFront"/>
-      <a:lightRig rig="threePt" dir="t"/>
-    </dgm:scene3d>
-    <dgm:sp3d/>
-    <dgm:txPr/>
-    <dgm:style>
-      <a:lnRef idx="2">
-        <a:scrgbClr r="0" g="0" b="0"/>
-      </a:lnRef>
-      <a:fillRef idx="1">
-        <a:scrgbClr r="0" g="0" b="0"/>
-      </a:fillRef>
-      <a:effectRef idx="0">
-        <a:scrgbClr r="0" g="0" b="0"/>
-      </a:effectRef>
-      <a:fontRef idx="minor">
-        <a:schemeClr val="lt1"/>
-      </a:fontRef>
-    </dgm:style>
-  </dgm:styleLbl>
-  <dgm:styleLbl name="lnNode1">
-    <dgm:scene3d>
-      <a:camera prst="orthographicFront"/>
-      <a:lightRig rig="threePt" dir="t"/>
-    </dgm:scene3d>
-    <dgm:sp3d/>
-    <dgm:txPr/>
-    <dgm:style>
-      <a:lnRef idx="2">
-        <a:scrgbClr r="0" g="0" b="0"/>
-      </a:lnRef>
-      <a:fillRef idx="1">
-        <a:scrgbClr r="0" g="0" b="0"/>
-      </a:fillRef>
-      <a:effectRef idx="0">
-        <a:scrgbClr r="0" g="0" b="0"/>
-      </a:effectRef>
-      <a:fontRef idx="minor">
-        <a:schemeClr val="lt1"/>
-      </a:fontRef>
-    </dgm:style>
-  </dgm:styleLbl>
-  <dgm:styleLbl name="vennNode1">
-    <dgm:scene3d>
-      <a:camera prst="orthographicFront"/>
-      <a:lightRig rig="threePt" dir="t"/>
-    </dgm:scene3d>
-    <dgm:sp3d/>
-    <dgm:txPr/>
-    <dgm:style>
-      <a:lnRef idx="2">
-        <a:scrgbClr r="0" g="0" b="0"/>
-      </a:lnRef>
-      <a:fillRef idx="1">
-        <a:scrgbClr r="0" g="0" b="0"/>
-      </a:fillRef>
-      <a:effectRef idx="0">
-        <a:scrgbClr r="0" g="0" b="0"/>
-      </a:effectRef>
-      <a:fontRef idx="minor">
-        <a:schemeClr val="tx1"/>
-      </a:fontRef>
-    </dgm:style>
-  </dgm:styleLbl>
-  <dgm:styleLbl name="alignNode1">
-    <dgm:scene3d>
-      <a:camera prst="orthographicFront"/>
-      <a:lightRig rig="threePt" dir="t"/>
-    </dgm:scene3d>
-    <dgm:sp3d/>
-    <dgm:txPr/>
-    <dgm:style>
-      <a:lnRef idx="2">
-        <a:scrgbClr r="0" g="0" b="0"/>
-      </a:lnRef>
-      <a:fillRef idx="1">
-        <a:scrgbClr r="0" g="0" b="0"/>
-      </a:fillRef>
-      <a:effectRef idx="0">
-        <a:scrgbClr r="0" g="0" b="0"/>
-      </a:effectRef>
-      <a:fontRef idx="minor">
-        <a:schemeClr val="lt1"/>
-      </a:fontRef>
-    </dgm:style>
-  </dgm:styleLbl>
-  <dgm:styleLbl name="node1">
-    <dgm:scene3d>
-      <a:camera prst="orthographicFront"/>
-      <a:lightRig rig="threePt" dir="t"/>
-    </dgm:scene3d>
-    <dgm:sp3d/>
-    <dgm:txPr/>
-    <dgm:style>
-      <a:lnRef idx="2">
-        <a:scrgbClr r="0" g="0" b="0"/>
-      </a:lnRef>
-      <a:fillRef idx="1">
-        <a:scrgbClr r="0" g="0" b="0"/>
-      </a:fillRef>
-      <a:effectRef idx="0">
-        <a:scrgbClr r="0" g="0" b="0"/>
-      </a:effectRef>
-      <a:fontRef idx="minor">
-        <a:schemeClr val="lt1"/>
-      </a:fontRef>
-    </dgm:style>
-  </dgm:styleLbl>
-  <dgm:styleLbl name="node2">
-    <dgm:scene3d>
-      <a:camera prst="orthographicFront"/>
-      <a:lightRig rig="threePt" dir="t"/>
-    </dgm:scene3d>
-    <dgm:sp3d/>
-    <dgm:txPr/>
-    <dgm:style>
-      <a:lnRef idx="2">
-        <a:scrgbClr r="0" g="0" b="0"/>
-      </a:lnRef>
-      <a:fillRef idx="1">
-        <a:scrgbClr r="0" g="0" b="0"/>
-      </a:fillRef>
-      <a:effectRef idx="0">
-        <a:scrgbClr r="0" g="0" b="0"/>
-      </a:effectRef>
-      <a:fontRef idx="minor">
-        <a:schemeClr val="lt1"/>
-      </a:fontRef>
-    </dgm:style>
-  </dgm:styleLbl>
-  <dgm:styleLbl name="node3">
-    <dgm:scene3d>
-      <a:camera prst="orthographicFront"/>
-      <a:lightRig rig="threePt" dir="t"/>
-    </dgm:scene3d>
-    <dgm:sp3d/>
-    <dgm:txPr/>
-    <dgm:style>
-      <a:lnRef idx="2">
-        <a:scrgbClr r="0" g="0" b="0"/>
-      </a:lnRef>
-      <a:fillRef idx="1">
-        <a:scrgbClr r="0" g="0" b="0"/>
-      </a:fillRef>
-      <a:effectRef idx="0">
-        <a:scrgbClr r="0" g="0" b="0"/>
-      </a:effectRef>
-      <a:fontRef idx="minor">
-        <a:schemeClr val="lt1"/>
-      </a:fontRef>
-    </dgm:style>
-  </dgm:styleLbl>
-  <dgm:styleLbl name="node4">
-    <dgm:scene3d>
-      <a:camera prst="orthographicFront"/>
-      <a:lightRig rig="threePt" dir="t"/>
-    </dgm:scene3d>
-    <dgm:sp3d/>
-    <dgm:txPr/>
-    <dgm:style>
-      <a:lnRef idx="2">
-        <a:scrgbClr r="0" g="0" b="0"/>
-      </a:lnRef>
-      <a:fillRef idx="1">
-        <a:scrgbClr r="0" g="0" b="0"/>
-      </a:fillRef>
-      <a:effectRef idx="0">
-        <a:scrgbClr r="0" g="0" b="0"/>
-      </a:effectRef>
-      <a:fontRef idx="minor">
-        <a:schemeClr val="lt1"/>
-      </a:fontRef>
-    </dgm:style>
-  </dgm:styleLbl>
-  <dgm:styleLbl name="fgImgPlace1">
-    <dgm:scene3d>
-      <a:camera prst="orthographicFront"/>
-      <a:lightRig rig="threePt" dir="t"/>
-    </dgm:scene3d>
-    <dgm:sp3d/>
-    <dgm:txPr/>
-    <dgm:style>
-      <a:lnRef idx="2">
-        <a:scrgbClr r="0" g="0" b="0"/>
-      </a:lnRef>
-      <a:fillRef idx="1">
-        <a:scrgbClr r="0" g="0" b="0"/>
-      </a:fillRef>
-      <a:effectRef idx="0">
-        <a:scrgbClr r="0" g="0" b="0"/>
-      </a:effectRef>
-      <a:fontRef idx="minor"/>
-    </dgm:style>
-  </dgm:styleLbl>
-  <dgm:styleLbl name="alignImgPlace1">
-    <dgm:scene3d>
-      <a:camera prst="orthographicFront"/>
-      <a:lightRig rig="threePt" dir="t"/>
-    </dgm:scene3d>
-    <dgm:sp3d/>
-    <dgm:txPr/>
-    <dgm:style>
-      <a:lnRef idx="2">
-        <a:scrgbClr r="0" g="0" b="0"/>
-      </a:lnRef>
-      <a:fillRef idx="1">
-        <a:scrgbClr r="0" g="0" b="0"/>
-      </a:fillRef>
-      <a:effectRef idx="0">
-        <a:scrgbClr r="0" g="0" b="0"/>
-      </a:effectRef>
-      <a:fontRef idx="minor"/>
-    </dgm:style>
-  </dgm:styleLbl>
-  <dgm:styleLbl name="bgImgPlace1">
-    <dgm:scene3d>
-      <a:camera prst="orthographicFront"/>
-      <a:lightRig rig="threePt" dir="t"/>
-    </dgm:scene3d>
-    <dgm:sp3d/>
-    <dgm:txPr/>
-    <dgm:style>
-      <a:lnRef idx="2">
-        <a:scrgbClr r="0" g="0" b="0"/>
-      </a:lnRef>
-      <a:fillRef idx="1">
-        <a:scrgbClr r="0" g="0" b="0"/>
-      </a:fillRef>
-      <a:effectRef idx="0">
-        <a:scrgbClr r="0" g="0" b="0"/>
-      </a:effectRef>
-      <a:fontRef idx="minor"/>
-    </dgm:style>
-  </dgm:styleLbl>
-  <dgm:styleLbl name="sibTrans2D1">
-    <dgm:scene3d>
-      <a:camera prst="orthographicFront"/>
-      <a:lightRig rig="threePt" dir="t"/>
-    </dgm:scene3d>
-    <dgm:sp3d/>
-    <dgm:txPr/>
-    <dgm:style>
-      <a:lnRef idx="0">
-        <a:scrgbClr r="0" g="0" b="0"/>
-      </a:lnRef>
-      <a:fillRef idx="1">
-        <a:scrgbClr r="0" g="0" b="0"/>
-      </a:fillRef>
-      <a:effectRef idx="0">
-        <a:scrgbClr r="0" g="0" b="0"/>
-      </a:effectRef>
-      <a:fontRef idx="minor">
-        <a:schemeClr val="lt1"/>
-      </a:fontRef>
-    </dgm:style>
-  </dgm:styleLbl>
-  <dgm:styleLbl name="fgSibTrans2D1">
-    <dgm:scene3d>
-      <a:camera prst="orthographicFront"/>
-      <a:lightRig rig="threePt" dir="t"/>
-    </dgm:scene3d>
-    <dgm:sp3d/>
-    <dgm:txPr/>
-    <dgm:style>
-      <a:lnRef idx="0">
-        <a:scrgbClr r="0" g="0" b="0"/>
-      </a:lnRef>
-      <a:fillRef idx="1">
-        <a:scrgbClr r="0" g="0" b="0"/>
-      </a:fillRef>
-      <a:effectRef idx="0">
-        <a:scrgbClr r="0" g="0" b="0"/>
-      </a:effectRef>
-      <a:fontRef idx="minor">
-        <a:schemeClr val="lt1"/>
-      </a:fontRef>
-    </dgm:style>
-  </dgm:styleLbl>
-  <dgm:styleLbl name="bgSibTrans2D1">
-    <dgm:scene3d>
-      <a:camera prst="orthographicFront"/>
-      <a:lightRig rig="threePt" dir="t"/>
-    </dgm:scene3d>
-    <dgm:sp3d/>
-    <dgm:txPr/>
-    <dgm:style>
-      <a:lnRef idx="0">
-        <a:scrgbClr r="0" g="0" b="0"/>
-      </a:lnRef>
-      <a:fillRef idx="1">
-        <a:scrgbClr r="0" g="0" b="0"/>
-      </a:fillRef>
-      <a:effectRef idx="0">
-        <a:scrgbClr r="0" g="0" b="0"/>
-      </a:effectRef>
-      <a:fontRef idx="minor">
-        <a:schemeClr val="lt1"/>
-      </a:fontRef>
-    </dgm:style>
-  </dgm:styleLbl>
-  <dgm:styleLbl name="sibTrans1D1">
-    <dgm:scene3d>
-      <a:camera prst="orthographicFront"/>
-      <a:lightRig rig="threePt" dir="t"/>
-    </dgm:scene3d>
-    <dgm:sp3d/>
-    <dgm:txPr/>
-    <dgm:style>
-      <a:lnRef idx="1">
-        <a:scrgbClr r="0" g="0" b="0"/>
-      </a:lnRef>
-      <a:fillRef idx="0">
-        <a:scrgbClr r="0" g="0" b="0"/>
-      </a:fillRef>
-      <a:effectRef idx="0">
-        <a:scrgbClr r="0" g="0" b="0"/>
-      </a:effectRef>
-      <a:fontRef idx="minor"/>
-    </dgm:style>
-  </dgm:styleLbl>
-  <dgm:styleLbl name="callout">
-    <dgm:scene3d>
-      <a:camera prst="orthographicFront"/>
-      <a:lightRig rig="threePt" dir="t"/>
-    </dgm:scene3d>
-    <dgm:sp3d/>
-    <dgm:txPr/>
-    <dgm:style>
-      <a:lnRef idx="2">
-        <a:scrgbClr r="0" g="0" b="0"/>
-      </a:lnRef>
-      <a:fillRef idx="1">
-        <a:scrgbClr r="0" g="0" b="0"/>
-      </a:fillRef>
-      <a:effectRef idx="0">
-        <a:scrgbClr r="0" g="0" b="0"/>
-      </a:effectRef>
-      <a:fontRef idx="minor"/>
-    </dgm:style>
-  </dgm:styleLbl>
-  <dgm:styleLbl name="asst0">
-    <dgm:scene3d>
-      <a:camera prst="orthographicFront"/>
-      <a:lightRig rig="threePt" dir="t"/>
-    </dgm:scene3d>
-    <dgm:sp3d/>
-    <dgm:txPr/>
-    <dgm:style>
-      <a:lnRef idx="2">
-        <a:scrgbClr r="0" g="0" b="0"/>
-      </a:lnRef>
-      <a:fillRef idx="1">
-        <a:scrgbClr r="0" g="0" b="0"/>
-      </a:fillRef>
-      <a:effectRef idx="0">
-        <a:scrgbClr r="0" g="0" b="0"/>
-      </a:effectRef>
-      <a:fontRef idx="minor">
-        <a:schemeClr val="lt1"/>
-      </a:fontRef>
-    </dgm:style>
-  </dgm:styleLbl>
-  <dgm:styleLbl name="asst1">
-    <dgm:scene3d>
-      <a:camera prst="orthographicFront"/>
-      <a:lightRig rig="threePt" dir="t"/>
-    </dgm:scene3d>
-    <dgm:sp3d/>
-    <dgm:txPr/>
-    <dgm:style>
-      <a:lnRef idx="2">
-        <a:scrgbClr r="0" g="0" b="0"/>
-      </a:lnRef>
-      <a:fillRef idx="1">
-        <a:scrgbClr r="0" g="0" b="0"/>
-      </a:fillRef>
-      <a:effectRef idx="0">
-        <a:scrgbClr r="0" g="0" b="0"/>
-      </a:effectRef>
-      <a:fontRef idx="minor">
-        <a:schemeClr val="lt1"/>
-      </a:fontRef>
-    </dgm:style>
-  </dgm:styleLbl>
-  <dgm:styleLbl name="asst2">
-    <dgm:scene3d>
-      <a:camera prst="orthographicFront"/>
-      <a:lightRig rig="threePt" dir="t"/>
-    </dgm:scene3d>
-    <dgm:sp3d/>
-    <dgm:txPr/>
-    <dgm:style>
-      <a:lnRef idx="2">
-        <a:scrgbClr r="0" g="0" b="0"/>
-      </a:lnRef>
-      <a:fillRef idx="1">
-        <a:scrgbClr r="0" g="0" b="0"/>
-      </a:fillRef>
-      <a:effectRef idx="0">
-        <a:scrgbClr r="0" g="0" b="0"/>
-      </a:effectRef>
-      <a:fontRef idx="minor">
-        <a:schemeClr val="lt1"/>
-      </a:fontRef>
-    </dgm:style>
-  </dgm:styleLbl>
-  <dgm:styleLbl name="asst3">
-    <dgm:scene3d>
-      <a:camera prst="orthographicFront"/>
-      <a:lightRig rig="threePt" dir="t"/>
-    </dgm:scene3d>
-    <dgm:sp3d/>
-    <dgm:txPr/>
-    <dgm:style>
-      <a:lnRef idx="2">
-        <a:scrgbClr r="0" g="0" b="0"/>
-      </a:lnRef>
-      <a:fillRef idx="1">
-        <a:scrgbClr r="0" g="0" b="0"/>
-      </a:fillRef>
-      <a:effectRef idx="0">
-        <a:scrgbClr r="0" g="0" b="0"/>
-      </a:effectRef>
-      <a:fontRef idx="minor">
-        <a:schemeClr val="lt1"/>
-      </a:fontRef>
-    </dgm:style>
-  </dgm:styleLbl>
-  <dgm:styleLbl name="asst4">
-    <dgm:scene3d>
-      <a:camera prst="orthographicFront"/>
-      <a:lightRig rig="threePt" dir="t"/>
-    </dgm:scene3d>
-    <dgm:sp3d/>
-    <dgm:txPr/>
-    <dgm:style>
-      <a:lnRef idx="2">
-        <a:scrgbClr r="0" g="0" b="0"/>
-      </a:lnRef>
-      <a:fillRef idx="1">
-        <a:scrgbClr r="0" g="0" b="0"/>
-      </a:fillRef>
-      <a:effectRef idx="0">
-        <a:scrgbClr r="0" g="0" b="0"/>
-      </a:effectRef>
-      <a:fontRef idx="minor">
-        <a:schemeClr val="lt1"/>
-      </a:fontRef>
-    </dgm:style>
-  </dgm:styleLbl>
-  <dgm:styleLbl name="parChTrans2D1">
-    <dgm:scene3d>
-      <a:camera prst="orthographicFront"/>
-      <a:lightRig rig="threePt" dir="t"/>
-    </dgm:scene3d>
-    <dgm:sp3d/>
-    <dgm:txPr/>
-    <dgm:style>
-      <a:lnRef idx="2">
-        <a:scrgbClr r="0" g="0" b="0"/>
-      </a:lnRef>
-      <a:fillRef idx="1">
-        <a:scrgbClr r="0" g="0" b="0"/>
-      </a:fillRef>
-      <a:effectRef idx="0">
-        <a:scrgbClr r="0" g="0" b="0"/>
-      </a:effectRef>
-      <a:fontRef idx="minor">
-        <a:schemeClr val="lt1"/>
-      </a:fontRef>
-    </dgm:style>
-  </dgm:styleLbl>
-  <dgm:styleLbl name="parChTrans2D2">
-    <dgm:scene3d>
-      <a:camera prst="orthographicFront"/>
-      <a:lightRig rig="threePt" dir="t"/>
-    </dgm:scene3d>
-    <dgm:sp3d/>
-    <dgm:txPr/>
-    <dgm:style>
-      <a:lnRef idx="2">
-        <a:scrgbClr r="0" g="0" b="0"/>
-      </a:lnRef>
-      <a:fillRef idx="1">
-        <a:scrgbClr r="0" g="0" b="0"/>
-      </a:fillRef>
-      <a:effectRef idx="0">
-        <a:scrgbClr r="0" g="0" b="0"/>
-      </a:effectRef>
-      <a:fontRef idx="minor">
-        <a:schemeClr val="lt1"/>
-      </a:fontRef>
-    </dgm:style>
-  </dgm:styleLbl>
-  <dgm:styleLbl name="parChTrans2D3">
-    <dgm:scene3d>
-      <a:camera prst="orthographicFront"/>
-      <a:lightRig rig="threePt" dir="t"/>
-    </dgm:scene3d>
-    <dgm:sp3d/>
-    <dgm:txPr/>
-    <dgm:style>
-      <a:lnRef idx="2">
-        <a:scrgbClr r="0" g="0" b="0"/>
-      </a:lnRef>
-      <a:fillRef idx="1">
-        <a:scrgbClr r="0" g="0" b="0"/>
-      </a:fillRef>
-      <a:effectRef idx="0">
-        <a:scrgbClr r="0" g="0" b="0"/>
-      </a:effectRef>
-      <a:fontRef idx="minor">
-        <a:schemeClr val="lt1"/>
-      </a:fontRef>
-    </dgm:style>
-  </dgm:styleLbl>
-  <dgm:styleLbl name="parChTrans2D4">
-    <dgm:scene3d>
-      <a:camera prst="orthographicFront"/>
-      <a:lightRig rig="threePt" dir="t"/>
-    </dgm:scene3d>
-    <dgm:sp3d/>
-    <dgm:txPr/>
-    <dgm:style>
-      <a:lnRef idx="2">
-        <a:scrgbClr r="0" g="0" b="0"/>
-      </a:lnRef>
-      <a:fillRef idx="1">
-        <a:scrgbClr r="0" g="0" b="0"/>
-      </a:fillRef>
-      <a:effectRef idx="0">
-        <a:scrgbClr r="0" g="0" b="0"/>
-      </a:effectRef>
-      <a:fontRef idx="minor">
-        <a:schemeClr val="lt1"/>
-      </a:fontRef>
-    </dgm:style>
-  </dgm:styleLbl>
-  <dgm:styleLbl name="parChTrans1D1">
-    <dgm:scene3d>
-      <a:camera prst="orthographicFront"/>
-      <a:lightRig rig="threePt" dir="t"/>
-    </dgm:scene3d>
-    <dgm:sp3d/>
-    <dgm:txPr/>
-    <dgm:style>
-      <a:lnRef idx="2">
-        <a:scrgbClr r="0" g="0" b="0"/>
-      </a:lnRef>
-      <a:fillRef idx="0">
-        <a:scrgbClr r="0" g="0" b="0"/>
-      </a:fillRef>
-      <a:effectRef idx="0">
-        <a:scrgbClr r="0" g="0" b="0"/>
-      </a:effectRef>
-      <a:fontRef idx="minor"/>
-    </dgm:style>
-  </dgm:styleLbl>
-  <dgm:styleLbl name="parChTrans1D2">
-    <dgm:scene3d>
-      <a:camera prst="orthographicFront"/>
-      <a:lightRig rig="threePt" dir="t"/>
-    </dgm:scene3d>
-    <dgm:sp3d/>
-    <dgm:txPr/>
-    <dgm:style>
-      <a:lnRef idx="2">
-        <a:scrgbClr r="0" g="0" b="0"/>
-      </a:lnRef>
-      <a:fillRef idx="0">
-        <a:scrgbClr r="0" g="0" b="0"/>
-      </a:fillRef>
-      <a:effectRef idx="0">
-        <a:scrgbClr r="0" g="0" b="0"/>
-      </a:effectRef>
-      <a:fontRef idx="minor"/>
-    </dgm:style>
-  </dgm:styleLbl>
-  <dgm:styleLbl name="parChTrans1D3">
-    <dgm:scene3d>
-      <a:camera prst="orthographicFront"/>
-      <a:lightRig rig="threePt" dir="t"/>
-    </dgm:scene3d>
-    <dgm:sp3d/>
-    <dgm:txPr/>
-    <dgm:style>
-      <a:lnRef idx="2">
-        <a:scrgbClr r="0" g="0" b="0"/>
-      </a:lnRef>
-      <a:fillRef idx="0">
-        <a:scrgbClr r="0" g="0" b="0"/>
-      </a:fillRef>
-      <a:effectRef idx="0">
-        <a:scrgbClr r="0" g="0" b="0"/>
-      </a:effectRef>
-      <a:fontRef idx="minor"/>
-    </dgm:style>
-  </dgm:styleLbl>
-  <dgm:styleLbl name="parChTrans1D4">
-    <dgm:scene3d>
-      <a:camera prst="orthographicFront"/>
-      <a:lightRig rig="threePt" dir="t"/>
-    </dgm:scene3d>
-    <dgm:sp3d/>
-    <dgm:txPr/>
-    <dgm:style>
-      <a:lnRef idx="2">
-        <a:scrgbClr r="0" g="0" b="0"/>
-      </a:lnRef>
-      <a:fillRef idx="0">
-        <a:scrgbClr r="0" g="0" b="0"/>
-      </a:fillRef>
-      <a:effectRef idx="0">
-        <a:scrgbClr r="0" g="0" b="0"/>
-      </a:effectRef>
-      <a:fontRef idx="minor"/>
-    </dgm:style>
-  </dgm:styleLbl>
-  <dgm:styleLbl name="fgAcc1">
-    <dgm:scene3d>
-      <a:camera prst="orthographicFront"/>
-      <a:lightRig rig="threePt" dir="t"/>
-    </dgm:scene3d>
-    <dgm:sp3d/>
-    <dgm:txPr/>
-    <dgm:style>
-      <a:lnRef idx="2">
-        <a:scrgbClr r="0" g="0" b="0"/>
-      </a:lnRef>
-      <a:fillRef idx="1">
-        <a:scrgbClr r="0" g="0" b="0"/>
-      </a:fillRef>
-      <a:effectRef idx="0">
-        <a:scrgbClr r="0" g="0" b="0"/>
-      </a:effectRef>
-      <a:fontRef idx="minor"/>
-    </dgm:style>
-  </dgm:styleLbl>
-  <dgm:styleLbl name="conFgAcc1">
-    <dgm:scene3d>
-      <a:camera prst="orthographicFront"/>
-      <a:lightRig rig="threePt" dir="t"/>
-    </dgm:scene3d>
-    <dgm:sp3d/>
-    <dgm:txPr/>
-    <dgm:style>
-      <a:lnRef idx="2">
-        <a:scrgbClr r="0" g="0" b="0"/>
-      </a:lnRef>
-      <a:fillRef idx="1">
-        <a:scrgbClr r="0" g="0" b="0"/>
-      </a:fillRef>
-      <a:effectRef idx="0">
-        <a:scrgbClr r="0" g="0" b="0"/>
-      </a:effectRef>
-      <a:fontRef idx="minor"/>
-    </dgm:style>
-  </dgm:styleLbl>
-  <dgm:styleLbl name="alignAcc1">
-    <dgm:scene3d>
-      <a:camera prst="orthographicFront"/>
-      <a:lightRig rig="threePt" dir="t"/>
-    </dgm:scene3d>
-    <dgm:sp3d/>
-    <dgm:txPr/>
-    <dgm:style>
-      <a:lnRef idx="2">
-        <a:scrgbClr r="0" g="0" b="0"/>
-      </a:lnRef>
-      <a:fillRef idx="1">
-        <a:scrgbClr r="0" g="0" b="0"/>
-      </a:fillRef>
-      <a:effectRef idx="0">
-        <a:scrgbClr r="0" g="0" b="0"/>
-      </a:effectRef>
-      <a:fontRef idx="minor"/>
-    </dgm:style>
-  </dgm:styleLbl>
-  <dgm:styleLbl name="trAlignAcc1">
-    <dgm:scene3d>
-      <a:camera prst="orthographicFront"/>
-      <a:lightRig rig="threePt" dir="t"/>
-    </dgm:scene3d>
-    <dgm:sp3d/>
-    <dgm:txPr/>
-    <dgm:style>
-      <a:lnRef idx="1">
-        <a:scrgbClr r="0" g="0" b="0"/>
-      </a:lnRef>
-      <a:fillRef idx="1">
-        <a:scrgbClr r="0" g="0" b="0"/>
-      </a:fillRef>
-      <a:effectRef idx="0">
-        <a:scrgbClr r="0" g="0" b="0"/>
-      </a:effectRef>
-      <a:fontRef idx="minor"/>
-    </dgm:style>
-  </dgm:styleLbl>
-  <dgm:styleLbl name="bgAcc1">
-    <dgm:scene3d>
-      <a:camera prst="orthographicFront"/>
-      <a:lightRig rig="threePt" dir="t"/>
-    </dgm:scene3d>
-    <dgm:sp3d/>
-    <dgm:txPr/>
-    <dgm:style>
-      <a:lnRef idx="2">
-        <a:scrgbClr r="0" g="0" b="0"/>
-      </a:lnRef>
-      <a:fillRef idx="1">
-        <a:scrgbClr r="0" g="0" b="0"/>
-      </a:fillRef>
-      <a:effectRef idx="0">
-        <a:scrgbClr r="0" g="0" b="0"/>
-      </a:effectRef>
-      <a:fontRef idx="minor"/>
-    </dgm:style>
-  </dgm:styleLbl>
-  <dgm:styleLbl name="solidFgAcc1">
-    <dgm:scene3d>
-      <a:camera prst="orthographicFront"/>
-      <a:lightRig rig="threePt" dir="t"/>
-    </dgm:scene3d>
-    <dgm:sp3d/>
-    <dgm:txPr/>
-    <dgm:style>
-      <a:lnRef idx="2">
-        <a:scrgbClr r="0" g="0" b="0"/>
-      </a:lnRef>
-      <a:fillRef idx="1">
-        <a:scrgbClr r="0" g="0" b="0"/>
-      </a:fillRef>
-      <a:effectRef idx="0">
-        <a:scrgbClr r="0" g="0" b="0"/>
-      </a:effectRef>
-      <a:fontRef idx="minor"/>
-    </dgm:style>
-  </dgm:styleLbl>
-  <dgm:styleLbl name="solidAlignAcc1">
-    <dgm:scene3d>
-      <a:camera prst="orthographicFront"/>
-      <a:lightRig rig="threePt" dir="t"/>
-    </dgm:scene3d>
-    <dgm:sp3d/>
-    <dgm:txPr/>
-    <dgm:style>
-      <a:lnRef idx="2">
-        <a:scrgbClr r="0" g="0" b="0"/>
-      </a:lnRef>
-      <a:fillRef idx="1">
-        <a:scrgbClr r="0" g="0" b="0"/>
-      </a:fillRef>
-      <a:effectRef idx="0">
-        <a:scrgbClr r="0" g="0" b="0"/>
-      </a:effectRef>
-      <a:fontRef idx="minor"/>
-    </dgm:style>
-  </dgm:styleLbl>
-  <dgm:styleLbl name="solidBgAcc1">
-    <dgm:scene3d>
-      <a:camera prst="orthographicFront"/>
-      <a:lightRig rig="threePt" dir="t"/>
-    </dgm:scene3d>
-    <dgm:sp3d/>
-    <dgm:txPr/>
-    <dgm:style>
-      <a:lnRef idx="2">
-        <a:scrgbClr r="0" g="0" b="0"/>
-      </a:lnRef>
-      <a:fillRef idx="1">
-        <a:scrgbClr r="0" g="0" b="0"/>
-      </a:fillRef>
-      <a:effectRef idx="0">
-        <a:scrgbClr r="0" g="0" b="0"/>
-      </a:effectRef>
-      <a:fontRef idx="minor"/>
-    </dgm:style>
-  </dgm:styleLbl>
-  <dgm:styleLbl name="fgAccFollowNode1">
-    <dgm:scene3d>
-      <a:camera prst="orthographicFront"/>
-      <a:lightRig rig="threePt" dir="t"/>
-    </dgm:scene3d>
-    <dgm:sp3d/>
-    <dgm:txPr/>
-    <dgm:style>
-      <a:lnRef idx="2">
-        <a:scrgbClr r="0" g="0" b="0"/>
-      </a:lnRef>
-      <a:fillRef idx="1">
-        <a:scrgbClr r="0" g="0" b="0"/>
-      </a:fillRef>
-      <a:effectRef idx="0">
-        <a:scrgbClr r="0" g="0" b="0"/>
-      </a:effectRef>
-      <a:fontRef idx="minor"/>
-    </dgm:style>
-  </dgm:styleLbl>
-  <dgm:styleLbl name="alignAccFollowNode1">
-    <dgm:scene3d>
-      <a:camera prst="orthographicFront"/>
-      <a:lightRig rig="threePt" dir="t"/>
-    </dgm:scene3d>
-    <dgm:sp3d/>
-    <dgm:txPr/>
-    <dgm:style>
-      <a:lnRef idx="2">
-        <a:scrgbClr r="0" g="0" b="0"/>
-      </a:lnRef>
-      <a:fillRef idx="1">
-        <a:scrgbClr r="0" g="0" b="0"/>
-      </a:fillRef>
-      <a:effectRef idx="0">
-        <a:scrgbClr r="0" g="0" b="0"/>
-      </a:effectRef>
-      <a:fontRef idx="minor"/>
-    </dgm:style>
-  </dgm:styleLbl>
-  <dgm:styleLbl name="bgAccFollowNode1">
-    <dgm:scene3d>
-      <a:camera prst="orthographicFront"/>
-      <a:lightRig rig="threePt" dir="t"/>
-    </dgm:scene3d>
-    <dgm:sp3d/>
-    <dgm:txPr/>
-    <dgm:style>
-      <a:lnRef idx="2">
-        <a:scrgbClr r="0" g="0" b="0"/>
-      </a:lnRef>
-      <a:fillRef idx="1">
-        <a:scrgbClr r="0" g="0" b="0"/>
-      </a:fillRef>
-      <a:effectRef idx="0">
-        <a:scrgbClr r="0" g="0" b="0"/>
-      </a:effectRef>
-      <a:fontRef idx="minor"/>
-    </dgm:style>
-  </dgm:styleLbl>
-  <dgm:styleLbl name="fgAcc0">
-    <dgm:scene3d>
-      <a:camera prst="orthographicFront"/>
-      <a:lightRig rig="threePt" dir="t"/>
-    </dgm:scene3d>
-    <dgm:sp3d/>
-    <dgm:txPr/>
-    <dgm:style>
-      <a:lnRef idx="2">
-        <a:scrgbClr r="0" g="0" b="0"/>
-      </a:lnRef>
-      <a:fillRef idx="1">
-        <a:scrgbClr r="0" g="0" b="0"/>
-      </a:fillRef>
-      <a:effectRef idx="0">
-        <a:scrgbClr r="0" g="0" b="0"/>
-      </a:effectRef>
-      <a:fontRef idx="minor"/>
-    </dgm:style>
-  </dgm:styleLbl>
-  <dgm:styleLbl name="fgAcc2">
-    <dgm:scene3d>
-      <a:camera prst="orthographicFront"/>
-      <a:lightRig rig="threePt" dir="t"/>
-    </dgm:scene3d>
-    <dgm:sp3d/>
-    <dgm:txPr/>
-    <dgm:style>
-      <a:lnRef idx="2">
-        <a:scrgbClr r="0" g="0" b="0"/>
-      </a:lnRef>
-      <a:fillRef idx="1">
-        <a:scrgbClr r="0" g="0" b="0"/>
-      </a:fillRef>
-      <a:effectRef idx="0">
-        <a:scrgbClr r="0" g="0" b="0"/>
-      </a:effectRef>
-      <a:fontRef idx="minor"/>
-    </dgm:style>
-  </dgm:styleLbl>
-  <dgm:styleLbl name="fgAcc3">
-    <dgm:scene3d>
-      <a:camera prst="orthographicFront"/>
-      <a:lightRig rig="threePt" dir="t"/>
-    </dgm:scene3d>
-    <dgm:sp3d/>
-    <dgm:txPr/>
-    <dgm:style>
-      <a:lnRef idx="2">
-        <a:scrgbClr r="0" g="0" b="0"/>
-      </a:lnRef>
-      <a:fillRef idx="1">
-        <a:scrgbClr r="0" g="0" b="0"/>
-      </a:fillRef>
-      <a:effectRef idx="0">
-        <a:scrgbClr r="0" g="0" b="0"/>
-      </a:effectRef>
-      <a:fontRef idx="minor"/>
-    </dgm:style>
-  </dgm:styleLbl>
-  <dgm:styleLbl name="fgAcc4">
-    <dgm:scene3d>
-      <a:camera prst="orthographicFront"/>
-      <a:lightRig rig="threePt" dir="t"/>
-    </dgm:scene3d>
-    <dgm:sp3d/>
-    <dgm:txPr/>
-    <dgm:style>
-      <a:lnRef idx="2">
-        <a:scrgbClr r="0" g="0" b="0"/>
-      </a:lnRef>
-      <a:fillRef idx="1">
-        <a:scrgbClr r="0" g="0" b="0"/>
-      </a:fillRef>
-      <a:effectRef idx="0">
-        <a:scrgbClr r="0" g="0" b="0"/>
-      </a:effectRef>
-      <a:fontRef idx="minor"/>
-    </dgm:style>
-  </dgm:styleLbl>
-  <dgm:styleLbl name="bgShp">
-    <dgm:scene3d>
-      <a:camera prst="orthographicFront"/>
-      <a:lightRig rig="threePt" dir="t"/>
-    </dgm:scene3d>
-    <dgm:sp3d/>
-    <dgm:txPr/>
-    <dgm:style>
-      <a:lnRef idx="0">
-        <a:scrgbClr r="0" g="0" b="0"/>
-      </a:lnRef>
-      <a:fillRef idx="1">
-        <a:scrgbClr r="0" g="0" b="0"/>
-      </a:fillRef>
-      <a:effectRef idx="0">
-        <a:scrgbClr r="0" g="0" b="0"/>
-      </a:effectRef>
-      <a:fontRef idx="minor"/>
-    </dgm:style>
-  </dgm:styleLbl>
-  <dgm:styleLbl name="dkBgShp">
-    <dgm:scene3d>
-      <a:camera prst="orthographicFront"/>
-      <a:lightRig rig="threePt" dir="t"/>
-    </dgm:scene3d>
-    <dgm:sp3d/>
-    <dgm:txPr/>
-    <dgm:style>
-      <a:lnRef idx="0">
-        <a:scrgbClr r="0" g="0" b="0"/>
-      </a:lnRef>
-      <a:fillRef idx="1">
-        <a:scrgbClr r="0" g="0" b="0"/>
-      </a:fillRef>
-      <a:effectRef idx="0">
-        <a:scrgbClr r="0" g="0" b="0"/>
-      </a:effectRef>
-      <a:fontRef idx="minor"/>
-    </dgm:style>
-  </dgm:styleLbl>
-  <dgm:styleLbl name="trBgShp">
-    <dgm:scene3d>
-      <a:camera prst="orthographicFront"/>
-      <a:lightRig rig="threePt" dir="t"/>
-    </dgm:scene3d>
-    <dgm:sp3d/>
-    <dgm:txPr/>
-    <dgm:style>
-      <a:lnRef idx="0">
-        <a:scrgbClr r="0" g="0" b="0"/>
-      </a:lnRef>
-      <a:fillRef idx="1">
-        <a:scrgbClr r="0" g="0" b="0"/>
-      </a:fillRef>
-      <a:effectRef idx="0">
-        <a:scrgbClr r="0" g="0" b="0"/>
-      </a:effectRef>
-      <a:fontRef idx="minor"/>
-    </dgm:style>
-  </dgm:styleLbl>
-  <dgm:styleLbl name="fgShp">
-    <dgm:scene3d>
-      <a:camera prst="orthographicFront"/>
-      <a:lightRig rig="threePt" dir="t"/>
-    </dgm:scene3d>
-    <dgm:sp3d/>
-    <dgm:txPr/>
-    <dgm:style>
-      <a:lnRef idx="2">
-        <a:scrgbClr r="0" g="0" b="0"/>
-      </a:lnRef>
-      <a:fillRef idx="1">
-        <a:scrgbClr r="0" g="0" b="0"/>
-      </a:fillRef>
-      <a:effectRef idx="0">
-        <a:scrgbClr r="0" g="0" b="0"/>
-      </a:effectRef>
-      <a:fontRef idx="minor"/>
-    </dgm:style>
-  </dgm:styleLbl>
-  <dgm:styleLbl name="revTx">
-    <dgm:scene3d>
-      <a:camera prst="orthographicFront"/>
-      <a:lightRig rig="threePt" dir="t"/>
-    </dgm:scene3d>
-    <dgm:sp3d/>
-    <dgm:txPr/>
-    <dgm:style>
-      <a:lnRef idx="0">
-        <a:scrgbClr r="0" g="0" b="0"/>
-      </a:lnRef>
-      <a:fillRef idx="0">
-        <a:scrgbClr r="0" g="0" b="0"/>
-      </a:fillRef>
-      <a:effectRef idx="0">
-        <a:scrgbClr r="0" g="0" b="0"/>
-      </a:effectRef>
-      <a:fontRef idx="minor"/>
-    </dgm:style>
-  </dgm:styleLbl>
-</dgm:styleDef>
-</file>
-
-<file path=ppt/diagrams/quickStyle2.xml><?xml version="1.0" encoding="utf-8"?>
-<dgm:styleDef xmlns:dgm="http://schemas.openxmlformats.org/drawingml/2006/diagram" xmlns:a="http://schemas.openxmlformats.org/drawingml/2006/main" uniqueId="urn:microsoft.com/office/officeart/2005/8/quickstyle/simple1">
-  <dgm:title val=""/>
-  <dgm:desc val=""/>
-  <dgm:catLst>
-    <dgm:cat type="simple" pri="10100"/>
-  </dgm:catLst>
-  <dgm:scene3d>
-    <a:camera prst="orthographicFront"/>
-    <a:lightRig rig="threePt" dir="t"/>
-  </dgm:scene3d>
-  <dgm:styleLbl name="node0">
-    <dgm:scene3d>
-      <a:camera prst="orthographicFront"/>
-      <a:lightRig rig="threePt" dir="t"/>
-    </dgm:scene3d>
-    <dgm:sp3d/>
-    <dgm:txPr/>
-    <dgm:style>
-      <a:lnRef idx="2">
-        <a:scrgbClr r="0" g="0" b="0"/>
-      </a:lnRef>
-      <a:fillRef idx="1">
-        <a:scrgbClr r="0" g="0" b="0"/>
-      </a:fillRef>
-      <a:effectRef idx="0">
-        <a:scrgbClr r="0" g="0" b="0"/>
-      </a:effectRef>
-      <a:fontRef idx="minor">
-        <a:schemeClr val="lt1"/>
-      </a:fontRef>
-    </dgm:style>
-  </dgm:styleLbl>
-  <dgm:styleLbl name="lnNode1">
-    <dgm:scene3d>
-      <a:camera prst="orthographicFront"/>
-      <a:lightRig rig="threePt" dir="t"/>
-    </dgm:scene3d>
-    <dgm:sp3d/>
-    <dgm:txPr/>
-    <dgm:style>
-      <a:lnRef idx="2">
-        <a:scrgbClr r="0" g="0" b="0"/>
-      </a:lnRef>
-      <a:fillRef idx="1">
-        <a:scrgbClr r="0" g="0" b="0"/>
-      </a:fillRef>
-      <a:effectRef idx="0">
-        <a:scrgbClr r="0" g="0" b="0"/>
-      </a:effectRef>
-      <a:fontRef idx="minor">
-        <a:schemeClr val="lt1"/>
-      </a:fontRef>
-    </dgm:style>
-  </dgm:styleLbl>
-  <dgm:styleLbl name="vennNode1">
-    <dgm:scene3d>
-      <a:camera prst="orthographicFront"/>
-      <a:lightRig rig="threePt" dir="t"/>
-    </dgm:scene3d>
-    <dgm:sp3d/>
-    <dgm:txPr/>
-    <dgm:style>
-      <a:lnRef idx="2">
-        <a:scrgbClr r="0" g="0" b="0"/>
-      </a:lnRef>
-      <a:fillRef idx="1">
-        <a:scrgbClr r="0" g="0" b="0"/>
-      </a:fillRef>
-      <a:effectRef idx="0">
-        <a:scrgbClr r="0" g="0" b="0"/>
-      </a:effectRef>
-      <a:fontRef idx="minor">
-        <a:schemeClr val="tx1"/>
-      </a:fontRef>
-    </dgm:style>
-  </dgm:styleLbl>
-  <dgm:styleLbl name="alignNode1">
-    <dgm:scene3d>
-      <a:camera prst="orthographicFront"/>
-      <a:lightRig rig="threePt" dir="t"/>
-    </dgm:scene3d>
-    <dgm:sp3d/>
-    <dgm:txPr/>
-    <dgm:style>
-      <a:lnRef idx="2">
-        <a:scrgbClr r="0" g="0" b="0"/>
-      </a:lnRef>
-      <a:fillRef idx="1">
-        <a:scrgbClr r="0" g="0" b="0"/>
-      </a:fillRef>
-      <a:effectRef idx="0">
-        <a:scrgbClr r="0" g="0" b="0"/>
-      </a:effectRef>
-      <a:fontRef idx="minor">
-        <a:schemeClr val="lt1"/>
-      </a:fontRef>
-    </dgm:style>
-  </dgm:styleLbl>
-  <dgm:styleLbl name="node1">
-    <dgm:scene3d>
-      <a:camera prst="orthographicFront"/>
-      <a:lightRig rig="threePt" dir="t"/>
-    </dgm:scene3d>
-    <dgm:sp3d/>
-    <dgm:txPr/>
-    <dgm:style>
-      <a:lnRef idx="2">
-        <a:scrgbClr r="0" g="0" b="0"/>
-      </a:lnRef>
-      <a:fillRef idx="1">
-        <a:scrgbClr r="0" g="0" b="0"/>
-      </a:fillRef>
-      <a:effectRef idx="0">
-        <a:scrgbClr r="0" g="0" b="0"/>
-      </a:effectRef>
-      <a:fontRef idx="minor">
-        <a:schemeClr val="lt1"/>
-      </a:fontRef>
-    </dgm:style>
-  </dgm:styleLbl>
-  <dgm:styleLbl name="node2">
-    <dgm:scene3d>
-      <a:camera prst="orthographicFront"/>
-      <a:lightRig rig="threePt" dir="t"/>
-    </dgm:scene3d>
-    <dgm:sp3d/>
-    <dgm:txPr/>
-    <dgm:style>
-      <a:lnRef idx="2">
-        <a:scrgbClr r="0" g="0" b="0"/>
-      </a:lnRef>
-      <a:fillRef idx="1">
-        <a:scrgbClr r="0" g="0" b="0"/>
-      </a:fillRef>
-      <a:effectRef idx="0">
-        <a:scrgbClr r="0" g="0" b="0"/>
-      </a:effectRef>
-      <a:fontRef idx="minor">
-        <a:schemeClr val="lt1"/>
-      </a:fontRef>
-    </dgm:style>
-  </dgm:styleLbl>
-  <dgm:styleLbl name="node3">
-    <dgm:scene3d>
-      <a:camera prst="orthographicFront"/>
-      <a:lightRig rig="threePt" dir="t"/>
-    </dgm:scene3d>
-    <dgm:sp3d/>
-    <dgm:txPr/>
-    <dgm:style>
-      <a:lnRef idx="2">
-        <a:scrgbClr r="0" g="0" b="0"/>
-      </a:lnRef>
-      <a:fillRef idx="1">
-        <a:scrgbClr r="0" g="0" b="0"/>
-      </a:fillRef>
-      <a:effectRef idx="0">
-        <a:scrgbClr r="0" g="0" b="0"/>
-      </a:effectRef>
-      <a:fontRef idx="minor">
-        <a:schemeClr val="lt1"/>
-      </a:fontRef>
-    </dgm:style>
-  </dgm:styleLbl>
-  <dgm:styleLbl name="node4">
-    <dgm:scene3d>
-      <a:camera prst="orthographicFront"/>
-      <a:lightRig rig="threePt" dir="t"/>
-    </dgm:scene3d>
-    <dgm:sp3d/>
-    <dgm:txPr/>
-    <dgm:style>
-      <a:lnRef idx="2">
-        <a:scrgbClr r="0" g="0" b="0"/>
-      </a:lnRef>
-      <a:fillRef idx="1">
-        <a:scrgbClr r="0" g="0" b="0"/>
-      </a:fillRef>
-      <a:effectRef idx="0">
-        <a:scrgbClr r="0" g="0" b="0"/>
-      </a:effectRef>
-      <a:fontRef idx="minor">
-        <a:schemeClr val="lt1"/>
-      </a:fontRef>
-    </dgm:style>
-  </dgm:styleLbl>
-  <dgm:styleLbl name="fgImgPlace1">
-    <dgm:scene3d>
-      <a:camera prst="orthographicFront"/>
-      <a:lightRig rig="threePt" dir="t"/>
-    </dgm:scene3d>
-    <dgm:sp3d/>
-    <dgm:txPr/>
-    <dgm:style>
-      <a:lnRef idx="2">
-        <a:scrgbClr r="0" g="0" b="0"/>
-      </a:lnRef>
-      <a:fillRef idx="1">
-        <a:scrgbClr r="0" g="0" b="0"/>
-      </a:fillRef>
-      <a:effectRef idx="0">
-        <a:scrgbClr r="0" g="0" b="0"/>
-      </a:effectRef>
-      <a:fontRef idx="minor"/>
-    </dgm:style>
-  </dgm:styleLbl>
-  <dgm:styleLbl name="alignImgPlace1">
-    <dgm:scene3d>
-      <a:camera prst="orthographicFront"/>
-      <a:lightRig rig="threePt" dir="t"/>
-    </dgm:scene3d>
-    <dgm:sp3d/>
-    <dgm:txPr/>
-    <dgm:style>
-      <a:lnRef idx="2">
-        <a:scrgbClr r="0" g="0" b="0"/>
-      </a:lnRef>
-      <a:fillRef idx="1">
-        <a:scrgbClr r="0" g="0" b="0"/>
-      </a:fillRef>
-      <a:effectRef idx="0">
-        <a:scrgbClr r="0" g="0" b="0"/>
-      </a:effectRef>
-      <a:fontRef idx="minor"/>
-    </dgm:style>
-  </dgm:styleLbl>
-  <dgm:styleLbl name="bgImgPlace1">
-    <dgm:scene3d>
-      <a:camera prst="orthographicFront"/>
-      <a:lightRig rig="threePt" dir="t"/>
-    </dgm:scene3d>
-    <dgm:sp3d/>
-    <dgm:txPr/>
-    <dgm:style>
-      <a:lnRef idx="2">
-        <a:scrgbClr r="0" g="0" b="0"/>
-      </a:lnRef>
-      <a:fillRef idx="1">
-        <a:scrgbClr r="0" g="0" b="0"/>
-      </a:fillRef>
-      <a:effectRef idx="0">
-        <a:scrgbClr r="0" g="0" b="0"/>
-      </a:effectRef>
-      <a:fontRef idx="minor"/>
-    </dgm:style>
-  </dgm:styleLbl>
-  <dgm:styleLbl name="sibTrans2D1">
-    <dgm:scene3d>
-      <a:camera prst="orthographicFront"/>
-      <a:lightRig rig="threePt" dir="t"/>
-    </dgm:scene3d>
-    <dgm:sp3d/>
-    <dgm:txPr/>
-    <dgm:style>
-      <a:lnRef idx="0">
-        <a:scrgbClr r="0" g="0" b="0"/>
-      </a:lnRef>
-      <a:fillRef idx="1">
-        <a:scrgbClr r="0" g="0" b="0"/>
-      </a:fillRef>
-      <a:effectRef idx="0">
-        <a:scrgbClr r="0" g="0" b="0"/>
-      </a:effectRef>
-      <a:fontRef idx="minor">
-        <a:schemeClr val="lt1"/>
-      </a:fontRef>
-    </dgm:style>
-  </dgm:styleLbl>
-  <dgm:styleLbl name="fgSibTrans2D1">
-    <dgm:scene3d>
-      <a:camera prst="orthographicFront"/>
-      <a:lightRig rig="threePt" dir="t"/>
-    </dgm:scene3d>
-    <dgm:sp3d/>
-    <dgm:txPr/>
-    <dgm:style>
-      <a:lnRef idx="0">
-        <a:scrgbClr r="0" g="0" b="0"/>
-      </a:lnRef>
-      <a:fillRef idx="1">
-        <a:scrgbClr r="0" g="0" b="0"/>
-      </a:fillRef>
-      <a:effectRef idx="0">
-        <a:scrgbClr r="0" g="0" b="0"/>
-      </a:effectRef>
-      <a:fontRef idx="minor">
-        <a:schemeClr val="lt1"/>
-      </a:fontRef>
-    </dgm:style>
-  </dgm:styleLbl>
-  <dgm:styleLbl name="bgSibTrans2D1">
-    <dgm:scene3d>
-      <a:camera prst="orthographicFront"/>
-      <a:lightRig rig="threePt" dir="t"/>
-    </dgm:scene3d>
-    <dgm:sp3d/>
-    <dgm:txPr/>
-    <dgm:style>
-      <a:lnRef idx="0">
-        <a:scrgbClr r="0" g="0" b="0"/>
-      </a:lnRef>
-      <a:fillRef idx="1">
-        <a:scrgbClr r="0" g="0" b="0"/>
-      </a:fillRef>
-      <a:effectRef idx="0">
-        <a:scrgbClr r="0" g="0" b="0"/>
-      </a:effectRef>
-      <a:fontRef idx="minor">
-        <a:schemeClr val="lt1"/>
-      </a:fontRef>
-    </dgm:style>
-  </dgm:styleLbl>
-  <dgm:styleLbl name="sibTrans1D1">
-    <dgm:scene3d>
-      <a:camera prst="orthographicFront"/>
-      <a:lightRig rig="threePt" dir="t"/>
-    </dgm:scene3d>
-    <dgm:sp3d/>
-    <dgm:txPr/>
-    <dgm:style>
-      <a:lnRef idx="1">
-        <a:scrgbClr r="0" g="0" b="0"/>
-      </a:lnRef>
-      <a:fillRef idx="0">
-        <a:scrgbClr r="0" g="0" b="0"/>
-      </a:fillRef>
-      <a:effectRef idx="0">
-        <a:scrgbClr r="0" g="0" b="0"/>
-      </a:effectRef>
-      <a:fontRef idx="minor"/>
-    </dgm:style>
-  </dgm:styleLbl>
-  <dgm:styleLbl name="callout">
-    <dgm:scene3d>
-      <a:camera prst="orthographicFront"/>
-      <a:lightRig rig="threePt" dir="t"/>
-    </dgm:scene3d>
-    <dgm:sp3d/>
-    <dgm:txPr/>
-    <dgm:style>
-      <a:lnRef idx="2">
-        <a:scrgbClr r="0" g="0" b="0"/>
-      </a:lnRef>
-      <a:fillRef idx="1">
-        <a:scrgbClr r="0" g="0" b="0"/>
-      </a:fillRef>
-      <a:effectRef idx="0">
-        <a:scrgbClr r="0" g="0" b="0"/>
-      </a:effectRef>
-      <a:fontRef idx="minor"/>
-    </dgm:style>
-  </dgm:styleLbl>
-  <dgm:styleLbl name="asst0">
-    <dgm:scene3d>
-      <a:camera prst="orthographicFront"/>
-      <a:lightRig rig="threePt" dir="t"/>
-    </dgm:scene3d>
-    <dgm:sp3d/>
-    <dgm:txPr/>
-    <dgm:style>
-      <a:lnRef idx="2">
-        <a:scrgbClr r="0" g="0" b="0"/>
-      </a:lnRef>
-      <a:fillRef idx="1">
-        <a:scrgbClr r="0" g="0" b="0"/>
-      </a:fillRef>
-      <a:effectRef idx="0">
-        <a:scrgbClr r="0" g="0" b="0"/>
-      </a:effectRef>
-      <a:fontRef idx="minor">
-        <a:schemeClr val="lt1"/>
-      </a:fontRef>
-    </dgm:style>
-  </dgm:styleLbl>
-  <dgm:styleLbl name="asst1">
-    <dgm:scene3d>
-      <a:camera prst="orthographicFront"/>
-      <a:lightRig rig="threePt" dir="t"/>
-    </dgm:scene3d>
-    <dgm:sp3d/>
-    <dgm:txPr/>
-    <dgm:style>
-      <a:lnRef idx="2">
-        <a:scrgbClr r="0" g="0" b="0"/>
-      </a:lnRef>
-      <a:fillRef idx="1">
-        <a:scrgbClr r="0" g="0" b="0"/>
-      </a:fillRef>
-      <a:effectRef idx="0">
-        <a:scrgbClr r="0" g="0" b="0"/>
-      </a:effectRef>
-      <a:fontRef idx="minor">
-        <a:schemeClr val="lt1"/>
-      </a:fontRef>
-    </dgm:style>
-  </dgm:styleLbl>
-  <dgm:styleLbl name="asst2">
-    <dgm:scene3d>
-      <a:camera prst="orthographicFront"/>
-      <a:lightRig rig="threePt" dir="t"/>
-    </dgm:scene3d>
-    <dgm:sp3d/>
-    <dgm:txPr/>
-    <dgm:style>
-      <a:lnRef idx="2">
-        <a:scrgbClr r="0" g="0" b="0"/>
-      </a:lnRef>
-      <a:fillRef idx="1">
-        <a:scrgbClr r="0" g="0" b="0"/>
-      </a:fillRef>
-      <a:effectRef idx="0">
-        <a:scrgbClr r="0" g="0" b="0"/>
-      </a:effectRef>
-      <a:fontRef idx="minor">
-        <a:schemeClr val="lt1"/>
-      </a:fontRef>
-    </dgm:style>
-  </dgm:styleLbl>
-  <dgm:styleLbl name="asst3">
-    <dgm:scene3d>
-      <a:camera prst="orthographicFront"/>
-      <a:lightRig rig="threePt" dir="t"/>
-    </dgm:scene3d>
-    <dgm:sp3d/>
-    <dgm:txPr/>
-    <dgm:style>
-      <a:lnRef idx="2">
-        <a:scrgbClr r="0" g="0" b="0"/>
-      </a:lnRef>
-      <a:fillRef idx="1">
-        <a:scrgbClr r="0" g="0" b="0"/>
-      </a:fillRef>
-      <a:effectRef idx="0">
-        <a:scrgbClr r="0" g="0" b="0"/>
-      </a:effectRef>
-      <a:fontRef idx="minor">
-        <a:schemeClr val="lt1"/>
-      </a:fontRef>
-    </dgm:style>
-  </dgm:styleLbl>
-  <dgm:styleLbl name="asst4">
-    <dgm:scene3d>
-      <a:camera prst="orthographicFront"/>
-      <a:lightRig rig="threePt" dir="t"/>
-    </dgm:scene3d>
-    <dgm:sp3d/>
-    <dgm:txPr/>
-    <dgm:style>
-      <a:lnRef idx="2">
-        <a:scrgbClr r="0" g="0" b="0"/>
-      </a:lnRef>
-      <a:fillRef idx="1">
-        <a:scrgbClr r="0" g="0" b="0"/>
-      </a:fillRef>
-      <a:effectRef idx="0">
-        <a:scrgbClr r="0" g="0" b="0"/>
-      </a:effectRef>
-      <a:fontRef idx="minor">
-        <a:schemeClr val="lt1"/>
-      </a:fontRef>
-    </dgm:style>
-  </dgm:styleLbl>
-  <dgm:styleLbl name="parChTrans2D1">
-    <dgm:scene3d>
-      <a:camera prst="orthographicFront"/>
-      <a:lightRig rig="threePt" dir="t"/>
-    </dgm:scene3d>
-    <dgm:sp3d/>
-    <dgm:txPr/>
-    <dgm:style>
-      <a:lnRef idx="2">
-        <a:scrgbClr r="0" g="0" b="0"/>
-      </a:lnRef>
-      <a:fillRef idx="1">
-        <a:scrgbClr r="0" g="0" b="0"/>
-      </a:fillRef>
-      <a:effectRef idx="0">
-        <a:scrgbClr r="0" g="0" b="0"/>
-      </a:effectRef>
-      <a:fontRef idx="minor">
-        <a:schemeClr val="lt1"/>
-      </a:fontRef>
-    </dgm:style>
-  </dgm:styleLbl>
-  <dgm:styleLbl name="parChTrans2D2">
-    <dgm:scene3d>
-      <a:camera prst="orthographicFront"/>
-      <a:lightRig rig="threePt" dir="t"/>
-    </dgm:scene3d>
-    <dgm:sp3d/>
-    <dgm:txPr/>
-    <dgm:style>
-      <a:lnRef idx="2">
-        <a:scrgbClr r="0" g="0" b="0"/>
-      </a:lnRef>
-      <a:fillRef idx="1">
-        <a:scrgbClr r="0" g="0" b="0"/>
-      </a:fillRef>
-      <a:effectRef idx="0">
-        <a:scrgbClr r="0" g="0" b="0"/>
-      </a:effectRef>
-      <a:fontRef idx="minor">
-        <a:schemeClr val="lt1"/>
-      </a:fontRef>
-    </dgm:style>
-  </dgm:styleLbl>
-  <dgm:styleLbl name="parChTrans2D3">
-    <dgm:scene3d>
-      <a:camera prst="orthographicFront"/>
-      <a:lightRig rig="threePt" dir="t"/>
-    </dgm:scene3d>
-    <dgm:sp3d/>
-    <dgm:txPr/>
-    <dgm:style>
-      <a:lnRef idx="2">
-        <a:scrgbClr r="0" g="0" b="0"/>
-      </a:lnRef>
-      <a:fillRef idx="1">
-        <a:scrgbClr r="0" g="0" b="0"/>
-      </a:fillRef>
-      <a:effectRef idx="0">
-        <a:scrgbClr r="0" g="0" b="0"/>
-      </a:effectRef>
-      <a:fontRef idx="minor">
-        <a:schemeClr val="lt1"/>
-      </a:fontRef>
-    </dgm:style>
-  </dgm:styleLbl>
-  <dgm:styleLbl name="parChTrans2D4">
-    <dgm:scene3d>
-      <a:camera prst="orthographicFront"/>
-      <a:lightRig rig="threePt" dir="t"/>
-    </dgm:scene3d>
-    <dgm:sp3d/>
-    <dgm:txPr/>
-    <dgm:style>
-      <a:lnRef idx="2">
-        <a:scrgbClr r="0" g="0" b="0"/>
-      </a:lnRef>
-      <a:fillRef idx="1">
-        <a:scrgbClr r="0" g="0" b="0"/>
-      </a:fillRef>
-      <a:effectRef idx="0">
-        <a:scrgbClr r="0" g="0" b="0"/>
-      </a:effectRef>
-      <a:fontRef idx="minor">
-        <a:schemeClr val="lt1"/>
-      </a:fontRef>
-    </dgm:style>
-  </dgm:styleLbl>
-  <dgm:styleLbl name="parChTrans1D1">
-    <dgm:scene3d>
-      <a:camera prst="orthographicFront"/>
-      <a:lightRig rig="threePt" dir="t"/>
-    </dgm:scene3d>
-    <dgm:sp3d/>
-    <dgm:txPr/>
-    <dgm:style>
-      <a:lnRef idx="2">
-        <a:scrgbClr r="0" g="0" b="0"/>
-      </a:lnRef>
-      <a:fillRef idx="0">
-        <a:scrgbClr r="0" g="0" b="0"/>
-      </a:fillRef>
-      <a:effectRef idx="0">
-        <a:scrgbClr r="0" g="0" b="0"/>
-      </a:effectRef>
-      <a:fontRef idx="minor"/>
-    </dgm:style>
-  </dgm:styleLbl>
-  <dgm:styleLbl name="parChTrans1D2">
-    <dgm:scene3d>
-      <a:camera prst="orthographicFront"/>
-      <a:lightRig rig="threePt" dir="t"/>
-    </dgm:scene3d>
-    <dgm:sp3d/>
-    <dgm:txPr/>
-    <dgm:style>
-      <a:lnRef idx="2">
-        <a:scrgbClr r="0" g="0" b="0"/>
-      </a:lnRef>
-      <a:fillRef idx="0">
-        <a:scrgbClr r="0" g="0" b="0"/>
-      </a:fillRef>
-      <a:effectRef idx="0">
-        <a:scrgbClr r="0" g="0" b="0"/>
-      </a:effectRef>
-      <a:fontRef idx="minor"/>
-    </dgm:style>
-  </dgm:styleLbl>
-  <dgm:styleLbl name="parChTrans1D3">
-    <dgm:scene3d>
-      <a:camera prst="orthographicFront"/>
-      <a:lightRig rig="threePt" dir="t"/>
-    </dgm:scene3d>
-    <dgm:sp3d/>
-    <dgm:txPr/>
-    <dgm:style>
-      <a:lnRef idx="2">
-        <a:scrgbClr r="0" g="0" b="0"/>
-      </a:lnRef>
-      <a:fillRef idx="0">
-        <a:scrgbClr r="0" g="0" b="0"/>
-      </a:fillRef>
-      <a:effectRef idx="0">
-        <a:scrgbClr r="0" g="0" b="0"/>
-      </a:effectRef>
-      <a:fontRef idx="minor"/>
-    </dgm:style>
-  </dgm:styleLbl>
-  <dgm:styleLbl name="parChTrans1D4">
-    <dgm:scene3d>
-      <a:camera prst="orthographicFront"/>
-      <a:lightRig rig="threePt" dir="t"/>
-    </dgm:scene3d>
-    <dgm:sp3d/>
-    <dgm:txPr/>
-    <dgm:style>
-      <a:lnRef idx="2">
-        <a:scrgbClr r="0" g="0" b="0"/>
-      </a:lnRef>
-      <a:fillRef idx="0">
-        <a:scrgbClr r="0" g="0" b="0"/>
-      </a:fillRef>
-      <a:effectRef idx="0">
-        <a:scrgbClr r="0" g="0" b="0"/>
-      </a:effectRef>
-      <a:fontRef idx="minor"/>
-    </dgm:style>
-  </dgm:styleLbl>
-  <dgm:styleLbl name="fgAcc1">
-    <dgm:scene3d>
-      <a:camera prst="orthographicFront"/>
-      <a:lightRig rig="threePt" dir="t"/>
-    </dgm:scene3d>
-    <dgm:sp3d/>
-    <dgm:txPr/>
-    <dgm:style>
-      <a:lnRef idx="2">
-        <a:scrgbClr r="0" g="0" b="0"/>
-      </a:lnRef>
-      <a:fillRef idx="1">
-        <a:scrgbClr r="0" g="0" b="0"/>
-      </a:fillRef>
-      <a:effectRef idx="0">
-        <a:scrgbClr r="0" g="0" b="0"/>
-      </a:effectRef>
-      <a:fontRef idx="minor"/>
-    </dgm:style>
-  </dgm:styleLbl>
-  <dgm:styleLbl name="conFgAcc1">
-    <dgm:scene3d>
-      <a:camera prst="orthographicFront"/>
-      <a:lightRig rig="threePt" dir="t"/>
-    </dgm:scene3d>
-    <dgm:sp3d/>
-    <dgm:txPr/>
-    <dgm:style>
-      <a:lnRef idx="2">
-        <a:scrgbClr r="0" g="0" b="0"/>
-      </a:lnRef>
-      <a:fillRef idx="1">
-        <a:scrgbClr r="0" g="0" b="0"/>
-      </a:fillRef>
-      <a:effectRef idx="0">
-        <a:scrgbClr r="0" g="0" b="0"/>
-      </a:effectRef>
-      <a:fontRef idx="minor"/>
-    </dgm:style>
-  </dgm:styleLbl>
-  <dgm:styleLbl name="alignAcc1">
-    <dgm:scene3d>
-      <a:camera prst="orthographicFront"/>
-      <a:lightRig rig="threePt" dir="t"/>
-    </dgm:scene3d>
-    <dgm:sp3d/>
-    <dgm:txPr/>
-    <dgm:style>
-      <a:lnRef idx="2">
-        <a:scrgbClr r="0" g="0" b="0"/>
-      </a:lnRef>
-      <a:fillRef idx="1">
-        <a:scrgbClr r="0" g="0" b="0"/>
-      </a:fillRef>
-      <a:effectRef idx="0">
-        <a:scrgbClr r="0" g="0" b="0"/>
-      </a:effectRef>
-      <a:fontRef idx="minor"/>
-    </dgm:style>
-  </dgm:styleLbl>
-  <dgm:styleLbl name="trAlignAcc1">
-    <dgm:scene3d>
-      <a:camera prst="orthographicFront"/>
-      <a:lightRig rig="threePt" dir="t"/>
-    </dgm:scene3d>
-    <dgm:sp3d/>
-    <dgm:txPr/>
-    <dgm:style>
-      <a:lnRef idx="1">
-        <a:scrgbClr r="0" g="0" b="0"/>
-      </a:lnRef>
-      <a:fillRef idx="1">
-        <a:scrgbClr r="0" g="0" b="0"/>
-      </a:fillRef>
-      <a:effectRef idx="0">
-        <a:scrgbClr r="0" g="0" b="0"/>
-      </a:effectRef>
-      <a:fontRef idx="minor"/>
-    </dgm:style>
-  </dgm:styleLbl>
-  <dgm:styleLbl name="bgAcc1">
-    <dgm:scene3d>
-      <a:camera prst="orthographicFront"/>
-      <a:lightRig rig="threePt" dir="t"/>
-    </dgm:scene3d>
-    <dgm:sp3d/>
-    <dgm:txPr/>
-    <dgm:style>
-      <a:lnRef idx="2">
-        <a:scrgbClr r="0" g="0" b="0"/>
-      </a:lnRef>
-      <a:fillRef idx="1">
-        <a:scrgbClr r="0" g="0" b="0"/>
-      </a:fillRef>
-      <a:effectRef idx="0">
-        <a:scrgbClr r="0" g="0" b="0"/>
-      </a:effectRef>
-      <a:fontRef idx="minor"/>
-    </dgm:style>
-  </dgm:styleLbl>
-  <dgm:styleLbl name="solidFgAcc1">
-    <dgm:scene3d>
-      <a:camera prst="orthographicFront"/>
-      <a:lightRig rig="threePt" dir="t"/>
-    </dgm:scene3d>
-    <dgm:sp3d/>
-    <dgm:txPr/>
-    <dgm:style>
-      <a:lnRef idx="2">
-        <a:scrgbClr r="0" g="0" b="0"/>
-      </a:lnRef>
-      <a:fillRef idx="1">
-        <a:scrgbClr r="0" g="0" b="0"/>
-      </a:fillRef>
-      <a:effectRef idx="0">
-        <a:scrgbClr r="0" g="0" b="0"/>
-      </a:effectRef>
-      <a:fontRef idx="minor"/>
-    </dgm:style>
-  </dgm:styleLbl>
-  <dgm:styleLbl name="solidAlignAcc1">
-    <dgm:scene3d>
-      <a:camera prst="orthographicFront"/>
-      <a:lightRig rig="threePt" dir="t"/>
-    </dgm:scene3d>
-    <dgm:sp3d/>
-    <dgm:txPr/>
-    <dgm:style>
-      <a:lnRef idx="2">
-        <a:scrgbClr r="0" g="0" b="0"/>
-      </a:lnRef>
-      <a:fillRef idx="1">
-        <a:scrgbClr r="0" g="0" b="0"/>
-      </a:fillRef>
-      <a:effectRef idx="0">
-        <a:scrgbClr r="0" g="0" b="0"/>
-      </a:effectRef>
-      <a:fontRef idx="minor"/>
-    </dgm:style>
-  </dgm:styleLbl>
-  <dgm:styleLbl name="solidBgAcc1">
-    <dgm:scene3d>
-      <a:camera prst="orthographicFront"/>
-      <a:lightRig rig="threePt" dir="t"/>
-    </dgm:scene3d>
-    <dgm:sp3d/>
-    <dgm:txPr/>
-    <dgm:style>
-      <a:lnRef idx="2">
-        <a:scrgbClr r="0" g="0" b="0"/>
-      </a:lnRef>
-      <a:fillRef idx="1">
-        <a:scrgbClr r="0" g="0" b="0"/>
-      </a:fillRef>
-      <a:effectRef idx="0">
-        <a:scrgbClr r="0" g="0" b="0"/>
-      </a:effectRef>
-      <a:fontRef idx="minor"/>
-    </dgm:style>
-  </dgm:styleLbl>
-  <dgm:styleLbl name="fgAccFollowNode1">
-    <dgm:scene3d>
-      <a:camera prst="orthographicFront"/>
-      <a:lightRig rig="threePt" dir="t"/>
-    </dgm:scene3d>
-    <dgm:sp3d/>
-    <dgm:txPr/>
-    <dgm:style>
-      <a:lnRef idx="2">
-        <a:scrgbClr r="0" g="0" b="0"/>
-      </a:lnRef>
-      <a:fillRef idx="1">
-        <a:scrgbClr r="0" g="0" b="0"/>
-      </a:fillRef>
-      <a:effectRef idx="0">
-        <a:scrgbClr r="0" g="0" b="0"/>
-      </a:effectRef>
-      <a:fontRef idx="minor"/>
-    </dgm:style>
-  </dgm:styleLbl>
-  <dgm:styleLbl name="alignAccFollowNode1">
-    <dgm:scene3d>
-      <a:camera prst="orthographicFront"/>
-      <a:lightRig rig="threePt" dir="t"/>
-    </dgm:scene3d>
-    <dgm:sp3d/>
-    <dgm:txPr/>
-    <dgm:style>
-      <a:lnRef idx="2">
-        <a:scrgbClr r="0" g="0" b="0"/>
-      </a:lnRef>
-      <a:fillRef idx="1">
-        <a:scrgbClr r="0" g="0" b="0"/>
-      </a:fillRef>
-      <a:effectRef idx="0">
-        <a:scrgbClr r="0" g="0" b="0"/>
-      </a:effectRef>
-      <a:fontRef idx="minor"/>
-    </dgm:style>
-  </dgm:styleLbl>
-  <dgm:styleLbl name="bgAccFollowNode1">
-    <dgm:scene3d>
-      <a:camera prst="orthographicFront"/>
-      <a:lightRig rig="threePt" dir="t"/>
-    </dgm:scene3d>
-    <dgm:sp3d/>
-    <dgm:txPr/>
-    <dgm:style>
-      <a:lnRef idx="2">
-        <a:scrgbClr r="0" g="0" b="0"/>
-      </a:lnRef>
-      <a:fillRef idx="1">
-        <a:scrgbClr r="0" g="0" b="0"/>
-      </a:fillRef>
-      <a:effectRef idx="0">
-        <a:scrgbClr r="0" g="0" b="0"/>
-      </a:effectRef>
-      <a:fontRef idx="minor"/>
-    </dgm:style>
-  </dgm:styleLbl>
-  <dgm:styleLbl name="fgAcc0">
-    <dgm:scene3d>
-      <a:camera prst="orthographicFront"/>
-      <a:lightRig rig="threePt" dir="t"/>
-    </dgm:scene3d>
-    <dgm:sp3d/>
-    <dgm:txPr/>
-    <dgm:style>
-      <a:lnRef idx="2">
-        <a:scrgbClr r="0" g="0" b="0"/>
-      </a:lnRef>
-      <a:fillRef idx="1">
-        <a:scrgbClr r="0" g="0" b="0"/>
-      </a:fillRef>
-      <a:effectRef idx="0">
-        <a:scrgbClr r="0" g="0" b="0"/>
-      </a:effectRef>
-      <a:fontRef idx="minor"/>
-    </dgm:style>
-  </dgm:styleLbl>
-  <dgm:styleLbl name="fgAcc2">
-    <dgm:scene3d>
-      <a:camera prst="orthographicFront"/>
-      <a:lightRig rig="threePt" dir="t"/>
-    </dgm:scene3d>
-    <dgm:sp3d/>
-    <dgm:txPr/>
-    <dgm:style>
-      <a:lnRef idx="2">
-        <a:scrgbClr r="0" g="0" b="0"/>
-      </a:lnRef>
-      <a:fillRef idx="1">
-        <a:scrgbClr r="0" g="0" b="0"/>
-      </a:fillRef>
-      <a:effectRef idx="0">
-        <a:scrgbClr r="0" g="0" b="0"/>
-      </a:effectRef>
-      <a:fontRef idx="minor"/>
-    </dgm:style>
-  </dgm:styleLbl>
-  <dgm:styleLbl name="fgAcc3">
-    <dgm:scene3d>
-      <a:camera prst="orthographicFront"/>
-      <a:lightRig rig="threePt" dir="t"/>
-    </dgm:scene3d>
-    <dgm:sp3d/>
-    <dgm:txPr/>
-    <dgm:style>
-      <a:lnRef idx="2">
-        <a:scrgbClr r="0" g="0" b="0"/>
-      </a:lnRef>
-      <a:fillRef idx="1">
-        <a:scrgbClr r="0" g="0" b="0"/>
-      </a:fillRef>
-      <a:effectRef idx="0">
-        <a:scrgbClr r="0" g="0" b="0"/>
-      </a:effectRef>
-      <a:fontRef idx="minor"/>
-    </dgm:style>
-  </dgm:styleLbl>
-  <dgm:styleLbl name="fgAcc4">
-    <dgm:scene3d>
-      <a:camera prst="orthographicFront"/>
-      <a:lightRig rig="threePt" dir="t"/>
-    </dgm:scene3d>
-    <dgm:sp3d/>
-    <dgm:txPr/>
-    <dgm:style>
-      <a:lnRef idx="2">
-        <a:scrgbClr r="0" g="0" b="0"/>
-      </a:lnRef>
-      <a:fillRef idx="1">
-        <a:scrgbClr r="0" g="0" b="0"/>
-      </a:fillRef>
-      <a:effectRef idx="0">
-        <a:scrgbClr r="0" g="0" b="0"/>
-      </a:effectRef>
-      <a:fontRef idx="minor"/>
-    </dgm:style>
-  </dgm:styleLbl>
-  <dgm:styleLbl name="bgShp">
-    <dgm:scene3d>
-      <a:camera prst="orthographicFront"/>
-      <a:lightRig rig="threePt" dir="t"/>
-    </dgm:scene3d>
-    <dgm:sp3d/>
-    <dgm:txPr/>
-    <dgm:style>
-      <a:lnRef idx="0">
-        <a:scrgbClr r="0" g="0" b="0"/>
-      </a:lnRef>
-      <a:fillRef idx="1">
-        <a:scrgbClr r="0" g="0" b="0"/>
-      </a:fillRef>
-      <a:effectRef idx="0">
-        <a:scrgbClr r="0" g="0" b="0"/>
-      </a:effectRef>
-      <a:fontRef idx="minor"/>
-    </dgm:style>
-  </dgm:styleLbl>
-  <dgm:styleLbl name="dkBgShp">
-    <dgm:scene3d>
-      <a:camera prst="orthographicFront"/>
-      <a:lightRig rig="threePt" dir="t"/>
-    </dgm:scene3d>
-    <dgm:sp3d/>
-    <dgm:txPr/>
-    <dgm:style>
-      <a:lnRef idx="0">
-        <a:scrgbClr r="0" g="0" b="0"/>
-      </a:lnRef>
-      <a:fillRef idx="1">
-        <a:scrgbClr r="0" g="0" b="0"/>
-      </a:fillRef>
-      <a:effectRef idx="0">
-        <a:scrgbClr r="0" g="0" b="0"/>
-      </a:effectRef>
-      <a:fontRef idx="minor"/>
-    </dgm:style>
-  </dgm:styleLbl>
-  <dgm:styleLbl name="trBgShp">
-    <dgm:scene3d>
-      <a:camera prst="orthographicFront"/>
-      <a:lightRig rig="threePt" dir="t"/>
-    </dgm:scene3d>
-    <dgm:sp3d/>
-    <dgm:txPr/>
-    <dgm:style>
-      <a:lnRef idx="0">
-        <a:scrgbClr r="0" g="0" b="0"/>
-      </a:lnRef>
-      <a:fillRef idx="1">
-        <a:scrgbClr r="0" g="0" b="0"/>
-      </a:fillRef>
-      <a:effectRef idx="0">
-        <a:scrgbClr r="0" g="0" b="0"/>
-      </a:effectRef>
-      <a:fontRef idx="minor"/>
-    </dgm:style>
-  </dgm:styleLbl>
-  <dgm:styleLbl name="fgShp">
-    <dgm:scene3d>
-      <a:camera prst="orthographicFront"/>
-      <a:lightRig rig="threePt" dir="t"/>
-    </dgm:scene3d>
-    <dgm:sp3d/>
-    <dgm:txPr/>
-    <dgm:style>
-      <a:lnRef idx="2">
-        <a:scrgbClr r="0" g="0" b="0"/>
-      </a:lnRef>
-      <a:fillRef idx="1">
-        <a:scrgbClr r="0" g="0" b="0"/>
-      </a:fillRef>
-      <a:effectRef idx="0">
-        <a:scrgbClr r="0" g="0" b="0"/>
-      </a:effectRef>
-      <a:fontRef idx="minor"/>
-    </dgm:style>
-  </dgm:styleLbl>
-  <dgm:styleLbl name="revTx">
-    <dgm:scene3d>
-      <a:camera prst="orthographicFront"/>
-      <a:lightRig rig="threePt" dir="t"/>
-    </dgm:scene3d>
-    <dgm:sp3d/>
-    <dgm:txPr/>
-    <dgm:style>
-      <a:lnRef idx="0">
-        <a:scrgbClr r="0" g="0" b="0"/>
-      </a:lnRef>
-      <a:fillRef idx="0">
-        <a:scrgbClr r="0" g="0" b="0"/>
-      </a:fillRef>
-      <a:effectRef idx="0">
-        <a:scrgbClr r="0" g="0" b="0"/>
-      </a:effectRef>
-      <a:fontRef idx="minor"/>
-    </dgm:style>
-  </dgm:styleLbl>
-</dgm:styleDef>
-</file>
-
-<file path=ppt/diagrams/quickStyle3.xml><?xml version="1.0" encoding="utf-8"?>
 <dgm:styleDef xmlns:dgm="http://schemas.openxmlformats.org/drawingml/2006/diagram" xmlns:a="http://schemas.openxmlformats.org/drawingml/2006/main" uniqueId="urn:microsoft.com/office/officeart/2005/8/quickstyle/simple1">
   <dgm:title val=""/>
   <dgm:desc val=""/>
@@ -18119,7 +10101,10 @@
           <a:bodyPr/>
           <a:lstStyle/>
           <a:p>
-            <a:endParaRPr lang="en-GB" dirty="0"/>
+            <a:r>
+              <a:rPr lang="en-GB" dirty="0"/>
+              <a:t>https://marketplace.visualstudio.com/items?itemName=microsoft-IsvExpTools.PowerPlatform-BuildTools</a:t>
+            </a:r>
           </a:p>
         </p:txBody>
       </p:sp>
@@ -18140,7 +10125,7 @@
           <a:p>
             <a:fld id="{DFD61FD4-0D1B-46E1-9586-D34C965386CF}" type="slidenum">
               <a:rPr lang="en-GB" smtClean="0"/>
-              <a:t>30</a:t>
+              <a:t>31</a:t>
             </a:fld>
             <a:endParaRPr lang="en-GB"/>
           </a:p>
@@ -18149,7 +10134,7 @@
     </p:spTree>
     <p:extLst>
       <p:ext uri="{BB962C8B-B14F-4D97-AF65-F5344CB8AC3E}">
-        <p14:creationId xmlns:p14="http://schemas.microsoft.com/office/powerpoint/2010/main" val="900241711"/>
+        <p14:creationId xmlns:p14="http://schemas.microsoft.com/office/powerpoint/2010/main" val="1128775371"/>
       </p:ext>
     </p:extLst>
   </p:cSld>
@@ -18224,286 +10209,7 @@
           <a:p>
             <a:fld id="{DFD61FD4-0D1B-46E1-9586-D34C965386CF}" type="slidenum">
               <a:rPr lang="en-GB" smtClean="0"/>
-              <a:t>31</a:t>
-            </a:fld>
-            <a:endParaRPr lang="en-GB"/>
-          </a:p>
-        </p:txBody>
-      </p:sp>
-    </p:spTree>
-    <p:extLst>
-      <p:ext uri="{BB962C8B-B14F-4D97-AF65-F5344CB8AC3E}">
-        <p14:creationId xmlns:p14="http://schemas.microsoft.com/office/powerpoint/2010/main" val="2554478149"/>
-      </p:ext>
-    </p:extLst>
-  </p:cSld>
-  <p:clrMapOvr>
-    <a:masterClrMapping/>
-  </p:clrMapOvr>
-</p:notes>
-</file>
-
-<file path=ppt/notesSlides/notesSlide6.xml><?xml version="1.0" encoding="utf-8"?>
-<p:notes xmlns:a="http://schemas.openxmlformats.org/drawingml/2006/main" xmlns:r="http://schemas.openxmlformats.org/officeDocument/2006/relationships" xmlns:p="http://schemas.openxmlformats.org/presentationml/2006/main">
-  <p:cSld>
-    <p:spTree>
-      <p:nvGrpSpPr>
-        <p:cNvPr id="1" name="">
-          <a:extLst>
-            <a:ext uri="{FF2B5EF4-FFF2-40B4-BE49-F238E27FC236}">
-              <a16:creationId xmlns:a16="http://schemas.microsoft.com/office/drawing/2014/main" id="{CF7D4AD7-C744-C695-850A-3D7BE7CA1CB2}"/>
-            </a:ext>
-          </a:extLst>
-        </p:cNvPr>
-        <p:cNvGrpSpPr/>
-        <p:nvPr/>
-      </p:nvGrpSpPr>
-      <p:grpSpPr>
-        <a:xfrm>
-          <a:off x="0" y="0"/>
-          <a:ext cx="0" cy="0"/>
-          <a:chOff x="0" y="0"/>
-          <a:chExt cx="0" cy="0"/>
-        </a:xfrm>
-      </p:grpSpPr>
-      <p:sp>
-        <p:nvSpPr>
-          <p:cNvPr id="2" name="Slide Image Placeholder 1">
-            <a:extLst>
-              <a:ext uri="{FF2B5EF4-FFF2-40B4-BE49-F238E27FC236}">
-                <a16:creationId xmlns:a16="http://schemas.microsoft.com/office/drawing/2014/main" id="{7A8D77F8-E1C4-DBEC-D58C-B24F72A9AF8D}"/>
-              </a:ext>
-            </a:extLst>
-          </p:cNvPr>
-          <p:cNvSpPr>
-            <a:spLocks noGrp="1" noRot="1" noChangeAspect="1"/>
-          </p:cNvSpPr>
-          <p:nvPr>
-            <p:ph type="sldImg"/>
-          </p:nvPr>
-        </p:nvSpPr>
-        <p:spPr/>
-      </p:sp>
-      <p:sp>
-        <p:nvSpPr>
-          <p:cNvPr id="3" name="Notes Placeholder 2">
-            <a:extLst>
-              <a:ext uri="{FF2B5EF4-FFF2-40B4-BE49-F238E27FC236}">
-                <a16:creationId xmlns:a16="http://schemas.microsoft.com/office/drawing/2014/main" id="{1BBDC4C8-A29D-821D-BD65-1F58EA5DBF37}"/>
-              </a:ext>
-            </a:extLst>
-          </p:cNvPr>
-          <p:cNvSpPr>
-            <a:spLocks noGrp="1"/>
-          </p:cNvSpPr>
-          <p:nvPr>
-            <p:ph type="body" idx="1"/>
-          </p:nvPr>
-        </p:nvSpPr>
-        <p:spPr/>
-        <p:txBody>
-          <a:bodyPr/>
-          <a:lstStyle/>
-          <a:p>
-            <a:endParaRPr lang="en-GB" dirty="0"/>
-          </a:p>
-        </p:txBody>
-      </p:sp>
-      <p:sp>
-        <p:nvSpPr>
-          <p:cNvPr id="4" name="Slide Number Placeholder 3">
-            <a:extLst>
-              <a:ext uri="{FF2B5EF4-FFF2-40B4-BE49-F238E27FC236}">
-                <a16:creationId xmlns:a16="http://schemas.microsoft.com/office/drawing/2014/main" id="{AF7904F4-D493-C7B0-D716-C1DF02F70DE2}"/>
-              </a:ext>
-            </a:extLst>
-          </p:cNvPr>
-          <p:cNvSpPr>
-            <a:spLocks noGrp="1"/>
-          </p:cNvSpPr>
-          <p:nvPr>
-            <p:ph type="sldNum" sz="quarter" idx="5"/>
-          </p:nvPr>
-        </p:nvSpPr>
-        <p:spPr/>
-        <p:txBody>
-          <a:bodyPr/>
-          <a:lstStyle/>
-          <a:p>
-            <a:fld id="{DFD61FD4-0D1B-46E1-9586-D34C965386CF}" type="slidenum">
-              <a:rPr lang="en-GB" smtClean="0"/>
-              <a:t>33</a:t>
-            </a:fld>
-            <a:endParaRPr lang="en-GB"/>
-          </a:p>
-        </p:txBody>
-      </p:sp>
-    </p:spTree>
-    <p:extLst>
-      <p:ext uri="{BB962C8B-B14F-4D97-AF65-F5344CB8AC3E}">
-        <p14:creationId xmlns:p14="http://schemas.microsoft.com/office/powerpoint/2010/main" val="2103616116"/>
-      </p:ext>
-    </p:extLst>
-  </p:cSld>
-  <p:clrMapOvr>
-    <a:masterClrMapping/>
-  </p:clrMapOvr>
-</p:notes>
-</file>
-
-<file path=ppt/notesSlides/notesSlide7.xml><?xml version="1.0" encoding="utf-8"?>
-<p:notes xmlns:a="http://schemas.openxmlformats.org/drawingml/2006/main" xmlns:r="http://schemas.openxmlformats.org/officeDocument/2006/relationships" xmlns:p="http://schemas.openxmlformats.org/presentationml/2006/main">
-  <p:cSld>
-    <p:spTree>
-      <p:nvGrpSpPr>
-        <p:cNvPr id="1" name=""/>
-        <p:cNvGrpSpPr/>
-        <p:nvPr/>
-      </p:nvGrpSpPr>
-      <p:grpSpPr>
-        <a:xfrm>
-          <a:off x="0" y="0"/>
-          <a:ext cx="0" cy="0"/>
-          <a:chOff x="0" y="0"/>
-          <a:chExt cx="0" cy="0"/>
-        </a:xfrm>
-      </p:grpSpPr>
-      <p:sp>
-        <p:nvSpPr>
-          <p:cNvPr id="2" name="Slide Image Placeholder 1"/>
-          <p:cNvSpPr>
-            <a:spLocks noGrp="1" noRot="1" noChangeAspect="1"/>
-          </p:cNvSpPr>
-          <p:nvPr>
-            <p:ph type="sldImg"/>
-          </p:nvPr>
-        </p:nvSpPr>
-        <p:spPr/>
-      </p:sp>
-      <p:sp>
-        <p:nvSpPr>
-          <p:cNvPr id="3" name="Notes Placeholder 2"/>
-          <p:cNvSpPr>
-            <a:spLocks noGrp="1"/>
-          </p:cNvSpPr>
-          <p:nvPr>
-            <p:ph type="body" idx="1"/>
-          </p:nvPr>
-        </p:nvSpPr>
-        <p:spPr/>
-        <p:txBody>
-          <a:bodyPr/>
-          <a:lstStyle/>
-          <a:p>
-            <a:r>
-              <a:rPr lang="en-GB" dirty="0"/>
-              <a:t>https://marketplace.visualstudio.com/items?itemName=microsoft-IsvExpTools.PowerPlatform-BuildTools</a:t>
-            </a:r>
-          </a:p>
-        </p:txBody>
-      </p:sp>
-      <p:sp>
-        <p:nvSpPr>
-          <p:cNvPr id="4" name="Slide Number Placeholder 3"/>
-          <p:cNvSpPr>
-            <a:spLocks noGrp="1"/>
-          </p:cNvSpPr>
-          <p:nvPr>
-            <p:ph type="sldNum" sz="quarter" idx="5"/>
-          </p:nvPr>
-        </p:nvSpPr>
-        <p:spPr/>
-        <p:txBody>
-          <a:bodyPr/>
-          <a:lstStyle/>
-          <a:p>
-            <a:fld id="{DFD61FD4-0D1B-46E1-9586-D34C965386CF}" type="slidenum">
-              <a:rPr lang="en-GB" smtClean="0"/>
-              <a:t>34</a:t>
-            </a:fld>
-            <a:endParaRPr lang="en-GB"/>
-          </a:p>
-        </p:txBody>
-      </p:sp>
-    </p:spTree>
-    <p:extLst>
-      <p:ext uri="{BB962C8B-B14F-4D97-AF65-F5344CB8AC3E}">
-        <p14:creationId xmlns:p14="http://schemas.microsoft.com/office/powerpoint/2010/main" val="1128775371"/>
-      </p:ext>
-    </p:extLst>
-  </p:cSld>
-  <p:clrMapOvr>
-    <a:masterClrMapping/>
-  </p:clrMapOvr>
-</p:notes>
-</file>
-
-<file path=ppt/notesSlides/notesSlide8.xml><?xml version="1.0" encoding="utf-8"?>
-<p:notes xmlns:a="http://schemas.openxmlformats.org/drawingml/2006/main" xmlns:r="http://schemas.openxmlformats.org/officeDocument/2006/relationships" xmlns:p="http://schemas.openxmlformats.org/presentationml/2006/main">
-  <p:cSld>
-    <p:spTree>
-      <p:nvGrpSpPr>
-        <p:cNvPr id="1" name=""/>
-        <p:cNvGrpSpPr/>
-        <p:nvPr/>
-      </p:nvGrpSpPr>
-      <p:grpSpPr>
-        <a:xfrm>
-          <a:off x="0" y="0"/>
-          <a:ext cx="0" cy="0"/>
-          <a:chOff x="0" y="0"/>
-          <a:chExt cx="0" cy="0"/>
-        </a:xfrm>
-      </p:grpSpPr>
-      <p:sp>
-        <p:nvSpPr>
-          <p:cNvPr id="2" name="Slide Image Placeholder 1"/>
-          <p:cNvSpPr>
-            <a:spLocks noGrp="1" noRot="1" noChangeAspect="1"/>
-          </p:cNvSpPr>
-          <p:nvPr>
-            <p:ph type="sldImg"/>
-          </p:nvPr>
-        </p:nvSpPr>
-        <p:spPr/>
-      </p:sp>
-      <p:sp>
-        <p:nvSpPr>
-          <p:cNvPr id="3" name="Notes Placeholder 2"/>
-          <p:cNvSpPr>
-            <a:spLocks noGrp="1"/>
-          </p:cNvSpPr>
-          <p:nvPr>
-            <p:ph type="body" idx="1"/>
-          </p:nvPr>
-        </p:nvSpPr>
-        <p:spPr/>
-        <p:txBody>
-          <a:bodyPr/>
-          <a:lstStyle/>
-          <a:p>
-            <a:endParaRPr lang="en-GB" dirty="0"/>
-          </a:p>
-        </p:txBody>
-      </p:sp>
-      <p:sp>
-        <p:nvSpPr>
-          <p:cNvPr id="4" name="Slide Number Placeholder 3"/>
-          <p:cNvSpPr>
-            <a:spLocks noGrp="1"/>
-          </p:cNvSpPr>
-          <p:nvPr>
-            <p:ph type="sldNum" sz="quarter" idx="5"/>
-          </p:nvPr>
-        </p:nvSpPr>
-        <p:spPr/>
-        <p:txBody>
-          <a:bodyPr/>
-          <a:lstStyle/>
-          <a:p>
-            <a:fld id="{DFD61FD4-0D1B-46E1-9586-D34C965386CF}" type="slidenum">
-              <a:rPr lang="en-GB" smtClean="0"/>
-              <a:t>35</a:t>
+              <a:t>32</a:t>
             </a:fld>
             <a:endParaRPr lang="en-GB"/>
           </a:p>
@@ -45229,964 +36935,6 @@
       </p:grpSpPr>
       <p:sp>
         <p:nvSpPr>
-          <p:cNvPr id="2" name="Title 1">
-            <a:extLst>
-              <a:ext uri="{FF2B5EF4-FFF2-40B4-BE49-F238E27FC236}">
-                <a16:creationId xmlns:a16="http://schemas.microsoft.com/office/drawing/2014/main" id="{019FB408-9308-46FB-B720-ECA4384E8012}"/>
-              </a:ext>
-            </a:extLst>
-          </p:cNvPr>
-          <p:cNvSpPr>
-            <a:spLocks noGrp="1"/>
-          </p:cNvSpPr>
-          <p:nvPr>
-            <p:ph type="title"/>
-          </p:nvPr>
-        </p:nvSpPr>
-        <p:spPr/>
-        <p:txBody>
-          <a:bodyPr/>
-          <a:lstStyle/>
-          <a:p>
-            <a:r>
-              <a:rPr lang="en-GB" dirty="0"/>
-              <a:t>Build Process</a:t>
-            </a:r>
-          </a:p>
-        </p:txBody>
-      </p:sp>
-      <p:graphicFrame>
-        <p:nvGraphicFramePr>
-          <p:cNvPr id="25" name="Diagram 24">
-            <a:extLst>
-              <a:ext uri="{FF2B5EF4-FFF2-40B4-BE49-F238E27FC236}">
-                <a16:creationId xmlns:a16="http://schemas.microsoft.com/office/drawing/2014/main" id="{3A48726E-37A8-49B9-85AC-0730A9AB2BDC}"/>
-              </a:ext>
-            </a:extLst>
-          </p:cNvPr>
-          <p:cNvGraphicFramePr/>
-          <p:nvPr>
-            <p:extLst>
-              <p:ext uri="{D42A27DB-BD31-4B8C-83A1-F6EECF244321}">
-                <p14:modId xmlns:p14="http://schemas.microsoft.com/office/powerpoint/2010/main" val="186160676"/>
-              </p:ext>
-            </p:extLst>
-          </p:nvPr>
-        </p:nvGraphicFramePr>
-        <p:xfrm>
-          <a:off x="985439" y="35588"/>
-          <a:ext cx="9877946" cy="6002345"/>
-        </p:xfrm>
-        <a:graphic>
-          <a:graphicData uri="http://schemas.openxmlformats.org/drawingml/2006/diagram">
-            <dgm:relIds xmlns:dgm="http://schemas.openxmlformats.org/drawingml/2006/diagram" xmlns:r="http://schemas.openxmlformats.org/officeDocument/2006/relationships" r:dm="rId3" r:lo="rId4" r:qs="rId5" r:cs="rId6"/>
-          </a:graphicData>
-        </a:graphic>
-      </p:graphicFrame>
-    </p:spTree>
-    <p:extLst>
-      <p:ext uri="{BB962C8B-B14F-4D97-AF65-F5344CB8AC3E}">
-        <p14:creationId xmlns:p14="http://schemas.microsoft.com/office/powerpoint/2010/main" val="3463923734"/>
-      </p:ext>
-    </p:extLst>
-  </p:cSld>
-  <p:clrMapOvr>
-    <a:masterClrMapping/>
-  </p:clrMapOvr>
-  <p:timing>
-    <p:tnLst>
-      <p:par>
-        <p:cTn id="1" dur="indefinite" restart="never" nodeType="tmRoot">
-          <p:childTnLst>
-            <p:seq concurrent="1" nextAc="seek">
-              <p:cTn id="2" dur="indefinite" nodeType="mainSeq">
-                <p:childTnLst>
-                  <p:par>
-                    <p:cTn id="3" fill="hold">
-                      <p:stCondLst>
-                        <p:cond delay="indefinite"/>
-                      </p:stCondLst>
-                      <p:childTnLst>
-                        <p:par>
-                          <p:cTn id="4" fill="hold">
-                            <p:stCondLst>
-                              <p:cond delay="0"/>
-                            </p:stCondLst>
-                            <p:childTnLst>
-                              <p:par>
-                                <p:cTn id="5" presetID="1" presetClass="entr" presetSubtype="0" fill="hold" grpId="0" nodeType="clickEffect">
-                                  <p:stCondLst>
-                                    <p:cond delay="0"/>
-                                  </p:stCondLst>
-                                  <p:childTnLst>
-                                    <p:set>
-                                      <p:cBhvr>
-                                        <p:cTn id="6" dur="1" fill="hold">
-                                          <p:stCondLst>
-                                            <p:cond delay="0"/>
-                                          </p:stCondLst>
-                                        </p:cTn>
-                                        <p:tgtEl>
-                                          <p:spTgt spid="25">
-                                            <p:graphicEl>
-                                              <a:dgm id="{5E24D3A6-8425-4985-9887-3007A5739949}"/>
-                                            </p:graphicEl>
-                                          </p:spTgt>
-                                        </p:tgtEl>
-                                        <p:attrNameLst>
-                                          <p:attrName>style.visibility</p:attrName>
-                                        </p:attrNameLst>
-                                      </p:cBhvr>
-                                      <p:to>
-                                        <p:strVal val="visible"/>
-                                      </p:to>
-                                    </p:set>
-                                  </p:childTnLst>
-                                </p:cTn>
-                              </p:par>
-                            </p:childTnLst>
-                          </p:cTn>
-                        </p:par>
-                      </p:childTnLst>
-                    </p:cTn>
-                  </p:par>
-                  <p:par>
-                    <p:cTn id="7" fill="hold">
-                      <p:stCondLst>
-                        <p:cond delay="indefinite"/>
-                      </p:stCondLst>
-                      <p:childTnLst>
-                        <p:par>
-                          <p:cTn id="8" fill="hold">
-                            <p:stCondLst>
-                              <p:cond delay="0"/>
-                            </p:stCondLst>
-                            <p:childTnLst>
-                              <p:par>
-                                <p:cTn id="9" presetID="1" presetClass="entr" presetSubtype="0" fill="hold" grpId="0" nodeType="clickEffect">
-                                  <p:stCondLst>
-                                    <p:cond delay="0"/>
-                                  </p:stCondLst>
-                                  <p:childTnLst>
-                                    <p:set>
-                                      <p:cBhvr>
-                                        <p:cTn id="10" dur="1" fill="hold">
-                                          <p:stCondLst>
-                                            <p:cond delay="0"/>
-                                          </p:stCondLst>
-                                        </p:cTn>
-                                        <p:tgtEl>
-                                          <p:spTgt spid="25">
-                                            <p:graphicEl>
-                                              <a:dgm id="{5E6ADCBE-372D-4BA9-A979-5A31ECDCDC40}"/>
-                                            </p:graphicEl>
-                                          </p:spTgt>
-                                        </p:tgtEl>
-                                        <p:attrNameLst>
-                                          <p:attrName>style.visibility</p:attrName>
-                                        </p:attrNameLst>
-                                      </p:cBhvr>
-                                      <p:to>
-                                        <p:strVal val="visible"/>
-                                      </p:to>
-                                    </p:set>
-                                  </p:childTnLst>
-                                </p:cTn>
-                              </p:par>
-                              <p:par>
-                                <p:cTn id="11" presetID="1" presetClass="entr" presetSubtype="0" fill="hold" grpId="0" nodeType="withEffect">
-                                  <p:stCondLst>
-                                    <p:cond delay="0"/>
-                                  </p:stCondLst>
-                                  <p:childTnLst>
-                                    <p:set>
-                                      <p:cBhvr>
-                                        <p:cTn id="12" dur="1" fill="hold">
-                                          <p:stCondLst>
-                                            <p:cond delay="0"/>
-                                          </p:stCondLst>
-                                        </p:cTn>
-                                        <p:tgtEl>
-                                          <p:spTgt spid="25">
-                                            <p:graphicEl>
-                                              <a:dgm id="{E53EF5A2-9B51-4860-94D7-DCC04E9C7EA3}"/>
-                                            </p:graphicEl>
-                                          </p:spTgt>
-                                        </p:tgtEl>
-                                        <p:attrNameLst>
-                                          <p:attrName>style.visibility</p:attrName>
-                                        </p:attrNameLst>
-                                      </p:cBhvr>
-                                      <p:to>
-                                        <p:strVal val="visible"/>
-                                      </p:to>
-                                    </p:set>
-                                  </p:childTnLst>
-                                </p:cTn>
-                              </p:par>
-                            </p:childTnLst>
-                          </p:cTn>
-                        </p:par>
-                      </p:childTnLst>
-                    </p:cTn>
-                  </p:par>
-                  <p:par>
-                    <p:cTn id="13" fill="hold">
-                      <p:stCondLst>
-                        <p:cond delay="indefinite"/>
-                      </p:stCondLst>
-                      <p:childTnLst>
-                        <p:par>
-                          <p:cTn id="14" fill="hold">
-                            <p:stCondLst>
-                              <p:cond delay="0"/>
-                            </p:stCondLst>
-                            <p:childTnLst>
-                              <p:par>
-                                <p:cTn id="15" presetID="1" presetClass="entr" presetSubtype="0" fill="hold" grpId="0" nodeType="clickEffect">
-                                  <p:stCondLst>
-                                    <p:cond delay="0"/>
-                                  </p:stCondLst>
-                                  <p:childTnLst>
-                                    <p:set>
-                                      <p:cBhvr>
-                                        <p:cTn id="16" dur="1" fill="hold">
-                                          <p:stCondLst>
-                                            <p:cond delay="0"/>
-                                          </p:stCondLst>
-                                        </p:cTn>
-                                        <p:tgtEl>
-                                          <p:spTgt spid="25">
-                                            <p:graphicEl>
-                                              <a:dgm id="{97B330FB-580F-44AC-B8D7-C75FE33FD7C0}"/>
-                                            </p:graphicEl>
-                                          </p:spTgt>
-                                        </p:tgtEl>
-                                        <p:attrNameLst>
-                                          <p:attrName>style.visibility</p:attrName>
-                                        </p:attrNameLst>
-                                      </p:cBhvr>
-                                      <p:to>
-                                        <p:strVal val="visible"/>
-                                      </p:to>
-                                    </p:set>
-                                  </p:childTnLst>
-                                </p:cTn>
-                              </p:par>
-                              <p:par>
-                                <p:cTn id="17" presetID="1" presetClass="entr" presetSubtype="0" fill="hold" grpId="0" nodeType="withEffect">
-                                  <p:stCondLst>
-                                    <p:cond delay="0"/>
-                                  </p:stCondLst>
-                                  <p:childTnLst>
-                                    <p:set>
-                                      <p:cBhvr>
-                                        <p:cTn id="18" dur="1" fill="hold">
-                                          <p:stCondLst>
-                                            <p:cond delay="0"/>
-                                          </p:stCondLst>
-                                        </p:cTn>
-                                        <p:tgtEl>
-                                          <p:spTgt spid="25">
-                                            <p:graphicEl>
-                                              <a:dgm id="{47295986-DACE-425A-84B0-E664787F38E3}"/>
-                                            </p:graphicEl>
-                                          </p:spTgt>
-                                        </p:tgtEl>
-                                        <p:attrNameLst>
-                                          <p:attrName>style.visibility</p:attrName>
-                                        </p:attrNameLst>
-                                      </p:cBhvr>
-                                      <p:to>
-                                        <p:strVal val="visible"/>
-                                      </p:to>
-                                    </p:set>
-                                  </p:childTnLst>
-                                </p:cTn>
-                              </p:par>
-                            </p:childTnLst>
-                          </p:cTn>
-                        </p:par>
-                      </p:childTnLst>
-                    </p:cTn>
-                  </p:par>
-                  <p:par>
-                    <p:cTn id="19" fill="hold">
-                      <p:stCondLst>
-                        <p:cond delay="indefinite"/>
-                      </p:stCondLst>
-                      <p:childTnLst>
-                        <p:par>
-                          <p:cTn id="20" fill="hold">
-                            <p:stCondLst>
-                              <p:cond delay="0"/>
-                            </p:stCondLst>
-                            <p:childTnLst>
-                              <p:par>
-                                <p:cTn id="21" presetID="1" presetClass="entr" presetSubtype="0" fill="hold" grpId="0" nodeType="clickEffect">
-                                  <p:stCondLst>
-                                    <p:cond delay="0"/>
-                                  </p:stCondLst>
-                                  <p:childTnLst>
-                                    <p:set>
-                                      <p:cBhvr>
-                                        <p:cTn id="22" dur="1" fill="hold">
-                                          <p:stCondLst>
-                                            <p:cond delay="0"/>
-                                          </p:stCondLst>
-                                        </p:cTn>
-                                        <p:tgtEl>
-                                          <p:spTgt spid="25">
-                                            <p:graphicEl>
-                                              <a:dgm id="{10C42DA6-E5EC-432C-9EE3-A0B3DBD402BC}"/>
-                                            </p:graphicEl>
-                                          </p:spTgt>
-                                        </p:tgtEl>
-                                        <p:attrNameLst>
-                                          <p:attrName>style.visibility</p:attrName>
-                                        </p:attrNameLst>
-                                      </p:cBhvr>
-                                      <p:to>
-                                        <p:strVal val="visible"/>
-                                      </p:to>
-                                    </p:set>
-                                  </p:childTnLst>
-                                </p:cTn>
-                              </p:par>
-                            </p:childTnLst>
-                          </p:cTn>
-                        </p:par>
-                      </p:childTnLst>
-                    </p:cTn>
-                  </p:par>
-                  <p:par>
-                    <p:cTn id="23" fill="hold">
-                      <p:stCondLst>
-                        <p:cond delay="indefinite"/>
-                      </p:stCondLst>
-                      <p:childTnLst>
-                        <p:par>
-                          <p:cTn id="24" fill="hold">
-                            <p:stCondLst>
-                              <p:cond delay="0"/>
-                            </p:stCondLst>
-                            <p:childTnLst>
-                              <p:par>
-                                <p:cTn id="25" presetID="1" presetClass="entr" presetSubtype="0" fill="hold" grpId="0" nodeType="clickEffect">
-                                  <p:stCondLst>
-                                    <p:cond delay="0"/>
-                                  </p:stCondLst>
-                                  <p:childTnLst>
-                                    <p:set>
-                                      <p:cBhvr>
-                                        <p:cTn id="26" dur="1" fill="hold">
-                                          <p:stCondLst>
-                                            <p:cond delay="0"/>
-                                          </p:stCondLst>
-                                        </p:cTn>
-                                        <p:tgtEl>
-                                          <p:spTgt spid="25">
-                                            <p:graphicEl>
-                                              <a:dgm id="{21E181B6-3FD8-4DAC-8298-5C17B4D5C3CD}"/>
-                                            </p:graphicEl>
-                                          </p:spTgt>
-                                        </p:tgtEl>
-                                        <p:attrNameLst>
-                                          <p:attrName>style.visibility</p:attrName>
-                                        </p:attrNameLst>
-                                      </p:cBhvr>
-                                      <p:to>
-                                        <p:strVal val="visible"/>
-                                      </p:to>
-                                    </p:set>
-                                  </p:childTnLst>
-                                </p:cTn>
-                              </p:par>
-                            </p:childTnLst>
-                          </p:cTn>
-                        </p:par>
-                      </p:childTnLst>
-                    </p:cTn>
-                  </p:par>
-                  <p:par>
-                    <p:cTn id="27" fill="hold">
-                      <p:stCondLst>
-                        <p:cond delay="indefinite"/>
-                      </p:stCondLst>
-                      <p:childTnLst>
-                        <p:par>
-                          <p:cTn id="28" fill="hold">
-                            <p:stCondLst>
-                              <p:cond delay="0"/>
-                            </p:stCondLst>
-                            <p:childTnLst>
-                              <p:par>
-                                <p:cTn id="29" presetID="1" presetClass="entr" presetSubtype="0" fill="hold" grpId="0" nodeType="clickEffect">
-                                  <p:stCondLst>
-                                    <p:cond delay="0"/>
-                                  </p:stCondLst>
-                                  <p:childTnLst>
-                                    <p:set>
-                                      <p:cBhvr>
-                                        <p:cTn id="30" dur="1" fill="hold">
-                                          <p:stCondLst>
-                                            <p:cond delay="0"/>
-                                          </p:stCondLst>
-                                        </p:cTn>
-                                        <p:tgtEl>
-                                          <p:spTgt spid="25">
-                                            <p:graphicEl>
-                                              <a:dgm id="{3E1AEA04-6E5B-48C8-A007-B09A7ACB56D7}"/>
-                                            </p:graphicEl>
-                                          </p:spTgt>
-                                        </p:tgtEl>
-                                        <p:attrNameLst>
-                                          <p:attrName>style.visibility</p:attrName>
-                                        </p:attrNameLst>
-                                      </p:cBhvr>
-                                      <p:to>
-                                        <p:strVal val="visible"/>
-                                      </p:to>
-                                    </p:set>
-                                  </p:childTnLst>
-                                </p:cTn>
-                              </p:par>
-                            </p:childTnLst>
-                          </p:cTn>
-                        </p:par>
-                      </p:childTnLst>
-                    </p:cTn>
-                  </p:par>
-                </p:childTnLst>
-              </p:cTn>
-              <p:prevCondLst>
-                <p:cond evt="onPrev" delay="0">
-                  <p:tgtEl>
-                    <p:sldTgt/>
-                  </p:tgtEl>
-                </p:cond>
-              </p:prevCondLst>
-              <p:nextCondLst>
-                <p:cond evt="onNext" delay="0">
-                  <p:tgtEl>
-                    <p:sldTgt/>
-                  </p:tgtEl>
-                </p:cond>
-              </p:nextCondLst>
-            </p:seq>
-          </p:childTnLst>
-        </p:cTn>
-      </p:par>
-    </p:tnLst>
-    <p:bldLst>
-      <p:bldGraphic spid="25" grpId="0">
-        <p:bldSub>
-          <a:bldDgm bld="lvlOne"/>
-        </p:bldSub>
-      </p:bldGraphic>
-    </p:bldLst>
-  </p:timing>
-</p:sld>
-</file>
-
-<file path=ppt/slides/slide31.xml><?xml version="1.0" encoding="utf-8"?>
-<p:sld xmlns:a="http://schemas.openxmlformats.org/drawingml/2006/main" xmlns:r="http://schemas.openxmlformats.org/officeDocument/2006/relationships" xmlns:p="http://schemas.openxmlformats.org/presentationml/2006/main">
-  <p:cSld>
-    <p:spTree>
-      <p:nvGrpSpPr>
-        <p:cNvPr id="1" name=""/>
-        <p:cNvGrpSpPr/>
-        <p:nvPr/>
-      </p:nvGrpSpPr>
-      <p:grpSpPr>
-        <a:xfrm>
-          <a:off x="0" y="0"/>
-          <a:ext cx="0" cy="0"/>
-          <a:chOff x="0" y="0"/>
-          <a:chExt cx="0" cy="0"/>
-        </a:xfrm>
-      </p:grpSpPr>
-      <p:sp>
-        <p:nvSpPr>
-          <p:cNvPr id="2" name="Title 1">
-            <a:extLst>
-              <a:ext uri="{FF2B5EF4-FFF2-40B4-BE49-F238E27FC236}">
-                <a16:creationId xmlns:a16="http://schemas.microsoft.com/office/drawing/2014/main" id="{019FB408-9308-46FB-B720-ECA4384E8012}"/>
-              </a:ext>
-            </a:extLst>
-          </p:cNvPr>
-          <p:cNvSpPr>
-            <a:spLocks noGrp="1"/>
-          </p:cNvSpPr>
-          <p:nvPr>
-            <p:ph type="title"/>
-          </p:nvPr>
-        </p:nvSpPr>
-        <p:spPr/>
-        <p:txBody>
-          <a:bodyPr/>
-          <a:lstStyle/>
-          <a:p>
-            <a:r>
-              <a:rPr lang="en-GB" dirty="0"/>
-              <a:t>Release Process</a:t>
-            </a:r>
-          </a:p>
-        </p:txBody>
-      </p:sp>
-      <p:graphicFrame>
-        <p:nvGraphicFramePr>
-          <p:cNvPr id="25" name="Diagram 24">
-            <a:extLst>
-              <a:ext uri="{FF2B5EF4-FFF2-40B4-BE49-F238E27FC236}">
-                <a16:creationId xmlns:a16="http://schemas.microsoft.com/office/drawing/2014/main" id="{3A48726E-37A8-49B9-85AC-0730A9AB2BDC}"/>
-              </a:ext>
-            </a:extLst>
-          </p:cNvPr>
-          <p:cNvGraphicFramePr/>
-          <p:nvPr>
-            <p:extLst>
-              <p:ext uri="{D42A27DB-BD31-4B8C-83A1-F6EECF244321}">
-                <p14:modId xmlns:p14="http://schemas.microsoft.com/office/powerpoint/2010/main" val="610514045"/>
-              </p:ext>
-            </p:extLst>
-          </p:nvPr>
-        </p:nvGraphicFramePr>
-        <p:xfrm>
-          <a:off x="980750" y="633885"/>
-          <a:ext cx="9877946" cy="6002345"/>
-        </p:xfrm>
-        <a:graphic>
-          <a:graphicData uri="http://schemas.openxmlformats.org/drawingml/2006/diagram">
-            <dgm:relIds xmlns:dgm="http://schemas.openxmlformats.org/drawingml/2006/diagram" xmlns:r="http://schemas.openxmlformats.org/officeDocument/2006/relationships" r:dm="rId3" r:lo="rId4" r:qs="rId5" r:cs="rId6"/>
-          </a:graphicData>
-        </a:graphic>
-      </p:graphicFrame>
-    </p:spTree>
-    <p:extLst>
-      <p:ext uri="{BB962C8B-B14F-4D97-AF65-F5344CB8AC3E}">
-        <p14:creationId xmlns:p14="http://schemas.microsoft.com/office/powerpoint/2010/main" val="1886940625"/>
-      </p:ext>
-    </p:extLst>
-  </p:cSld>
-  <p:clrMapOvr>
-    <a:masterClrMapping/>
-  </p:clrMapOvr>
-  <p:timing>
-    <p:tnLst>
-      <p:par>
-        <p:cTn id="1" dur="indefinite" restart="never" nodeType="tmRoot">
-          <p:childTnLst>
-            <p:seq concurrent="1" nextAc="seek">
-              <p:cTn id="2" dur="indefinite" nodeType="mainSeq">
-                <p:childTnLst>
-                  <p:par>
-                    <p:cTn id="3" fill="hold">
-                      <p:stCondLst>
-                        <p:cond delay="indefinite"/>
-                      </p:stCondLst>
-                      <p:childTnLst>
-                        <p:par>
-                          <p:cTn id="4" fill="hold">
-                            <p:stCondLst>
-                              <p:cond delay="0"/>
-                            </p:stCondLst>
-                            <p:childTnLst>
-                              <p:par>
-                                <p:cTn id="5" presetID="1" presetClass="entr" presetSubtype="0" fill="hold" grpId="0" nodeType="clickEffect">
-                                  <p:stCondLst>
-                                    <p:cond delay="0"/>
-                                  </p:stCondLst>
-                                  <p:childTnLst>
-                                    <p:set>
-                                      <p:cBhvr>
-                                        <p:cTn id="6" dur="1" fill="hold">
-                                          <p:stCondLst>
-                                            <p:cond delay="0"/>
-                                          </p:stCondLst>
-                                        </p:cTn>
-                                        <p:tgtEl>
-                                          <p:spTgt spid="25">
-                                            <p:graphicEl>
-                                              <a:dgm id="{5E24D3A6-8425-4985-9887-3007A5739949}"/>
-                                            </p:graphicEl>
-                                          </p:spTgt>
-                                        </p:tgtEl>
-                                        <p:attrNameLst>
-                                          <p:attrName>style.visibility</p:attrName>
-                                        </p:attrNameLst>
-                                      </p:cBhvr>
-                                      <p:to>
-                                        <p:strVal val="visible"/>
-                                      </p:to>
-                                    </p:set>
-                                  </p:childTnLst>
-                                </p:cTn>
-                              </p:par>
-                            </p:childTnLst>
-                          </p:cTn>
-                        </p:par>
-                      </p:childTnLst>
-                    </p:cTn>
-                  </p:par>
-                  <p:par>
-                    <p:cTn id="7" fill="hold">
-                      <p:stCondLst>
-                        <p:cond delay="indefinite"/>
-                      </p:stCondLst>
-                      <p:childTnLst>
-                        <p:par>
-                          <p:cTn id="8" fill="hold">
-                            <p:stCondLst>
-                              <p:cond delay="0"/>
-                            </p:stCondLst>
-                            <p:childTnLst>
-                              <p:par>
-                                <p:cTn id="9" presetID="1" presetClass="entr" presetSubtype="0" fill="hold" grpId="0" nodeType="clickEffect">
-                                  <p:stCondLst>
-                                    <p:cond delay="0"/>
-                                  </p:stCondLst>
-                                  <p:childTnLst>
-                                    <p:set>
-                                      <p:cBhvr>
-                                        <p:cTn id="10" dur="1" fill="hold">
-                                          <p:stCondLst>
-                                            <p:cond delay="0"/>
-                                          </p:stCondLst>
-                                        </p:cTn>
-                                        <p:tgtEl>
-                                          <p:spTgt spid="25">
-                                            <p:graphicEl>
-                                              <a:dgm id="{5E6ADCBE-372D-4BA9-A979-5A31ECDCDC40}"/>
-                                            </p:graphicEl>
-                                          </p:spTgt>
-                                        </p:tgtEl>
-                                        <p:attrNameLst>
-                                          <p:attrName>style.visibility</p:attrName>
-                                        </p:attrNameLst>
-                                      </p:cBhvr>
-                                      <p:to>
-                                        <p:strVal val="visible"/>
-                                      </p:to>
-                                    </p:set>
-                                  </p:childTnLst>
-                                </p:cTn>
-                              </p:par>
-                              <p:par>
-                                <p:cTn id="11" presetID="1" presetClass="entr" presetSubtype="0" fill="hold" grpId="0" nodeType="withEffect">
-                                  <p:stCondLst>
-                                    <p:cond delay="0"/>
-                                  </p:stCondLst>
-                                  <p:childTnLst>
-                                    <p:set>
-                                      <p:cBhvr>
-                                        <p:cTn id="12" dur="1" fill="hold">
-                                          <p:stCondLst>
-                                            <p:cond delay="0"/>
-                                          </p:stCondLst>
-                                        </p:cTn>
-                                        <p:tgtEl>
-                                          <p:spTgt spid="25">
-                                            <p:graphicEl>
-                                              <a:dgm id="{E53EF5A2-9B51-4860-94D7-DCC04E9C7EA3}"/>
-                                            </p:graphicEl>
-                                          </p:spTgt>
-                                        </p:tgtEl>
-                                        <p:attrNameLst>
-                                          <p:attrName>style.visibility</p:attrName>
-                                        </p:attrNameLst>
-                                      </p:cBhvr>
-                                      <p:to>
-                                        <p:strVal val="visible"/>
-                                      </p:to>
-                                    </p:set>
-                                  </p:childTnLst>
-                                </p:cTn>
-                              </p:par>
-                            </p:childTnLst>
-                          </p:cTn>
-                        </p:par>
-                      </p:childTnLst>
-                    </p:cTn>
-                  </p:par>
-                  <p:par>
-                    <p:cTn id="13" fill="hold">
-                      <p:stCondLst>
-                        <p:cond delay="indefinite"/>
-                      </p:stCondLst>
-                      <p:childTnLst>
-                        <p:par>
-                          <p:cTn id="14" fill="hold">
-                            <p:stCondLst>
-                              <p:cond delay="0"/>
-                            </p:stCondLst>
-                            <p:childTnLst>
-                              <p:par>
-                                <p:cTn id="15" presetID="1" presetClass="entr" presetSubtype="0" fill="hold" grpId="0" nodeType="clickEffect">
-                                  <p:stCondLst>
-                                    <p:cond delay="0"/>
-                                  </p:stCondLst>
-                                  <p:childTnLst>
-                                    <p:set>
-                                      <p:cBhvr>
-                                        <p:cTn id="16" dur="1" fill="hold">
-                                          <p:stCondLst>
-                                            <p:cond delay="0"/>
-                                          </p:stCondLst>
-                                        </p:cTn>
-                                        <p:tgtEl>
-                                          <p:spTgt spid="25">
-                                            <p:graphicEl>
-                                              <a:dgm id="{97B330FB-580F-44AC-B8D7-C75FE33FD7C0}"/>
-                                            </p:graphicEl>
-                                          </p:spTgt>
-                                        </p:tgtEl>
-                                        <p:attrNameLst>
-                                          <p:attrName>style.visibility</p:attrName>
-                                        </p:attrNameLst>
-                                      </p:cBhvr>
-                                      <p:to>
-                                        <p:strVal val="visible"/>
-                                      </p:to>
-                                    </p:set>
-                                  </p:childTnLst>
-                                </p:cTn>
-                              </p:par>
-                              <p:par>
-                                <p:cTn id="17" presetID="1" presetClass="entr" presetSubtype="0" fill="hold" grpId="0" nodeType="withEffect">
-                                  <p:stCondLst>
-                                    <p:cond delay="0"/>
-                                  </p:stCondLst>
-                                  <p:childTnLst>
-                                    <p:set>
-                                      <p:cBhvr>
-                                        <p:cTn id="18" dur="1" fill="hold">
-                                          <p:stCondLst>
-                                            <p:cond delay="0"/>
-                                          </p:stCondLst>
-                                        </p:cTn>
-                                        <p:tgtEl>
-                                          <p:spTgt spid="25">
-                                            <p:graphicEl>
-                                              <a:dgm id="{47295986-DACE-425A-84B0-E664787F38E3}"/>
-                                            </p:graphicEl>
-                                          </p:spTgt>
-                                        </p:tgtEl>
-                                        <p:attrNameLst>
-                                          <p:attrName>style.visibility</p:attrName>
-                                        </p:attrNameLst>
-                                      </p:cBhvr>
-                                      <p:to>
-                                        <p:strVal val="visible"/>
-                                      </p:to>
-                                    </p:set>
-                                  </p:childTnLst>
-                                </p:cTn>
-                              </p:par>
-                            </p:childTnLst>
-                          </p:cTn>
-                        </p:par>
-                      </p:childTnLst>
-                    </p:cTn>
-                  </p:par>
-                  <p:par>
-                    <p:cTn id="19" fill="hold">
-                      <p:stCondLst>
-                        <p:cond delay="indefinite"/>
-                      </p:stCondLst>
-                      <p:childTnLst>
-                        <p:par>
-                          <p:cTn id="20" fill="hold">
-                            <p:stCondLst>
-                              <p:cond delay="0"/>
-                            </p:stCondLst>
-                            <p:childTnLst>
-                              <p:par>
-                                <p:cTn id="21" presetID="1" presetClass="entr" presetSubtype="0" fill="hold" grpId="0" nodeType="clickEffect">
-                                  <p:stCondLst>
-                                    <p:cond delay="0"/>
-                                  </p:stCondLst>
-                                  <p:childTnLst>
-                                    <p:set>
-                                      <p:cBhvr>
-                                        <p:cTn id="22" dur="1" fill="hold">
-                                          <p:stCondLst>
-                                            <p:cond delay="0"/>
-                                          </p:stCondLst>
-                                        </p:cTn>
-                                        <p:tgtEl>
-                                          <p:spTgt spid="25">
-                                            <p:graphicEl>
-                                              <a:dgm id="{10C42DA6-E5EC-432C-9EE3-A0B3DBD402BC}"/>
-                                            </p:graphicEl>
-                                          </p:spTgt>
-                                        </p:tgtEl>
-                                        <p:attrNameLst>
-                                          <p:attrName>style.visibility</p:attrName>
-                                        </p:attrNameLst>
-                                      </p:cBhvr>
-                                      <p:to>
-                                        <p:strVal val="visible"/>
-                                      </p:to>
-                                    </p:set>
-                                  </p:childTnLst>
-                                </p:cTn>
-                              </p:par>
-                            </p:childTnLst>
-                          </p:cTn>
-                        </p:par>
-                      </p:childTnLst>
-                    </p:cTn>
-                  </p:par>
-                  <p:par>
-                    <p:cTn id="23" fill="hold">
-                      <p:stCondLst>
-                        <p:cond delay="indefinite"/>
-                      </p:stCondLst>
-                      <p:childTnLst>
-                        <p:par>
-                          <p:cTn id="24" fill="hold">
-                            <p:stCondLst>
-                              <p:cond delay="0"/>
-                            </p:stCondLst>
-                            <p:childTnLst>
-                              <p:par>
-                                <p:cTn id="25" presetID="1" presetClass="entr" presetSubtype="0" fill="hold" grpId="0" nodeType="clickEffect">
-                                  <p:stCondLst>
-                                    <p:cond delay="0"/>
-                                  </p:stCondLst>
-                                  <p:childTnLst>
-                                    <p:set>
-                                      <p:cBhvr>
-                                        <p:cTn id="26" dur="1" fill="hold">
-                                          <p:stCondLst>
-                                            <p:cond delay="0"/>
-                                          </p:stCondLst>
-                                        </p:cTn>
-                                        <p:tgtEl>
-                                          <p:spTgt spid="25">
-                                            <p:graphicEl>
-                                              <a:dgm id="{21E181B6-3FD8-4DAC-8298-5C17B4D5C3CD}"/>
-                                            </p:graphicEl>
-                                          </p:spTgt>
-                                        </p:tgtEl>
-                                        <p:attrNameLst>
-                                          <p:attrName>style.visibility</p:attrName>
-                                        </p:attrNameLst>
-                                      </p:cBhvr>
-                                      <p:to>
-                                        <p:strVal val="visible"/>
-                                      </p:to>
-                                    </p:set>
-                                  </p:childTnLst>
-                                </p:cTn>
-                              </p:par>
-                            </p:childTnLst>
-                          </p:cTn>
-                        </p:par>
-                      </p:childTnLst>
-                    </p:cTn>
-                  </p:par>
-                  <p:par>
-                    <p:cTn id="27" fill="hold">
-                      <p:stCondLst>
-                        <p:cond delay="indefinite"/>
-                      </p:stCondLst>
-                      <p:childTnLst>
-                        <p:par>
-                          <p:cTn id="28" fill="hold">
-                            <p:stCondLst>
-                              <p:cond delay="0"/>
-                            </p:stCondLst>
-                            <p:childTnLst>
-                              <p:par>
-                                <p:cTn id="29" presetID="1" presetClass="entr" presetSubtype="0" fill="hold" grpId="0" nodeType="clickEffect">
-                                  <p:stCondLst>
-                                    <p:cond delay="0"/>
-                                  </p:stCondLst>
-                                  <p:childTnLst>
-                                    <p:set>
-                                      <p:cBhvr>
-                                        <p:cTn id="30" dur="1" fill="hold">
-                                          <p:stCondLst>
-                                            <p:cond delay="0"/>
-                                          </p:stCondLst>
-                                        </p:cTn>
-                                        <p:tgtEl>
-                                          <p:spTgt spid="25">
-                                            <p:graphicEl>
-                                              <a:dgm id="{3E1AEA04-6E5B-48C8-A007-B09A7ACB56D7}"/>
-                                            </p:graphicEl>
-                                          </p:spTgt>
-                                        </p:tgtEl>
-                                        <p:attrNameLst>
-                                          <p:attrName>style.visibility</p:attrName>
-                                        </p:attrNameLst>
-                                      </p:cBhvr>
-                                      <p:to>
-                                        <p:strVal val="visible"/>
-                                      </p:to>
-                                    </p:set>
-                                  </p:childTnLst>
-                                </p:cTn>
-                              </p:par>
-                            </p:childTnLst>
-                          </p:cTn>
-                        </p:par>
-                      </p:childTnLst>
-                    </p:cTn>
-                  </p:par>
-                </p:childTnLst>
-              </p:cTn>
-              <p:prevCondLst>
-                <p:cond evt="onPrev" delay="0">
-                  <p:tgtEl>
-                    <p:sldTgt/>
-                  </p:tgtEl>
-                </p:cond>
-              </p:prevCondLst>
-              <p:nextCondLst>
-                <p:cond evt="onNext" delay="0">
-                  <p:tgtEl>
-                    <p:sldTgt/>
-                  </p:tgtEl>
-                </p:cond>
-              </p:nextCondLst>
-            </p:seq>
-          </p:childTnLst>
-        </p:cTn>
-      </p:par>
-    </p:tnLst>
-    <p:bldLst>
-      <p:bldGraphic spid="25" grpId="0">
-        <p:bldSub>
-          <a:bldDgm bld="lvlOne"/>
-        </p:bldSub>
-      </p:bldGraphic>
-    </p:bldLst>
-  </p:timing>
-</p:sld>
-</file>
-
-<file path=ppt/slides/slide32.xml><?xml version="1.0" encoding="utf-8"?>
-<p:sld xmlns:a="http://schemas.openxmlformats.org/drawingml/2006/main" xmlns:r="http://schemas.openxmlformats.org/officeDocument/2006/relationships" xmlns:p="http://schemas.openxmlformats.org/presentationml/2006/main">
-  <p:cSld>
-    <p:spTree>
-      <p:nvGrpSpPr>
-        <p:cNvPr id="1" name=""/>
-        <p:cNvGrpSpPr/>
-        <p:nvPr/>
-      </p:nvGrpSpPr>
-      <p:grpSpPr>
-        <a:xfrm>
-          <a:off x="0" y="0"/>
-          <a:ext cx="0" cy="0"/>
-          <a:chOff x="0" y="0"/>
-          <a:chExt cx="0" cy="0"/>
-        </a:xfrm>
-      </p:grpSpPr>
-      <p:sp>
-        <p:nvSpPr>
           <p:cNvPr id="2" name="Title"/>
           <p:cNvSpPr>
             <a:spLocks noGrp="1"/>
@@ -47739,101 +38487,7 @@
 </p:sld>
 </file>
 
-<file path=ppt/slides/slide33.xml><?xml version="1.0" encoding="utf-8"?>
-<p:sld xmlns:a="http://schemas.openxmlformats.org/drawingml/2006/main" xmlns:r="http://schemas.openxmlformats.org/officeDocument/2006/relationships" xmlns:p="http://schemas.openxmlformats.org/presentationml/2006/main">
-  <p:cSld>
-    <p:spTree>
-      <p:nvGrpSpPr>
-        <p:cNvPr id="1" name="">
-          <a:extLst>
-            <a:ext uri="{FF2B5EF4-FFF2-40B4-BE49-F238E27FC236}">
-              <a16:creationId xmlns:a16="http://schemas.microsoft.com/office/drawing/2014/main" id="{A5AC9552-07ED-CCF4-FE92-06E6703FABF4}"/>
-            </a:ext>
-          </a:extLst>
-        </p:cNvPr>
-        <p:cNvGrpSpPr/>
-        <p:nvPr/>
-      </p:nvGrpSpPr>
-      <p:grpSpPr>
-        <a:xfrm>
-          <a:off x="0" y="0"/>
-          <a:ext cx="0" cy="0"/>
-          <a:chOff x="0" y="0"/>
-          <a:chExt cx="0" cy="0"/>
-        </a:xfrm>
-      </p:grpSpPr>
-      <p:sp>
-        <p:nvSpPr>
-          <p:cNvPr id="2" name="Title 1">
-            <a:extLst>
-              <a:ext uri="{FF2B5EF4-FFF2-40B4-BE49-F238E27FC236}">
-                <a16:creationId xmlns:a16="http://schemas.microsoft.com/office/drawing/2014/main" id="{F2AB3EB4-8F3F-F1FB-4CE1-3EE3D8A227A7}"/>
-              </a:ext>
-            </a:extLst>
-          </p:cNvPr>
-          <p:cNvSpPr>
-            <a:spLocks noGrp="1"/>
-          </p:cNvSpPr>
-          <p:nvPr>
-            <p:ph type="title"/>
-          </p:nvPr>
-        </p:nvSpPr>
-        <p:spPr/>
-        <p:txBody>
-          <a:bodyPr/>
-          <a:lstStyle/>
-          <a:p>
-            <a:r>
-              <a:rPr lang="en-GB" dirty="0"/>
-              <a:t>PP Pipelines</a:t>
-            </a:r>
-          </a:p>
-        </p:txBody>
-      </p:sp>
-      <p:pic>
-        <p:nvPicPr>
-          <p:cNvPr id="8" name="Picture 7">
-            <a:extLst>
-              <a:ext uri="{FF2B5EF4-FFF2-40B4-BE49-F238E27FC236}">
-                <a16:creationId xmlns:a16="http://schemas.microsoft.com/office/drawing/2014/main" id="{4931935A-81BC-E2FA-98A1-EF597F6C8837}"/>
-              </a:ext>
-            </a:extLst>
-          </p:cNvPr>
-          <p:cNvPicPr>
-            <a:picLocks noChangeAspect="1"/>
-          </p:cNvPicPr>
-          <p:nvPr/>
-        </p:nvPicPr>
-        <p:blipFill>
-          <a:blip r:embed="rId3"/>
-          <a:stretch>
-            <a:fillRect/>
-          </a:stretch>
-        </p:blipFill>
-        <p:spPr>
-          <a:xfrm>
-            <a:off x="1181064" y="1171558"/>
-            <a:ext cx="9829872" cy="4514883"/>
-          </a:xfrm>
-          <a:prstGeom prst="rect">
-            <a:avLst/>
-          </a:prstGeom>
-        </p:spPr>
-      </p:pic>
-    </p:spTree>
-    <p:extLst>
-      <p:ext uri="{BB962C8B-B14F-4D97-AF65-F5344CB8AC3E}">
-        <p14:creationId xmlns:p14="http://schemas.microsoft.com/office/powerpoint/2010/main" val="171646407"/>
-      </p:ext>
-    </p:extLst>
-  </p:cSld>
-  <p:clrMapOvr>
-    <a:masterClrMapping/>
-  </p:clrMapOvr>
-</p:sld>
-</file>
-
-<file path=ppt/slides/slide34.xml><?xml version="1.0" encoding="utf-8"?>
+<file path=ppt/slides/slide31.xml><?xml version="1.0" encoding="utf-8"?>
 <p:sld xmlns:a="http://schemas.openxmlformats.org/drawingml/2006/main" xmlns:r="http://schemas.openxmlformats.org/officeDocument/2006/relationships" xmlns:p="http://schemas.openxmlformats.org/presentationml/2006/main">
   <p:cSld>
     <p:spTree>
@@ -48542,7 +39196,7 @@
 </p:sld>
 </file>
 
-<file path=ppt/slides/slide35.xml><?xml version="1.0" encoding="utf-8"?>
+<file path=ppt/slides/slide32.xml><?xml version="1.0" encoding="utf-8"?>
 <p:sld xmlns:a="http://schemas.openxmlformats.org/drawingml/2006/main" xmlns:r="http://schemas.openxmlformats.org/officeDocument/2006/relationships" xmlns:p="http://schemas.openxmlformats.org/presentationml/2006/main">
   <p:cSld>
     <p:spTree>
@@ -49365,187 +40019,6 @@
 </p:sld>
 </file>
 
-<file path=ppt/slides/slide36.xml><?xml version="1.0" encoding="utf-8"?>
-<p:sld xmlns:a="http://schemas.openxmlformats.org/drawingml/2006/main" xmlns:r="http://schemas.openxmlformats.org/officeDocument/2006/relationships" xmlns:p="http://schemas.openxmlformats.org/presentationml/2006/main">
-  <p:cSld>
-    <p:spTree>
-      <p:nvGrpSpPr>
-        <p:cNvPr id="1" name=""/>
-        <p:cNvGrpSpPr/>
-        <p:nvPr/>
-      </p:nvGrpSpPr>
-      <p:grpSpPr>
-        <a:xfrm>
-          <a:off x="0" y="0"/>
-          <a:ext cx="0" cy="0"/>
-          <a:chOff x="0" y="0"/>
-          <a:chExt cx="0" cy="0"/>
-        </a:xfrm>
-      </p:grpSpPr>
-      <p:sp>
-        <p:nvSpPr>
-          <p:cNvPr id="4" name="Title 3">
-            <a:extLst>
-              <a:ext uri="{FF2B5EF4-FFF2-40B4-BE49-F238E27FC236}">
-                <a16:creationId xmlns:a16="http://schemas.microsoft.com/office/drawing/2014/main" id="{D7561E9E-F033-30EF-3B88-781934DD7664}"/>
-              </a:ext>
-            </a:extLst>
-          </p:cNvPr>
-          <p:cNvSpPr>
-            <a:spLocks noGrp="1"/>
-          </p:cNvSpPr>
-          <p:nvPr>
-            <p:ph type="title"/>
-          </p:nvPr>
-        </p:nvSpPr>
-        <p:spPr/>
-        <p:txBody>
-          <a:bodyPr/>
-          <a:lstStyle/>
-          <a:p>
-            <a:r>
-              <a:rPr lang="en-GB" dirty="0"/>
-              <a:t>Current State of Power Platform DevOps</a:t>
-            </a:r>
-            <a:endParaRPr lang="en-US" dirty="0"/>
-          </a:p>
-        </p:txBody>
-      </p:sp>
-      <p:pic>
-        <p:nvPicPr>
-          <p:cNvPr id="4098" name="Picture 2" descr="dashboard of a modern car">
-            <a:extLst>
-              <a:ext uri="{FF2B5EF4-FFF2-40B4-BE49-F238E27FC236}">
-                <a16:creationId xmlns:a16="http://schemas.microsoft.com/office/drawing/2014/main" id="{45F4F9D7-BD23-9BEB-C254-E25D205A01CF}"/>
-              </a:ext>
-            </a:extLst>
-          </p:cNvPr>
-          <p:cNvPicPr>
-            <a:picLocks noChangeAspect="1" noChangeArrowheads="1"/>
-          </p:cNvPicPr>
-          <p:nvPr/>
-        </p:nvPicPr>
-        <p:blipFill>
-          <a:blip r:embed="rId2">
-            <a:extLst>
-              <a:ext uri="{28A0092B-C50C-407E-A947-70E740481C1C}">
-                <a14:useLocalDpi xmlns:a14="http://schemas.microsoft.com/office/drawing/2010/main" val="0"/>
-              </a:ext>
-            </a:extLst>
-          </a:blip>
-          <a:srcRect/>
-          <a:stretch>
-            <a:fillRect/>
-          </a:stretch>
-        </p:blipFill>
-        <p:spPr bwMode="auto">
-          <a:xfrm>
-            <a:off x="3746827" y="1690688"/>
-            <a:ext cx="4698345" cy="4698345"/>
-          </a:xfrm>
-          <a:prstGeom prst="rect">
-            <a:avLst/>
-          </a:prstGeom>
-          <a:noFill/>
-          <a:extLst>
-            <a:ext uri="{909E8E84-426E-40DD-AFC4-6F175D3DCCD1}">
-              <a14:hiddenFill xmlns:a14="http://schemas.microsoft.com/office/drawing/2010/main">
-                <a:solidFill>
-                  <a:srgbClr val="FFFFFF"/>
-                </a:solidFill>
-              </a14:hiddenFill>
-            </a:ext>
-          </a:extLst>
-        </p:spPr>
-      </p:pic>
-    </p:spTree>
-    <p:extLst>
-      <p:ext uri="{BB962C8B-B14F-4D97-AF65-F5344CB8AC3E}">
-        <p14:creationId xmlns:p14="http://schemas.microsoft.com/office/powerpoint/2010/main" val="991787621"/>
-      </p:ext>
-    </p:extLst>
-  </p:cSld>
-  <p:clrMapOvr>
-    <a:masterClrMapping/>
-  </p:clrMapOvr>
-  <p:timing>
-    <p:tnLst>
-      <p:par>
-        <p:cTn id="1" dur="indefinite" restart="never" nodeType="tmRoot">
-          <p:childTnLst>
-            <p:seq concurrent="1" nextAc="seek">
-              <p:cTn id="2" dur="indefinite" nodeType="mainSeq">
-                <p:childTnLst>
-                  <p:par>
-                    <p:cTn id="3" fill="hold">
-                      <p:stCondLst>
-                        <p:cond delay="indefinite"/>
-                      </p:stCondLst>
-                      <p:childTnLst>
-                        <p:par>
-                          <p:cTn id="4" fill="hold">
-                            <p:stCondLst>
-                              <p:cond delay="0"/>
-                            </p:stCondLst>
-                            <p:childTnLst>
-                              <p:par>
-                                <p:cTn id="5" presetID="1" presetClass="entr" presetSubtype="0" fill="hold" nodeType="clickEffect">
-                                  <p:stCondLst>
-                                    <p:cond delay="0"/>
-                                  </p:stCondLst>
-                                  <p:childTnLst>
-                                    <p:set>
-                                      <p:cBhvr>
-                                        <p:cTn id="6" dur="1" fill="hold">
-                                          <p:stCondLst>
-                                            <p:cond delay="0"/>
-                                          </p:stCondLst>
-                                        </p:cTn>
-                                        <p:tgtEl>
-                                          <p:spTgt spid="4098"/>
-                                        </p:tgtEl>
-                                        <p:attrNameLst>
-                                          <p:attrName>style.visibility</p:attrName>
-                                        </p:attrNameLst>
-                                      </p:cBhvr>
-                                      <p:to>
-                                        <p:strVal val="visible"/>
-                                      </p:to>
-                                    </p:set>
-                                  </p:childTnLst>
-                                </p:cTn>
-                              </p:par>
-                            </p:childTnLst>
-                          </p:cTn>
-                        </p:par>
-                      </p:childTnLst>
-                    </p:cTn>
-                  </p:par>
-                </p:childTnLst>
-              </p:cTn>
-              <p:prevCondLst>
-                <p:cond evt="onPrev" delay="0">
-                  <p:tgtEl>
-                    <p:sldTgt/>
-                  </p:tgtEl>
-                </p:cond>
-              </p:prevCondLst>
-              <p:nextCondLst>
-                <p:cond evt="onNext" delay="0">
-                  <p:tgtEl>
-                    <p:sldTgt/>
-                  </p:tgtEl>
-                </p:cond>
-              </p:nextCondLst>
-            </p:seq>
-          </p:childTnLst>
-        </p:cTn>
-      </p:par>
-    </p:tnLst>
-  </p:timing>
-</p:sld>
-</file>
-
 <file path=ppt/slides/slide4.xml><?xml version="1.0" encoding="utf-8"?>
 <p:sld xmlns:a="http://schemas.openxmlformats.org/drawingml/2006/main" xmlns:r="http://schemas.openxmlformats.org/officeDocument/2006/relationships" xmlns:p="http://schemas.openxmlformats.org/presentationml/2006/main">
   <p:cSld>
